--- a/Document_Assistant.pptx
+++ b/Document_Assistant.pptx
@@ -12738,7 +12738,7 @@
                 <a:ea typeface="Calibri" pitchFamily="34" charset="-122"/>
                 <a:cs typeface="Calibri" pitchFamily="34" charset="-120"/>
               </a:rPr>
-              <a:t>state["current_response"].result displayed in chat bubble: "The Q2 2024 net profit is $1,900,000."</a:t>
+              <a:t>state["current_response"].result displayed in chat bubble: "The Q2 2026 net profit is $1,900,000."</a:t>
             </a:r>
             <a:endParaRPr lang="en-US" sz="900" dirty="0"/>
           </a:p>
@@ -15077,7 +15077,7 @@
                 <a:ea typeface="Calibri" pitchFamily="34" charset="-122"/>
                 <a:cs typeface="Calibri" pitchFamily="34" charset="-120"/>
               </a:rPr>
-              <a:t>q3_2024_financial_report.csv</a:t>
+              <a:t>q3_2026_financial_report.csv</a:t>
             </a:r>
             <a:endParaRPr lang="en-US" sz="1100" dirty="0"/>
           </a:p>
@@ -24605,7 +24605,7 @@
                 <a:ea typeface="Calibri" pitchFamily="34" charset="-122"/>
                 <a:cs typeface="Calibri" pitchFamily="34" charset="-120"/>
               </a:rPr>
-              <a:t>Q1 2024 Financial Report</a:t>
+              <a:t>Q1 2026 Financial Report</a:t>
             </a:r>
             <a:endParaRPr lang="en-US" sz="950" dirty="0"/>
           </a:p>
@@ -24710,7 +24710,7 @@
                 <a:ea typeface="Calibri" pitchFamily="34" charset="-122"/>
                 <a:cs typeface="Calibri" pitchFamily="34" charset="-120"/>
               </a:rPr>
-              <a:t>Q2 2024 Financial Report</a:t>
+              <a:t>Q2 2026 Financial Report</a:t>
             </a:r>
             <a:endParaRPr lang="en-US" sz="950" dirty="0"/>
           </a:p>
@@ -24815,7 +24815,7 @@
                 <a:ea typeface="Calibri" pitchFamily="34" charset="-122"/>
                 <a:cs typeface="Calibri" pitchFamily="34" charset="-120"/>
               </a:rPr>
-              <a:t>Healthcare Statistics 2024</a:t>
+              <a:t>Healthcare Statistics 2026</a:t>
             </a:r>
             <a:endParaRPr lang="en-US" sz="950" dirty="0"/>
           </a:p>
@@ -24920,7 +24920,7 @@
                 <a:ea typeface="Calibri" pitchFamily="34" charset="-122"/>
                 <a:cs typeface="Calibri" pitchFamily="34" charset="-120"/>
               </a:rPr>
-              <a:t>Patient Outcomes Report 2024</a:t>
+              <a:t>Patient Outcomes Report 2026</a:t>
             </a:r>
             <a:endParaRPr lang="en-US" sz="950" dirty="0"/>
           </a:p>

--- a/Document_Assistant.pptx
+++ b/Document_Assistant.pptx
@@ -25,6 +25,14 @@
     <p:sldId id="273" r:id="rId19"/>
     <p:sldId id="274" r:id="rId20"/>
     <p:sldId id="275" r:id="rId21"/>
+    <p:sldId id="276" r:id="rId27"/>
+    <p:sldId id="277" r:id="rId28"/>
+    <p:sldId id="278" r:id="rId29"/>
+    <p:sldId id="279" r:id="rId30"/>
+    <p:sldId id="280" r:id="rId31"/>
+    <p:sldId id="281" r:id="rId32"/>
+    <p:sldId id="282" r:id="rId33"/>
+    <p:sldId id="283" r:id="rId34"/>
   </p:sldIdLst>
   <p:notesMasterIdLst>
     <p:notesMasterId r:id="rId22"/>
@@ -17732,6 +17740,3694 @@
 </p:sld>
 </file>
 
+<file path=ppt/slides/slide21.xml><?xml version="1.0" encoding="utf-8"?>
+<p:sld xmlns:a="http://schemas.openxmlformats.org/drawingml/2006/main" xmlns:p="http://schemas.openxmlformats.org/presentationml/2006/main" xmlns:r="http://schemas.openxmlformats.org/officeDocument/2006/relationships">
+  <p:cSld>
+    <p:bg>
+      <p:bgPr>
+        <a:solidFill>
+          <a:srgbClr val="1E1E2E"/>
+        </a:solidFill>
+        <a:effectLst/>
+      </p:bgPr>
+    </p:bg>
+    <p:spTree>
+      <p:nvGrpSpPr>
+        <p:cNvPr id="1" name=""/>
+        <p:cNvGrpSpPr/>
+        <p:nvPr/>
+      </p:nvGrpSpPr>
+      <p:grpSpPr/>
+      <p:sp>
+        <p:nvSpPr>
+          <p:cNvPr id="2" name="TextBox 1"/>
+          <p:cNvSpPr txBox="1"/>
+          <p:nvPr/>
+        </p:nvSpPr>
+        <p:spPr>
+          <a:xfrm>
+            <a:off x="914400" y="2286000"/>
+            <a:ext cx="7315200" cy="1097280"/>
+          </a:xfrm>
+          <a:prstGeom prst="rect">
+            <a:avLst/>
+          </a:prstGeom>
+          <a:noFill/>
+        </p:spPr>
+        <p:txBody>
+          <a:bodyPr wrap="none">
+            <a:spAutoFit/>
+          </a:bodyPr>
+          <a:lstStyle/>
+          <a:p>
+            <a:pPr algn="ctr"/>
+            <a:r>
+              <a:rPr b="1" sz="3200">
+                <a:solidFill>
+                  <a:srgbClr val="74C7EC"/>
+                </a:solidFill>
+              </a:rPr>
+              <a:t>Recent Updates — Oct 2026</a:t>
+            </a:r>
+          </a:p>
+        </p:txBody>
+      </p:sp>
+      <p:sp>
+        <p:nvSpPr>
+          <p:cNvPr id="3" name="TextBox 2"/>
+          <p:cNvSpPr txBox="1"/>
+          <p:nvPr/>
+        </p:nvSpPr>
+        <p:spPr>
+          <a:xfrm>
+            <a:off x="914400" y="3474720"/>
+            <a:ext cx="7315200" cy="640080"/>
+          </a:xfrm>
+          <a:prstGeom prst="rect">
+            <a:avLst/>
+          </a:prstGeom>
+          <a:noFill/>
+        </p:spPr>
+        <p:txBody>
+          <a:bodyPr wrap="none">
+            <a:spAutoFit/>
+          </a:bodyPr>
+          <a:lstStyle/>
+          <a:p>
+            <a:pPr algn="ctr"/>
+            <a:r>
+              <a:rPr sz="1600">
+                <a:solidFill>
+                  <a:srgbClr val="CDD6F4"/>
+                </a:solidFill>
+              </a:rPr>
+              <a:t>CLI  ·  Logging  ·  Sessions  ·  Prompt Engineering</a:t>
+            </a:r>
+          </a:p>
+        </p:txBody>
+      </p:sp>
+    </p:spTree>
+  </p:cSld>
+  <p:clrMapOvr>
+    <a:masterClrMapping/>
+  </p:clrMapOvr>
+</p:sld>
+</file>
+
+<file path=ppt/slides/slide22.xml><?xml version="1.0" encoding="utf-8"?>
+<p:sld xmlns:a="http://schemas.openxmlformats.org/drawingml/2006/main" xmlns:p="http://schemas.openxmlformats.org/presentationml/2006/main" xmlns:r="http://schemas.openxmlformats.org/officeDocument/2006/relationships">
+  <p:cSld>
+    <p:bg>
+      <p:bgPr>
+        <a:solidFill>
+          <a:srgbClr val="1E1E2E"/>
+        </a:solidFill>
+        <a:effectLst/>
+      </p:bgPr>
+    </p:bg>
+    <p:spTree>
+      <p:nvGrpSpPr>
+        <p:cNvPr id="1" name=""/>
+        <p:cNvGrpSpPr/>
+        <p:nvPr/>
+      </p:nvGrpSpPr>
+      <p:grpSpPr/>
+      <p:sp>
+        <p:nvSpPr>
+          <p:cNvPr id="2" name="TextBox 1"/>
+          <p:cNvSpPr txBox="1"/>
+          <p:nvPr/>
+        </p:nvSpPr>
+        <p:spPr>
+          <a:xfrm>
+            <a:off x="365760" y="228600"/>
+            <a:ext cx="8412480" cy="594360"/>
+          </a:xfrm>
+          <a:prstGeom prst="rect">
+            <a:avLst/>
+          </a:prstGeom>
+          <a:noFill/>
+        </p:spPr>
+        <p:txBody>
+          <a:bodyPr wrap="none">
+            <a:spAutoFit/>
+          </a:bodyPr>
+          <a:lstStyle/>
+          <a:p>
+            <a:pPr algn="l"/>
+            <a:r>
+              <a:rPr b="1" sz="2400">
+                <a:solidFill>
+                  <a:srgbClr val="74C7EC"/>
+                </a:solidFill>
+              </a:rPr>
+              <a:t>Update 1 — Numbered Menu CLI (main.py)</a:t>
+            </a:r>
+          </a:p>
+        </p:txBody>
+      </p:sp>
+      <p:sp>
+        <p:nvSpPr>
+          <p:cNvPr id="3" name="TextBox 2"/>
+          <p:cNvSpPr txBox="1"/>
+          <p:nvPr/>
+        </p:nvSpPr>
+        <p:spPr>
+          <a:xfrm>
+            <a:off x="365760" y="914400"/>
+            <a:ext cx="8412480" cy="640080"/>
+          </a:xfrm>
+          <a:prstGeom prst="rect">
+            <a:avLst/>
+          </a:prstGeom>
+          <a:noFill/>
+        </p:spPr>
+        <p:txBody>
+          <a:bodyPr wrap="square">
+            <a:spAutoFit/>
+          </a:bodyPr>
+          <a:lstStyle/>
+          <a:p>
+            <a:pPr algn="l"/>
+            <a:r>
+              <a:rPr sz="1300" b="0">
+                <a:solidFill>
+                  <a:srgbClr val="CDD6F4"/>
+                </a:solidFill>
+              </a:rPr>
+              <a:t>Replaced free-text command input with a numbered menu.</a:t>
+            </a:r>
+          </a:p>
+          <a:p>
+            <a:pPr algn="l"/>
+            <a:r>
+              <a:rPr sz="1300" b="0">
+                <a:solidFill>
+                  <a:srgbClr val="CDD6F4"/>
+                </a:solidFill>
+              </a:rPr>
+              <a:t>Every option shows a repeat-or-back sub-menu after each action.</a:t>
+            </a:r>
+          </a:p>
+          <a:p>
+            <a:pPr algn="l"/>
+            <a:r>
+              <a:rPr sz="1300" b="0">
+                <a:solidFill>
+                  <a:srgbClr val="CDD6F4"/>
+                </a:solidFill>
+              </a:rPr>
+              <a:t/>
+            </a:r>
+          </a:p>
+        </p:txBody>
+      </p:sp>
+      <p:sp>
+        <p:nvSpPr>
+          <p:cNvPr id="4" name="Rectangle 3"/>
+          <p:cNvSpPr/>
+          <p:nvPr/>
+        </p:nvSpPr>
+        <p:spPr>
+          <a:xfrm>
+            <a:off x="365760" y="1691640"/>
+            <a:ext cx="8412480" cy="4206240"/>
+          </a:xfrm>
+          <a:prstGeom prst="rect">
+            <a:avLst/>
+          </a:prstGeom>
+          <a:solidFill>
+            <a:srgbClr val="18182E"/>
+          </a:solidFill>
+          <a:ln>
+            <a:noFill/>
+          </a:ln>
+        </p:spPr>
+        <p:style>
+          <a:lnRef idx="1">
+            <a:schemeClr val="accent1"/>
+          </a:lnRef>
+          <a:fillRef idx="3">
+            <a:schemeClr val="accent1"/>
+          </a:fillRef>
+          <a:effectRef idx="2">
+            <a:schemeClr val="accent1"/>
+          </a:effectRef>
+          <a:fontRef idx="minor">
+            <a:schemeClr val="lt1"/>
+          </a:fontRef>
+        </p:style>
+        <p:txBody>
+          <a:bodyPr rtlCol="0" anchor="ctr"/>
+          <a:lstStyle/>
+          <a:p>
+            <a:pPr algn="ctr"/>
+          </a:p>
+        </p:txBody>
+      </p:sp>
+      <p:sp>
+        <p:nvSpPr>
+          <p:cNvPr id="5" name="TextBox 4"/>
+          <p:cNvSpPr txBox="1"/>
+          <p:nvPr/>
+        </p:nvSpPr>
+        <p:spPr>
+          <a:xfrm>
+            <a:off x="457200" y="1783080"/>
+            <a:ext cx="8229600" cy="4023360"/>
+          </a:xfrm>
+          <a:prstGeom prst="rect">
+            <a:avLst/>
+          </a:prstGeom>
+          <a:noFill/>
+        </p:spPr>
+        <p:txBody>
+          <a:bodyPr wrap="square">
+            <a:spAutoFit/>
+          </a:bodyPr>
+          <a:lstStyle/>
+          <a:p>
+            <a:r>
+              <a:rPr sz="1100">
+                <a:solidFill>
+                  <a:srgbClr val="A6E3A1"/>
+                </a:solidFill>
+                <a:latin typeface="Courier New"/>
+              </a:rPr>
+              <a:t>  ┌─────────────────────────────────────────┐</a:t>
+            </a:r>
+          </a:p>
+          <a:p>
+            <a:r>
+              <a:rPr sz="1100">
+                <a:solidFill>
+                  <a:srgbClr val="A6E3A1"/>
+                </a:solidFill>
+                <a:latin typeface="Courier New"/>
+              </a:rPr>
+              <a:t>  │  1  📁  Upload Document                 │</a:t>
+            </a:r>
+          </a:p>
+          <a:p>
+            <a:r>
+              <a:rPr sz="1100">
+                <a:solidFill>
+                  <a:srgbClr val="A6E3A1"/>
+                </a:solidFill>
+                <a:latin typeface="Courier New"/>
+              </a:rPr>
+              <a:t>  │  2  ❓  Question &amp; Answer               │</a:t>
+            </a:r>
+          </a:p>
+          <a:p>
+            <a:r>
+              <a:rPr sz="1100">
+                <a:solidFill>
+                  <a:srgbClr val="A6E3A1"/>
+                </a:solidFill>
+                <a:latin typeface="Courier New"/>
+              </a:rPr>
+              <a:t>  │  3  📄  Summarize Document              │</a:t>
+            </a:r>
+          </a:p>
+          <a:p>
+            <a:r>
+              <a:rPr sz="1100">
+                <a:solidFill>
+                  <a:srgbClr val="A6E3A1"/>
+                </a:solidFill>
+                <a:latin typeface="Courier New"/>
+              </a:rPr>
+              <a:t>  │  4  🧮  Calculator                      │</a:t>
+            </a:r>
+          </a:p>
+          <a:p>
+            <a:r>
+              <a:rPr sz="1100">
+                <a:solidFill>
+                  <a:srgbClr val="A6E3A1"/>
+                </a:solidFill>
+                <a:latin typeface="Courier New"/>
+              </a:rPr>
+              <a:t>  │  5  📚  Show Loaded Documents           │</a:t>
+            </a:r>
+          </a:p>
+          <a:p>
+            <a:r>
+              <a:rPr sz="1100">
+                <a:solidFill>
+                  <a:srgbClr val="A6E3A1"/>
+                </a:solidFill>
+                <a:latin typeface="Courier New"/>
+              </a:rPr>
+              <a:t>  │  6  ℹ️   Session Info                   │</a:t>
+            </a:r>
+          </a:p>
+          <a:p>
+            <a:r>
+              <a:rPr sz="1100">
+                <a:solidFill>
+                  <a:srgbClr val="A6E3A1"/>
+                </a:solidFill>
+                <a:latin typeface="Courier New"/>
+              </a:rPr>
+              <a:t>  │  0  ❌  Quit                            │</a:t>
+            </a:r>
+          </a:p>
+          <a:p>
+            <a:r>
+              <a:rPr sz="1100">
+                <a:solidFill>
+                  <a:srgbClr val="A6E3A1"/>
+                </a:solidFill>
+                <a:latin typeface="Courier New"/>
+              </a:rPr>
+              <a:t>  └─────────────────────────────────────────┘</a:t>
+            </a:r>
+          </a:p>
+          <a:p>
+            <a:r>
+              <a:rPr sz="1100">
+                <a:solidFill>
+                  <a:srgbClr val="A6E3A1"/>
+                </a:solidFill>
+                <a:latin typeface="Courier New"/>
+              </a:rPr>
+              <a:t/>
+            </a:r>
+          </a:p>
+          <a:p>
+            <a:r>
+              <a:rPr sz="1100">
+                <a:solidFill>
+                  <a:srgbClr val="A6E3A1"/>
+                </a:solidFill>
+                <a:latin typeface="Courier New"/>
+              </a:rPr>
+              <a:t>  After each action:</a:t>
+            </a:r>
+          </a:p>
+          <a:p>
+            <a:r>
+              <a:rPr sz="1100">
+                <a:solidFill>
+                  <a:srgbClr val="A6E3A1"/>
+                </a:solidFill>
+                <a:latin typeface="Courier New"/>
+              </a:rPr>
+              <a:t>  ┌──────────────────────────────────────────┐</a:t>
+            </a:r>
+          </a:p>
+          <a:p>
+            <a:r>
+              <a:rPr sz="1100">
+                <a:solidFill>
+                  <a:srgbClr val="A6E3A1"/>
+                </a:solidFill>
+                <a:latin typeface="Courier New"/>
+              </a:rPr>
+              <a:t>  │  1  🔄  Ask another question             │</a:t>
+            </a:r>
+          </a:p>
+          <a:p>
+            <a:r>
+              <a:rPr sz="1100">
+                <a:solidFill>
+                  <a:srgbClr val="A6E3A1"/>
+                </a:solidFill>
+                <a:latin typeface="Courier New"/>
+              </a:rPr>
+              <a:t>  │  0  ↩   Back to main menu                │</a:t>
+            </a:r>
+          </a:p>
+          <a:p>
+            <a:r>
+              <a:rPr sz="1100">
+                <a:solidFill>
+                  <a:srgbClr val="A6E3A1"/>
+                </a:solidFill>
+                <a:latin typeface="Courier New"/>
+              </a:rPr>
+              <a:t>  └──────────────────────────────────────────┘</a:t>
+            </a:r>
+          </a:p>
+        </p:txBody>
+      </p:sp>
+    </p:spTree>
+  </p:cSld>
+  <p:clrMapOvr>
+    <a:masterClrMapping/>
+  </p:clrMapOvr>
+</p:sld>
+</file>
+
+<file path=ppt/slides/slide23.xml><?xml version="1.0" encoding="utf-8"?>
+<p:sld xmlns:a="http://schemas.openxmlformats.org/drawingml/2006/main" xmlns:p="http://schemas.openxmlformats.org/presentationml/2006/main" xmlns:r="http://schemas.openxmlformats.org/officeDocument/2006/relationships">
+  <p:cSld>
+    <p:bg>
+      <p:bgPr>
+        <a:solidFill>
+          <a:srgbClr val="1E1E2E"/>
+        </a:solidFill>
+        <a:effectLst/>
+      </p:bgPr>
+    </p:bg>
+    <p:spTree>
+      <p:nvGrpSpPr>
+        <p:cNvPr id="1" name=""/>
+        <p:cNvGrpSpPr/>
+        <p:nvPr/>
+      </p:nvGrpSpPr>
+      <p:grpSpPr/>
+      <p:sp>
+        <p:nvSpPr>
+          <p:cNvPr id="2" name="TextBox 1"/>
+          <p:cNvSpPr txBox="1"/>
+          <p:nvPr/>
+        </p:nvSpPr>
+        <p:spPr>
+          <a:xfrm>
+            <a:off x="365760" y="228600"/>
+            <a:ext cx="8412480" cy="594360"/>
+          </a:xfrm>
+          <a:prstGeom prst="rect">
+            <a:avLst/>
+          </a:prstGeom>
+          <a:noFill/>
+        </p:spPr>
+        <p:txBody>
+          <a:bodyPr wrap="none">
+            <a:spAutoFit/>
+          </a:bodyPr>
+          <a:lstStyle/>
+          <a:p>
+            <a:pPr algn="l"/>
+            <a:r>
+              <a:rPr b="1" sz="2400">
+                <a:solidFill>
+                  <a:srgbClr val="74C7EC"/>
+                </a:solidFill>
+              </a:rPr>
+              <a:t>Update 2 — Native File Picker (tkinter)</a:t>
+            </a:r>
+          </a:p>
+        </p:txBody>
+      </p:sp>
+      <p:sp>
+        <p:nvSpPr>
+          <p:cNvPr id="3" name="TextBox 2"/>
+          <p:cNvSpPr txBox="1"/>
+          <p:nvPr/>
+        </p:nvSpPr>
+        <p:spPr>
+          <a:xfrm>
+            <a:off x="365760" y="914400"/>
+            <a:ext cx="8412480" cy="822960"/>
+          </a:xfrm>
+          <a:prstGeom prst="rect">
+            <a:avLst/>
+          </a:prstGeom>
+          <a:noFill/>
+        </p:spPr>
+        <p:txBody>
+          <a:bodyPr wrap="square">
+            <a:spAutoFit/>
+          </a:bodyPr>
+          <a:lstStyle/>
+          <a:p>
+            <a:pPr algn="l"/>
+            <a:r>
+              <a:rPr sz="1300" b="0">
+                <a:solidFill>
+                  <a:srgbClr val="CDD6F4"/>
+                </a:solidFill>
+              </a:rPr>
+              <a:t>Option 1 opens a native Windows file browser dialog via tkinter.filedialog.</a:t>
+            </a:r>
+          </a:p>
+          <a:p>
+            <a:pPr algn="l"/>
+            <a:r>
+              <a:rPr sz="1300" b="0">
+                <a:solidFill>
+                  <a:srgbClr val="CDD6F4"/>
+                </a:solidFill>
+              </a:rPr>
+              <a:t>Falls back to manual path entry if dialog is unavailable.</a:t>
+            </a:r>
+          </a:p>
+          <a:p>
+            <a:pPr algn="l"/>
+            <a:r>
+              <a:rPr sz="1300" b="0">
+                <a:solidFill>
+                  <a:srgbClr val="CDD6F4"/>
+                </a:solidFill>
+              </a:rPr>
+              <a:t>Supports: PDF  TXT  MD  CSV</a:t>
+            </a:r>
+          </a:p>
+        </p:txBody>
+      </p:sp>
+      <p:sp>
+        <p:nvSpPr>
+          <p:cNvPr id="4" name="Rectangle 3"/>
+          <p:cNvSpPr/>
+          <p:nvPr/>
+        </p:nvSpPr>
+        <p:spPr>
+          <a:xfrm>
+            <a:off x="365760" y="1828800"/>
+            <a:ext cx="8412480" cy="4023360"/>
+          </a:xfrm>
+          <a:prstGeom prst="rect">
+            <a:avLst/>
+          </a:prstGeom>
+          <a:solidFill>
+            <a:srgbClr val="18182E"/>
+          </a:solidFill>
+          <a:ln>
+            <a:noFill/>
+          </a:ln>
+        </p:spPr>
+        <p:style>
+          <a:lnRef idx="1">
+            <a:schemeClr val="accent1"/>
+          </a:lnRef>
+          <a:fillRef idx="3">
+            <a:schemeClr val="accent1"/>
+          </a:fillRef>
+          <a:effectRef idx="2">
+            <a:schemeClr val="accent1"/>
+          </a:effectRef>
+          <a:fontRef idx="minor">
+            <a:schemeClr val="lt1"/>
+          </a:fontRef>
+        </p:style>
+        <p:txBody>
+          <a:bodyPr rtlCol="0" anchor="ctr"/>
+          <a:lstStyle/>
+          <a:p>
+            <a:pPr algn="ctr"/>
+          </a:p>
+        </p:txBody>
+      </p:sp>
+      <p:sp>
+        <p:nvSpPr>
+          <p:cNvPr id="5" name="TextBox 4"/>
+          <p:cNvSpPr txBox="1"/>
+          <p:nvPr/>
+        </p:nvSpPr>
+        <p:spPr>
+          <a:xfrm>
+            <a:off x="457200" y="1920240"/>
+            <a:ext cx="8229600" cy="3840480"/>
+          </a:xfrm>
+          <a:prstGeom prst="rect">
+            <a:avLst/>
+          </a:prstGeom>
+          <a:noFill/>
+        </p:spPr>
+        <p:txBody>
+          <a:bodyPr wrap="square">
+            <a:spAutoFit/>
+          </a:bodyPr>
+          <a:lstStyle/>
+          <a:p>
+            <a:r>
+              <a:rPr sz="1100">
+                <a:solidFill>
+                  <a:srgbClr val="A6E3A1"/>
+                </a:solidFill>
+                <a:latin typeface="Courier New"/>
+              </a:rPr>
+              <a:t>def _pick_file() -&gt; str | None:</a:t>
+            </a:r>
+          </a:p>
+          <a:p>
+            <a:r>
+              <a:rPr sz="1100">
+                <a:solidFill>
+                  <a:srgbClr val="A6E3A1"/>
+                </a:solidFill>
+                <a:latin typeface="Courier New"/>
+              </a:rPr>
+              <a:t>    import tkinter as tk</a:t>
+            </a:r>
+          </a:p>
+          <a:p>
+            <a:r>
+              <a:rPr sz="1100">
+                <a:solidFill>
+                  <a:srgbClr val="A6E3A1"/>
+                </a:solidFill>
+                <a:latin typeface="Courier New"/>
+              </a:rPr>
+              <a:t>    from tkinter import filedialog</a:t>
+            </a:r>
+          </a:p>
+          <a:p>
+            <a:r>
+              <a:rPr sz="1100">
+                <a:solidFill>
+                  <a:srgbClr val="A6E3A1"/>
+                </a:solidFill>
+                <a:latin typeface="Courier New"/>
+              </a:rPr>
+              <a:t>    root = tk.Tk()</a:t>
+            </a:r>
+          </a:p>
+          <a:p>
+            <a:r>
+              <a:rPr sz="1100">
+                <a:solidFill>
+                  <a:srgbClr val="A6E3A1"/>
+                </a:solidFill>
+                <a:latin typeface="Courier New"/>
+              </a:rPr>
+              <a:t>    root.withdraw()               # hide blank Tk window</a:t>
+            </a:r>
+          </a:p>
+          <a:p>
+            <a:r>
+              <a:rPr sz="1100">
+                <a:solidFill>
+                  <a:srgbClr val="A6E3A1"/>
+                </a:solidFill>
+                <a:latin typeface="Courier New"/>
+              </a:rPr>
+              <a:t>    root.attributes("-topmost", True)</a:t>
+            </a:r>
+          </a:p>
+          <a:p>
+            <a:r>
+              <a:rPr sz="1100">
+                <a:solidFill>
+                  <a:srgbClr val="A6E3A1"/>
+                </a:solidFill>
+                <a:latin typeface="Courier New"/>
+              </a:rPr>
+              <a:t>    path = filedialog.askopenfilename(</a:t>
+            </a:r>
+          </a:p>
+          <a:p>
+            <a:r>
+              <a:rPr sz="1100">
+                <a:solidFill>
+                  <a:srgbClr val="A6E3A1"/>
+                </a:solidFill>
+                <a:latin typeface="Courier New"/>
+              </a:rPr>
+              <a:t>        title="Select a document to upload",</a:t>
+            </a:r>
+          </a:p>
+          <a:p>
+            <a:r>
+              <a:rPr sz="1100">
+                <a:solidFill>
+                  <a:srgbClr val="A6E3A1"/>
+                </a:solidFill>
+                <a:latin typeface="Courier New"/>
+              </a:rPr>
+              <a:t>        filetypes=[</a:t>
+            </a:r>
+          </a:p>
+          <a:p>
+            <a:r>
+              <a:rPr sz="1100">
+                <a:solidFill>
+                  <a:srgbClr val="A6E3A1"/>
+                </a:solidFill>
+                <a:latin typeface="Courier New"/>
+              </a:rPr>
+              <a:t>            ("Supported files", "*.pdf *.txt *.md *.csv"),</a:t>
+            </a:r>
+          </a:p>
+          <a:p>
+            <a:r>
+              <a:rPr sz="1100">
+                <a:solidFill>
+                  <a:srgbClr val="A6E3A1"/>
+                </a:solidFill>
+                <a:latin typeface="Courier New"/>
+              </a:rPr>
+              <a:t>            ("All files", "*.*"),</a:t>
+            </a:r>
+          </a:p>
+          <a:p>
+            <a:r>
+              <a:rPr sz="1100">
+                <a:solidFill>
+                  <a:srgbClr val="A6E3A1"/>
+                </a:solidFill>
+                <a:latin typeface="Courier New"/>
+              </a:rPr>
+              <a:t>        ],</a:t>
+            </a:r>
+          </a:p>
+          <a:p>
+            <a:r>
+              <a:rPr sz="1100">
+                <a:solidFill>
+                  <a:srgbClr val="A6E3A1"/>
+                </a:solidFill>
+                <a:latin typeface="Courier New"/>
+              </a:rPr>
+              <a:t>    )</a:t>
+            </a:r>
+          </a:p>
+          <a:p>
+            <a:r>
+              <a:rPr sz="1100">
+                <a:solidFill>
+                  <a:srgbClr val="A6E3A1"/>
+                </a:solidFill>
+                <a:latin typeface="Courier New"/>
+              </a:rPr>
+              <a:t>    root.destroy()</a:t>
+            </a:r>
+          </a:p>
+          <a:p>
+            <a:r>
+              <a:rPr sz="1100">
+                <a:solidFill>
+                  <a:srgbClr val="A6E3A1"/>
+                </a:solidFill>
+                <a:latin typeface="Courier New"/>
+              </a:rPr>
+              <a:t>    return path if path else None</a:t>
+            </a:r>
+          </a:p>
+          <a:p>
+            <a:r>
+              <a:rPr sz="1100">
+                <a:solidFill>
+                  <a:srgbClr val="A6E3A1"/>
+                </a:solidFill>
+                <a:latin typeface="Courier New"/>
+              </a:rPr>
+              <a:t/>
+            </a:r>
+          </a:p>
+          <a:p>
+            <a:r>
+              <a:rPr sz="1100">
+                <a:solidFill>
+                  <a:srgbClr val="A6E3A1"/>
+                </a:solidFill>
+                <a:latin typeface="Courier New"/>
+              </a:rPr>
+              <a:t># Fallback if dialog unavailable:</a:t>
+            </a:r>
+          </a:p>
+          <a:p>
+            <a:r>
+              <a:rPr sz="1100">
+                <a:solidFill>
+                  <a:srgbClr val="A6E3A1"/>
+                </a:solidFill>
+                <a:latin typeface="Courier New"/>
+              </a:rPr>
+              <a:t>file_path = input("  Path: ").strip()</a:t>
+            </a:r>
+          </a:p>
+        </p:txBody>
+      </p:sp>
+    </p:spTree>
+  </p:cSld>
+  <p:clrMapOvr>
+    <a:masterClrMapping/>
+  </p:clrMapOvr>
+</p:sld>
+</file>
+
+<file path=ppt/slides/slide24.xml><?xml version="1.0" encoding="utf-8"?>
+<p:sld xmlns:a="http://schemas.openxmlformats.org/drawingml/2006/main" xmlns:p="http://schemas.openxmlformats.org/presentationml/2006/main" xmlns:r="http://schemas.openxmlformats.org/officeDocument/2006/relationships">
+  <p:cSld>
+    <p:bg>
+      <p:bgPr>
+        <a:solidFill>
+          <a:srgbClr val="1E1E2E"/>
+        </a:solidFill>
+        <a:effectLst/>
+      </p:bgPr>
+    </p:bg>
+    <p:spTree>
+      <p:nvGrpSpPr>
+        <p:cNvPr id="1" name=""/>
+        <p:cNvGrpSpPr/>
+        <p:nvPr/>
+      </p:nvGrpSpPr>
+      <p:grpSpPr/>
+      <p:sp>
+        <p:nvSpPr>
+          <p:cNvPr id="2" name="TextBox 1"/>
+          <p:cNvSpPr txBox="1"/>
+          <p:nvPr/>
+        </p:nvSpPr>
+        <p:spPr>
+          <a:xfrm>
+            <a:off x="365760" y="228600"/>
+            <a:ext cx="8412480" cy="594360"/>
+          </a:xfrm>
+          <a:prstGeom prst="rect">
+            <a:avLst/>
+          </a:prstGeom>
+          <a:noFill/>
+        </p:spPr>
+        <p:txBody>
+          <a:bodyPr wrap="none">
+            <a:spAutoFit/>
+          </a:bodyPr>
+          <a:lstStyle/>
+          <a:p>
+            <a:pPr algn="l"/>
+            <a:r>
+              <a:rPr b="1" sz="2400">
+                <a:solidFill>
+                  <a:srgbClr val="74C7EC"/>
+                </a:solidFill>
+              </a:rPr>
+              <a:t>Update 3 — Per-Session Logs (tools.py)</a:t>
+            </a:r>
+          </a:p>
+        </p:txBody>
+      </p:sp>
+      <p:sp>
+        <p:nvSpPr>
+          <p:cNvPr id="3" name="TextBox 2"/>
+          <p:cNvSpPr txBox="1"/>
+          <p:nvPr/>
+        </p:nvSpPr>
+        <p:spPr>
+          <a:xfrm>
+            <a:off x="365760" y="914400"/>
+            <a:ext cx="8412480" cy="1005840"/>
+          </a:xfrm>
+          <a:prstGeom prst="rect">
+            <a:avLst/>
+          </a:prstGeom>
+          <a:noFill/>
+        </p:spPr>
+        <p:txBody>
+          <a:bodyPr wrap="square">
+            <a:spAutoFit/>
+          </a:bodyPr>
+          <a:lstStyle/>
+          <a:p>
+            <a:pPr algn="l"/>
+            <a:r>
+              <a:rPr sz="1300" b="0">
+                <a:solidFill>
+                  <a:srgbClr val="CDD6F4"/>
+                </a:solidFill>
+              </a:rPr>
+              <a:t>OLD: One file per day  →  logs/tool_calls_2026-10-05.log  (no session ID)</a:t>
+            </a:r>
+          </a:p>
+          <a:p>
+            <a:pPr algn="l"/>
+            <a:r>
+              <a:rPr sz="1300" b="0">
+                <a:solidFill>
+                  <a:srgbClr val="CDD6F4"/>
+                </a:solidFill>
+              </a:rPr>
+              <a:t>NEW: One file per session  →  logs/&lt;session_id&gt;.log</a:t>
+            </a:r>
+          </a:p>
+          <a:p>
+            <a:pPr algn="l"/>
+            <a:r>
+              <a:rPr sz="1300" b="0">
+                <a:solidFill>
+                  <a:srgbClr val="CDD6F4"/>
+                </a:solidFill>
+              </a:rPr>
+              <a:t/>
+            </a:r>
+          </a:p>
+          <a:p>
+            <a:pPr algn="l"/>
+            <a:r>
+              <a:rPr sz="1300" b="0">
+                <a:solidFill>
+                  <a:srgbClr val="CDD6F4"/>
+                </a:solidFill>
+              </a:rPr>
+              <a:t>All code paths now logged with status labels:</a:t>
+            </a:r>
+          </a:p>
+        </p:txBody>
+      </p:sp>
+      <p:sp>
+        <p:nvSpPr>
+          <p:cNvPr id="4" name="Rectangle 3"/>
+          <p:cNvSpPr/>
+          <p:nvPr/>
+        </p:nvSpPr>
+        <p:spPr>
+          <a:xfrm>
+            <a:off x="365760" y="2011680"/>
+            <a:ext cx="8412480" cy="3840480"/>
+          </a:xfrm>
+          <a:prstGeom prst="rect">
+            <a:avLst/>
+          </a:prstGeom>
+          <a:solidFill>
+            <a:srgbClr val="18182E"/>
+          </a:solidFill>
+          <a:ln>
+            <a:noFill/>
+          </a:ln>
+        </p:spPr>
+        <p:style>
+          <a:lnRef idx="1">
+            <a:schemeClr val="accent1"/>
+          </a:lnRef>
+          <a:fillRef idx="3">
+            <a:schemeClr val="accent1"/>
+          </a:fillRef>
+          <a:effectRef idx="2">
+            <a:schemeClr val="accent1"/>
+          </a:effectRef>
+          <a:fontRef idx="minor">
+            <a:schemeClr val="lt1"/>
+          </a:fontRef>
+        </p:style>
+        <p:txBody>
+          <a:bodyPr rtlCol="0" anchor="ctr"/>
+          <a:lstStyle/>
+          <a:p>
+            <a:pPr algn="ctr"/>
+          </a:p>
+        </p:txBody>
+      </p:sp>
+      <p:sp>
+        <p:nvSpPr>
+          <p:cNvPr id="5" name="TextBox 4"/>
+          <p:cNvSpPr txBox="1"/>
+          <p:nvPr/>
+        </p:nvSpPr>
+        <p:spPr>
+          <a:xfrm>
+            <a:off x="457200" y="2103120"/>
+            <a:ext cx="8229600" cy="3657600"/>
+          </a:xfrm>
+          <a:prstGeom prst="rect">
+            <a:avLst/>
+          </a:prstGeom>
+          <a:noFill/>
+        </p:spPr>
+        <p:txBody>
+          <a:bodyPr wrap="square">
+            <a:spAutoFit/>
+          </a:bodyPr>
+          <a:lstStyle/>
+          <a:p>
+            <a:r>
+              <a:rPr sz="1100">
+                <a:solidFill>
+                  <a:srgbClr val="A6E3A1"/>
+                </a:solidFill>
+                <a:latin typeface="Courier New"/>
+              </a:rPr>
+              <a:t># tools.py — session context</a:t>
+            </a:r>
+          </a:p>
+          <a:p>
+            <a:r>
+              <a:rPr sz="1100">
+                <a:solidFill>
+                  <a:srgbClr val="A6E3A1"/>
+                </a:solidFill>
+                <a:latin typeface="Courier New"/>
+              </a:rPr>
+              <a:t>_current_session_id: str = "unknown"</a:t>
+            </a:r>
+          </a:p>
+          <a:p>
+            <a:r>
+              <a:rPr sz="1100">
+                <a:solidFill>
+                  <a:srgbClr val="A6E3A1"/>
+                </a:solidFill>
+                <a:latin typeface="Courier New"/>
+              </a:rPr>
+              <a:t/>
+            </a:r>
+          </a:p>
+          <a:p>
+            <a:r>
+              <a:rPr sz="1100">
+                <a:solidFill>
+                  <a:srgbClr val="A6E3A1"/>
+                </a:solidFill>
+                <a:latin typeface="Courier New"/>
+              </a:rPr>
+              <a:t>def set_session_context(session_id: str) -&gt; None:</a:t>
+            </a:r>
+          </a:p>
+          <a:p>
+            <a:r>
+              <a:rPr sz="1100">
+                <a:solidFill>
+                  <a:srgbClr val="A6E3A1"/>
+                </a:solidFill>
+                <a:latin typeface="Courier New"/>
+              </a:rPr>
+              <a:t>    global _current_session_id</a:t>
+            </a:r>
+          </a:p>
+          <a:p>
+            <a:r>
+              <a:rPr sz="1100">
+                <a:solidFill>
+                  <a:srgbClr val="A6E3A1"/>
+                </a:solidFill>
+                <a:latin typeface="Courier New"/>
+              </a:rPr>
+              <a:t>    _current_session_id = session_id   # called by assistant.start_session()</a:t>
+            </a:r>
+          </a:p>
+          <a:p>
+            <a:r>
+              <a:rPr sz="1100">
+                <a:solidFill>
+                  <a:srgbClr val="A6E3A1"/>
+                </a:solidFill>
+                <a:latin typeface="Courier New"/>
+              </a:rPr>
+              <a:t/>
+            </a:r>
+          </a:p>
+          <a:p>
+            <a:r>
+              <a:rPr sz="1100">
+                <a:solidFill>
+                  <a:srgbClr val="A6E3A1"/>
+                </a:solidFill>
+                <a:latin typeface="Courier New"/>
+              </a:rPr>
+              <a:t>class ToolLogger:</a:t>
+            </a:r>
+          </a:p>
+          <a:p>
+            <a:r>
+              <a:rPr sz="1100">
+                <a:solidFill>
+                  <a:srgbClr val="A6E3A1"/>
+                </a:solidFill>
+                <a:latin typeface="Courier New"/>
+              </a:rPr>
+              <a:t>    @staticmethod</a:t>
+            </a:r>
+          </a:p>
+          <a:p>
+            <a:r>
+              <a:rPr sz="1100">
+                <a:solidFill>
+                  <a:srgbClr val="A6E3A1"/>
+                </a:solidFill>
+                <a:latin typeface="Courier New"/>
+              </a:rPr>
+              <a:t>    def log(tool_name, input_data, output, status="OK"):</a:t>
+            </a:r>
+          </a:p>
+          <a:p>
+            <a:r>
+              <a:rPr sz="1100">
+                <a:solidFill>
+                  <a:srgbClr val="A6E3A1"/>
+                </a:solidFill>
+                <a:latin typeface="Courier New"/>
+              </a:rPr>
+              <a:t>        log_file = Path("logs") / f"{_current_session_id}.log"</a:t>
+            </a:r>
+          </a:p>
+          <a:p>
+            <a:r>
+              <a:rPr sz="1100">
+                <a:solidFill>
+                  <a:srgbClr val="A6E3A1"/>
+                </a:solidFill>
+                <a:latin typeface="Courier New"/>
+              </a:rPr>
+              <a:t>        with open(log_file, "a") as f:</a:t>
+            </a:r>
+          </a:p>
+          <a:p>
+            <a:r>
+              <a:rPr sz="1100">
+                <a:solidFill>
+                  <a:srgbClr val="A6E3A1"/>
+                </a:solidFill>
+                <a:latin typeface="Courier New"/>
+              </a:rPr>
+              <a:t>            f.write(f"[{ts}]  Tool: {tool_name}  |  Status: {status}\n")</a:t>
+            </a:r>
+          </a:p>
+          <a:p>
+            <a:r>
+              <a:rPr sz="1100">
+                <a:solidFill>
+                  <a:srgbClr val="A6E3A1"/>
+                </a:solidFill>
+                <a:latin typeface="Courier New"/>
+              </a:rPr>
+              <a:t>            f.write(f"  Input:  {input_data}\n")</a:t>
+            </a:r>
+          </a:p>
+          <a:p>
+            <a:r>
+              <a:rPr sz="1100">
+                <a:solidFill>
+                  <a:srgbClr val="A6E3A1"/>
+                </a:solidFill>
+                <a:latin typeface="Courier New"/>
+              </a:rPr>
+              <a:t>            f.write(f"  Output: {output}\n\n")   # no truncation</a:t>
+            </a:r>
+          </a:p>
+          <a:p>
+            <a:r>
+              <a:rPr sz="1100">
+                <a:solidFill>
+                  <a:srgbClr val="A6E3A1"/>
+                </a:solidFill>
+                <a:latin typeface="Courier New"/>
+              </a:rPr>
+              <a:t/>
+            </a:r>
+          </a:p>
+          <a:p>
+            <a:r>
+              <a:rPr sz="1100">
+                <a:solidFill>
+                  <a:srgbClr val="A6E3A1"/>
+                </a:solidFill>
+                <a:latin typeface="Courier New"/>
+              </a:rPr>
+              <a:t># Status labels: LIST | EXACT_MATCH | KEYWORD_MATCH | FALLBACK_ALL</a:t>
+            </a:r>
+          </a:p>
+          <a:p>
+            <a:r>
+              <a:rPr sz="1100">
+                <a:solidFill>
+                  <a:srgbClr val="A6E3A1"/>
+                </a:solidFill>
+                <a:latin typeface="Courier New"/>
+              </a:rPr>
+              <a:t>#                NO_MATCH | ERROR | INVALID_INPUT | ZERO_DIVISION | FALLBACK</a:t>
+            </a:r>
+          </a:p>
+        </p:txBody>
+      </p:sp>
+    </p:spTree>
+  </p:cSld>
+  <p:clrMapOvr>
+    <a:masterClrMapping/>
+  </p:clrMapOvr>
+</p:sld>
+</file>
+
+<file path=ppt/slides/slide25.xml><?xml version="1.0" encoding="utf-8"?>
+<p:sld xmlns:a="http://schemas.openxmlformats.org/drawingml/2006/main" xmlns:p="http://schemas.openxmlformats.org/presentationml/2006/main" xmlns:r="http://schemas.openxmlformats.org/officeDocument/2006/relationships">
+  <p:cSld>
+    <p:bg>
+      <p:bgPr>
+        <a:solidFill>
+          <a:srgbClr val="1E1E2E"/>
+        </a:solidFill>
+        <a:effectLst/>
+      </p:bgPr>
+    </p:bg>
+    <p:spTree>
+      <p:nvGrpSpPr>
+        <p:cNvPr id="1" name=""/>
+        <p:cNvGrpSpPr/>
+        <p:nvPr/>
+      </p:nvGrpSpPr>
+      <p:grpSpPr/>
+      <p:sp>
+        <p:nvSpPr>
+          <p:cNvPr id="2" name="TextBox 1"/>
+          <p:cNvSpPr txBox="1"/>
+          <p:nvPr/>
+        </p:nvSpPr>
+        <p:spPr>
+          <a:xfrm>
+            <a:off x="365760" y="228600"/>
+            <a:ext cx="8412480" cy="594360"/>
+          </a:xfrm>
+          <a:prstGeom prst="rect">
+            <a:avLst/>
+          </a:prstGeom>
+          <a:noFill/>
+        </p:spPr>
+        <p:txBody>
+          <a:bodyPr wrap="none">
+            <a:spAutoFit/>
+          </a:bodyPr>
+          <a:lstStyle/>
+          <a:p>
+            <a:pPr algn="l"/>
+            <a:r>
+              <a:rPr b="1" sz="2400">
+                <a:solidFill>
+                  <a:srgbClr val="74C7EC"/>
+                </a:solidFill>
+              </a:rPr>
+              <a:t>Update 4 — Full Conversation History in sessions/</a:t>
+            </a:r>
+          </a:p>
+        </p:txBody>
+      </p:sp>
+      <p:sp>
+        <p:nvSpPr>
+          <p:cNvPr id="3" name="TextBox 2"/>
+          <p:cNvSpPr txBox="1"/>
+          <p:nvPr/>
+        </p:nvSpPr>
+        <p:spPr>
+          <a:xfrm>
+            <a:off x="365760" y="914400"/>
+            <a:ext cx="8412480" cy="685800"/>
+          </a:xfrm>
+          <a:prstGeom prst="rect">
+            <a:avLst/>
+          </a:prstGeom>
+          <a:noFill/>
+        </p:spPr>
+        <p:txBody>
+          <a:bodyPr wrap="square">
+            <a:spAutoFit/>
+          </a:bodyPr>
+          <a:lstStyle/>
+          <a:p>
+            <a:pPr algn="l"/>
+            <a:r>
+              <a:rPr sz="1300" b="0">
+                <a:solidFill>
+                  <a:srgbClr val="CDD6F4"/>
+                </a:solidFill>
+              </a:rPr>
+              <a:t>OLD: sessions/&lt;uuid&gt;.json had only metadata (session_id, user_id, message_count)</a:t>
+            </a:r>
+          </a:p>
+          <a:p>
+            <a:pPr algn="l"/>
+            <a:r>
+              <a:rPr sz="1300" b="0">
+                <a:solidFill>
+                  <a:srgbClr val="CDD6F4"/>
+                </a:solidFill>
+              </a:rPr>
+              <a:t>NEW: Each turn is appended to conversation_history with full detail</a:t>
+            </a:r>
+          </a:p>
+        </p:txBody>
+      </p:sp>
+      <p:sp>
+        <p:nvSpPr>
+          <p:cNvPr id="4" name="Rectangle 3"/>
+          <p:cNvSpPr/>
+          <p:nvPr/>
+        </p:nvSpPr>
+        <p:spPr>
+          <a:xfrm>
+            <a:off x="365760" y="1737360"/>
+            <a:ext cx="8412480" cy="4114800"/>
+          </a:xfrm>
+          <a:prstGeom prst="rect">
+            <a:avLst/>
+          </a:prstGeom>
+          <a:solidFill>
+            <a:srgbClr val="18182E"/>
+          </a:solidFill>
+          <a:ln>
+            <a:noFill/>
+          </a:ln>
+        </p:spPr>
+        <p:style>
+          <a:lnRef idx="1">
+            <a:schemeClr val="accent1"/>
+          </a:lnRef>
+          <a:fillRef idx="3">
+            <a:schemeClr val="accent1"/>
+          </a:fillRef>
+          <a:effectRef idx="2">
+            <a:schemeClr val="accent1"/>
+          </a:effectRef>
+          <a:fontRef idx="minor">
+            <a:schemeClr val="lt1"/>
+          </a:fontRef>
+        </p:style>
+        <p:txBody>
+          <a:bodyPr rtlCol="0" anchor="ctr"/>
+          <a:lstStyle/>
+          <a:p>
+            <a:pPr algn="ctr"/>
+          </a:p>
+        </p:txBody>
+      </p:sp>
+      <p:sp>
+        <p:nvSpPr>
+          <p:cNvPr id="5" name="TextBox 4"/>
+          <p:cNvSpPr txBox="1"/>
+          <p:nvPr/>
+        </p:nvSpPr>
+        <p:spPr>
+          <a:xfrm>
+            <a:off x="457200" y="1828800"/>
+            <a:ext cx="8229600" cy="3931920"/>
+          </a:xfrm>
+          <a:prstGeom prst="rect">
+            <a:avLst/>
+          </a:prstGeom>
+          <a:noFill/>
+        </p:spPr>
+        <p:txBody>
+          <a:bodyPr wrap="square">
+            <a:spAutoFit/>
+          </a:bodyPr>
+          <a:lstStyle/>
+          <a:p>
+            <a:r>
+              <a:rPr sz="1100">
+                <a:solidFill>
+                  <a:srgbClr val="A6E3A1"/>
+                </a:solidFill>
+                <a:latin typeface="Courier New"/>
+              </a:rPr>
+              <a:t>{</a:t>
+            </a:r>
+          </a:p>
+          <a:p>
+            <a:r>
+              <a:rPr sz="1100">
+                <a:solidFill>
+                  <a:srgbClr val="A6E3A1"/>
+                </a:solidFill>
+                <a:latin typeface="Courier New"/>
+              </a:rPr>
+              <a:t>  "session_id": "c3d4e5f6-calculation-revenue-session",</a:t>
+            </a:r>
+          </a:p>
+          <a:p>
+            <a:r>
+              <a:rPr sz="1100">
+                <a:solidFill>
+                  <a:srgbClr val="A6E3A1"/>
+                </a:solidFill>
+                <a:latin typeface="Courier New"/>
+              </a:rPr>
+              <a:t>  "user_id": "user_001",</a:t>
+            </a:r>
+          </a:p>
+          <a:p>
+            <a:r>
+              <a:rPr sz="1100">
+                <a:solidFill>
+                  <a:srgbClr val="A6E3A1"/>
+                </a:solidFill>
+                <a:latin typeface="Courier New"/>
+              </a:rPr>
+              <a:t>  "created_at": "2026-10-05T11:20:00",</a:t>
+            </a:r>
+          </a:p>
+          <a:p>
+            <a:r>
+              <a:rPr sz="1100">
+                <a:solidFill>
+                  <a:srgbClr val="A6E3A1"/>
+                </a:solidFill>
+                <a:latin typeface="Courier New"/>
+              </a:rPr>
+              <a:t>  "message_count": 3,</a:t>
+            </a:r>
+          </a:p>
+          <a:p>
+            <a:r>
+              <a:rPr sz="1100">
+                <a:solidFill>
+                  <a:srgbClr val="A6E3A1"/>
+                </a:solidFill>
+                <a:latin typeface="Courier New"/>
+              </a:rPr>
+              <a:t>  "conversation_history": [</a:t>
+            </a:r>
+          </a:p>
+          <a:p>
+            <a:r>
+              <a:rPr sz="1100">
+                <a:solidFill>
+                  <a:srgbClr val="A6E3A1"/>
+                </a:solidFill>
+                <a:latin typeface="Courier New"/>
+              </a:rPr>
+              <a:t>    {</a:t>
+            </a:r>
+          </a:p>
+          <a:p>
+            <a:r>
+              <a:rPr sz="1100">
+                <a:solidFill>
+                  <a:srgbClr val="A6E3A1"/>
+                </a:solidFill>
+                <a:latin typeface="Courier New"/>
+              </a:rPr>
+              <a:t>      "turn": 1,</a:t>
+            </a:r>
+          </a:p>
+          <a:p>
+            <a:r>
+              <a:rPr sz="1100">
+                <a:solidFill>
+                  <a:srgbClr val="A6E3A1"/>
+                </a:solidFill>
+                <a:latin typeface="Courier New"/>
+              </a:rPr>
+              <a:t>      "timestamp": "2026-10-05T11:20:15",</a:t>
+            </a:r>
+          </a:p>
+          <a:p>
+            <a:r>
+              <a:rPr sz="1100">
+                <a:solidFill>
+                  <a:srgbClr val="A6E3A1"/>
+                </a:solidFill>
+                <a:latin typeface="Courier New"/>
+              </a:rPr>
+              <a:t>      "user_input": "Calculate: total revenue Q1 and Q2",</a:t>
+            </a:r>
+          </a:p>
+          <a:p>
+            <a:r>
+              <a:rPr sz="1100">
+                <a:solidFill>
+                  <a:srgbClr val="A6E3A1"/>
+                </a:solidFill>
+                <a:latin typeface="Courier New"/>
+              </a:rPr>
+              <a:t>      "intent_type": "calculation",</a:t>
+            </a:r>
+          </a:p>
+          <a:p>
+            <a:r>
+              <a:rPr sz="1100">
+                <a:solidFill>
+                  <a:srgbClr val="A6E3A1"/>
+                </a:solidFill>
+                <a:latin typeface="Courier New"/>
+              </a:rPr>
+              <a:t>      "intent_confidence": 0.97,</a:t>
+            </a:r>
+          </a:p>
+          <a:p>
+            <a:r>
+              <a:rPr sz="1100">
+                <a:solidFill>
+                  <a:srgbClr val="A6E3A1"/>
+                </a:solidFill>
+                <a:latin typeface="Courier New"/>
+              </a:rPr>
+              <a:t>      "intent_reasoning": "Prefix 'Calculate:' is explicit; adding two revenue figures requires arithmetic.",</a:t>
+            </a:r>
+          </a:p>
+          <a:p>
+            <a:r>
+              <a:rPr sz="1100">
+                <a:solidFill>
+                  <a:srgbClr val="A6E3A1"/>
+                </a:solidFill>
+                <a:latin typeface="Courier New"/>
+              </a:rPr>
+              <a:t>      "tools_used": ["document_reader", "calculator"],</a:t>
+            </a:r>
+          </a:p>
+          <a:p>
+            <a:r>
+              <a:rPr sz="1100">
+                <a:solidFill>
+                  <a:srgbClr val="A6E3A1"/>
+                </a:solidFill>
+                <a:latin typeface="Courier New"/>
+              </a:rPr>
+              <a:t>      "sources": ["doc_financial_q1", "doc_financial_q2"],</a:t>
+            </a:r>
+          </a:p>
+          <a:p>
+            <a:r>
+              <a:rPr sz="1100">
+                <a:solidFill>
+                  <a:srgbClr val="A6E3A1"/>
+                </a:solidFill>
+                <a:latin typeface="Courier New"/>
+              </a:rPr>
+              <a:t>      "response": "Combined revenue is $9,300,000 ...",</a:t>
+            </a:r>
+          </a:p>
+          <a:p>
+            <a:r>
+              <a:rPr sz="1100">
+                <a:solidFill>
+                  <a:srgbClr val="A6E3A1"/>
+                </a:solidFill>
+                <a:latin typeface="Courier New"/>
+              </a:rPr>
+              <a:t>      "conversation_summary": "..."</a:t>
+            </a:r>
+          </a:p>
+          <a:p>
+            <a:r>
+              <a:rPr sz="1100">
+                <a:solidFill>
+                  <a:srgbClr val="A6E3A1"/>
+                </a:solidFill>
+                <a:latin typeface="Courier New"/>
+              </a:rPr>
+              <a:t>    }</a:t>
+            </a:r>
+          </a:p>
+          <a:p>
+            <a:r>
+              <a:rPr sz="1100">
+                <a:solidFill>
+                  <a:srgbClr val="A6E3A1"/>
+                </a:solidFill>
+                <a:latin typeface="Courier New"/>
+              </a:rPr>
+              <a:t>  ]</a:t>
+            </a:r>
+          </a:p>
+          <a:p>
+            <a:r>
+              <a:rPr sz="1100">
+                <a:solidFill>
+                  <a:srgbClr val="A6E3A1"/>
+                </a:solidFill>
+                <a:latin typeface="Courier New"/>
+              </a:rPr>
+              <a:t>}</a:t>
+            </a:r>
+          </a:p>
+        </p:txBody>
+      </p:sp>
+    </p:spTree>
+  </p:cSld>
+  <p:clrMapOvr>
+    <a:masterClrMapping/>
+  </p:clrMapOvr>
+</p:sld>
+</file>
+
+<file path=ppt/slides/slide26.xml><?xml version="1.0" encoding="utf-8"?>
+<p:sld xmlns:a="http://schemas.openxmlformats.org/drawingml/2006/main" xmlns:p="http://schemas.openxmlformats.org/presentationml/2006/main" xmlns:r="http://schemas.openxmlformats.org/officeDocument/2006/relationships">
+  <p:cSld>
+    <p:bg>
+      <p:bgPr>
+        <a:solidFill>
+          <a:srgbClr val="1E1E2E"/>
+        </a:solidFill>
+        <a:effectLst/>
+      </p:bgPr>
+    </p:bg>
+    <p:spTree>
+      <p:nvGrpSpPr>
+        <p:cNvPr id="1" name=""/>
+        <p:cNvGrpSpPr/>
+        <p:nvPr/>
+      </p:nvGrpSpPr>
+      <p:grpSpPr/>
+      <p:sp>
+        <p:nvSpPr>
+          <p:cNvPr id="2" name="TextBox 1"/>
+          <p:cNvSpPr txBox="1"/>
+          <p:nvPr/>
+        </p:nvSpPr>
+        <p:spPr>
+          <a:xfrm>
+            <a:off x="365760" y="228600"/>
+            <a:ext cx="8412480" cy="594360"/>
+          </a:xfrm>
+          <a:prstGeom prst="rect">
+            <a:avLst/>
+          </a:prstGeom>
+          <a:noFill/>
+        </p:spPr>
+        <p:txBody>
+          <a:bodyPr wrap="none">
+            <a:spAutoFit/>
+          </a:bodyPr>
+          <a:lstStyle/>
+          <a:p>
+            <a:pPr algn="l"/>
+            <a:r>
+              <a:rPr b="1" sz="2400">
+                <a:solidFill>
+                  <a:srgbClr val="74C7EC"/>
+                </a:solidFill>
+              </a:rPr>
+              <a:t>Update 5 — MessagesPlaceholder in ChatPromptTemplate</a:t>
+            </a:r>
+          </a:p>
+        </p:txBody>
+      </p:sp>
+      <p:sp>
+        <p:nvSpPr>
+          <p:cNvPr id="3" name="TextBox 2"/>
+          <p:cNvSpPr txBox="1"/>
+          <p:nvPr/>
+        </p:nvSpPr>
+        <p:spPr>
+          <a:xfrm>
+            <a:off x="365760" y="914400"/>
+            <a:ext cx="8412480" cy="685800"/>
+          </a:xfrm>
+          <a:prstGeom prst="rect">
+            <a:avLst/>
+          </a:prstGeom>
+          <a:noFill/>
+        </p:spPr>
+        <p:txBody>
+          <a:bodyPr wrap="square">
+            <a:spAutoFit/>
+          </a:bodyPr>
+          <a:lstStyle/>
+          <a:p>
+            <a:pPr algn="l"/>
+            <a:r>
+              <a:rPr sz="1300" b="0">
+                <a:solidFill>
+                  <a:srgbClr val="CDD6F4"/>
+                </a:solidFill>
+              </a:rPr>
+              <a:t>All three agent prompt templates now include MessagesPlaceholder</a:t>
+            </a:r>
+          </a:p>
+          <a:p>
+            <a:pPr algn="l"/>
+            <a:r>
+              <a:rPr sz="1300" b="0">
+                <a:solidFill>
+                  <a:srgbClr val="CDD6F4"/>
+                </a:solidFill>
+              </a:rPr>
+              <a:t>so prior conversation turns are visible to the LLM (multi-turn context).</a:t>
+            </a:r>
+          </a:p>
+        </p:txBody>
+      </p:sp>
+      <p:sp>
+        <p:nvSpPr>
+          <p:cNvPr id="4" name="Rectangle 3"/>
+          <p:cNvSpPr/>
+          <p:nvPr/>
+        </p:nvSpPr>
+        <p:spPr>
+          <a:xfrm>
+            <a:off x="365760" y="1737360"/>
+            <a:ext cx="8412480" cy="4114800"/>
+          </a:xfrm>
+          <a:prstGeom prst="rect">
+            <a:avLst/>
+          </a:prstGeom>
+          <a:solidFill>
+            <a:srgbClr val="18182E"/>
+          </a:solidFill>
+          <a:ln>
+            <a:noFill/>
+          </a:ln>
+        </p:spPr>
+        <p:style>
+          <a:lnRef idx="1">
+            <a:schemeClr val="accent1"/>
+          </a:lnRef>
+          <a:fillRef idx="3">
+            <a:schemeClr val="accent1"/>
+          </a:fillRef>
+          <a:effectRef idx="2">
+            <a:schemeClr val="accent1"/>
+          </a:effectRef>
+          <a:fontRef idx="minor">
+            <a:schemeClr val="lt1"/>
+          </a:fontRef>
+        </p:style>
+        <p:txBody>
+          <a:bodyPr rtlCol="0" anchor="ctr"/>
+          <a:lstStyle/>
+          <a:p>
+            <a:pPr algn="ctr"/>
+          </a:p>
+        </p:txBody>
+      </p:sp>
+      <p:sp>
+        <p:nvSpPr>
+          <p:cNvPr id="5" name="TextBox 4"/>
+          <p:cNvSpPr txBox="1"/>
+          <p:nvPr/>
+        </p:nvSpPr>
+        <p:spPr>
+          <a:xfrm>
+            <a:off x="457200" y="1828800"/>
+            <a:ext cx="8229600" cy="3931920"/>
+          </a:xfrm>
+          <a:prstGeom prst="rect">
+            <a:avLst/>
+          </a:prstGeom>
+          <a:noFill/>
+        </p:spPr>
+        <p:txBody>
+          <a:bodyPr wrap="square">
+            <a:spAutoFit/>
+          </a:bodyPr>
+          <a:lstStyle/>
+          <a:p>
+            <a:r>
+              <a:rPr sz="1100">
+                <a:solidFill>
+                  <a:srgbClr val="A6E3A1"/>
+                </a:solidFill>
+                <a:latin typeface="Courier New"/>
+              </a:rPr>
+              <a:t># prompts.py — BEFORE</a:t>
+            </a:r>
+          </a:p>
+          <a:p>
+            <a:r>
+              <a:rPr sz="1100">
+                <a:solidFill>
+                  <a:srgbClr val="A6E3A1"/>
+                </a:solidFill>
+                <a:latin typeface="Courier New"/>
+              </a:rPr>
+              <a:t>from langchain_core.prompts import PromptTemplate, ChatPromptTemplate</a:t>
+            </a:r>
+          </a:p>
+          <a:p>
+            <a:r>
+              <a:rPr sz="1100">
+                <a:solidFill>
+                  <a:srgbClr val="A6E3A1"/>
+                </a:solidFill>
+                <a:latin typeface="Courier New"/>
+              </a:rPr>
+              <a:t/>
+            </a:r>
+          </a:p>
+          <a:p>
+            <a:r>
+              <a:rPr sz="1100">
+                <a:solidFill>
+                  <a:srgbClr val="A6E3A1"/>
+                </a:solidFill>
+                <a:latin typeface="Courier New"/>
+              </a:rPr>
+              <a:t>return ChatPromptTemplate.from_messages([</a:t>
+            </a:r>
+          </a:p>
+          <a:p>
+            <a:r>
+              <a:rPr sz="1100">
+                <a:solidFill>
+                  <a:srgbClr val="A6E3A1"/>
+                </a:solidFill>
+                <a:latin typeface="Courier New"/>
+              </a:rPr>
+              <a:t>    ("system", system_prompt),</a:t>
+            </a:r>
+          </a:p>
+          <a:p>
+            <a:r>
+              <a:rPr sz="1100">
+                <a:solidFill>
+                  <a:srgbClr val="A6E3A1"/>
+                </a:solidFill>
+                <a:latin typeface="Courier New"/>
+              </a:rPr>
+              <a:t>    ("human", "{user_input}"),</a:t>
+            </a:r>
+          </a:p>
+          <a:p>
+            <a:r>
+              <a:rPr sz="1100">
+                <a:solidFill>
+                  <a:srgbClr val="A6E3A1"/>
+                </a:solidFill>
+                <a:latin typeface="Courier New"/>
+              </a:rPr>
+              <a:t>])</a:t>
+            </a:r>
+          </a:p>
+          <a:p>
+            <a:r>
+              <a:rPr sz="1100">
+                <a:solidFill>
+                  <a:srgbClr val="A6E3A1"/>
+                </a:solidFill>
+                <a:latin typeface="Courier New"/>
+              </a:rPr>
+              <a:t/>
+            </a:r>
+          </a:p>
+          <a:p>
+            <a:r>
+              <a:rPr sz="1100">
+                <a:solidFill>
+                  <a:srgbClr val="A6E3A1"/>
+                </a:solidFill>
+                <a:latin typeface="Courier New"/>
+              </a:rPr>
+              <a:t/>
+            </a:r>
+          </a:p>
+          <a:p>
+            <a:r>
+              <a:rPr sz="1100">
+                <a:solidFill>
+                  <a:srgbClr val="A6E3A1"/>
+                </a:solidFill>
+                <a:latin typeface="Courier New"/>
+              </a:rPr>
+              <a:t># prompts.py — AFTER</a:t>
+            </a:r>
+          </a:p>
+          <a:p>
+            <a:r>
+              <a:rPr sz="1100">
+                <a:solidFill>
+                  <a:srgbClr val="A6E3A1"/>
+                </a:solidFill>
+                <a:latin typeface="Courier New"/>
+              </a:rPr>
+              <a:t>from langchain_core.prompts import (</a:t>
+            </a:r>
+          </a:p>
+          <a:p>
+            <a:r>
+              <a:rPr sz="1100">
+                <a:solidFill>
+                  <a:srgbClr val="A6E3A1"/>
+                </a:solidFill>
+                <a:latin typeface="Courier New"/>
+              </a:rPr>
+              <a:t>    PromptTemplate, ChatPromptTemplate, MessagesPlaceholder</a:t>
+            </a:r>
+          </a:p>
+          <a:p>
+            <a:r>
+              <a:rPr sz="1100">
+                <a:solidFill>
+                  <a:srgbClr val="A6E3A1"/>
+                </a:solidFill>
+                <a:latin typeface="Courier New"/>
+              </a:rPr>
+              <a:t>)</a:t>
+            </a:r>
+          </a:p>
+          <a:p>
+            <a:r>
+              <a:rPr sz="1100">
+                <a:solidFill>
+                  <a:srgbClr val="A6E3A1"/>
+                </a:solidFill>
+                <a:latin typeface="Courier New"/>
+              </a:rPr>
+              <a:t/>
+            </a:r>
+          </a:p>
+          <a:p>
+            <a:r>
+              <a:rPr sz="1100">
+                <a:solidFill>
+                  <a:srgbClr val="A6E3A1"/>
+                </a:solidFill>
+                <a:latin typeface="Courier New"/>
+              </a:rPr>
+              <a:t>return ChatPromptTemplate.from_messages([</a:t>
+            </a:r>
+          </a:p>
+          <a:p>
+            <a:r>
+              <a:rPr sz="1100">
+                <a:solidFill>
+                  <a:srgbClr val="A6E3A1"/>
+                </a:solidFill>
+                <a:latin typeface="Courier New"/>
+              </a:rPr>
+              <a:t>    ("system", system_prompt),</a:t>
+            </a:r>
+          </a:p>
+          <a:p>
+            <a:r>
+              <a:rPr sz="1100">
+                <a:solidFill>
+                  <a:srgbClr val="A6E3A1"/>
+                </a:solidFill>
+                <a:latin typeface="Courier New"/>
+              </a:rPr>
+              <a:t>    MessagesPlaceholder(variable_name="conversation_history", optional=True),</a:t>
+            </a:r>
+          </a:p>
+          <a:p>
+            <a:r>
+              <a:rPr sz="1100">
+                <a:solidFill>
+                  <a:srgbClr val="A6E3A1"/>
+                </a:solidFill>
+                <a:latin typeface="Courier New"/>
+              </a:rPr>
+              <a:t>    ("human", "{user_input}"),</a:t>
+            </a:r>
+          </a:p>
+          <a:p>
+            <a:r>
+              <a:rPr sz="1100">
+                <a:solidFill>
+                  <a:srgbClr val="A6E3A1"/>
+                </a:solidFill>
+                <a:latin typeface="Courier New"/>
+              </a:rPr>
+              <a:t>])</a:t>
+            </a:r>
+          </a:p>
+          <a:p>
+            <a:r>
+              <a:rPr sz="1100">
+                <a:solidFill>
+                  <a:srgbClr val="A6E3A1"/>
+                </a:solidFill>
+                <a:latin typeface="Courier New"/>
+              </a:rPr>
+              <a:t/>
+            </a:r>
+          </a:p>
+          <a:p>
+            <a:r>
+              <a:rPr sz="1100">
+                <a:solidFill>
+                  <a:srgbClr val="A6E3A1"/>
+                </a:solidFill>
+                <a:latin typeface="Courier New"/>
+              </a:rPr>
+              <a:t/>
+            </a:r>
+          </a:p>
+          <a:p>
+            <a:r>
+              <a:rPr sz="1100">
+                <a:solidFill>
+                  <a:srgbClr val="A6E3A1"/>
+                </a:solidFill>
+                <a:latin typeface="Courier New"/>
+              </a:rPr>
+              <a:t># agent.py — each agent now passes history into format_messages()</a:t>
+            </a:r>
+          </a:p>
+          <a:p>
+            <a:r>
+              <a:rPr sz="1100">
+                <a:solidFill>
+                  <a:srgbClr val="A6E3A1"/>
+                </a:solidFill>
+                <a:latin typeface="Courier New"/>
+              </a:rPr>
+              <a:t>recent_history = state.get("messages", [])[-6:]</a:t>
+            </a:r>
+          </a:p>
+          <a:p>
+            <a:r>
+              <a:rPr sz="1100">
+                <a:solidFill>
+                  <a:srgbClr val="A6E3A1"/>
+                </a:solidFill>
+                <a:latin typeface="Courier New"/>
+              </a:rPr>
+              <a:t>messages = prompt_template.format_messages(</a:t>
+            </a:r>
+          </a:p>
+          <a:p>
+            <a:r>
+              <a:rPr sz="1100">
+                <a:solidFill>
+                  <a:srgbClr val="A6E3A1"/>
+                </a:solidFill>
+                <a:latin typeface="Courier New"/>
+              </a:rPr>
+              <a:t>    user_input=enriched_input,</a:t>
+            </a:r>
+          </a:p>
+          <a:p>
+            <a:r>
+              <a:rPr sz="1100">
+                <a:solidFill>
+                  <a:srgbClr val="A6E3A1"/>
+                </a:solidFill>
+                <a:latin typeface="Courier New"/>
+              </a:rPr>
+              <a:t>    conversation_history=recent_history,</a:t>
+            </a:r>
+          </a:p>
+          <a:p>
+            <a:r>
+              <a:rPr sz="1100">
+                <a:solidFill>
+                  <a:srgbClr val="A6E3A1"/>
+                </a:solidFill>
+                <a:latin typeface="Courier New"/>
+              </a:rPr>
+              <a:t>)</a:t>
+            </a:r>
+          </a:p>
+        </p:txBody>
+      </p:sp>
+    </p:spTree>
+  </p:cSld>
+  <p:clrMapOvr>
+    <a:masterClrMapping/>
+  </p:clrMapOvr>
+</p:sld>
+</file>
+
+<file path=ppt/slides/slide27.xml><?xml version="1.0" encoding="utf-8"?>
+<p:sld xmlns:a="http://schemas.openxmlformats.org/drawingml/2006/main" xmlns:p="http://schemas.openxmlformats.org/presentationml/2006/main" xmlns:r="http://schemas.openxmlformats.org/officeDocument/2006/relationships">
+  <p:cSld>
+    <p:bg>
+      <p:bgPr>
+        <a:solidFill>
+          <a:srgbClr val="1E1E2E"/>
+        </a:solidFill>
+        <a:effectLst/>
+      </p:bgPr>
+    </p:bg>
+    <p:spTree>
+      <p:nvGrpSpPr>
+        <p:cNvPr id="1" name=""/>
+        <p:cNvGrpSpPr/>
+        <p:nvPr/>
+      </p:nvGrpSpPr>
+      <p:grpSpPr/>
+      <p:sp>
+        <p:nvSpPr>
+          <p:cNvPr id="2" name="TextBox 1"/>
+          <p:cNvSpPr txBox="1"/>
+          <p:nvPr/>
+        </p:nvSpPr>
+        <p:spPr>
+          <a:xfrm>
+            <a:off x="365760" y="228600"/>
+            <a:ext cx="8412480" cy="594360"/>
+          </a:xfrm>
+          <a:prstGeom prst="rect">
+            <a:avLst/>
+          </a:prstGeom>
+          <a:noFill/>
+        </p:spPr>
+        <p:txBody>
+          <a:bodyPr wrap="none">
+            <a:spAutoFit/>
+          </a:bodyPr>
+          <a:lstStyle/>
+          <a:p>
+            <a:pPr algn="l"/>
+            <a:r>
+              <a:rPr b="1" sz="2400">
+                <a:solidFill>
+                  <a:srgbClr val="74C7EC"/>
+                </a:solidFill>
+              </a:rPr>
+              <a:t>Update 6 — Enriched Intent Classification Prompt</a:t>
+            </a:r>
+          </a:p>
+        </p:txBody>
+      </p:sp>
+      <p:sp>
+        <p:nvSpPr>
+          <p:cNvPr id="3" name="TextBox 2"/>
+          <p:cNvSpPr txBox="1"/>
+          <p:nvPr/>
+        </p:nvSpPr>
+        <p:spPr>
+          <a:xfrm>
+            <a:off x="365760" y="914400"/>
+            <a:ext cx="8412480" cy="457200"/>
+          </a:xfrm>
+          <a:prstGeom prst="rect">
+            <a:avLst/>
+          </a:prstGeom>
+          <a:noFill/>
+        </p:spPr>
+        <p:txBody>
+          <a:bodyPr wrap="square">
+            <a:spAutoFit/>
+          </a:bodyPr>
+          <a:lstStyle/>
+          <a:p>
+            <a:pPr algn="l"/>
+            <a:r>
+              <a:rPr sz="1300" b="0">
+                <a:solidFill>
+                  <a:srgbClr val="CDD6F4"/>
+                </a:solidFill>
+              </a:rPr>
+              <a:t>Four improvements added to _INTENT_CLASSIFICATION_TEMPLATE in prompts.py:</a:t>
+            </a:r>
+          </a:p>
+        </p:txBody>
+      </p:sp>
+      <p:sp>
+        <p:nvSpPr>
+          <p:cNvPr id="4" name="Rectangle 3"/>
+          <p:cNvSpPr/>
+          <p:nvPr/>
+        </p:nvSpPr>
+        <p:spPr>
+          <a:xfrm>
+            <a:off x="365760" y="1463040"/>
+            <a:ext cx="8412480" cy="4389120"/>
+          </a:xfrm>
+          <a:prstGeom prst="rect">
+            <a:avLst/>
+          </a:prstGeom>
+          <a:solidFill>
+            <a:srgbClr val="18182E"/>
+          </a:solidFill>
+          <a:ln>
+            <a:noFill/>
+          </a:ln>
+        </p:spPr>
+        <p:style>
+          <a:lnRef idx="1">
+            <a:schemeClr val="accent1"/>
+          </a:lnRef>
+          <a:fillRef idx="3">
+            <a:schemeClr val="accent1"/>
+          </a:fillRef>
+          <a:effectRef idx="2">
+            <a:schemeClr val="accent1"/>
+          </a:effectRef>
+          <a:fontRef idx="minor">
+            <a:schemeClr val="lt1"/>
+          </a:fontRef>
+        </p:style>
+        <p:txBody>
+          <a:bodyPr rtlCol="0" anchor="ctr"/>
+          <a:lstStyle/>
+          <a:p>
+            <a:pPr algn="ctr"/>
+          </a:p>
+        </p:txBody>
+      </p:sp>
+      <p:sp>
+        <p:nvSpPr>
+          <p:cNvPr id="5" name="TextBox 4"/>
+          <p:cNvSpPr txBox="1"/>
+          <p:nvPr/>
+        </p:nvSpPr>
+        <p:spPr>
+          <a:xfrm>
+            <a:off x="457200" y="1554480"/>
+            <a:ext cx="8229600" cy="4206240"/>
+          </a:xfrm>
+          <a:prstGeom prst="rect">
+            <a:avLst/>
+          </a:prstGeom>
+          <a:noFill/>
+        </p:spPr>
+        <p:txBody>
+          <a:bodyPr wrap="square">
+            <a:spAutoFit/>
+          </a:bodyPr>
+          <a:lstStyle/>
+          <a:p>
+            <a:r>
+              <a:rPr sz="1100">
+                <a:solidFill>
+                  <a:srgbClr val="A6E3A1"/>
+                </a:solidFill>
+                <a:latin typeface="Courier New"/>
+              </a:rPr>
+              <a:t>1. EXAMPLES PER CATEGORY (3 per category)</a:t>
+            </a:r>
+          </a:p>
+          <a:p>
+            <a:r>
+              <a:rPr sz="1100">
+                <a:solidFill>
+                  <a:srgbClr val="A6E3A1"/>
+                </a:solidFill>
+                <a:latin typeface="Courier New"/>
+              </a:rPr>
+              <a:t>   "What is the readmission rate?" → qa,  confidence: 0.95</a:t>
+            </a:r>
+          </a:p>
+          <a:p>
+            <a:r>
+              <a:rPr sz="1100">
+                <a:solidFill>
+                  <a:srgbClr val="A6E3A1"/>
+                </a:solidFill>
+                <a:latin typeface="Courier New"/>
+              </a:rPr>
+              <a:t>     reasoning: "Direct factual question; no arithmetic required."</a:t>
+            </a:r>
+          </a:p>
+          <a:p>
+            <a:r>
+              <a:rPr sz="1100">
+                <a:solidFill>
+                  <a:srgbClr val="A6E3A1"/>
+                </a:solidFill>
+                <a:latin typeface="Courier New"/>
+              </a:rPr>
+              <a:t>   "Summarize the Q2 financial report" → summarization,  confidence: 0.97</a:t>
+            </a:r>
+          </a:p>
+          <a:p>
+            <a:r>
+              <a:rPr sz="1100">
+                <a:solidFill>
+                  <a:srgbClr val="A6E3A1"/>
+                </a:solidFill>
+                <a:latin typeface="Courier New"/>
+              </a:rPr>
+              <a:t>     reasoning: "'Summarize' is explicit; user wants condensed content."</a:t>
+            </a:r>
+          </a:p>
+          <a:p>
+            <a:r>
+              <a:rPr sz="1100">
+                <a:solidFill>
+                  <a:srgbClr val="A6E3A1"/>
+                </a:solidFill>
+                <a:latin typeface="Courier New"/>
+              </a:rPr>
+              <a:t>   "What is the combined revenue Q1+Q2?" → calculation,  confidence: 0.95</a:t>
+            </a:r>
+          </a:p>
+          <a:p>
+            <a:r>
+              <a:rPr sz="1100">
+                <a:solidFill>
+                  <a:srgbClr val="A6E3A1"/>
+                </a:solidFill>
+                <a:latin typeface="Courier New"/>
+              </a:rPr>
+              <a:t>     reasoning: "Requires adding two figures from separate documents."</a:t>
+            </a:r>
+          </a:p>
+          <a:p>
+            <a:r>
+              <a:rPr sz="1100">
+                <a:solidFill>
+                  <a:srgbClr val="A6E3A1"/>
+                </a:solidFill>
+                <a:latin typeface="Courier New"/>
+              </a:rPr>
+              <a:t/>
+            </a:r>
+          </a:p>
+          <a:p>
+            <a:r>
+              <a:rPr sz="1100">
+                <a:solidFill>
+                  <a:srgbClr val="A6E3A1"/>
+                </a:solidFill>
+                <a:latin typeface="Courier New"/>
+              </a:rPr>
+              <a:t>2. CONFIDENCE SCORING GUIDE</a:t>
+            </a:r>
+          </a:p>
+          <a:p>
+            <a:r>
+              <a:rPr sz="1100">
+                <a:solidFill>
+                  <a:srgbClr val="A6E3A1"/>
+                </a:solidFill>
+                <a:latin typeface="Courier New"/>
+              </a:rPr>
+              <a:t>   0.90–1.00  Intent is explicit and unambiguous</a:t>
+            </a:r>
+          </a:p>
+          <a:p>
+            <a:r>
+              <a:rPr sz="1100">
+                <a:solidFill>
+                  <a:srgbClr val="A6E3A1"/>
+                </a:solidFill>
+                <a:latin typeface="Courier New"/>
+              </a:rPr>
+              <a:t>   0.70–0.89  Likely correct but one other category is plausible</a:t>
+            </a:r>
+          </a:p>
+          <a:p>
+            <a:r>
+              <a:rPr sz="1100">
+                <a:solidFill>
+                  <a:srgbClr val="A6E3A1"/>
+                </a:solidFill>
+                <a:latin typeface="Courier New"/>
+              </a:rPr>
+              <a:t>   0.50–0.69  Genuinely ambiguous; fits two categories equally</a:t>
+            </a:r>
+          </a:p>
+          <a:p>
+            <a:r>
+              <a:rPr sz="1100">
+                <a:solidFill>
+                  <a:srgbClr val="A6E3A1"/>
+                </a:solidFill>
+                <a:latin typeface="Courier New"/>
+              </a:rPr>
+              <a:t>   Below 0.50  Very unclear — default to "qa"</a:t>
+            </a:r>
+          </a:p>
+          <a:p>
+            <a:r>
+              <a:rPr sz="1100">
+                <a:solidFill>
+                  <a:srgbClr val="A6E3A1"/>
+                </a:solidFill>
+                <a:latin typeface="Courier New"/>
+              </a:rPr>
+              <a:t/>
+            </a:r>
+          </a:p>
+          <a:p>
+            <a:r>
+              <a:rPr sz="1100">
+                <a:solidFill>
+                  <a:srgbClr val="A6E3A1"/>
+                </a:solidFill>
+                <a:latin typeface="Courier New"/>
+              </a:rPr>
+              <a:t>3. TIE-BREAKING RULES</a:t>
+            </a:r>
+          </a:p>
+          <a:p>
+            <a:r>
+              <a:rPr sz="1100">
+                <a:solidFill>
+                  <a:srgbClr val="A6E3A1"/>
+                </a:solidFill>
+                <a:latin typeface="Courier New"/>
+              </a:rPr>
+              <a:t>   • Any request needing arithmetic → "calculation" (beats "qa")</a:t>
+            </a:r>
+          </a:p>
+          <a:p>
+            <a:r>
+              <a:rPr sz="1100">
+                <a:solidFill>
+                  <a:srgbClr val="A6E3A1"/>
+                </a:solidFill>
+                <a:latin typeface="Courier New"/>
+              </a:rPr>
+              <a:t>   • "overview / highlight / tell me about" → "summarization"</a:t>
+            </a:r>
+          </a:p>
+          <a:p>
+            <a:r>
+              <a:rPr sz="1100">
+                <a:solidFill>
+                  <a:srgbClr val="A6E3A1"/>
+                </a:solidFill>
+                <a:latin typeface="Courier New"/>
+              </a:rPr>
+              <a:t>   • Follow-up requests → inherit intent from conversation_history</a:t>
+            </a:r>
+          </a:p>
+          <a:p>
+            <a:r>
+              <a:rPr sz="1100">
+                <a:solidFill>
+                  <a:srgbClr val="A6E3A1"/>
+                </a:solidFill>
+                <a:latin typeface="Courier New"/>
+              </a:rPr>
+              <a:t>   • Uncertain → "qa" is the safe fallback</a:t>
+            </a:r>
+          </a:p>
+          <a:p>
+            <a:r>
+              <a:rPr sz="1100">
+                <a:solidFill>
+                  <a:srgbClr val="A6E3A1"/>
+                </a:solidFill>
+                <a:latin typeface="Courier New"/>
+              </a:rPr>
+              <a:t/>
+            </a:r>
+          </a:p>
+          <a:p>
+            <a:r>
+              <a:rPr sz="1100">
+                <a:solidFill>
+                  <a:srgbClr val="A6E3A1"/>
+                </a:solidFill>
+                <a:latin typeface="Courier New"/>
+              </a:rPr>
+              <a:t>4. REASONING INSTRUCTIONS</a:t>
+            </a:r>
+          </a:p>
+          <a:p>
+            <a:r>
+              <a:rPr sz="1100">
+                <a:solidFill>
+                  <a:srgbClr val="A6E3A1"/>
+                </a:solidFill>
+                <a:latin typeface="Courier New"/>
+              </a:rPr>
+              <a:t>   "Name the specific words/phrases that drove your choice AND</a:t>
+            </a:r>
+          </a:p>
+          <a:p>
+            <a:r>
+              <a:rPr sz="1100">
+                <a:solidFill>
+                  <a:srgbClr val="A6E3A1"/>
+                </a:solidFill>
+                <a:latin typeface="Courier New"/>
+              </a:rPr>
+              <a:t>    explain why you ruled out the next-closest category." </a:t>
+            </a:r>
+          </a:p>
+        </p:txBody>
+      </p:sp>
+    </p:spTree>
+  </p:cSld>
+  <p:clrMapOvr>
+    <a:masterClrMapping/>
+  </p:clrMapOvr>
+</p:sld>
+</file>
+
+<file path=ppt/slides/slide28.xml><?xml version="1.0" encoding="utf-8"?>
+<p:sld xmlns:a="http://schemas.openxmlformats.org/drawingml/2006/main" xmlns:p="http://schemas.openxmlformats.org/presentationml/2006/main" xmlns:r="http://schemas.openxmlformats.org/officeDocument/2006/relationships">
+  <p:cSld>
+    <p:bg>
+      <p:bgPr>
+        <a:solidFill>
+          <a:srgbClr val="1E1E2E"/>
+        </a:solidFill>
+        <a:effectLst/>
+      </p:bgPr>
+    </p:bg>
+    <p:spTree>
+      <p:nvGrpSpPr>
+        <p:cNvPr id="1" name=""/>
+        <p:cNvGrpSpPr/>
+        <p:nvPr/>
+      </p:nvGrpSpPr>
+      <p:grpSpPr/>
+      <p:sp>
+        <p:nvSpPr>
+          <p:cNvPr id="2" name="TextBox 1"/>
+          <p:cNvSpPr txBox="1"/>
+          <p:nvPr/>
+        </p:nvSpPr>
+        <p:spPr>
+          <a:xfrm>
+            <a:off x="365760" y="228600"/>
+            <a:ext cx="8412480" cy="594360"/>
+          </a:xfrm>
+          <a:prstGeom prst="rect">
+            <a:avLst/>
+          </a:prstGeom>
+          <a:noFill/>
+        </p:spPr>
+        <p:txBody>
+          <a:bodyPr wrap="none">
+            <a:spAutoFit/>
+          </a:bodyPr>
+          <a:lstStyle/>
+          <a:p>
+            <a:pPr algn="l"/>
+            <a:r>
+              <a:rPr b="1" sz="2400">
+                <a:solidFill>
+                  <a:srgbClr val="74C7EC"/>
+                </a:solidFill>
+              </a:rPr>
+              <a:t>Summary of All Updates</a:t>
+            </a:r>
+          </a:p>
+        </p:txBody>
+      </p:sp>
+      <p:sp>
+        <p:nvSpPr>
+          <p:cNvPr id="3" name="Rectangle 2"/>
+          <p:cNvSpPr/>
+          <p:nvPr/>
+        </p:nvSpPr>
+        <p:spPr>
+          <a:xfrm>
+            <a:off x="320040" y="1005840"/>
+            <a:ext cx="320040" cy="347472"/>
+          </a:xfrm>
+          <a:prstGeom prst="rect">
+            <a:avLst/>
+          </a:prstGeom>
+          <a:solidFill>
+            <a:srgbClr val="74C7EC"/>
+          </a:solidFill>
+          <a:ln>
+            <a:noFill/>
+          </a:ln>
+        </p:spPr>
+        <p:style>
+          <a:lnRef idx="1">
+            <a:schemeClr val="accent1"/>
+          </a:lnRef>
+          <a:fillRef idx="3">
+            <a:schemeClr val="accent1"/>
+          </a:fillRef>
+          <a:effectRef idx="2">
+            <a:schemeClr val="accent1"/>
+          </a:effectRef>
+          <a:fontRef idx="minor">
+            <a:schemeClr val="lt1"/>
+          </a:fontRef>
+        </p:style>
+        <p:txBody>
+          <a:bodyPr rtlCol="0" anchor="ctr"/>
+          <a:lstStyle/>
+          <a:p>
+            <a:pPr algn="ctr"/>
+          </a:p>
+        </p:txBody>
+      </p:sp>
+      <p:sp>
+        <p:nvSpPr>
+          <p:cNvPr id="4" name="TextBox 3"/>
+          <p:cNvSpPr txBox="1"/>
+          <p:nvPr/>
+        </p:nvSpPr>
+        <p:spPr>
+          <a:xfrm>
+            <a:off x="320040" y="996696"/>
+            <a:ext cx="320040" cy="347472"/>
+          </a:xfrm>
+          <a:prstGeom prst="rect">
+            <a:avLst/>
+          </a:prstGeom>
+          <a:noFill/>
+        </p:spPr>
+        <p:txBody>
+          <a:bodyPr wrap="none">
+            <a:spAutoFit/>
+          </a:bodyPr>
+          <a:lstStyle/>
+          <a:p>
+            <a:pPr algn="ctr"/>
+            <a:r>
+              <a:rPr b="1" sz="1200">
+                <a:solidFill>
+                  <a:srgbClr val="1E1E2E"/>
+                </a:solidFill>
+              </a:rPr>
+              <a:t>1</a:t>
+            </a:r>
+          </a:p>
+        </p:txBody>
+      </p:sp>
+      <p:sp>
+        <p:nvSpPr>
+          <p:cNvPr id="5" name="TextBox 4"/>
+          <p:cNvSpPr txBox="1"/>
+          <p:nvPr/>
+        </p:nvSpPr>
+        <p:spPr>
+          <a:xfrm>
+            <a:off x="731520" y="960120"/>
+            <a:ext cx="1371600" cy="457200"/>
+          </a:xfrm>
+          <a:prstGeom prst="rect">
+            <a:avLst/>
+          </a:prstGeom>
+          <a:noFill/>
+        </p:spPr>
+        <p:txBody>
+          <a:bodyPr wrap="none">
+            <a:spAutoFit/>
+          </a:bodyPr>
+          <a:lstStyle/>
+          <a:p>
+            <a:r>
+              <a:rPr b="1" sz="1200">
+                <a:solidFill>
+                  <a:srgbClr val="F9E2AF"/>
+                </a:solidFill>
+              </a:rPr>
+              <a:t>main.py</a:t>
+            </a:r>
+          </a:p>
+        </p:txBody>
+      </p:sp>
+      <p:sp>
+        <p:nvSpPr>
+          <p:cNvPr id="6" name="TextBox 5"/>
+          <p:cNvSpPr txBox="1"/>
+          <p:nvPr/>
+        </p:nvSpPr>
+        <p:spPr>
+          <a:xfrm>
+            <a:off x="2194560" y="960120"/>
+            <a:ext cx="6400800" cy="457200"/>
+          </a:xfrm>
+          <a:prstGeom prst="rect">
+            <a:avLst/>
+          </a:prstGeom>
+          <a:noFill/>
+        </p:spPr>
+        <p:txBody>
+          <a:bodyPr wrap="none">
+            <a:spAutoFit/>
+          </a:bodyPr>
+          <a:lstStyle/>
+          <a:p>
+            <a:r>
+              <a:rPr sz="1200">
+                <a:solidFill>
+                  <a:srgbClr val="FFFFFF"/>
+                </a:solidFill>
+              </a:rPr>
+              <a:t>Numbered menu (1-6) + repeat-or-back sub-menu on every option</a:t>
+            </a:r>
+          </a:p>
+        </p:txBody>
+      </p:sp>
+      <p:sp>
+        <p:nvSpPr>
+          <p:cNvPr id="7" name="Rectangle 6"/>
+          <p:cNvSpPr/>
+          <p:nvPr/>
+        </p:nvSpPr>
+        <p:spPr>
+          <a:xfrm>
+            <a:off x="320040" y="1481328"/>
+            <a:ext cx="320040" cy="347472"/>
+          </a:xfrm>
+          <a:prstGeom prst="rect">
+            <a:avLst/>
+          </a:prstGeom>
+          <a:solidFill>
+            <a:srgbClr val="74C7EC"/>
+          </a:solidFill>
+          <a:ln>
+            <a:noFill/>
+          </a:ln>
+        </p:spPr>
+        <p:style>
+          <a:lnRef idx="1">
+            <a:schemeClr val="accent1"/>
+          </a:lnRef>
+          <a:fillRef idx="3">
+            <a:schemeClr val="accent1"/>
+          </a:fillRef>
+          <a:effectRef idx="2">
+            <a:schemeClr val="accent1"/>
+          </a:effectRef>
+          <a:fontRef idx="minor">
+            <a:schemeClr val="lt1"/>
+          </a:fontRef>
+        </p:style>
+        <p:txBody>
+          <a:bodyPr rtlCol="0" anchor="ctr"/>
+          <a:lstStyle/>
+          <a:p>
+            <a:pPr algn="ctr"/>
+          </a:p>
+        </p:txBody>
+      </p:sp>
+      <p:sp>
+        <p:nvSpPr>
+          <p:cNvPr id="8" name="TextBox 7"/>
+          <p:cNvSpPr txBox="1"/>
+          <p:nvPr/>
+        </p:nvSpPr>
+        <p:spPr>
+          <a:xfrm>
+            <a:off x="320040" y="1472184"/>
+            <a:ext cx="320040" cy="347472"/>
+          </a:xfrm>
+          <a:prstGeom prst="rect">
+            <a:avLst/>
+          </a:prstGeom>
+          <a:noFill/>
+        </p:spPr>
+        <p:txBody>
+          <a:bodyPr wrap="none">
+            <a:spAutoFit/>
+          </a:bodyPr>
+          <a:lstStyle/>
+          <a:p>
+            <a:pPr algn="ctr"/>
+            <a:r>
+              <a:rPr b="1" sz="1200">
+                <a:solidFill>
+                  <a:srgbClr val="1E1E2E"/>
+                </a:solidFill>
+              </a:rPr>
+              <a:t>2</a:t>
+            </a:r>
+          </a:p>
+        </p:txBody>
+      </p:sp>
+      <p:sp>
+        <p:nvSpPr>
+          <p:cNvPr id="9" name="TextBox 8"/>
+          <p:cNvSpPr txBox="1"/>
+          <p:nvPr/>
+        </p:nvSpPr>
+        <p:spPr>
+          <a:xfrm>
+            <a:off x="731520" y="1435608"/>
+            <a:ext cx="1371600" cy="457200"/>
+          </a:xfrm>
+          <a:prstGeom prst="rect">
+            <a:avLst/>
+          </a:prstGeom>
+          <a:noFill/>
+        </p:spPr>
+        <p:txBody>
+          <a:bodyPr wrap="none">
+            <a:spAutoFit/>
+          </a:bodyPr>
+          <a:lstStyle/>
+          <a:p>
+            <a:r>
+              <a:rPr b="1" sz="1200">
+                <a:solidFill>
+                  <a:srgbClr val="F9E2AF"/>
+                </a:solidFill>
+              </a:rPr>
+              <a:t>main.py</a:t>
+            </a:r>
+          </a:p>
+        </p:txBody>
+      </p:sp>
+      <p:sp>
+        <p:nvSpPr>
+          <p:cNvPr id="10" name="TextBox 9"/>
+          <p:cNvSpPr txBox="1"/>
+          <p:nvPr/>
+        </p:nvSpPr>
+        <p:spPr>
+          <a:xfrm>
+            <a:off x="2194560" y="1435608"/>
+            <a:ext cx="6400800" cy="457200"/>
+          </a:xfrm>
+          <a:prstGeom prst="rect">
+            <a:avLst/>
+          </a:prstGeom>
+          <a:noFill/>
+        </p:spPr>
+        <p:txBody>
+          <a:bodyPr wrap="none">
+            <a:spAutoFit/>
+          </a:bodyPr>
+          <a:lstStyle/>
+          <a:p>
+            <a:r>
+              <a:rPr sz="1200">
+                <a:solidFill>
+                  <a:srgbClr val="FFFFFF"/>
+                </a:solidFill>
+              </a:rPr>
+              <a:t>tkinter native file picker for Upload (Option 1)</a:t>
+            </a:r>
+          </a:p>
+        </p:txBody>
+      </p:sp>
+      <p:sp>
+        <p:nvSpPr>
+          <p:cNvPr id="11" name="Rectangle 10"/>
+          <p:cNvSpPr/>
+          <p:nvPr/>
+        </p:nvSpPr>
+        <p:spPr>
+          <a:xfrm>
+            <a:off x="320040" y="1956816"/>
+            <a:ext cx="320040" cy="347472"/>
+          </a:xfrm>
+          <a:prstGeom prst="rect">
+            <a:avLst/>
+          </a:prstGeom>
+          <a:solidFill>
+            <a:srgbClr val="74C7EC"/>
+          </a:solidFill>
+          <a:ln>
+            <a:noFill/>
+          </a:ln>
+        </p:spPr>
+        <p:style>
+          <a:lnRef idx="1">
+            <a:schemeClr val="accent1"/>
+          </a:lnRef>
+          <a:fillRef idx="3">
+            <a:schemeClr val="accent1"/>
+          </a:fillRef>
+          <a:effectRef idx="2">
+            <a:schemeClr val="accent1"/>
+          </a:effectRef>
+          <a:fontRef idx="minor">
+            <a:schemeClr val="lt1"/>
+          </a:fontRef>
+        </p:style>
+        <p:txBody>
+          <a:bodyPr rtlCol="0" anchor="ctr"/>
+          <a:lstStyle/>
+          <a:p>
+            <a:pPr algn="ctr"/>
+          </a:p>
+        </p:txBody>
+      </p:sp>
+      <p:sp>
+        <p:nvSpPr>
+          <p:cNvPr id="12" name="TextBox 11"/>
+          <p:cNvSpPr txBox="1"/>
+          <p:nvPr/>
+        </p:nvSpPr>
+        <p:spPr>
+          <a:xfrm>
+            <a:off x="320040" y="1947672"/>
+            <a:ext cx="320040" cy="347472"/>
+          </a:xfrm>
+          <a:prstGeom prst="rect">
+            <a:avLst/>
+          </a:prstGeom>
+          <a:noFill/>
+        </p:spPr>
+        <p:txBody>
+          <a:bodyPr wrap="none">
+            <a:spAutoFit/>
+          </a:bodyPr>
+          <a:lstStyle/>
+          <a:p>
+            <a:pPr algn="ctr"/>
+            <a:r>
+              <a:rPr b="1" sz="1200">
+                <a:solidFill>
+                  <a:srgbClr val="1E1E2E"/>
+                </a:solidFill>
+              </a:rPr>
+              <a:t>3</a:t>
+            </a:r>
+          </a:p>
+        </p:txBody>
+      </p:sp>
+      <p:sp>
+        <p:nvSpPr>
+          <p:cNvPr id="13" name="TextBox 12"/>
+          <p:cNvSpPr txBox="1"/>
+          <p:nvPr/>
+        </p:nvSpPr>
+        <p:spPr>
+          <a:xfrm>
+            <a:off x="731520" y="1911096"/>
+            <a:ext cx="1371600" cy="457200"/>
+          </a:xfrm>
+          <a:prstGeom prst="rect">
+            <a:avLst/>
+          </a:prstGeom>
+          <a:noFill/>
+        </p:spPr>
+        <p:txBody>
+          <a:bodyPr wrap="none">
+            <a:spAutoFit/>
+          </a:bodyPr>
+          <a:lstStyle/>
+          <a:p>
+            <a:r>
+              <a:rPr b="1" sz="1200">
+                <a:solidFill>
+                  <a:srgbClr val="F9E2AF"/>
+                </a:solidFill>
+              </a:rPr>
+              <a:t>tools.py</a:t>
+            </a:r>
+          </a:p>
+        </p:txBody>
+      </p:sp>
+      <p:sp>
+        <p:nvSpPr>
+          <p:cNvPr id="14" name="TextBox 13"/>
+          <p:cNvSpPr txBox="1"/>
+          <p:nvPr/>
+        </p:nvSpPr>
+        <p:spPr>
+          <a:xfrm>
+            <a:off x="2194560" y="1911096"/>
+            <a:ext cx="6400800" cy="457200"/>
+          </a:xfrm>
+          <a:prstGeom prst="rect">
+            <a:avLst/>
+          </a:prstGeom>
+          <a:noFill/>
+        </p:spPr>
+        <p:txBody>
+          <a:bodyPr wrap="none">
+            <a:spAutoFit/>
+          </a:bodyPr>
+          <a:lstStyle/>
+          <a:p>
+            <a:r>
+              <a:rPr sz="1200">
+                <a:solidFill>
+                  <a:srgbClr val="FFFFFF"/>
+                </a:solidFill>
+              </a:rPr>
+              <a:t>Per-session log files: logs/&lt;session_id&gt;.log</a:t>
+            </a:r>
+          </a:p>
+        </p:txBody>
+      </p:sp>
+      <p:sp>
+        <p:nvSpPr>
+          <p:cNvPr id="15" name="Rectangle 14"/>
+          <p:cNvSpPr/>
+          <p:nvPr/>
+        </p:nvSpPr>
+        <p:spPr>
+          <a:xfrm>
+            <a:off x="320040" y="2432304"/>
+            <a:ext cx="320040" cy="347472"/>
+          </a:xfrm>
+          <a:prstGeom prst="rect">
+            <a:avLst/>
+          </a:prstGeom>
+          <a:solidFill>
+            <a:srgbClr val="74C7EC"/>
+          </a:solidFill>
+          <a:ln>
+            <a:noFill/>
+          </a:ln>
+        </p:spPr>
+        <p:style>
+          <a:lnRef idx="1">
+            <a:schemeClr val="accent1"/>
+          </a:lnRef>
+          <a:fillRef idx="3">
+            <a:schemeClr val="accent1"/>
+          </a:fillRef>
+          <a:effectRef idx="2">
+            <a:schemeClr val="accent1"/>
+          </a:effectRef>
+          <a:fontRef idx="minor">
+            <a:schemeClr val="lt1"/>
+          </a:fontRef>
+        </p:style>
+        <p:txBody>
+          <a:bodyPr rtlCol="0" anchor="ctr"/>
+          <a:lstStyle/>
+          <a:p>
+            <a:pPr algn="ctr"/>
+          </a:p>
+        </p:txBody>
+      </p:sp>
+      <p:sp>
+        <p:nvSpPr>
+          <p:cNvPr id="16" name="TextBox 15"/>
+          <p:cNvSpPr txBox="1"/>
+          <p:nvPr/>
+        </p:nvSpPr>
+        <p:spPr>
+          <a:xfrm>
+            <a:off x="320040" y="2423160"/>
+            <a:ext cx="320040" cy="347472"/>
+          </a:xfrm>
+          <a:prstGeom prst="rect">
+            <a:avLst/>
+          </a:prstGeom>
+          <a:noFill/>
+        </p:spPr>
+        <p:txBody>
+          <a:bodyPr wrap="none">
+            <a:spAutoFit/>
+          </a:bodyPr>
+          <a:lstStyle/>
+          <a:p>
+            <a:pPr algn="ctr"/>
+            <a:r>
+              <a:rPr b="1" sz="1200">
+                <a:solidFill>
+                  <a:srgbClr val="1E1E2E"/>
+                </a:solidFill>
+              </a:rPr>
+              <a:t>4</a:t>
+            </a:r>
+          </a:p>
+        </p:txBody>
+      </p:sp>
+      <p:sp>
+        <p:nvSpPr>
+          <p:cNvPr id="17" name="TextBox 16"/>
+          <p:cNvSpPr txBox="1"/>
+          <p:nvPr/>
+        </p:nvSpPr>
+        <p:spPr>
+          <a:xfrm>
+            <a:off x="731520" y="2386584"/>
+            <a:ext cx="1371600" cy="457200"/>
+          </a:xfrm>
+          <a:prstGeom prst="rect">
+            <a:avLst/>
+          </a:prstGeom>
+          <a:noFill/>
+        </p:spPr>
+        <p:txBody>
+          <a:bodyPr wrap="none">
+            <a:spAutoFit/>
+          </a:bodyPr>
+          <a:lstStyle/>
+          <a:p>
+            <a:r>
+              <a:rPr b="1" sz="1200">
+                <a:solidFill>
+                  <a:srgbClr val="F9E2AF"/>
+                </a:solidFill>
+              </a:rPr>
+              <a:t>tools.py</a:t>
+            </a:r>
+          </a:p>
+        </p:txBody>
+      </p:sp>
+      <p:sp>
+        <p:nvSpPr>
+          <p:cNvPr id="18" name="TextBox 17"/>
+          <p:cNvSpPr txBox="1"/>
+          <p:nvPr/>
+        </p:nvSpPr>
+        <p:spPr>
+          <a:xfrm>
+            <a:off x="2194560" y="2386584"/>
+            <a:ext cx="6400800" cy="457200"/>
+          </a:xfrm>
+          <a:prstGeom prst="rect">
+            <a:avLst/>
+          </a:prstGeom>
+          <a:noFill/>
+        </p:spPr>
+        <p:txBody>
+          <a:bodyPr wrap="none">
+            <a:spAutoFit/>
+          </a:bodyPr>
+          <a:lstStyle/>
+          <a:p>
+            <a:r>
+              <a:rPr sz="1200">
+                <a:solidFill>
+                  <a:srgbClr val="FFFFFF"/>
+                </a:solidFill>
+              </a:rPr>
+              <a:t>All tool paths logged (LIST/EXACT/KEYWORD/FALLBACK/ERROR)</a:t>
+            </a:r>
+          </a:p>
+        </p:txBody>
+      </p:sp>
+      <p:sp>
+        <p:nvSpPr>
+          <p:cNvPr id="19" name="Rectangle 18"/>
+          <p:cNvSpPr/>
+          <p:nvPr/>
+        </p:nvSpPr>
+        <p:spPr>
+          <a:xfrm>
+            <a:off x="320040" y="2907792"/>
+            <a:ext cx="320040" cy="347472"/>
+          </a:xfrm>
+          <a:prstGeom prst="rect">
+            <a:avLst/>
+          </a:prstGeom>
+          <a:solidFill>
+            <a:srgbClr val="74C7EC"/>
+          </a:solidFill>
+          <a:ln>
+            <a:noFill/>
+          </a:ln>
+        </p:spPr>
+        <p:style>
+          <a:lnRef idx="1">
+            <a:schemeClr val="accent1"/>
+          </a:lnRef>
+          <a:fillRef idx="3">
+            <a:schemeClr val="accent1"/>
+          </a:fillRef>
+          <a:effectRef idx="2">
+            <a:schemeClr val="accent1"/>
+          </a:effectRef>
+          <a:fontRef idx="minor">
+            <a:schemeClr val="lt1"/>
+          </a:fontRef>
+        </p:style>
+        <p:txBody>
+          <a:bodyPr rtlCol="0" anchor="ctr"/>
+          <a:lstStyle/>
+          <a:p>
+            <a:pPr algn="ctr"/>
+          </a:p>
+        </p:txBody>
+      </p:sp>
+      <p:sp>
+        <p:nvSpPr>
+          <p:cNvPr id="20" name="TextBox 19"/>
+          <p:cNvSpPr txBox="1"/>
+          <p:nvPr/>
+        </p:nvSpPr>
+        <p:spPr>
+          <a:xfrm>
+            <a:off x="320040" y="2898648"/>
+            <a:ext cx="320040" cy="347472"/>
+          </a:xfrm>
+          <a:prstGeom prst="rect">
+            <a:avLst/>
+          </a:prstGeom>
+          <a:noFill/>
+        </p:spPr>
+        <p:txBody>
+          <a:bodyPr wrap="none">
+            <a:spAutoFit/>
+          </a:bodyPr>
+          <a:lstStyle/>
+          <a:p>
+            <a:pPr algn="ctr"/>
+            <a:r>
+              <a:rPr b="1" sz="1200">
+                <a:solidFill>
+                  <a:srgbClr val="1E1E2E"/>
+                </a:solidFill>
+              </a:rPr>
+              <a:t>5</a:t>
+            </a:r>
+          </a:p>
+        </p:txBody>
+      </p:sp>
+      <p:sp>
+        <p:nvSpPr>
+          <p:cNvPr id="21" name="TextBox 20"/>
+          <p:cNvSpPr txBox="1"/>
+          <p:nvPr/>
+        </p:nvSpPr>
+        <p:spPr>
+          <a:xfrm>
+            <a:off x="731520" y="2862072"/>
+            <a:ext cx="1371600" cy="457200"/>
+          </a:xfrm>
+          <a:prstGeom prst="rect">
+            <a:avLst/>
+          </a:prstGeom>
+          <a:noFill/>
+        </p:spPr>
+        <p:txBody>
+          <a:bodyPr wrap="none">
+            <a:spAutoFit/>
+          </a:bodyPr>
+          <a:lstStyle/>
+          <a:p>
+            <a:r>
+              <a:rPr b="1" sz="1200">
+                <a:solidFill>
+                  <a:srgbClr val="F9E2AF"/>
+                </a:solidFill>
+              </a:rPr>
+              <a:t>agent.py</a:t>
+            </a:r>
+          </a:p>
+        </p:txBody>
+      </p:sp>
+      <p:sp>
+        <p:nvSpPr>
+          <p:cNvPr id="22" name="TextBox 21"/>
+          <p:cNvSpPr txBox="1"/>
+          <p:nvPr/>
+        </p:nvSpPr>
+        <p:spPr>
+          <a:xfrm>
+            <a:off x="2194560" y="2862072"/>
+            <a:ext cx="6400800" cy="457200"/>
+          </a:xfrm>
+          <a:prstGeom prst="rect">
+            <a:avLst/>
+          </a:prstGeom>
+          <a:noFill/>
+        </p:spPr>
+        <p:txBody>
+          <a:bodyPr wrap="none">
+            <a:spAutoFit/>
+          </a:bodyPr>
+          <a:lstStyle/>
+          <a:p>
+            <a:r>
+              <a:rPr sz="1200">
+                <a:solidFill>
+                  <a:srgbClr val="FFFFFF"/>
+                </a:solidFill>
+              </a:rPr>
+              <a:t>_direct_retrieve() now logs its fallback calls</a:t>
+            </a:r>
+          </a:p>
+        </p:txBody>
+      </p:sp>
+      <p:sp>
+        <p:nvSpPr>
+          <p:cNvPr id="23" name="Rectangle 22"/>
+          <p:cNvSpPr/>
+          <p:nvPr/>
+        </p:nvSpPr>
+        <p:spPr>
+          <a:xfrm>
+            <a:off x="320040" y="3383280"/>
+            <a:ext cx="320040" cy="347472"/>
+          </a:xfrm>
+          <a:prstGeom prst="rect">
+            <a:avLst/>
+          </a:prstGeom>
+          <a:solidFill>
+            <a:srgbClr val="74C7EC"/>
+          </a:solidFill>
+          <a:ln>
+            <a:noFill/>
+          </a:ln>
+        </p:spPr>
+        <p:style>
+          <a:lnRef idx="1">
+            <a:schemeClr val="accent1"/>
+          </a:lnRef>
+          <a:fillRef idx="3">
+            <a:schemeClr val="accent1"/>
+          </a:fillRef>
+          <a:effectRef idx="2">
+            <a:schemeClr val="accent1"/>
+          </a:effectRef>
+          <a:fontRef idx="minor">
+            <a:schemeClr val="lt1"/>
+          </a:fontRef>
+        </p:style>
+        <p:txBody>
+          <a:bodyPr rtlCol="0" anchor="ctr"/>
+          <a:lstStyle/>
+          <a:p>
+            <a:pPr algn="ctr"/>
+          </a:p>
+        </p:txBody>
+      </p:sp>
+      <p:sp>
+        <p:nvSpPr>
+          <p:cNvPr id="24" name="TextBox 23"/>
+          <p:cNvSpPr txBox="1"/>
+          <p:nvPr/>
+        </p:nvSpPr>
+        <p:spPr>
+          <a:xfrm>
+            <a:off x="320040" y="3374136"/>
+            <a:ext cx="320040" cy="347472"/>
+          </a:xfrm>
+          <a:prstGeom prst="rect">
+            <a:avLst/>
+          </a:prstGeom>
+          <a:noFill/>
+        </p:spPr>
+        <p:txBody>
+          <a:bodyPr wrap="none">
+            <a:spAutoFit/>
+          </a:bodyPr>
+          <a:lstStyle/>
+          <a:p>
+            <a:pPr algn="ctr"/>
+            <a:r>
+              <a:rPr b="1" sz="1200">
+                <a:solidFill>
+                  <a:srgbClr val="1E1E2E"/>
+                </a:solidFill>
+              </a:rPr>
+              <a:t>6</a:t>
+            </a:r>
+          </a:p>
+        </p:txBody>
+      </p:sp>
+      <p:sp>
+        <p:nvSpPr>
+          <p:cNvPr id="25" name="TextBox 24"/>
+          <p:cNvSpPr txBox="1"/>
+          <p:nvPr/>
+        </p:nvSpPr>
+        <p:spPr>
+          <a:xfrm>
+            <a:off x="731520" y="3337560"/>
+            <a:ext cx="1371600" cy="457200"/>
+          </a:xfrm>
+          <a:prstGeom prst="rect">
+            <a:avLst/>
+          </a:prstGeom>
+          <a:noFill/>
+        </p:spPr>
+        <p:txBody>
+          <a:bodyPr wrap="none">
+            <a:spAutoFit/>
+          </a:bodyPr>
+          <a:lstStyle/>
+          <a:p>
+            <a:r>
+              <a:rPr b="1" sz="1200">
+                <a:solidFill>
+                  <a:srgbClr val="F9E2AF"/>
+                </a:solidFill>
+              </a:rPr>
+              <a:t>assistant.py</a:t>
+            </a:r>
+          </a:p>
+        </p:txBody>
+      </p:sp>
+      <p:sp>
+        <p:nvSpPr>
+          <p:cNvPr id="26" name="TextBox 25"/>
+          <p:cNvSpPr txBox="1"/>
+          <p:nvPr/>
+        </p:nvSpPr>
+        <p:spPr>
+          <a:xfrm>
+            <a:off x="2194560" y="3337560"/>
+            <a:ext cx="6400800" cy="457200"/>
+          </a:xfrm>
+          <a:prstGeom prst="rect">
+            <a:avLst/>
+          </a:prstGeom>
+          <a:noFill/>
+        </p:spPr>
+        <p:txBody>
+          <a:bodyPr wrap="none">
+            <a:spAutoFit/>
+          </a:bodyPr>
+          <a:lstStyle/>
+          <a:p>
+            <a:r>
+              <a:rPr sz="1200">
+                <a:solidFill>
+                  <a:srgbClr val="FFFFFF"/>
+                </a:solidFill>
+              </a:rPr>
+              <a:t>Full conversation history saved to sessions/&lt;uuid&gt;.json</a:t>
+            </a:r>
+          </a:p>
+        </p:txBody>
+      </p:sp>
+      <p:sp>
+        <p:nvSpPr>
+          <p:cNvPr id="27" name="Rectangle 26"/>
+          <p:cNvSpPr/>
+          <p:nvPr/>
+        </p:nvSpPr>
+        <p:spPr>
+          <a:xfrm>
+            <a:off x="320040" y="3858768"/>
+            <a:ext cx="320040" cy="347472"/>
+          </a:xfrm>
+          <a:prstGeom prst="rect">
+            <a:avLst/>
+          </a:prstGeom>
+          <a:solidFill>
+            <a:srgbClr val="74C7EC"/>
+          </a:solidFill>
+          <a:ln>
+            <a:noFill/>
+          </a:ln>
+        </p:spPr>
+        <p:style>
+          <a:lnRef idx="1">
+            <a:schemeClr val="accent1"/>
+          </a:lnRef>
+          <a:fillRef idx="3">
+            <a:schemeClr val="accent1"/>
+          </a:fillRef>
+          <a:effectRef idx="2">
+            <a:schemeClr val="accent1"/>
+          </a:effectRef>
+          <a:fontRef idx="minor">
+            <a:schemeClr val="lt1"/>
+          </a:fontRef>
+        </p:style>
+        <p:txBody>
+          <a:bodyPr rtlCol="0" anchor="ctr"/>
+          <a:lstStyle/>
+          <a:p>
+            <a:pPr algn="ctr"/>
+          </a:p>
+        </p:txBody>
+      </p:sp>
+      <p:sp>
+        <p:nvSpPr>
+          <p:cNvPr id="28" name="TextBox 27"/>
+          <p:cNvSpPr txBox="1"/>
+          <p:nvPr/>
+        </p:nvSpPr>
+        <p:spPr>
+          <a:xfrm>
+            <a:off x="320040" y="3849624"/>
+            <a:ext cx="320040" cy="347472"/>
+          </a:xfrm>
+          <a:prstGeom prst="rect">
+            <a:avLst/>
+          </a:prstGeom>
+          <a:noFill/>
+        </p:spPr>
+        <p:txBody>
+          <a:bodyPr wrap="none">
+            <a:spAutoFit/>
+          </a:bodyPr>
+          <a:lstStyle/>
+          <a:p>
+            <a:pPr algn="ctr"/>
+            <a:r>
+              <a:rPr b="1" sz="1200">
+                <a:solidFill>
+                  <a:srgbClr val="1E1E2E"/>
+                </a:solidFill>
+              </a:rPr>
+              <a:t>7</a:t>
+            </a:r>
+          </a:p>
+        </p:txBody>
+      </p:sp>
+      <p:sp>
+        <p:nvSpPr>
+          <p:cNvPr id="29" name="TextBox 28"/>
+          <p:cNvSpPr txBox="1"/>
+          <p:nvPr/>
+        </p:nvSpPr>
+        <p:spPr>
+          <a:xfrm>
+            <a:off x="731520" y="3813048"/>
+            <a:ext cx="1371600" cy="457200"/>
+          </a:xfrm>
+          <a:prstGeom prst="rect">
+            <a:avLst/>
+          </a:prstGeom>
+          <a:noFill/>
+        </p:spPr>
+        <p:txBody>
+          <a:bodyPr wrap="none">
+            <a:spAutoFit/>
+          </a:bodyPr>
+          <a:lstStyle/>
+          <a:p>
+            <a:r>
+              <a:rPr b="1" sz="1200">
+                <a:solidFill>
+                  <a:srgbClr val="F9E2AF"/>
+                </a:solidFill>
+              </a:rPr>
+              <a:t>prompts.py</a:t>
+            </a:r>
+          </a:p>
+        </p:txBody>
+      </p:sp>
+      <p:sp>
+        <p:nvSpPr>
+          <p:cNvPr id="30" name="TextBox 29"/>
+          <p:cNvSpPr txBox="1"/>
+          <p:nvPr/>
+        </p:nvSpPr>
+        <p:spPr>
+          <a:xfrm>
+            <a:off x="2194560" y="3813048"/>
+            <a:ext cx="6400800" cy="457200"/>
+          </a:xfrm>
+          <a:prstGeom prst="rect">
+            <a:avLst/>
+          </a:prstGeom>
+          <a:noFill/>
+        </p:spPr>
+        <p:txBody>
+          <a:bodyPr wrap="none">
+            <a:spAutoFit/>
+          </a:bodyPr>
+          <a:lstStyle/>
+          <a:p>
+            <a:r>
+              <a:rPr sz="1200">
+                <a:solidFill>
+                  <a:srgbClr val="FFFFFF"/>
+                </a:solidFill>
+              </a:rPr>
+              <a:t>MessagesPlaceholder added to all ChatPromptTemplates</a:t>
+            </a:r>
+          </a:p>
+        </p:txBody>
+      </p:sp>
+      <p:sp>
+        <p:nvSpPr>
+          <p:cNvPr id="31" name="Rectangle 30"/>
+          <p:cNvSpPr/>
+          <p:nvPr/>
+        </p:nvSpPr>
+        <p:spPr>
+          <a:xfrm>
+            <a:off x="320040" y="4334256"/>
+            <a:ext cx="320040" cy="347472"/>
+          </a:xfrm>
+          <a:prstGeom prst="rect">
+            <a:avLst/>
+          </a:prstGeom>
+          <a:solidFill>
+            <a:srgbClr val="74C7EC"/>
+          </a:solidFill>
+          <a:ln>
+            <a:noFill/>
+          </a:ln>
+        </p:spPr>
+        <p:style>
+          <a:lnRef idx="1">
+            <a:schemeClr val="accent1"/>
+          </a:lnRef>
+          <a:fillRef idx="3">
+            <a:schemeClr val="accent1"/>
+          </a:fillRef>
+          <a:effectRef idx="2">
+            <a:schemeClr val="accent1"/>
+          </a:effectRef>
+          <a:fontRef idx="minor">
+            <a:schemeClr val="lt1"/>
+          </a:fontRef>
+        </p:style>
+        <p:txBody>
+          <a:bodyPr rtlCol="0" anchor="ctr"/>
+          <a:lstStyle/>
+          <a:p>
+            <a:pPr algn="ctr"/>
+          </a:p>
+        </p:txBody>
+      </p:sp>
+      <p:sp>
+        <p:nvSpPr>
+          <p:cNvPr id="32" name="TextBox 31"/>
+          <p:cNvSpPr txBox="1"/>
+          <p:nvPr/>
+        </p:nvSpPr>
+        <p:spPr>
+          <a:xfrm>
+            <a:off x="320040" y="4325112"/>
+            <a:ext cx="320040" cy="347472"/>
+          </a:xfrm>
+          <a:prstGeom prst="rect">
+            <a:avLst/>
+          </a:prstGeom>
+          <a:noFill/>
+        </p:spPr>
+        <p:txBody>
+          <a:bodyPr wrap="none">
+            <a:spAutoFit/>
+          </a:bodyPr>
+          <a:lstStyle/>
+          <a:p>
+            <a:pPr algn="ctr"/>
+            <a:r>
+              <a:rPr b="1" sz="1200">
+                <a:solidFill>
+                  <a:srgbClr val="1E1E2E"/>
+                </a:solidFill>
+              </a:rPr>
+              <a:t>8</a:t>
+            </a:r>
+          </a:p>
+        </p:txBody>
+      </p:sp>
+      <p:sp>
+        <p:nvSpPr>
+          <p:cNvPr id="33" name="TextBox 32"/>
+          <p:cNvSpPr txBox="1"/>
+          <p:nvPr/>
+        </p:nvSpPr>
+        <p:spPr>
+          <a:xfrm>
+            <a:off x="731520" y="4288536"/>
+            <a:ext cx="1371600" cy="457200"/>
+          </a:xfrm>
+          <a:prstGeom prst="rect">
+            <a:avLst/>
+          </a:prstGeom>
+          <a:noFill/>
+        </p:spPr>
+        <p:txBody>
+          <a:bodyPr wrap="none">
+            <a:spAutoFit/>
+          </a:bodyPr>
+          <a:lstStyle/>
+          <a:p>
+            <a:r>
+              <a:rPr b="1" sz="1200">
+                <a:solidFill>
+                  <a:srgbClr val="F9E2AF"/>
+                </a:solidFill>
+              </a:rPr>
+              <a:t>prompts.py</a:t>
+            </a:r>
+          </a:p>
+        </p:txBody>
+      </p:sp>
+      <p:sp>
+        <p:nvSpPr>
+          <p:cNvPr id="34" name="TextBox 33"/>
+          <p:cNvSpPr txBox="1"/>
+          <p:nvPr/>
+        </p:nvSpPr>
+        <p:spPr>
+          <a:xfrm>
+            <a:off x="2194560" y="4288536"/>
+            <a:ext cx="6400800" cy="457200"/>
+          </a:xfrm>
+          <a:prstGeom prst="rect">
+            <a:avLst/>
+          </a:prstGeom>
+          <a:noFill/>
+        </p:spPr>
+        <p:txBody>
+          <a:bodyPr wrap="none">
+            <a:spAutoFit/>
+          </a:bodyPr>
+          <a:lstStyle/>
+          <a:p>
+            <a:r>
+              <a:rPr sz="1200">
+                <a:solidFill>
+                  <a:srgbClr val="FFFFFF"/>
+                </a:solidFill>
+              </a:rPr>
+              <a:t>Intent prompt: 3 examples/category, confidence guide, tie-breaking</a:t>
+            </a:r>
+          </a:p>
+        </p:txBody>
+      </p:sp>
+    </p:spTree>
+  </p:cSld>
+  <p:clrMapOvr>
+    <a:masterClrMapping/>
+  </p:clrMapOvr>
+</p:sld>
+</file>
+
 <file path=ppt/slides/slide3.xml><?xml version="1.0" encoding="utf-8"?>
 <p:sld xmlns:a="http://schemas.openxmlformats.org/drawingml/2006/main" xmlns:r="http://schemas.openxmlformats.org/officeDocument/2006/relationships" xmlns:p="http://schemas.openxmlformats.org/presentationml/2006/main">
   <p:cSld name="Slide 3">

--- a/Document_Assistant.pptx
+++ b/Document_Assistant.pptx
@@ -33,6 +33,12 @@
     <p:sldId id="281" r:id="rId32"/>
     <p:sldId id="282" r:id="rId33"/>
     <p:sldId id="283" r:id="rId34"/>
+    <p:sldId id="284" r:id="rId35"/>
+    <p:sldId id="285" r:id="rId36"/>
+    <p:sldId id="286" r:id="rId37"/>
+    <p:sldId id="287" r:id="rId38"/>
+    <p:sldId id="288" r:id="rId39"/>
+    <p:sldId id="289" r:id="rId40"/>
   </p:sldIdLst>
   <p:notesMasterIdLst>
     <p:notesMasterId r:id="rId22"/>
@@ -21428,6 +21434,1951 @@
 </p:sld>
 </file>
 
+<file path=ppt/slides/slide29.xml><?xml version="1.0" encoding="utf-8"?>
+<p:sld xmlns:a="http://schemas.openxmlformats.org/drawingml/2006/main" xmlns:p="http://schemas.openxmlformats.org/presentationml/2006/main" xmlns:r="http://schemas.openxmlformats.org/officeDocument/2006/relationships">
+  <p:cSld>
+    <p:bg>
+      <p:bgPr>
+        <a:solidFill>
+          <a:srgbClr val="1E1E2E"/>
+        </a:solidFill>
+        <a:effectLst/>
+      </p:bgPr>
+    </p:bg>
+    <p:spTree>
+      <p:nvGrpSpPr>
+        <p:cNvPr id="1" name=""/>
+        <p:cNvGrpSpPr/>
+        <p:nvPr/>
+      </p:nvGrpSpPr>
+      <p:grpSpPr/>
+      <p:sp>
+        <p:nvSpPr>
+          <p:cNvPr id="2" name="TextBox 1"/>
+          <p:cNvSpPr txBox="1"/>
+          <p:nvPr/>
+        </p:nvSpPr>
+        <p:spPr>
+          <a:xfrm>
+            <a:off x="365760" y="164592"/>
+            <a:ext cx="8412480" cy="594360"/>
+          </a:xfrm>
+          <a:prstGeom prst="rect">
+            <a:avLst/>
+          </a:prstGeom>
+          <a:noFill/>
+        </p:spPr>
+        <p:txBody>
+          <a:bodyPr wrap="none">
+            <a:spAutoFit/>
+          </a:bodyPr>
+          <a:lstStyle/>
+          <a:p>
+            <a:pPr algn="l"/>
+            <a:r>
+              <a:rPr b="1" sz="2200">
+                <a:solidFill>
+                  <a:srgbClr val="74C7EC"/>
+                </a:solidFill>
+              </a:rPr>
+              <a:t>AgentState — Full Field Listing (agent.py)</a:t>
+            </a:r>
+          </a:p>
+        </p:txBody>
+      </p:sp>
+      <p:sp>
+        <p:nvSpPr>
+          <p:cNvPr id="3" name="Rectangle 2"/>
+          <p:cNvSpPr/>
+          <p:nvPr/>
+        </p:nvSpPr>
+        <p:spPr>
+          <a:xfrm>
+            <a:off x="365760" y="804672"/>
+            <a:ext cx="8412480" cy="27432"/>
+          </a:xfrm>
+          <a:prstGeom prst="rect">
+            <a:avLst/>
+          </a:prstGeom>
+          <a:solidFill>
+            <a:srgbClr val="74C7EC"/>
+          </a:solidFill>
+          <a:ln>
+            <a:noFill/>
+          </a:ln>
+        </p:spPr>
+        <p:style>
+          <a:lnRef idx="1">
+            <a:schemeClr val="accent1"/>
+          </a:lnRef>
+          <a:fillRef idx="3">
+            <a:schemeClr val="accent1"/>
+          </a:fillRef>
+          <a:effectRef idx="2">
+            <a:schemeClr val="accent1"/>
+          </a:effectRef>
+          <a:fontRef idx="minor">
+            <a:schemeClr val="lt1"/>
+          </a:fontRef>
+        </p:style>
+        <p:txBody>
+          <a:bodyPr rtlCol="0" anchor="ctr"/>
+          <a:lstStyle/>
+          <a:p>
+            <a:pPr algn="ctr"/>
+          </a:p>
+        </p:txBody>
+      </p:sp>
+      <p:sp>
+        <p:nvSpPr>
+          <p:cNvPr id="4" name="TextBox 3"/>
+          <p:cNvSpPr txBox="1"/>
+          <p:nvPr/>
+        </p:nvSpPr>
+        <p:spPr>
+          <a:xfrm>
+            <a:off x="320040" y="868680"/>
+            <a:ext cx="1554480" cy="292608"/>
+          </a:xfrm>
+          <a:prstGeom prst="rect">
+            <a:avLst/>
+          </a:prstGeom>
+          <a:noFill/>
+        </p:spPr>
+        <p:txBody>
+          <a:bodyPr wrap="none">
+            <a:spAutoFit/>
+          </a:bodyPr>
+          <a:lstStyle/>
+          <a:p>
+            <a:r>
+              <a:rPr b="1" sz="1100">
+                <a:solidFill>
+                  <a:srgbClr val="74C7EC"/>
+                </a:solidFill>
+              </a:rPr>
+              <a:t>Field</a:t>
+            </a:r>
+          </a:p>
+        </p:txBody>
+      </p:sp>
+      <p:sp>
+        <p:nvSpPr>
+          <p:cNvPr id="5" name="TextBox 4"/>
+          <p:cNvSpPr txBox="1"/>
+          <p:nvPr/>
+        </p:nvSpPr>
+        <p:spPr>
+          <a:xfrm>
+            <a:off x="1920240" y="868680"/>
+            <a:ext cx="1188720" cy="292608"/>
+          </a:xfrm>
+          <a:prstGeom prst="rect">
+            <a:avLst/>
+          </a:prstGeom>
+          <a:noFill/>
+        </p:spPr>
+        <p:txBody>
+          <a:bodyPr wrap="none">
+            <a:spAutoFit/>
+          </a:bodyPr>
+          <a:lstStyle/>
+          <a:p>
+            <a:r>
+              <a:rPr b="1" sz="1100">
+                <a:solidFill>
+                  <a:srgbClr val="74C7EC"/>
+                </a:solidFill>
+              </a:rPr>
+              <a:t>Type</a:t>
+            </a:r>
+          </a:p>
+        </p:txBody>
+      </p:sp>
+      <p:sp>
+        <p:nvSpPr>
+          <p:cNvPr id="6" name="TextBox 5"/>
+          <p:cNvSpPr txBox="1"/>
+          <p:nvPr/>
+        </p:nvSpPr>
+        <p:spPr>
+          <a:xfrm>
+            <a:off x="3154680" y="868680"/>
+            <a:ext cx="2560320" cy="292608"/>
+          </a:xfrm>
+          <a:prstGeom prst="rect">
+            <a:avLst/>
+          </a:prstGeom>
+          <a:noFill/>
+        </p:spPr>
+        <p:txBody>
+          <a:bodyPr wrap="none">
+            <a:spAutoFit/>
+          </a:bodyPr>
+          <a:lstStyle/>
+          <a:p>
+            <a:r>
+              <a:rPr b="1" sz="1100">
+                <a:solidFill>
+                  <a:srgbClr val="74C7EC"/>
+                </a:solidFill>
+              </a:rPr>
+              <a:t>Reducer</a:t>
+            </a:r>
+          </a:p>
+        </p:txBody>
+      </p:sp>
+      <p:sp>
+        <p:nvSpPr>
+          <p:cNvPr id="7" name="TextBox 6"/>
+          <p:cNvSpPr txBox="1"/>
+          <p:nvPr/>
+        </p:nvSpPr>
+        <p:spPr>
+          <a:xfrm>
+            <a:off x="5760720" y="868680"/>
+            <a:ext cx="2926080" cy="292608"/>
+          </a:xfrm>
+          <a:prstGeom prst="rect">
+            <a:avLst/>
+          </a:prstGeom>
+          <a:noFill/>
+        </p:spPr>
+        <p:txBody>
+          <a:bodyPr wrap="none">
+            <a:spAutoFit/>
+          </a:bodyPr>
+          <a:lstStyle/>
+          <a:p>
+            <a:r>
+              <a:rPr b="1" sz="1100">
+                <a:solidFill>
+                  <a:srgbClr val="74C7EC"/>
+                </a:solidFill>
+              </a:rPr>
+              <a:t>Purpose</a:t>
+            </a:r>
+          </a:p>
+        </p:txBody>
+      </p:sp>
+      <p:sp>
+        <p:nvSpPr>
+          <p:cNvPr id="8" name="Rectangle 7"/>
+          <p:cNvSpPr/>
+          <p:nvPr/>
+        </p:nvSpPr>
+        <p:spPr>
+          <a:xfrm>
+            <a:off x="274320" y="1207008"/>
+            <a:ext cx="8595360" cy="365760"/>
+          </a:xfrm>
+          <a:prstGeom prst="rect">
+            <a:avLst/>
+          </a:prstGeom>
+          <a:solidFill>
+            <a:srgbClr val="282840"/>
+          </a:solidFill>
+          <a:ln>
+            <a:noFill/>
+          </a:ln>
+        </p:spPr>
+        <p:style>
+          <a:lnRef idx="1">
+            <a:schemeClr val="accent1"/>
+          </a:lnRef>
+          <a:fillRef idx="3">
+            <a:schemeClr val="accent1"/>
+          </a:fillRef>
+          <a:effectRef idx="2">
+            <a:schemeClr val="accent1"/>
+          </a:effectRef>
+          <a:fontRef idx="minor">
+            <a:schemeClr val="lt1"/>
+          </a:fontRef>
+        </p:style>
+        <p:txBody>
+          <a:bodyPr rtlCol="0" anchor="ctr"/>
+          <a:lstStyle/>
+          <a:p>
+            <a:pPr algn="ctr"/>
+          </a:p>
+        </p:txBody>
+      </p:sp>
+      <p:sp>
+        <p:nvSpPr>
+          <p:cNvPr id="9" name="TextBox 8"/>
+          <p:cNvSpPr txBox="1"/>
+          <p:nvPr/>
+        </p:nvSpPr>
+        <p:spPr>
+          <a:xfrm>
+            <a:off x="320040" y="1252728"/>
+            <a:ext cx="1554480" cy="320040"/>
+          </a:xfrm>
+          <a:prstGeom prst="rect">
+            <a:avLst/>
+          </a:prstGeom>
+          <a:noFill/>
+        </p:spPr>
+        <p:txBody>
+          <a:bodyPr wrap="square">
+            <a:spAutoFit/>
+          </a:bodyPr>
+          <a:lstStyle/>
+          <a:p>
+            <a:r>
+              <a:rPr sz="1100" b="1">
+                <a:solidFill>
+                  <a:srgbClr val="F9E2AF"/>
+                </a:solidFill>
+              </a:rPr>
+              <a:t>user_input</a:t>
+            </a:r>
+          </a:p>
+        </p:txBody>
+      </p:sp>
+      <p:sp>
+        <p:nvSpPr>
+          <p:cNvPr id="10" name="TextBox 9"/>
+          <p:cNvSpPr txBox="1"/>
+          <p:nvPr/>
+        </p:nvSpPr>
+        <p:spPr>
+          <a:xfrm>
+            <a:off x="1920240" y="1252728"/>
+            <a:ext cx="1188720" cy="320040"/>
+          </a:xfrm>
+          <a:prstGeom prst="rect">
+            <a:avLst/>
+          </a:prstGeom>
+          <a:noFill/>
+        </p:spPr>
+        <p:txBody>
+          <a:bodyPr wrap="square">
+            <a:spAutoFit/>
+          </a:bodyPr>
+          <a:lstStyle/>
+          <a:p>
+            <a:r>
+              <a:rPr sz="1100" b="0">
+                <a:solidFill>
+                  <a:srgbClr val="FAB387"/>
+                </a:solidFill>
+              </a:rPr>
+              <a:t>str</a:t>
+            </a:r>
+          </a:p>
+        </p:txBody>
+      </p:sp>
+      <p:sp>
+        <p:nvSpPr>
+          <p:cNvPr id="11" name="TextBox 10"/>
+          <p:cNvSpPr txBox="1"/>
+          <p:nvPr/>
+        </p:nvSpPr>
+        <p:spPr>
+          <a:xfrm>
+            <a:off x="3154680" y="1252728"/>
+            <a:ext cx="2560320" cy="320040"/>
+          </a:xfrm>
+          <a:prstGeom prst="rect">
+            <a:avLst/>
+          </a:prstGeom>
+          <a:noFill/>
+        </p:spPr>
+        <p:txBody>
+          <a:bodyPr wrap="square">
+            <a:spAutoFit/>
+          </a:bodyPr>
+          <a:lstStyle/>
+          <a:p>
+            <a:r>
+              <a:rPr sz="1100" b="0">
+                <a:solidFill>
+                  <a:srgbClr val="A6E3A1"/>
+                </a:solidFill>
+              </a:rPr>
+              <a:t>—</a:t>
+            </a:r>
+          </a:p>
+        </p:txBody>
+      </p:sp>
+      <p:sp>
+        <p:nvSpPr>
+          <p:cNvPr id="12" name="TextBox 11"/>
+          <p:cNvSpPr txBox="1"/>
+          <p:nvPr/>
+        </p:nvSpPr>
+        <p:spPr>
+          <a:xfrm>
+            <a:off x="5760720" y="1252728"/>
+            <a:ext cx="2926080" cy="320040"/>
+          </a:xfrm>
+          <a:prstGeom prst="rect">
+            <a:avLst/>
+          </a:prstGeom>
+          <a:noFill/>
+        </p:spPr>
+        <p:txBody>
+          <a:bodyPr wrap="square">
+            <a:spAutoFit/>
+          </a:bodyPr>
+          <a:lstStyle/>
+          <a:p>
+            <a:r>
+              <a:rPr sz="1100" b="0">
+                <a:solidFill>
+                  <a:srgbClr val="FFFFFF"/>
+                </a:solidFill>
+              </a:rPr>
+              <a:t>Current user message text</a:t>
+            </a:r>
+          </a:p>
+        </p:txBody>
+      </p:sp>
+      <p:sp>
+        <p:nvSpPr>
+          <p:cNvPr id="13" name="TextBox 12"/>
+          <p:cNvSpPr txBox="1"/>
+          <p:nvPr/>
+        </p:nvSpPr>
+        <p:spPr>
+          <a:xfrm>
+            <a:off x="320040" y="1645920"/>
+            <a:ext cx="1554480" cy="320040"/>
+          </a:xfrm>
+          <a:prstGeom prst="rect">
+            <a:avLst/>
+          </a:prstGeom>
+          <a:noFill/>
+        </p:spPr>
+        <p:txBody>
+          <a:bodyPr wrap="square">
+            <a:spAutoFit/>
+          </a:bodyPr>
+          <a:lstStyle/>
+          <a:p>
+            <a:r>
+              <a:rPr sz="1100" b="1">
+                <a:solidFill>
+                  <a:srgbClr val="F9E2AF"/>
+                </a:solidFill>
+              </a:rPr>
+              <a:t>messages</a:t>
+            </a:r>
+          </a:p>
+        </p:txBody>
+      </p:sp>
+      <p:sp>
+        <p:nvSpPr>
+          <p:cNvPr id="14" name="TextBox 13"/>
+          <p:cNvSpPr txBox="1"/>
+          <p:nvPr/>
+        </p:nvSpPr>
+        <p:spPr>
+          <a:xfrm>
+            <a:off x="1920240" y="1645920"/>
+            <a:ext cx="1188720" cy="320040"/>
+          </a:xfrm>
+          <a:prstGeom prst="rect">
+            <a:avLst/>
+          </a:prstGeom>
+          <a:noFill/>
+        </p:spPr>
+        <p:txBody>
+          <a:bodyPr wrap="square">
+            <a:spAutoFit/>
+          </a:bodyPr>
+          <a:lstStyle/>
+          <a:p>
+            <a:r>
+              <a:rPr sz="1100" b="0">
+                <a:solidFill>
+                  <a:srgbClr val="FAB387"/>
+                </a:solidFill>
+              </a:rPr>
+              <a:t>List[BaseMessage]</a:t>
+            </a:r>
+          </a:p>
+        </p:txBody>
+      </p:sp>
+      <p:sp>
+        <p:nvSpPr>
+          <p:cNvPr id="15" name="TextBox 14"/>
+          <p:cNvSpPr txBox="1"/>
+          <p:nvPr/>
+        </p:nvSpPr>
+        <p:spPr>
+          <a:xfrm>
+            <a:off x="3154680" y="1645920"/>
+            <a:ext cx="2560320" cy="320040"/>
+          </a:xfrm>
+          <a:prstGeom prst="rect">
+            <a:avLst/>
+          </a:prstGeom>
+          <a:noFill/>
+        </p:spPr>
+        <p:txBody>
+          <a:bodyPr wrap="square">
+            <a:spAutoFit/>
+          </a:bodyPr>
+          <a:lstStyle/>
+          <a:p>
+            <a:r>
+              <a:rPr sz="1100" b="0">
+                <a:solidFill>
+                  <a:srgbClr val="A6E3A1"/>
+                </a:solidFill>
+              </a:rPr>
+              <a:t>add_messages</a:t>
+            </a:r>
+          </a:p>
+        </p:txBody>
+      </p:sp>
+      <p:sp>
+        <p:nvSpPr>
+          <p:cNvPr id="16" name="TextBox 15"/>
+          <p:cNvSpPr txBox="1"/>
+          <p:nvPr/>
+        </p:nvSpPr>
+        <p:spPr>
+          <a:xfrm>
+            <a:off x="5760720" y="1645920"/>
+            <a:ext cx="2926080" cy="320040"/>
+          </a:xfrm>
+          <a:prstGeom prst="rect">
+            <a:avLst/>
+          </a:prstGeom>
+          <a:noFill/>
+        </p:spPr>
+        <p:txBody>
+          <a:bodyPr wrap="square">
+            <a:spAutoFit/>
+          </a:bodyPr>
+          <a:lstStyle/>
+          <a:p>
+            <a:r>
+              <a:rPr sz="1100" b="0">
+                <a:solidFill>
+                  <a:srgbClr val="FFFFFF"/>
+                </a:solidFill>
+              </a:rPr>
+              <a:t>Full conversation history (append-only)</a:t>
+            </a:r>
+          </a:p>
+        </p:txBody>
+      </p:sp>
+      <p:sp>
+        <p:nvSpPr>
+          <p:cNvPr id="17" name="Rectangle 16"/>
+          <p:cNvSpPr/>
+          <p:nvPr/>
+        </p:nvSpPr>
+        <p:spPr>
+          <a:xfrm>
+            <a:off x="274320" y="1993392"/>
+            <a:ext cx="8595360" cy="365760"/>
+          </a:xfrm>
+          <a:prstGeom prst="rect">
+            <a:avLst/>
+          </a:prstGeom>
+          <a:solidFill>
+            <a:srgbClr val="282840"/>
+          </a:solidFill>
+          <a:ln>
+            <a:noFill/>
+          </a:ln>
+        </p:spPr>
+        <p:style>
+          <a:lnRef idx="1">
+            <a:schemeClr val="accent1"/>
+          </a:lnRef>
+          <a:fillRef idx="3">
+            <a:schemeClr val="accent1"/>
+          </a:fillRef>
+          <a:effectRef idx="2">
+            <a:schemeClr val="accent1"/>
+          </a:effectRef>
+          <a:fontRef idx="minor">
+            <a:schemeClr val="lt1"/>
+          </a:fontRef>
+        </p:style>
+        <p:txBody>
+          <a:bodyPr rtlCol="0" anchor="ctr"/>
+          <a:lstStyle/>
+          <a:p>
+            <a:pPr algn="ctr"/>
+          </a:p>
+        </p:txBody>
+      </p:sp>
+      <p:sp>
+        <p:nvSpPr>
+          <p:cNvPr id="18" name="TextBox 17"/>
+          <p:cNvSpPr txBox="1"/>
+          <p:nvPr/>
+        </p:nvSpPr>
+        <p:spPr>
+          <a:xfrm>
+            <a:off x="320040" y="2039112"/>
+            <a:ext cx="1554480" cy="320040"/>
+          </a:xfrm>
+          <a:prstGeom prst="rect">
+            <a:avLst/>
+          </a:prstGeom>
+          <a:noFill/>
+        </p:spPr>
+        <p:txBody>
+          <a:bodyPr wrap="square">
+            <a:spAutoFit/>
+          </a:bodyPr>
+          <a:lstStyle/>
+          <a:p>
+            <a:r>
+              <a:rPr sz="1100" b="1">
+                <a:solidFill>
+                  <a:srgbClr val="F9E2AF"/>
+                </a:solidFill>
+              </a:rPr>
+              <a:t>intent</a:t>
+            </a:r>
+          </a:p>
+        </p:txBody>
+      </p:sp>
+      <p:sp>
+        <p:nvSpPr>
+          <p:cNvPr id="19" name="TextBox 18"/>
+          <p:cNvSpPr txBox="1"/>
+          <p:nvPr/>
+        </p:nvSpPr>
+        <p:spPr>
+          <a:xfrm>
+            <a:off x="1920240" y="2039112"/>
+            <a:ext cx="1188720" cy="320040"/>
+          </a:xfrm>
+          <a:prstGeom prst="rect">
+            <a:avLst/>
+          </a:prstGeom>
+          <a:noFill/>
+        </p:spPr>
+        <p:txBody>
+          <a:bodyPr wrap="square">
+            <a:spAutoFit/>
+          </a:bodyPr>
+          <a:lstStyle/>
+          <a:p>
+            <a:r>
+              <a:rPr sz="1100" b="0">
+                <a:solidFill>
+                  <a:srgbClr val="FAB387"/>
+                </a:solidFill>
+              </a:rPr>
+              <a:t>UserIntent | None</a:t>
+            </a:r>
+          </a:p>
+        </p:txBody>
+      </p:sp>
+      <p:sp>
+        <p:nvSpPr>
+          <p:cNvPr id="20" name="TextBox 19"/>
+          <p:cNvSpPr txBox="1"/>
+          <p:nvPr/>
+        </p:nvSpPr>
+        <p:spPr>
+          <a:xfrm>
+            <a:off x="3154680" y="2039112"/>
+            <a:ext cx="2560320" cy="320040"/>
+          </a:xfrm>
+          <a:prstGeom prst="rect">
+            <a:avLst/>
+          </a:prstGeom>
+          <a:noFill/>
+        </p:spPr>
+        <p:txBody>
+          <a:bodyPr wrap="square">
+            <a:spAutoFit/>
+          </a:bodyPr>
+          <a:lstStyle/>
+          <a:p>
+            <a:r>
+              <a:rPr sz="1100" b="0">
+                <a:solidFill>
+                  <a:srgbClr val="A6E3A1"/>
+                </a:solidFill>
+              </a:rPr>
+              <a:t>—</a:t>
+            </a:r>
+          </a:p>
+        </p:txBody>
+      </p:sp>
+      <p:sp>
+        <p:nvSpPr>
+          <p:cNvPr id="21" name="TextBox 20"/>
+          <p:cNvSpPr txBox="1"/>
+          <p:nvPr/>
+        </p:nvSpPr>
+        <p:spPr>
+          <a:xfrm>
+            <a:off x="5760720" y="2039112"/>
+            <a:ext cx="2926080" cy="320040"/>
+          </a:xfrm>
+          <a:prstGeom prst="rect">
+            <a:avLst/>
+          </a:prstGeom>
+          <a:noFill/>
+        </p:spPr>
+        <p:txBody>
+          <a:bodyPr wrap="square">
+            <a:spAutoFit/>
+          </a:bodyPr>
+          <a:lstStyle/>
+          <a:p>
+            <a:r>
+              <a:rPr sz="1100" b="0">
+                <a:solidFill>
+                  <a:srgbClr val="FFFFFF"/>
+                </a:solidFill>
+              </a:rPr>
+              <a:t>Classified intent from classify_intent node</a:t>
+            </a:r>
+          </a:p>
+        </p:txBody>
+      </p:sp>
+      <p:sp>
+        <p:nvSpPr>
+          <p:cNvPr id="22" name="TextBox 21"/>
+          <p:cNvSpPr txBox="1"/>
+          <p:nvPr/>
+        </p:nvSpPr>
+        <p:spPr>
+          <a:xfrm>
+            <a:off x="320040" y="2432304"/>
+            <a:ext cx="1554480" cy="320040"/>
+          </a:xfrm>
+          <a:prstGeom prst="rect">
+            <a:avLst/>
+          </a:prstGeom>
+          <a:noFill/>
+        </p:spPr>
+        <p:txBody>
+          <a:bodyPr wrap="square">
+            <a:spAutoFit/>
+          </a:bodyPr>
+          <a:lstStyle/>
+          <a:p>
+            <a:r>
+              <a:rPr sz="1100" b="1">
+                <a:solidFill>
+                  <a:srgbClr val="F9E2AF"/>
+                </a:solidFill>
+              </a:rPr>
+              <a:t>next_step</a:t>
+            </a:r>
+          </a:p>
+        </p:txBody>
+      </p:sp>
+      <p:sp>
+        <p:nvSpPr>
+          <p:cNvPr id="23" name="TextBox 22"/>
+          <p:cNvSpPr txBox="1"/>
+          <p:nvPr/>
+        </p:nvSpPr>
+        <p:spPr>
+          <a:xfrm>
+            <a:off x="1920240" y="2432304"/>
+            <a:ext cx="1188720" cy="320040"/>
+          </a:xfrm>
+          <a:prstGeom prst="rect">
+            <a:avLst/>
+          </a:prstGeom>
+          <a:noFill/>
+        </p:spPr>
+        <p:txBody>
+          <a:bodyPr wrap="square">
+            <a:spAutoFit/>
+          </a:bodyPr>
+          <a:lstStyle/>
+          <a:p>
+            <a:r>
+              <a:rPr sz="1100" b="0">
+                <a:solidFill>
+                  <a:srgbClr val="FAB387"/>
+                </a:solidFill>
+              </a:rPr>
+              <a:t>str</a:t>
+            </a:r>
+          </a:p>
+        </p:txBody>
+      </p:sp>
+      <p:sp>
+        <p:nvSpPr>
+          <p:cNvPr id="24" name="TextBox 23"/>
+          <p:cNvSpPr txBox="1"/>
+          <p:nvPr/>
+        </p:nvSpPr>
+        <p:spPr>
+          <a:xfrm>
+            <a:off x="3154680" y="2432304"/>
+            <a:ext cx="2560320" cy="320040"/>
+          </a:xfrm>
+          <a:prstGeom prst="rect">
+            <a:avLst/>
+          </a:prstGeom>
+          <a:noFill/>
+        </p:spPr>
+        <p:txBody>
+          <a:bodyPr wrap="square">
+            <a:spAutoFit/>
+          </a:bodyPr>
+          <a:lstStyle/>
+          <a:p>
+            <a:r>
+              <a:rPr sz="1100" b="0">
+                <a:solidFill>
+                  <a:srgbClr val="A6E3A1"/>
+                </a:solidFill>
+              </a:rPr>
+              <a:t>—</a:t>
+            </a:r>
+          </a:p>
+        </p:txBody>
+      </p:sp>
+      <p:sp>
+        <p:nvSpPr>
+          <p:cNvPr id="25" name="TextBox 24"/>
+          <p:cNvSpPr txBox="1"/>
+          <p:nvPr/>
+        </p:nvSpPr>
+        <p:spPr>
+          <a:xfrm>
+            <a:off x="5760720" y="2432304"/>
+            <a:ext cx="2926080" cy="320040"/>
+          </a:xfrm>
+          <a:prstGeom prst="rect">
+            <a:avLst/>
+          </a:prstGeom>
+          <a:noFill/>
+        </p:spPr>
+        <p:txBody>
+          <a:bodyPr wrap="square">
+            <a:spAutoFit/>
+          </a:bodyPr>
+          <a:lstStyle/>
+          <a:p>
+            <a:r>
+              <a:rPr sz="1100" b="0">
+                <a:solidFill>
+                  <a:srgbClr val="FFFFFF"/>
+                </a:solidFill>
+              </a:rPr>
+              <a:t>Target node name for routing</a:t>
+            </a:r>
+          </a:p>
+        </p:txBody>
+      </p:sp>
+      <p:sp>
+        <p:nvSpPr>
+          <p:cNvPr id="26" name="Rectangle 25"/>
+          <p:cNvSpPr/>
+          <p:nvPr/>
+        </p:nvSpPr>
+        <p:spPr>
+          <a:xfrm>
+            <a:off x="274320" y="2779776"/>
+            <a:ext cx="8595360" cy="365760"/>
+          </a:xfrm>
+          <a:prstGeom prst="rect">
+            <a:avLst/>
+          </a:prstGeom>
+          <a:solidFill>
+            <a:srgbClr val="282840"/>
+          </a:solidFill>
+          <a:ln>
+            <a:noFill/>
+          </a:ln>
+        </p:spPr>
+        <p:style>
+          <a:lnRef idx="1">
+            <a:schemeClr val="accent1"/>
+          </a:lnRef>
+          <a:fillRef idx="3">
+            <a:schemeClr val="accent1"/>
+          </a:fillRef>
+          <a:effectRef idx="2">
+            <a:schemeClr val="accent1"/>
+          </a:effectRef>
+          <a:fontRef idx="minor">
+            <a:schemeClr val="lt1"/>
+          </a:fontRef>
+        </p:style>
+        <p:txBody>
+          <a:bodyPr rtlCol="0" anchor="ctr"/>
+          <a:lstStyle/>
+          <a:p>
+            <a:pPr algn="ctr"/>
+          </a:p>
+        </p:txBody>
+      </p:sp>
+      <p:sp>
+        <p:nvSpPr>
+          <p:cNvPr id="27" name="TextBox 26"/>
+          <p:cNvSpPr txBox="1"/>
+          <p:nvPr/>
+        </p:nvSpPr>
+        <p:spPr>
+          <a:xfrm>
+            <a:off x="320040" y="2825496"/>
+            <a:ext cx="1554480" cy="320040"/>
+          </a:xfrm>
+          <a:prstGeom prst="rect">
+            <a:avLst/>
+          </a:prstGeom>
+          <a:noFill/>
+        </p:spPr>
+        <p:txBody>
+          <a:bodyPr wrap="square">
+            <a:spAutoFit/>
+          </a:bodyPr>
+          <a:lstStyle/>
+          <a:p>
+            <a:r>
+              <a:rPr sz="1100" b="1">
+                <a:solidFill>
+                  <a:srgbClr val="F9E2AF"/>
+                </a:solidFill>
+              </a:rPr>
+              <a:t>conversation_summary</a:t>
+            </a:r>
+          </a:p>
+        </p:txBody>
+      </p:sp>
+      <p:sp>
+        <p:nvSpPr>
+          <p:cNvPr id="28" name="TextBox 27"/>
+          <p:cNvSpPr txBox="1"/>
+          <p:nvPr/>
+        </p:nvSpPr>
+        <p:spPr>
+          <a:xfrm>
+            <a:off x="1920240" y="2825496"/>
+            <a:ext cx="1188720" cy="320040"/>
+          </a:xfrm>
+          <a:prstGeom prst="rect">
+            <a:avLst/>
+          </a:prstGeom>
+          <a:noFill/>
+        </p:spPr>
+        <p:txBody>
+          <a:bodyPr wrap="square">
+            <a:spAutoFit/>
+          </a:bodyPr>
+          <a:lstStyle/>
+          <a:p>
+            <a:r>
+              <a:rPr sz="1100" b="0">
+                <a:solidFill>
+                  <a:srgbClr val="FAB387"/>
+                </a:solidFill>
+              </a:rPr>
+              <a:t>str</a:t>
+            </a:r>
+          </a:p>
+        </p:txBody>
+      </p:sp>
+      <p:sp>
+        <p:nvSpPr>
+          <p:cNvPr id="29" name="TextBox 28"/>
+          <p:cNvSpPr txBox="1"/>
+          <p:nvPr/>
+        </p:nvSpPr>
+        <p:spPr>
+          <a:xfrm>
+            <a:off x="3154680" y="2825496"/>
+            <a:ext cx="2560320" cy="320040"/>
+          </a:xfrm>
+          <a:prstGeom prst="rect">
+            <a:avLst/>
+          </a:prstGeom>
+          <a:noFill/>
+        </p:spPr>
+        <p:txBody>
+          <a:bodyPr wrap="square">
+            <a:spAutoFit/>
+          </a:bodyPr>
+          <a:lstStyle/>
+          <a:p>
+            <a:r>
+              <a:rPr sz="1100" b="0">
+                <a:solidFill>
+                  <a:srgbClr val="A6E3A1"/>
+                </a:solidFill>
+              </a:rPr>
+              <a:t>—</a:t>
+            </a:r>
+          </a:p>
+        </p:txBody>
+      </p:sp>
+      <p:sp>
+        <p:nvSpPr>
+          <p:cNvPr id="30" name="TextBox 29"/>
+          <p:cNvSpPr txBox="1"/>
+          <p:nvPr/>
+        </p:nvSpPr>
+        <p:spPr>
+          <a:xfrm>
+            <a:off x="5760720" y="2825496"/>
+            <a:ext cx="2926080" cy="320040"/>
+          </a:xfrm>
+          <a:prstGeom prst="rect">
+            <a:avLst/>
+          </a:prstGeom>
+          <a:noFill/>
+        </p:spPr>
+        <p:txBody>
+          <a:bodyPr wrap="square">
+            <a:spAutoFit/>
+          </a:bodyPr>
+          <a:lstStyle/>
+          <a:p>
+            <a:r>
+              <a:rPr sz="1100" b="0">
+                <a:solidFill>
+                  <a:srgbClr val="FFFFFF"/>
+                </a:solidFill>
+              </a:rPr>
+              <a:t>LLM-generated rolling summary</a:t>
+            </a:r>
+          </a:p>
+        </p:txBody>
+      </p:sp>
+      <p:sp>
+        <p:nvSpPr>
+          <p:cNvPr id="31" name="TextBox 30"/>
+          <p:cNvSpPr txBox="1"/>
+          <p:nvPr/>
+        </p:nvSpPr>
+        <p:spPr>
+          <a:xfrm>
+            <a:off x="320040" y="3218688"/>
+            <a:ext cx="1554480" cy="320040"/>
+          </a:xfrm>
+          <a:prstGeom prst="rect">
+            <a:avLst/>
+          </a:prstGeom>
+          <a:noFill/>
+        </p:spPr>
+        <p:txBody>
+          <a:bodyPr wrap="square">
+            <a:spAutoFit/>
+          </a:bodyPr>
+          <a:lstStyle/>
+          <a:p>
+            <a:r>
+              <a:rPr sz="1100" b="1">
+                <a:solidFill>
+                  <a:srgbClr val="F9E2AF"/>
+                </a:solidFill>
+              </a:rPr>
+              <a:t>active_documents</a:t>
+            </a:r>
+          </a:p>
+        </p:txBody>
+      </p:sp>
+      <p:sp>
+        <p:nvSpPr>
+          <p:cNvPr id="32" name="TextBox 31"/>
+          <p:cNvSpPr txBox="1"/>
+          <p:nvPr/>
+        </p:nvSpPr>
+        <p:spPr>
+          <a:xfrm>
+            <a:off x="1920240" y="3218688"/>
+            <a:ext cx="1188720" cy="320040"/>
+          </a:xfrm>
+          <a:prstGeom prst="rect">
+            <a:avLst/>
+          </a:prstGeom>
+          <a:noFill/>
+        </p:spPr>
+        <p:txBody>
+          <a:bodyPr wrap="square">
+            <a:spAutoFit/>
+          </a:bodyPr>
+          <a:lstStyle/>
+          <a:p>
+            <a:r>
+              <a:rPr sz="1100" b="0">
+                <a:solidFill>
+                  <a:srgbClr val="FAB387"/>
+                </a:solidFill>
+              </a:rPr>
+              <a:t>List[str]</a:t>
+            </a:r>
+          </a:p>
+        </p:txBody>
+      </p:sp>
+      <p:sp>
+        <p:nvSpPr>
+          <p:cNvPr id="33" name="TextBox 32"/>
+          <p:cNvSpPr txBox="1"/>
+          <p:nvPr/>
+        </p:nvSpPr>
+        <p:spPr>
+          <a:xfrm>
+            <a:off x="3154680" y="3218688"/>
+            <a:ext cx="2560320" cy="320040"/>
+          </a:xfrm>
+          <a:prstGeom prst="rect">
+            <a:avLst/>
+          </a:prstGeom>
+          <a:noFill/>
+        </p:spPr>
+        <p:txBody>
+          <a:bodyPr wrap="square">
+            <a:spAutoFit/>
+          </a:bodyPr>
+          <a:lstStyle/>
+          <a:p>
+            <a:r>
+              <a:rPr sz="1100" b="0">
+                <a:solidFill>
+                  <a:srgbClr val="A6E3A1"/>
+                </a:solidFill>
+              </a:rPr>
+              <a:t>—</a:t>
+            </a:r>
+          </a:p>
+        </p:txBody>
+      </p:sp>
+      <p:sp>
+        <p:nvSpPr>
+          <p:cNvPr id="34" name="TextBox 33"/>
+          <p:cNvSpPr txBox="1"/>
+          <p:nvPr/>
+        </p:nvSpPr>
+        <p:spPr>
+          <a:xfrm>
+            <a:off x="5760720" y="3218688"/>
+            <a:ext cx="2926080" cy="320040"/>
+          </a:xfrm>
+          <a:prstGeom prst="rect">
+            <a:avLst/>
+          </a:prstGeom>
+          <a:noFill/>
+        </p:spPr>
+        <p:txBody>
+          <a:bodyPr wrap="square">
+            <a:spAutoFit/>
+          </a:bodyPr>
+          <a:lstStyle/>
+          <a:p>
+            <a:r>
+              <a:rPr sz="1100" b="0">
+                <a:solidFill>
+                  <a:srgbClr val="FFFFFF"/>
+                </a:solidFill>
+              </a:rPr>
+              <a:t>Document IDs referenced across turns</a:t>
+            </a:r>
+          </a:p>
+        </p:txBody>
+      </p:sp>
+      <p:sp>
+        <p:nvSpPr>
+          <p:cNvPr id="35" name="Rectangle 34"/>
+          <p:cNvSpPr/>
+          <p:nvPr/>
+        </p:nvSpPr>
+        <p:spPr>
+          <a:xfrm>
+            <a:off x="274320" y="3566160"/>
+            <a:ext cx="8595360" cy="365760"/>
+          </a:xfrm>
+          <a:prstGeom prst="rect">
+            <a:avLst/>
+          </a:prstGeom>
+          <a:solidFill>
+            <a:srgbClr val="282840"/>
+          </a:solidFill>
+          <a:ln>
+            <a:noFill/>
+          </a:ln>
+        </p:spPr>
+        <p:style>
+          <a:lnRef idx="1">
+            <a:schemeClr val="accent1"/>
+          </a:lnRef>
+          <a:fillRef idx="3">
+            <a:schemeClr val="accent1"/>
+          </a:fillRef>
+          <a:effectRef idx="2">
+            <a:schemeClr val="accent1"/>
+          </a:effectRef>
+          <a:fontRef idx="minor">
+            <a:schemeClr val="lt1"/>
+          </a:fontRef>
+        </p:style>
+        <p:txBody>
+          <a:bodyPr rtlCol="0" anchor="ctr"/>
+          <a:lstStyle/>
+          <a:p>
+            <a:pPr algn="ctr"/>
+          </a:p>
+        </p:txBody>
+      </p:sp>
+      <p:sp>
+        <p:nvSpPr>
+          <p:cNvPr id="36" name="TextBox 35"/>
+          <p:cNvSpPr txBox="1"/>
+          <p:nvPr/>
+        </p:nvSpPr>
+        <p:spPr>
+          <a:xfrm>
+            <a:off x="320040" y="3611880"/>
+            <a:ext cx="1554480" cy="320040"/>
+          </a:xfrm>
+          <a:prstGeom prst="rect">
+            <a:avLst/>
+          </a:prstGeom>
+          <a:noFill/>
+        </p:spPr>
+        <p:txBody>
+          <a:bodyPr wrap="square">
+            <a:spAutoFit/>
+          </a:bodyPr>
+          <a:lstStyle/>
+          <a:p>
+            <a:r>
+              <a:rPr sz="1100" b="1">
+                <a:solidFill>
+                  <a:srgbClr val="F9E2AF"/>
+                </a:solidFill>
+              </a:rPr>
+              <a:t>current_response</a:t>
+            </a:r>
+          </a:p>
+        </p:txBody>
+      </p:sp>
+      <p:sp>
+        <p:nvSpPr>
+          <p:cNvPr id="37" name="TextBox 36"/>
+          <p:cNvSpPr txBox="1"/>
+          <p:nvPr/>
+        </p:nvSpPr>
+        <p:spPr>
+          <a:xfrm>
+            <a:off x="1920240" y="3611880"/>
+            <a:ext cx="1188720" cy="320040"/>
+          </a:xfrm>
+          <a:prstGeom prst="rect">
+            <a:avLst/>
+          </a:prstGeom>
+          <a:noFill/>
+        </p:spPr>
+        <p:txBody>
+          <a:bodyPr wrap="square">
+            <a:spAutoFit/>
+          </a:bodyPr>
+          <a:lstStyle/>
+          <a:p>
+            <a:r>
+              <a:rPr sz="1100" b="0">
+                <a:solidFill>
+                  <a:srgbClr val="FAB387"/>
+                </a:solidFill>
+              </a:rPr>
+              <a:t>Pydantic | None</a:t>
+            </a:r>
+          </a:p>
+        </p:txBody>
+      </p:sp>
+      <p:sp>
+        <p:nvSpPr>
+          <p:cNvPr id="38" name="TextBox 37"/>
+          <p:cNvSpPr txBox="1"/>
+          <p:nvPr/>
+        </p:nvSpPr>
+        <p:spPr>
+          <a:xfrm>
+            <a:off x="3154680" y="3611880"/>
+            <a:ext cx="2560320" cy="320040"/>
+          </a:xfrm>
+          <a:prstGeom prst="rect">
+            <a:avLst/>
+          </a:prstGeom>
+          <a:noFill/>
+        </p:spPr>
+        <p:txBody>
+          <a:bodyPr wrap="square">
+            <a:spAutoFit/>
+          </a:bodyPr>
+          <a:lstStyle/>
+          <a:p>
+            <a:r>
+              <a:rPr sz="1100" b="0">
+                <a:solidFill>
+                  <a:srgbClr val="A6E3A1"/>
+                </a:solidFill>
+              </a:rPr>
+              <a:t>—</a:t>
+            </a:r>
+          </a:p>
+        </p:txBody>
+      </p:sp>
+      <p:sp>
+        <p:nvSpPr>
+          <p:cNvPr id="39" name="TextBox 38"/>
+          <p:cNvSpPr txBox="1"/>
+          <p:nvPr/>
+        </p:nvSpPr>
+        <p:spPr>
+          <a:xfrm>
+            <a:off x="5760720" y="3611880"/>
+            <a:ext cx="2926080" cy="320040"/>
+          </a:xfrm>
+          <a:prstGeom prst="rect">
+            <a:avLst/>
+          </a:prstGeom>
+          <a:noFill/>
+        </p:spPr>
+        <p:txBody>
+          <a:bodyPr wrap="square">
+            <a:spAutoFit/>
+          </a:bodyPr>
+          <a:lstStyle/>
+          <a:p>
+            <a:r>
+              <a:rPr sz="1100" b="0">
+                <a:solidFill>
+                  <a:srgbClr val="FFFFFF"/>
+                </a:solidFill>
+              </a:rPr>
+              <a:t>Structured output from active agent</a:t>
+            </a:r>
+          </a:p>
+        </p:txBody>
+      </p:sp>
+      <p:sp>
+        <p:nvSpPr>
+          <p:cNvPr id="40" name="TextBox 39"/>
+          <p:cNvSpPr txBox="1"/>
+          <p:nvPr/>
+        </p:nvSpPr>
+        <p:spPr>
+          <a:xfrm>
+            <a:off x="320040" y="4005072"/>
+            <a:ext cx="1554480" cy="320040"/>
+          </a:xfrm>
+          <a:prstGeom prst="rect">
+            <a:avLst/>
+          </a:prstGeom>
+          <a:noFill/>
+        </p:spPr>
+        <p:txBody>
+          <a:bodyPr wrap="square">
+            <a:spAutoFit/>
+          </a:bodyPr>
+          <a:lstStyle/>
+          <a:p>
+            <a:r>
+              <a:rPr sz="1100" b="1">
+                <a:solidFill>
+                  <a:srgbClr val="F9E2AF"/>
+                </a:solidFill>
+              </a:rPr>
+              <a:t>tools_used</a:t>
+            </a:r>
+          </a:p>
+        </p:txBody>
+      </p:sp>
+      <p:sp>
+        <p:nvSpPr>
+          <p:cNvPr id="41" name="TextBox 40"/>
+          <p:cNvSpPr txBox="1"/>
+          <p:nvPr/>
+        </p:nvSpPr>
+        <p:spPr>
+          <a:xfrm>
+            <a:off x="1920240" y="4005072"/>
+            <a:ext cx="1188720" cy="320040"/>
+          </a:xfrm>
+          <a:prstGeom prst="rect">
+            <a:avLst/>
+          </a:prstGeom>
+          <a:noFill/>
+        </p:spPr>
+        <p:txBody>
+          <a:bodyPr wrap="square">
+            <a:spAutoFit/>
+          </a:bodyPr>
+          <a:lstStyle/>
+          <a:p>
+            <a:r>
+              <a:rPr sz="1100" b="0">
+                <a:solidFill>
+                  <a:srgbClr val="FAB387"/>
+                </a:solidFill>
+              </a:rPr>
+              <a:t>List[str]</a:t>
+            </a:r>
+          </a:p>
+        </p:txBody>
+      </p:sp>
+      <p:sp>
+        <p:nvSpPr>
+          <p:cNvPr id="42" name="TextBox 41"/>
+          <p:cNvSpPr txBox="1"/>
+          <p:nvPr/>
+        </p:nvSpPr>
+        <p:spPr>
+          <a:xfrm>
+            <a:off x="3154680" y="4005072"/>
+            <a:ext cx="2560320" cy="320040"/>
+          </a:xfrm>
+          <a:prstGeom prst="rect">
+            <a:avLst/>
+          </a:prstGeom>
+          <a:noFill/>
+        </p:spPr>
+        <p:txBody>
+          <a:bodyPr wrap="square">
+            <a:spAutoFit/>
+          </a:bodyPr>
+          <a:lstStyle/>
+          <a:p>
+            <a:r>
+              <a:rPr sz="1100" b="0">
+                <a:solidFill>
+                  <a:srgbClr val="A6E3A1"/>
+                </a:solidFill>
+              </a:rPr>
+              <a:t>—</a:t>
+            </a:r>
+          </a:p>
+        </p:txBody>
+      </p:sp>
+      <p:sp>
+        <p:nvSpPr>
+          <p:cNvPr id="43" name="TextBox 42"/>
+          <p:cNvSpPr txBox="1"/>
+          <p:nvPr/>
+        </p:nvSpPr>
+        <p:spPr>
+          <a:xfrm>
+            <a:off x="5760720" y="4005072"/>
+            <a:ext cx="2926080" cy="320040"/>
+          </a:xfrm>
+          <a:prstGeom prst="rect">
+            <a:avLst/>
+          </a:prstGeom>
+          <a:noFill/>
+        </p:spPr>
+        <p:txBody>
+          <a:bodyPr wrap="square">
+            <a:spAutoFit/>
+          </a:bodyPr>
+          <a:lstStyle/>
+          <a:p>
+            <a:r>
+              <a:rPr sz="1100" b="0">
+                <a:solidFill>
+                  <a:srgbClr val="FFFFFF"/>
+                </a:solidFill>
+              </a:rPr>
+              <a:t>Tool names called this turn</a:t>
+            </a:r>
+          </a:p>
+        </p:txBody>
+      </p:sp>
+      <p:sp>
+        <p:nvSpPr>
+          <p:cNvPr id="44" name="Rectangle 43"/>
+          <p:cNvSpPr/>
+          <p:nvPr/>
+        </p:nvSpPr>
+        <p:spPr>
+          <a:xfrm>
+            <a:off x="274320" y="4352544"/>
+            <a:ext cx="8595360" cy="365760"/>
+          </a:xfrm>
+          <a:prstGeom prst="rect">
+            <a:avLst/>
+          </a:prstGeom>
+          <a:solidFill>
+            <a:srgbClr val="282840"/>
+          </a:solidFill>
+          <a:ln>
+            <a:noFill/>
+          </a:ln>
+        </p:spPr>
+        <p:style>
+          <a:lnRef idx="1">
+            <a:schemeClr val="accent1"/>
+          </a:lnRef>
+          <a:fillRef idx="3">
+            <a:schemeClr val="accent1"/>
+          </a:fillRef>
+          <a:effectRef idx="2">
+            <a:schemeClr val="accent1"/>
+          </a:effectRef>
+          <a:fontRef idx="minor">
+            <a:schemeClr val="lt1"/>
+          </a:fontRef>
+        </p:style>
+        <p:txBody>
+          <a:bodyPr rtlCol="0" anchor="ctr"/>
+          <a:lstStyle/>
+          <a:p>
+            <a:pPr algn="ctr"/>
+          </a:p>
+        </p:txBody>
+      </p:sp>
+      <p:sp>
+        <p:nvSpPr>
+          <p:cNvPr id="45" name="TextBox 44"/>
+          <p:cNvSpPr txBox="1"/>
+          <p:nvPr/>
+        </p:nvSpPr>
+        <p:spPr>
+          <a:xfrm>
+            <a:off x="320040" y="4398264"/>
+            <a:ext cx="1554480" cy="320040"/>
+          </a:xfrm>
+          <a:prstGeom prst="rect">
+            <a:avLst/>
+          </a:prstGeom>
+          <a:noFill/>
+        </p:spPr>
+        <p:txBody>
+          <a:bodyPr wrap="square">
+            <a:spAutoFit/>
+          </a:bodyPr>
+          <a:lstStyle/>
+          <a:p>
+            <a:r>
+              <a:rPr sz="1100" b="1">
+                <a:solidFill>
+                  <a:srgbClr val="F9E2AF"/>
+                </a:solidFill>
+              </a:rPr>
+              <a:t>session_id</a:t>
+            </a:r>
+          </a:p>
+        </p:txBody>
+      </p:sp>
+      <p:sp>
+        <p:nvSpPr>
+          <p:cNvPr id="46" name="TextBox 45"/>
+          <p:cNvSpPr txBox="1"/>
+          <p:nvPr/>
+        </p:nvSpPr>
+        <p:spPr>
+          <a:xfrm>
+            <a:off x="1920240" y="4398264"/>
+            <a:ext cx="1188720" cy="320040"/>
+          </a:xfrm>
+          <a:prstGeom prst="rect">
+            <a:avLst/>
+          </a:prstGeom>
+          <a:noFill/>
+        </p:spPr>
+        <p:txBody>
+          <a:bodyPr wrap="square">
+            <a:spAutoFit/>
+          </a:bodyPr>
+          <a:lstStyle/>
+          <a:p>
+            <a:r>
+              <a:rPr sz="1100" b="0">
+                <a:solidFill>
+                  <a:srgbClr val="FAB387"/>
+                </a:solidFill>
+              </a:rPr>
+              <a:t>str</a:t>
+            </a:r>
+          </a:p>
+        </p:txBody>
+      </p:sp>
+      <p:sp>
+        <p:nvSpPr>
+          <p:cNvPr id="47" name="TextBox 46"/>
+          <p:cNvSpPr txBox="1"/>
+          <p:nvPr/>
+        </p:nvSpPr>
+        <p:spPr>
+          <a:xfrm>
+            <a:off x="3154680" y="4398264"/>
+            <a:ext cx="2560320" cy="320040"/>
+          </a:xfrm>
+          <a:prstGeom prst="rect">
+            <a:avLst/>
+          </a:prstGeom>
+          <a:noFill/>
+        </p:spPr>
+        <p:txBody>
+          <a:bodyPr wrap="square">
+            <a:spAutoFit/>
+          </a:bodyPr>
+          <a:lstStyle/>
+          <a:p>
+            <a:r>
+              <a:rPr sz="1100" b="0">
+                <a:solidFill>
+                  <a:srgbClr val="A6E3A1"/>
+                </a:solidFill>
+              </a:rPr>
+              <a:t>—</a:t>
+            </a:r>
+          </a:p>
+        </p:txBody>
+      </p:sp>
+      <p:sp>
+        <p:nvSpPr>
+          <p:cNvPr id="48" name="TextBox 47"/>
+          <p:cNvSpPr txBox="1"/>
+          <p:nvPr/>
+        </p:nvSpPr>
+        <p:spPr>
+          <a:xfrm>
+            <a:off x="5760720" y="4398264"/>
+            <a:ext cx="2926080" cy="320040"/>
+          </a:xfrm>
+          <a:prstGeom prst="rect">
+            <a:avLst/>
+          </a:prstGeom>
+          <a:noFill/>
+        </p:spPr>
+        <p:txBody>
+          <a:bodyPr wrap="square">
+            <a:spAutoFit/>
+          </a:bodyPr>
+          <a:lstStyle/>
+          <a:p>
+            <a:r>
+              <a:rPr sz="1100" b="0">
+                <a:solidFill>
+                  <a:srgbClr val="FFFFFF"/>
+                </a:solidFill>
+              </a:rPr>
+              <a:t>LangGraph thread_id for checkpointing</a:t>
+            </a:r>
+          </a:p>
+        </p:txBody>
+      </p:sp>
+      <p:sp>
+        <p:nvSpPr>
+          <p:cNvPr id="49" name="TextBox 48"/>
+          <p:cNvSpPr txBox="1"/>
+          <p:nvPr/>
+        </p:nvSpPr>
+        <p:spPr>
+          <a:xfrm>
+            <a:off x="320040" y="4791456"/>
+            <a:ext cx="1554480" cy="320040"/>
+          </a:xfrm>
+          <a:prstGeom prst="rect">
+            <a:avLst/>
+          </a:prstGeom>
+          <a:noFill/>
+        </p:spPr>
+        <p:txBody>
+          <a:bodyPr wrap="square">
+            <a:spAutoFit/>
+          </a:bodyPr>
+          <a:lstStyle/>
+          <a:p>
+            <a:r>
+              <a:rPr sz="1100" b="1">
+                <a:solidFill>
+                  <a:srgbClr val="F9E2AF"/>
+                </a:solidFill>
+              </a:rPr>
+              <a:t>user_id</a:t>
+            </a:r>
+          </a:p>
+        </p:txBody>
+      </p:sp>
+      <p:sp>
+        <p:nvSpPr>
+          <p:cNvPr id="50" name="TextBox 49"/>
+          <p:cNvSpPr txBox="1"/>
+          <p:nvPr/>
+        </p:nvSpPr>
+        <p:spPr>
+          <a:xfrm>
+            <a:off x="1920240" y="4791456"/>
+            <a:ext cx="1188720" cy="320040"/>
+          </a:xfrm>
+          <a:prstGeom prst="rect">
+            <a:avLst/>
+          </a:prstGeom>
+          <a:noFill/>
+        </p:spPr>
+        <p:txBody>
+          <a:bodyPr wrap="square">
+            <a:spAutoFit/>
+          </a:bodyPr>
+          <a:lstStyle/>
+          <a:p>
+            <a:r>
+              <a:rPr sz="1100" b="0">
+                <a:solidFill>
+                  <a:srgbClr val="FAB387"/>
+                </a:solidFill>
+              </a:rPr>
+              <a:t>str</a:t>
+            </a:r>
+          </a:p>
+        </p:txBody>
+      </p:sp>
+      <p:sp>
+        <p:nvSpPr>
+          <p:cNvPr id="51" name="TextBox 50"/>
+          <p:cNvSpPr txBox="1"/>
+          <p:nvPr/>
+        </p:nvSpPr>
+        <p:spPr>
+          <a:xfrm>
+            <a:off x="3154680" y="4791456"/>
+            <a:ext cx="2560320" cy="320040"/>
+          </a:xfrm>
+          <a:prstGeom prst="rect">
+            <a:avLst/>
+          </a:prstGeom>
+          <a:noFill/>
+        </p:spPr>
+        <p:txBody>
+          <a:bodyPr wrap="square">
+            <a:spAutoFit/>
+          </a:bodyPr>
+          <a:lstStyle/>
+          <a:p>
+            <a:r>
+              <a:rPr sz="1100" b="0">
+                <a:solidFill>
+                  <a:srgbClr val="A6E3A1"/>
+                </a:solidFill>
+              </a:rPr>
+              <a:t>—</a:t>
+            </a:r>
+          </a:p>
+        </p:txBody>
+      </p:sp>
+      <p:sp>
+        <p:nvSpPr>
+          <p:cNvPr id="52" name="TextBox 51"/>
+          <p:cNvSpPr txBox="1"/>
+          <p:nvPr/>
+        </p:nvSpPr>
+        <p:spPr>
+          <a:xfrm>
+            <a:off x="5760720" y="4791456"/>
+            <a:ext cx="2926080" cy="320040"/>
+          </a:xfrm>
+          <a:prstGeom prst="rect">
+            <a:avLst/>
+          </a:prstGeom>
+          <a:noFill/>
+        </p:spPr>
+        <p:txBody>
+          <a:bodyPr wrap="square">
+            <a:spAutoFit/>
+          </a:bodyPr>
+          <a:lstStyle/>
+          <a:p>
+            <a:r>
+              <a:rPr sz="1100" b="0">
+                <a:solidFill>
+                  <a:srgbClr val="FFFFFF"/>
+                </a:solidFill>
+              </a:rPr>
+              <a:t>User identifier</a:t>
+            </a:r>
+          </a:p>
+        </p:txBody>
+      </p:sp>
+      <p:sp>
+        <p:nvSpPr>
+          <p:cNvPr id="53" name="Rectangle 52"/>
+          <p:cNvSpPr/>
+          <p:nvPr/>
+        </p:nvSpPr>
+        <p:spPr>
+          <a:xfrm>
+            <a:off x="274320" y="5138928"/>
+            <a:ext cx="8595360" cy="365760"/>
+          </a:xfrm>
+          <a:prstGeom prst="rect">
+            <a:avLst/>
+          </a:prstGeom>
+          <a:solidFill>
+            <a:srgbClr val="282840"/>
+          </a:solidFill>
+          <a:ln>
+            <a:noFill/>
+          </a:ln>
+        </p:spPr>
+        <p:style>
+          <a:lnRef idx="1">
+            <a:schemeClr val="accent1"/>
+          </a:lnRef>
+          <a:fillRef idx="3">
+            <a:schemeClr val="accent1"/>
+          </a:fillRef>
+          <a:effectRef idx="2">
+            <a:schemeClr val="accent1"/>
+          </a:effectRef>
+          <a:fontRef idx="minor">
+            <a:schemeClr val="lt1"/>
+          </a:fontRef>
+        </p:style>
+        <p:txBody>
+          <a:bodyPr rtlCol="0" anchor="ctr"/>
+          <a:lstStyle/>
+          <a:p>
+            <a:pPr algn="ctr"/>
+          </a:p>
+        </p:txBody>
+      </p:sp>
+      <p:sp>
+        <p:nvSpPr>
+          <p:cNvPr id="54" name="TextBox 53"/>
+          <p:cNvSpPr txBox="1"/>
+          <p:nvPr/>
+        </p:nvSpPr>
+        <p:spPr>
+          <a:xfrm>
+            <a:off x="320040" y="5184648"/>
+            <a:ext cx="1554480" cy="320040"/>
+          </a:xfrm>
+          <a:prstGeom prst="rect">
+            <a:avLst/>
+          </a:prstGeom>
+          <a:noFill/>
+        </p:spPr>
+        <p:txBody>
+          <a:bodyPr wrap="square">
+            <a:spAutoFit/>
+          </a:bodyPr>
+          <a:lstStyle/>
+          <a:p>
+            <a:r>
+              <a:rPr sz="1100" b="1">
+                <a:solidFill>
+                  <a:srgbClr val="F9E2AF"/>
+                </a:solidFill>
+              </a:rPr>
+              <a:t>actions_taken</a:t>
+            </a:r>
+          </a:p>
+        </p:txBody>
+      </p:sp>
+      <p:sp>
+        <p:nvSpPr>
+          <p:cNvPr id="55" name="TextBox 54"/>
+          <p:cNvSpPr txBox="1"/>
+          <p:nvPr/>
+        </p:nvSpPr>
+        <p:spPr>
+          <a:xfrm>
+            <a:off x="1920240" y="5184648"/>
+            <a:ext cx="1188720" cy="320040"/>
+          </a:xfrm>
+          <a:prstGeom prst="rect">
+            <a:avLst/>
+          </a:prstGeom>
+          <a:noFill/>
+        </p:spPr>
+        <p:txBody>
+          <a:bodyPr wrap="square">
+            <a:spAutoFit/>
+          </a:bodyPr>
+          <a:lstStyle/>
+          <a:p>
+            <a:r>
+              <a:rPr sz="1100" b="0">
+                <a:solidFill>
+                  <a:srgbClr val="FAB387"/>
+                </a:solidFill>
+              </a:rPr>
+              <a:t>List[str]</a:t>
+            </a:r>
+          </a:p>
+        </p:txBody>
+      </p:sp>
+      <p:sp>
+        <p:nvSpPr>
+          <p:cNvPr id="56" name="TextBox 55"/>
+          <p:cNvSpPr txBox="1"/>
+          <p:nvPr/>
+        </p:nvSpPr>
+        <p:spPr>
+          <a:xfrm>
+            <a:off x="3154680" y="5184648"/>
+            <a:ext cx="2560320" cy="320040"/>
+          </a:xfrm>
+          <a:prstGeom prst="rect">
+            <a:avLst/>
+          </a:prstGeom>
+          <a:noFill/>
+        </p:spPr>
+        <p:txBody>
+          <a:bodyPr wrap="square">
+            <a:spAutoFit/>
+          </a:bodyPr>
+          <a:lstStyle/>
+          <a:p>
+            <a:r>
+              <a:rPr sz="1100" b="0">
+                <a:solidFill>
+                  <a:srgbClr val="A6E3A1"/>
+                </a:solidFill>
+              </a:rPr>
+              <a:t>operator.add</a:t>
+            </a:r>
+          </a:p>
+        </p:txBody>
+      </p:sp>
+      <p:sp>
+        <p:nvSpPr>
+          <p:cNvPr id="57" name="TextBox 56"/>
+          <p:cNvSpPr txBox="1"/>
+          <p:nvPr/>
+        </p:nvSpPr>
+        <p:spPr>
+          <a:xfrm>
+            <a:off x="5760720" y="5184648"/>
+            <a:ext cx="2926080" cy="320040"/>
+          </a:xfrm>
+          <a:prstGeom prst="rect">
+            <a:avLst/>
+          </a:prstGeom>
+          <a:noFill/>
+        </p:spPr>
+        <p:txBody>
+          <a:bodyPr wrap="square">
+            <a:spAutoFit/>
+          </a:bodyPr>
+          <a:lstStyle/>
+          <a:p>
+            <a:r>
+              <a:rPr sz="1100" b="0">
+                <a:solidFill>
+                  <a:srgbClr val="FFFFFF"/>
+                </a:solidFill>
+              </a:rPr>
+              <a:t>Node names run this turn (accumulated)</a:t>
+            </a:r>
+          </a:p>
+        </p:txBody>
+      </p:sp>
+    </p:spTree>
+  </p:cSld>
+  <p:clrMapOvr>
+    <a:masterClrMapping/>
+  </p:clrMapOvr>
+</p:sld>
+</file>
+
 <file path=ppt/slides/slide3.xml><?xml version="1.0" encoding="utf-8"?>
 <p:sld xmlns:a="http://schemas.openxmlformats.org/drawingml/2006/main" xmlns:r="http://schemas.openxmlformats.org/officeDocument/2006/relationships" xmlns:p="http://schemas.openxmlformats.org/presentationml/2006/main">
   <p:cSld name="Slide 3">
@@ -22805,6 +24756,3218 @@
               <a:t>Types</a:t>
             </a:r>
             <a:endParaRPr lang="en-US" sz="900" dirty="0"/>
+          </a:p>
+        </p:txBody>
+      </p:sp>
+    </p:spTree>
+  </p:cSld>
+  <p:clrMapOvr>
+    <a:masterClrMapping/>
+  </p:clrMapOvr>
+</p:sld>
+</file>
+
+<file path=ppt/slides/slide30.xml><?xml version="1.0" encoding="utf-8"?>
+<p:sld xmlns:a="http://schemas.openxmlformats.org/drawingml/2006/main" xmlns:p="http://schemas.openxmlformats.org/presentationml/2006/main" xmlns:r="http://schemas.openxmlformats.org/officeDocument/2006/relationships">
+  <p:cSld>
+    <p:bg>
+      <p:bgPr>
+        <a:solidFill>
+          <a:srgbClr val="1E1E2E"/>
+        </a:solidFill>
+        <a:effectLst/>
+      </p:bgPr>
+    </p:bg>
+    <p:spTree>
+      <p:nvGrpSpPr>
+        <p:cNvPr id="1" name=""/>
+        <p:cNvGrpSpPr/>
+        <p:nvPr/>
+      </p:nvGrpSpPr>
+      <p:grpSpPr/>
+      <p:sp>
+        <p:nvSpPr>
+          <p:cNvPr id="2" name="TextBox 1"/>
+          <p:cNvSpPr txBox="1"/>
+          <p:nvPr/>
+        </p:nvSpPr>
+        <p:spPr>
+          <a:xfrm>
+            <a:off x="365760" y="164592"/>
+            <a:ext cx="8412480" cy="594360"/>
+          </a:xfrm>
+          <a:prstGeom prst="rect">
+            <a:avLst/>
+          </a:prstGeom>
+          <a:noFill/>
+        </p:spPr>
+        <p:txBody>
+          <a:bodyPr wrap="none">
+            <a:spAutoFit/>
+          </a:bodyPr>
+          <a:lstStyle/>
+          <a:p>
+            <a:pPr algn="l"/>
+            <a:r>
+              <a:rPr b="1" sz="2200">
+                <a:solidFill>
+                  <a:srgbClr val="74C7EC"/>
+                </a:solidFill>
+              </a:rPr>
+              <a:t>AgentState — Reducers Explained</a:t>
+            </a:r>
+          </a:p>
+        </p:txBody>
+      </p:sp>
+      <p:sp>
+        <p:nvSpPr>
+          <p:cNvPr id="3" name="Rectangle 2"/>
+          <p:cNvSpPr/>
+          <p:nvPr/>
+        </p:nvSpPr>
+        <p:spPr>
+          <a:xfrm>
+            <a:off x="365760" y="804672"/>
+            <a:ext cx="8412480" cy="27432"/>
+          </a:xfrm>
+          <a:prstGeom prst="rect">
+            <a:avLst/>
+          </a:prstGeom>
+          <a:solidFill>
+            <a:srgbClr val="74C7EC"/>
+          </a:solidFill>
+          <a:ln>
+            <a:noFill/>
+          </a:ln>
+        </p:spPr>
+        <p:style>
+          <a:lnRef idx="1">
+            <a:schemeClr val="accent1"/>
+          </a:lnRef>
+          <a:fillRef idx="3">
+            <a:schemeClr val="accent1"/>
+          </a:fillRef>
+          <a:effectRef idx="2">
+            <a:schemeClr val="accent1"/>
+          </a:effectRef>
+          <a:fontRef idx="minor">
+            <a:schemeClr val="lt1"/>
+          </a:fontRef>
+        </p:style>
+        <p:txBody>
+          <a:bodyPr rtlCol="0" anchor="ctr"/>
+          <a:lstStyle/>
+          <a:p>
+            <a:pPr algn="ctr"/>
+          </a:p>
+        </p:txBody>
+      </p:sp>
+      <p:sp>
+        <p:nvSpPr>
+          <p:cNvPr id="4" name="Rectangle 3"/>
+          <p:cNvSpPr/>
+          <p:nvPr/>
+        </p:nvSpPr>
+        <p:spPr>
+          <a:xfrm>
+            <a:off x="320040" y="914400"/>
+            <a:ext cx="8503920" cy="5212080"/>
+          </a:xfrm>
+          <a:prstGeom prst="rect">
+            <a:avLst/>
+          </a:prstGeom>
+          <a:solidFill>
+            <a:srgbClr val="111122"/>
+          </a:solidFill>
+          <a:ln>
+            <a:noFill/>
+          </a:ln>
+        </p:spPr>
+        <p:style>
+          <a:lnRef idx="1">
+            <a:schemeClr val="accent1"/>
+          </a:lnRef>
+          <a:fillRef idx="3">
+            <a:schemeClr val="accent1"/>
+          </a:fillRef>
+          <a:effectRef idx="2">
+            <a:schemeClr val="accent1"/>
+          </a:effectRef>
+          <a:fontRef idx="minor">
+            <a:schemeClr val="lt1"/>
+          </a:fontRef>
+        </p:style>
+        <p:txBody>
+          <a:bodyPr rtlCol="0" anchor="ctr"/>
+          <a:lstStyle/>
+          <a:p>
+            <a:pPr algn="ctr"/>
+          </a:p>
+        </p:txBody>
+      </p:sp>
+      <p:sp>
+        <p:nvSpPr>
+          <p:cNvPr id="5" name="TextBox 4"/>
+          <p:cNvSpPr txBox="1"/>
+          <p:nvPr/>
+        </p:nvSpPr>
+        <p:spPr>
+          <a:xfrm>
+            <a:off x="429768" y="1005840"/>
+            <a:ext cx="8284464" cy="5074920"/>
+          </a:xfrm>
+          <a:prstGeom prst="rect">
+            <a:avLst/>
+          </a:prstGeom>
+          <a:noFill/>
+        </p:spPr>
+        <p:txBody>
+          <a:bodyPr wrap="square">
+            <a:spAutoFit/>
+          </a:bodyPr>
+          <a:lstStyle/>
+          <a:p>
+            <a:r>
+              <a:rPr sz="1050">
+                <a:solidFill>
+                  <a:srgbClr val="A6E3A1"/>
+                </a:solidFill>
+                <a:latin typeface="Courier New"/>
+              </a:rPr>
+              <a:t># Without a reducer — last write wins (default)</a:t>
+            </a:r>
+          </a:p>
+          <a:p>
+            <a:r>
+              <a:rPr sz="1050">
+                <a:solidFill>
+                  <a:srgbClr val="A6E3A1"/>
+                </a:solidFill>
+                <a:latin typeface="Courier New"/>
+              </a:rPr>
+              <a:t>state["next_step"] = "qa_agent"          # classify_intent sets this</a:t>
+            </a:r>
+          </a:p>
+          <a:p>
+            <a:r>
+              <a:rPr sz="1050">
+                <a:solidFill>
+                  <a:srgbClr val="A6E3A1"/>
+                </a:solidFill>
+                <a:latin typeface="Courier New"/>
+              </a:rPr>
+              <a:t>state["next_step"] = "summarization"     # update_memory overwrites it  ← lost!</a:t>
+            </a:r>
+          </a:p>
+          <a:p>
+            <a:r>
+              <a:rPr sz="1050">
+                <a:solidFill>
+                  <a:srgbClr val="A6E3A1"/>
+                </a:solidFill>
+                <a:latin typeface="Courier New"/>
+              </a:rPr>
+              <a:t/>
+            </a:r>
+          </a:p>
+          <a:p>
+            <a:r>
+              <a:rPr sz="1050">
+                <a:solidFill>
+                  <a:srgbClr val="A6E3A1"/>
+                </a:solidFill>
+                <a:latin typeface="Courier New"/>
+              </a:rPr>
+              <a:t/>
+            </a:r>
+          </a:p>
+          <a:p>
+            <a:r>
+              <a:rPr sz="1050">
+                <a:solidFill>
+                  <a:srgbClr val="A6E3A1"/>
+                </a:solidFill>
+                <a:latin typeface="Courier New"/>
+              </a:rPr>
+              <a:t># add_messages reducer — appends, never overwrites</a:t>
+            </a:r>
+          </a:p>
+          <a:p>
+            <a:r>
+              <a:rPr sz="1050">
+                <a:solidFill>
+                  <a:srgbClr val="A6E3A1"/>
+                </a:solidFill>
+                <a:latin typeface="Courier New"/>
+              </a:rPr>
+              <a:t>messages: Annotated[List[BaseMessage], add_messages]</a:t>
+            </a:r>
+          </a:p>
+          <a:p>
+            <a:r>
+              <a:rPr sz="1050">
+                <a:solidFill>
+                  <a:srgbClr val="A6E3A1"/>
+                </a:solidFill>
+                <a:latin typeface="Courier New"/>
+              </a:rPr>
+              <a:t/>
+            </a:r>
+          </a:p>
+          <a:p>
+            <a:r>
+              <a:rPr sz="1050">
+                <a:solidFill>
+                  <a:srgbClr val="A6E3A1"/>
+                </a:solidFill>
+                <a:latin typeface="Courier New"/>
+              </a:rPr>
+              <a:t># Turn 1 result : [HumanMessage("Q1 revenue?"), AIMessage("$4.2M")]</a:t>
+            </a:r>
+          </a:p>
+          <a:p>
+            <a:r>
+              <a:rPr sz="1050">
+                <a:solidFill>
+                  <a:srgbClr val="A6E3A1"/>
+                </a:solidFill>
+                <a:latin typeface="Courier New"/>
+              </a:rPr>
+              <a:t># Turn 2 result : [HumanMessage("Q2 revenue?"), AIMessage("$5.1M")]</a:t>
+            </a:r>
+          </a:p>
+          <a:p>
+            <a:r>
+              <a:rPr sz="1050">
+                <a:solidFill>
+                  <a:srgbClr val="A6E3A1"/>
+                </a:solidFill>
+                <a:latin typeface="Courier New"/>
+              </a:rPr>
+              <a:t># State after 2 turns: ALL 4 messages preserved  ✓</a:t>
+            </a:r>
+          </a:p>
+          <a:p>
+            <a:r>
+              <a:rPr sz="1050">
+                <a:solidFill>
+                  <a:srgbClr val="A6E3A1"/>
+                </a:solidFill>
+                <a:latin typeface="Courier New"/>
+              </a:rPr>
+              <a:t/>
+            </a:r>
+          </a:p>
+          <a:p>
+            <a:r>
+              <a:rPr sz="1050">
+                <a:solidFill>
+                  <a:srgbClr val="A6E3A1"/>
+                </a:solidFill>
+                <a:latin typeface="Courier New"/>
+              </a:rPr>
+              <a:t/>
+            </a:r>
+          </a:p>
+          <a:p>
+            <a:r>
+              <a:rPr sz="1050">
+                <a:solidFill>
+                  <a:srgbClr val="A6E3A1"/>
+                </a:solidFill>
+                <a:latin typeface="Courier New"/>
+              </a:rPr>
+              <a:t># operator.add reducer — list concatenation across nodes</a:t>
+            </a:r>
+          </a:p>
+          <a:p>
+            <a:r>
+              <a:rPr sz="1050">
+                <a:solidFill>
+                  <a:srgbClr val="A6E3A1"/>
+                </a:solidFill>
+                <a:latin typeface="Courier New"/>
+              </a:rPr>
+              <a:t>actions_taken: Annotated[List[str], operator.add]</a:t>
+            </a:r>
+          </a:p>
+          <a:p>
+            <a:r>
+              <a:rPr sz="1050">
+                <a:solidFill>
+                  <a:srgbClr val="A6E3A1"/>
+                </a:solidFill>
+                <a:latin typeface="Courier New"/>
+              </a:rPr>
+              <a:t/>
+            </a:r>
+          </a:p>
+          <a:p>
+            <a:r>
+              <a:rPr sz="1050">
+                <a:solidFill>
+                  <a:srgbClr val="A6E3A1"/>
+                </a:solidFill>
+                <a:latin typeface="Courier New"/>
+              </a:rPr>
+              <a:t># classify_intent returns : ["classify_intent"]</a:t>
+            </a:r>
+          </a:p>
+          <a:p>
+            <a:r>
+              <a:rPr sz="1050">
+                <a:solidFill>
+                  <a:srgbClr val="A6E3A1"/>
+                </a:solidFill>
+                <a:latin typeface="Courier New"/>
+              </a:rPr>
+              <a:t># qa_agent returns        : ["qa_agent"]</a:t>
+            </a:r>
+          </a:p>
+          <a:p>
+            <a:r>
+              <a:rPr sz="1050">
+                <a:solidFill>
+                  <a:srgbClr val="A6E3A1"/>
+                </a:solidFill>
+                <a:latin typeface="Courier New"/>
+              </a:rPr>
+              <a:t># update_memory returns   : ["update_memory"]</a:t>
+            </a:r>
+          </a:p>
+          <a:p>
+            <a:r>
+              <a:rPr sz="1050">
+                <a:solidFill>
+                  <a:srgbClr val="A6E3A1"/>
+                </a:solidFill>
+                <a:latin typeface="Courier New"/>
+              </a:rPr>
+              <a:t># Final state             : ["classify_intent", "qa_agent", "update_memory"]  ✓</a:t>
+            </a:r>
+          </a:p>
+          <a:p>
+            <a:r>
+              <a:rPr sz="1050">
+                <a:solidFill>
+                  <a:srgbClr val="A6E3A1"/>
+                </a:solidFill>
+                <a:latin typeface="Courier New"/>
+              </a:rPr>
+              <a:t/>
+            </a:r>
+          </a:p>
+          <a:p>
+            <a:r>
+              <a:rPr sz="1050">
+                <a:solidFill>
+                  <a:srgbClr val="A6E3A1"/>
+                </a:solidFill>
+                <a:latin typeface="Courier New"/>
+              </a:rPr>
+              <a:t/>
+            </a:r>
+          </a:p>
+          <a:p>
+            <a:r>
+              <a:rPr sz="1050">
+                <a:solidFill>
+                  <a:srgbClr val="A6E3A1"/>
+                </a:solidFill>
+                <a:latin typeface="Courier New"/>
+              </a:rPr>
+              <a:t># InMemorySaver — checkpoints full state after every node</a:t>
+            </a:r>
+          </a:p>
+          <a:p>
+            <a:r>
+              <a:rPr sz="1050">
+                <a:solidFill>
+                  <a:srgbClr val="A6E3A1"/>
+                </a:solidFill>
+                <a:latin typeface="Courier New"/>
+              </a:rPr>
+              <a:t>workflow.compile(checkpointer=InMemorySaver())</a:t>
+            </a:r>
+          </a:p>
+          <a:p>
+            <a:r>
+              <a:rPr sz="1050">
+                <a:solidFill>
+                  <a:srgbClr val="A6E3A1"/>
+                </a:solidFill>
+                <a:latin typeface="Courier New"/>
+              </a:rPr>
+              <a:t># Same thread_id → state restored on next .invoke()  →  true multi-turn memory</a:t>
+            </a:r>
+          </a:p>
+        </p:txBody>
+      </p:sp>
+    </p:spTree>
+  </p:cSld>
+  <p:clrMapOvr>
+    <a:masterClrMapping/>
+  </p:clrMapOvr>
+</p:sld>
+</file>
+
+<file path=ppt/slides/slide31.xml><?xml version="1.0" encoding="utf-8"?>
+<p:sld xmlns:a="http://schemas.openxmlformats.org/drawingml/2006/main" xmlns:p="http://schemas.openxmlformats.org/presentationml/2006/main" xmlns:r="http://schemas.openxmlformats.org/officeDocument/2006/relationships">
+  <p:cSld>
+    <p:bg>
+      <p:bgPr>
+        <a:solidFill>
+          <a:srgbClr val="1E1E2E"/>
+        </a:solidFill>
+        <a:effectLst/>
+      </p:bgPr>
+    </p:bg>
+    <p:spTree>
+      <p:nvGrpSpPr>
+        <p:cNvPr id="1" name=""/>
+        <p:cNvGrpSpPr/>
+        <p:nvPr/>
+      </p:nvGrpSpPr>
+      <p:grpSpPr/>
+      <p:sp>
+        <p:nvSpPr>
+          <p:cNvPr id="2" name="TextBox 1"/>
+          <p:cNvSpPr txBox="1"/>
+          <p:nvPr/>
+        </p:nvSpPr>
+        <p:spPr>
+          <a:xfrm>
+            <a:off x="365760" y="164592"/>
+            <a:ext cx="8412480" cy="594360"/>
+          </a:xfrm>
+          <a:prstGeom prst="rect">
+            <a:avLst/>
+          </a:prstGeom>
+          <a:noFill/>
+        </p:spPr>
+        <p:txBody>
+          <a:bodyPr wrap="none">
+            <a:spAutoFit/>
+          </a:bodyPr>
+          <a:lstStyle/>
+          <a:p>
+            <a:pPr algn="l"/>
+            <a:r>
+              <a:rPr b="1" sz="2200">
+                <a:solidFill>
+                  <a:srgbClr val="74C7EC"/>
+                </a:solidFill>
+              </a:rPr>
+              <a:t>Tools — calculator &amp; document_reader (tools.py)</a:t>
+            </a:r>
+          </a:p>
+        </p:txBody>
+      </p:sp>
+      <p:sp>
+        <p:nvSpPr>
+          <p:cNvPr id="3" name="Rectangle 2"/>
+          <p:cNvSpPr/>
+          <p:nvPr/>
+        </p:nvSpPr>
+        <p:spPr>
+          <a:xfrm>
+            <a:off x="365760" y="804672"/>
+            <a:ext cx="8412480" cy="27432"/>
+          </a:xfrm>
+          <a:prstGeom prst="rect">
+            <a:avLst/>
+          </a:prstGeom>
+          <a:solidFill>
+            <a:srgbClr val="74C7EC"/>
+          </a:solidFill>
+          <a:ln>
+            <a:noFill/>
+          </a:ln>
+        </p:spPr>
+        <p:style>
+          <a:lnRef idx="1">
+            <a:schemeClr val="accent1"/>
+          </a:lnRef>
+          <a:fillRef idx="3">
+            <a:schemeClr val="accent1"/>
+          </a:fillRef>
+          <a:effectRef idx="2">
+            <a:schemeClr val="accent1"/>
+          </a:effectRef>
+          <a:fontRef idx="minor">
+            <a:schemeClr val="lt1"/>
+          </a:fontRef>
+        </p:style>
+        <p:txBody>
+          <a:bodyPr rtlCol="0" anchor="ctr"/>
+          <a:lstStyle/>
+          <a:p>
+            <a:pPr algn="ctr"/>
+          </a:p>
+        </p:txBody>
+      </p:sp>
+      <p:sp>
+        <p:nvSpPr>
+          <p:cNvPr id="4" name="TextBox 3"/>
+          <p:cNvSpPr txBox="1"/>
+          <p:nvPr/>
+        </p:nvSpPr>
+        <p:spPr>
+          <a:xfrm>
+            <a:off x="320040" y="914400"/>
+            <a:ext cx="8412480" cy="320040"/>
+          </a:xfrm>
+          <a:prstGeom prst="rect">
+            <a:avLst/>
+          </a:prstGeom>
+          <a:noFill/>
+        </p:spPr>
+        <p:txBody>
+          <a:bodyPr wrap="square">
+            <a:spAutoFit/>
+          </a:bodyPr>
+          <a:lstStyle/>
+          <a:p>
+            <a:pPr algn="l"/>
+            <a:r>
+              <a:rPr sz="1400" b="1">
+                <a:solidFill>
+                  <a:srgbClr val="F9E2AF"/>
+                </a:solidFill>
+              </a:rPr>
+              <a:t>🧮  calculator</a:t>
+            </a:r>
+          </a:p>
+        </p:txBody>
+      </p:sp>
+      <p:sp>
+        <p:nvSpPr>
+          <p:cNvPr id="5" name="Rectangle 4"/>
+          <p:cNvSpPr/>
+          <p:nvPr/>
+        </p:nvSpPr>
+        <p:spPr>
+          <a:xfrm>
+            <a:off x="320040" y="1280160"/>
+            <a:ext cx="8503920" cy="1828800"/>
+          </a:xfrm>
+          <a:prstGeom prst="rect">
+            <a:avLst/>
+          </a:prstGeom>
+          <a:solidFill>
+            <a:srgbClr val="111122"/>
+          </a:solidFill>
+          <a:ln>
+            <a:noFill/>
+          </a:ln>
+        </p:spPr>
+        <p:style>
+          <a:lnRef idx="1">
+            <a:schemeClr val="accent1"/>
+          </a:lnRef>
+          <a:fillRef idx="3">
+            <a:schemeClr val="accent1"/>
+          </a:fillRef>
+          <a:effectRef idx="2">
+            <a:schemeClr val="accent1"/>
+          </a:effectRef>
+          <a:fontRef idx="minor">
+            <a:schemeClr val="lt1"/>
+          </a:fontRef>
+        </p:style>
+        <p:txBody>
+          <a:bodyPr rtlCol="0" anchor="ctr"/>
+          <a:lstStyle/>
+          <a:p>
+            <a:pPr algn="ctr"/>
+          </a:p>
+        </p:txBody>
+      </p:sp>
+      <p:sp>
+        <p:nvSpPr>
+          <p:cNvPr id="6" name="TextBox 5"/>
+          <p:cNvSpPr txBox="1"/>
+          <p:nvPr/>
+        </p:nvSpPr>
+        <p:spPr>
+          <a:xfrm>
+            <a:off x="429768" y="1371600"/>
+            <a:ext cx="8284464" cy="1691640"/>
+          </a:xfrm>
+          <a:prstGeom prst="rect">
+            <a:avLst/>
+          </a:prstGeom>
+          <a:noFill/>
+        </p:spPr>
+        <p:txBody>
+          <a:bodyPr wrap="square">
+            <a:spAutoFit/>
+          </a:bodyPr>
+          <a:lstStyle/>
+          <a:p>
+            <a:r>
+              <a:rPr sz="1050">
+                <a:solidFill>
+                  <a:srgbClr val="A6E3A1"/>
+                </a:solidFill>
+                <a:latin typeface="Courier New"/>
+              </a:rPr>
+              <a:t>@tool</a:t>
+            </a:r>
+          </a:p>
+          <a:p>
+            <a:r>
+              <a:rPr sz="1050">
+                <a:solidFill>
+                  <a:srgbClr val="A6E3A1"/>
+                </a:solidFill>
+                <a:latin typeface="Courier New"/>
+              </a:rPr>
+              <a:t>def calculator(expression: str) -&gt; str:</a:t>
+            </a:r>
+          </a:p>
+          <a:p>
+            <a:r>
+              <a:rPr sz="1050">
+                <a:solidFill>
+                  <a:srgbClr val="A6E3A1"/>
+                </a:solidFill>
+                <a:latin typeface="Courier New"/>
+              </a:rPr>
+              <a:t>    # 1. Strip commas:        "4,200,000 + 5,100,000"  →  "4200000 + 5100000"</a:t>
+            </a:r>
+          </a:p>
+          <a:p>
+            <a:r>
+              <a:rPr sz="1050">
+                <a:solidFill>
+                  <a:srgbClr val="A6E3A1"/>
+                </a:solidFill>
+                <a:latin typeface="Courier New"/>
+              </a:rPr>
+              <a:t>    # 2. Regex whitelist:     only  digits  + - * / ( ) . %  allowed</a:t>
+            </a:r>
+          </a:p>
+          <a:p>
+            <a:r>
+              <a:rPr sz="1050">
+                <a:solidFill>
+                  <a:srgbClr val="A6E3A1"/>
+                </a:solidFill>
+                <a:latin typeface="Courier New"/>
+              </a:rPr>
+              <a:t>    # 3. Sandboxed eval():    eval(expr, {"__builtins__": {}}, {})</a:t>
+            </a:r>
+          </a:p>
+          <a:p>
+            <a:r>
+              <a:rPr sz="1050">
+                <a:solidFill>
+                  <a:srgbClr val="A6E3A1"/>
+                </a:solidFill>
+                <a:latin typeface="Courier New"/>
+              </a:rPr>
+              <a:t>    # 4. Format result:       int-valued floats → "9,300,000"</a:t>
+            </a:r>
+          </a:p>
+          <a:p>
+            <a:r>
+              <a:rPr sz="1050">
+                <a:solidFill>
+                  <a:srgbClr val="A6E3A1"/>
+                </a:solidFill>
+                <a:latin typeface="Courier New"/>
+              </a:rPr>
+              <a:t>    # 5. Log to session file: status = OK | INVALID_INPUT | ZERO_DIVISION | ERROR</a:t>
+            </a:r>
+          </a:p>
+          <a:p>
+            <a:r>
+              <a:rPr sz="1050">
+                <a:solidFill>
+                  <a:srgbClr val="A6E3A1"/>
+                </a:solidFill>
+                <a:latin typeface="Courier New"/>
+              </a:rPr>
+              <a:t>    return "Result: 9,300,000  (expression: 4200000 + 5100000)" </a:t>
+            </a:r>
+          </a:p>
+        </p:txBody>
+      </p:sp>
+      <p:sp>
+        <p:nvSpPr>
+          <p:cNvPr id="7" name="TextBox 6"/>
+          <p:cNvSpPr txBox="1"/>
+          <p:nvPr/>
+        </p:nvSpPr>
+        <p:spPr>
+          <a:xfrm>
+            <a:off x="320040" y="3200400"/>
+            <a:ext cx="8412480" cy="320040"/>
+          </a:xfrm>
+          <a:prstGeom prst="rect">
+            <a:avLst/>
+          </a:prstGeom>
+          <a:noFill/>
+        </p:spPr>
+        <p:txBody>
+          <a:bodyPr wrap="square">
+            <a:spAutoFit/>
+          </a:bodyPr>
+          <a:lstStyle/>
+          <a:p>
+            <a:pPr algn="l"/>
+            <a:r>
+              <a:rPr sz="1400" b="1">
+                <a:solidFill>
+                  <a:srgbClr val="F9E2AF"/>
+                </a:solidFill>
+              </a:rPr>
+              <a:t>📄  document_reader</a:t>
+            </a:r>
+          </a:p>
+        </p:txBody>
+      </p:sp>
+      <p:sp>
+        <p:nvSpPr>
+          <p:cNvPr id="8" name="Rectangle 7"/>
+          <p:cNvSpPr/>
+          <p:nvPr/>
+        </p:nvSpPr>
+        <p:spPr>
+          <a:xfrm>
+            <a:off x="320040" y="3566160"/>
+            <a:ext cx="8503920" cy="1691640"/>
+          </a:xfrm>
+          <a:prstGeom prst="rect">
+            <a:avLst/>
+          </a:prstGeom>
+          <a:solidFill>
+            <a:srgbClr val="111122"/>
+          </a:solidFill>
+          <a:ln>
+            <a:noFill/>
+          </a:ln>
+        </p:spPr>
+        <p:style>
+          <a:lnRef idx="1">
+            <a:schemeClr val="accent1"/>
+          </a:lnRef>
+          <a:fillRef idx="3">
+            <a:schemeClr val="accent1"/>
+          </a:fillRef>
+          <a:effectRef idx="2">
+            <a:schemeClr val="accent1"/>
+          </a:effectRef>
+          <a:fontRef idx="minor">
+            <a:schemeClr val="lt1"/>
+          </a:fontRef>
+        </p:style>
+        <p:txBody>
+          <a:bodyPr rtlCol="0" anchor="ctr"/>
+          <a:lstStyle/>
+          <a:p>
+            <a:pPr algn="ctr"/>
+          </a:p>
+        </p:txBody>
+      </p:sp>
+      <p:sp>
+        <p:nvSpPr>
+          <p:cNvPr id="9" name="TextBox 8"/>
+          <p:cNvSpPr txBox="1"/>
+          <p:nvPr/>
+        </p:nvSpPr>
+        <p:spPr>
+          <a:xfrm>
+            <a:off x="429768" y="3657600"/>
+            <a:ext cx="8284464" cy="1554480"/>
+          </a:xfrm>
+          <a:prstGeom prst="rect">
+            <a:avLst/>
+          </a:prstGeom>
+          <a:noFill/>
+        </p:spPr>
+        <p:txBody>
+          <a:bodyPr wrap="square">
+            <a:spAutoFit/>
+          </a:bodyPr>
+          <a:lstStyle/>
+          <a:p>
+            <a:r>
+              <a:rPr sz="1050">
+                <a:solidFill>
+                  <a:srgbClr val="A6E3A1"/>
+                </a:solidFill>
+                <a:latin typeface="Courier New"/>
+              </a:rPr>
+              <a:t>@tool</a:t>
+            </a:r>
+          </a:p>
+          <a:p>
+            <a:r>
+              <a:rPr sz="1050">
+                <a:solidFill>
+                  <a:srgbClr val="A6E3A1"/>
+                </a:solidFill>
+                <a:latin typeface="Courier New"/>
+              </a:rPr>
+              <a:t>def document_reader(query: str) -&gt; str:</a:t>
+            </a:r>
+          </a:p>
+          <a:p>
+            <a:r>
+              <a:rPr sz="1050">
+                <a:solidFill>
+                  <a:srgbClr val="A6E3A1"/>
+                </a:solidFill>
+                <a:latin typeface="Courier New"/>
+              </a:rPr>
+              <a:t>    # Path 1  LIST        query = "list"         → returns all doc IDs + titles</a:t>
+            </a:r>
+          </a:p>
+          <a:p>
+            <a:r>
+              <a:rPr sz="1050">
+                <a:solidFill>
+                  <a:srgbClr val="A6E3A1"/>
+                </a:solidFill>
+                <a:latin typeface="Courier New"/>
+              </a:rPr>
+              <a:t>    # Path 2  EXACT_MATCH query = "doc_financial_q2"  → returns full content</a:t>
+            </a:r>
+          </a:p>
+          <a:p>
+            <a:r>
+              <a:rPr sz="1050">
+                <a:solidFill>
+                  <a:srgbClr val="A6E3A1"/>
+                </a:solidFill>
+                <a:latin typeface="Courier New"/>
+              </a:rPr>
+              <a:t>    # Path 3  KEYWORD     query = "revenue growth"    → keyword scored search (top 3)</a:t>
+            </a:r>
+          </a:p>
+          <a:p>
+            <a:r>
+              <a:rPr sz="1050">
+                <a:solidFill>
+                  <a:srgbClr val="A6E3A1"/>
+                </a:solidFill>
+                <a:latin typeface="Courier New"/>
+              </a:rPr>
+              <a:t>    # Path 4  FALLBACK    no match found         → returns first 2 docs in store</a:t>
+            </a:r>
+          </a:p>
+          <a:p>
+            <a:r>
+              <a:rPr sz="1050">
+                <a:solidFill>
+                  <a:srgbClr val="A6E3A1"/>
+                </a:solidFill>
+                <a:latin typeface="Courier New"/>
+              </a:rPr>
+              <a:t>    # Path 5  NO_MATCH    store is empty         → "No documents found"</a:t>
+            </a:r>
+          </a:p>
+          <a:p>
+            <a:r>
+              <a:rPr sz="1050">
+                <a:solidFill>
+                  <a:srgbClr val="A6E3A1"/>
+                </a:solidFill>
+                <a:latin typeface="Courier New"/>
+              </a:rPr>
+              <a:t>    # All paths log to logs/&lt;session_id&gt;.log with status label + full output</a:t>
+            </a:r>
+          </a:p>
+        </p:txBody>
+      </p:sp>
+      <p:sp>
+        <p:nvSpPr>
+          <p:cNvPr id="10" name="TextBox 9"/>
+          <p:cNvSpPr txBox="1"/>
+          <p:nvPr/>
+        </p:nvSpPr>
+        <p:spPr>
+          <a:xfrm>
+            <a:off x="320040" y="5321808"/>
+            <a:ext cx="8503920" cy="502920"/>
+          </a:xfrm>
+          <a:prstGeom prst="rect">
+            <a:avLst/>
+          </a:prstGeom>
+          <a:noFill/>
+        </p:spPr>
+        <p:txBody>
+          <a:bodyPr wrap="square">
+            <a:spAutoFit/>
+          </a:bodyPr>
+          <a:lstStyle/>
+          <a:p>
+            <a:pPr algn="l"/>
+            <a:r>
+              <a:rPr sz="1100" b="0">
+                <a:solidFill>
+                  <a:srgbClr val="CDD6F4"/>
+                </a:solidFill>
+              </a:rPr>
+              <a:t>Both tools are bound to the LLM via llm.bind_tools([calculator, document_reader])</a:t>
+            </a:r>
+          </a:p>
+          <a:p>
+            <a:pPr algn="l"/>
+            <a:r>
+              <a:rPr sz="1100" b="0">
+                <a:solidFill>
+                  <a:srgbClr val="CDD6F4"/>
+                </a:solidFill>
+              </a:rPr>
+              <a:t>and invoked inside _run_tool_loop() when the LLM returns a tool_calls response.</a:t>
+            </a:r>
+          </a:p>
+        </p:txBody>
+      </p:sp>
+    </p:spTree>
+  </p:cSld>
+  <p:clrMapOvr>
+    <a:masterClrMapping/>
+  </p:clrMapOvr>
+</p:sld>
+</file>
+
+<file path=ppt/slides/slide32.xml><?xml version="1.0" encoding="utf-8"?>
+<p:sld xmlns:a="http://schemas.openxmlformats.org/drawingml/2006/main" xmlns:p="http://schemas.openxmlformats.org/presentationml/2006/main" xmlns:r="http://schemas.openxmlformats.org/officeDocument/2006/relationships">
+  <p:cSld>
+    <p:bg>
+      <p:bgPr>
+        <a:solidFill>
+          <a:srgbClr val="1E1E2E"/>
+        </a:solidFill>
+        <a:effectLst/>
+      </p:bgPr>
+    </p:bg>
+    <p:spTree>
+      <p:nvGrpSpPr>
+        <p:cNvPr id="1" name=""/>
+        <p:cNvGrpSpPr/>
+        <p:nvPr/>
+      </p:nvGrpSpPr>
+      <p:grpSpPr/>
+      <p:sp>
+        <p:nvSpPr>
+          <p:cNvPr id="2" name="TextBox 1"/>
+          <p:cNvSpPr txBox="1"/>
+          <p:nvPr/>
+        </p:nvSpPr>
+        <p:spPr>
+          <a:xfrm>
+            <a:off x="365760" y="164592"/>
+            <a:ext cx="8412480" cy="594360"/>
+          </a:xfrm>
+          <a:prstGeom prst="rect">
+            <a:avLst/>
+          </a:prstGeom>
+          <a:noFill/>
+        </p:spPr>
+        <p:txBody>
+          <a:bodyPr wrap="none">
+            <a:spAutoFit/>
+          </a:bodyPr>
+          <a:lstStyle/>
+          <a:p>
+            <a:pPr algn="l"/>
+            <a:r>
+              <a:rPr b="1" sz="2200">
+                <a:solidFill>
+                  <a:srgbClr val="74C7EC"/>
+                </a:solidFill>
+              </a:rPr>
+              <a:t>Tool Calling Loop — _run_tool_loop()</a:t>
+            </a:r>
+          </a:p>
+        </p:txBody>
+      </p:sp>
+      <p:sp>
+        <p:nvSpPr>
+          <p:cNvPr id="3" name="Rectangle 2"/>
+          <p:cNvSpPr/>
+          <p:nvPr/>
+        </p:nvSpPr>
+        <p:spPr>
+          <a:xfrm>
+            <a:off x="365760" y="804672"/>
+            <a:ext cx="8412480" cy="27432"/>
+          </a:xfrm>
+          <a:prstGeom prst="rect">
+            <a:avLst/>
+          </a:prstGeom>
+          <a:solidFill>
+            <a:srgbClr val="74C7EC"/>
+          </a:solidFill>
+          <a:ln>
+            <a:noFill/>
+          </a:ln>
+        </p:spPr>
+        <p:style>
+          <a:lnRef idx="1">
+            <a:schemeClr val="accent1"/>
+          </a:lnRef>
+          <a:fillRef idx="3">
+            <a:schemeClr val="accent1"/>
+          </a:fillRef>
+          <a:effectRef idx="2">
+            <a:schemeClr val="accent1"/>
+          </a:effectRef>
+          <a:fontRef idx="minor">
+            <a:schemeClr val="lt1"/>
+          </a:fontRef>
+        </p:style>
+        <p:txBody>
+          <a:bodyPr rtlCol="0" anchor="ctr"/>
+          <a:lstStyle/>
+          <a:p>
+            <a:pPr algn="ctr"/>
+          </a:p>
+        </p:txBody>
+      </p:sp>
+      <p:sp>
+        <p:nvSpPr>
+          <p:cNvPr id="4" name="Rectangle 3"/>
+          <p:cNvSpPr/>
+          <p:nvPr/>
+        </p:nvSpPr>
+        <p:spPr>
+          <a:xfrm>
+            <a:off x="320040" y="914400"/>
+            <a:ext cx="8503920" cy="3931920"/>
+          </a:xfrm>
+          <a:prstGeom prst="rect">
+            <a:avLst/>
+          </a:prstGeom>
+          <a:solidFill>
+            <a:srgbClr val="111122"/>
+          </a:solidFill>
+          <a:ln>
+            <a:noFill/>
+          </a:ln>
+        </p:spPr>
+        <p:style>
+          <a:lnRef idx="1">
+            <a:schemeClr val="accent1"/>
+          </a:lnRef>
+          <a:fillRef idx="3">
+            <a:schemeClr val="accent1"/>
+          </a:fillRef>
+          <a:effectRef idx="2">
+            <a:schemeClr val="accent1"/>
+          </a:effectRef>
+          <a:fontRef idx="minor">
+            <a:schemeClr val="lt1"/>
+          </a:fontRef>
+        </p:style>
+        <p:txBody>
+          <a:bodyPr rtlCol="0" anchor="ctr"/>
+          <a:lstStyle/>
+          <a:p>
+            <a:pPr algn="ctr"/>
+          </a:p>
+        </p:txBody>
+      </p:sp>
+      <p:sp>
+        <p:nvSpPr>
+          <p:cNvPr id="5" name="TextBox 4"/>
+          <p:cNvSpPr txBox="1"/>
+          <p:nvPr/>
+        </p:nvSpPr>
+        <p:spPr>
+          <a:xfrm>
+            <a:off x="429768" y="1005840"/>
+            <a:ext cx="8284464" cy="3794760"/>
+          </a:xfrm>
+          <a:prstGeom prst="rect">
+            <a:avLst/>
+          </a:prstGeom>
+          <a:noFill/>
+        </p:spPr>
+        <p:txBody>
+          <a:bodyPr wrap="square">
+            <a:spAutoFit/>
+          </a:bodyPr>
+          <a:lstStyle/>
+          <a:p>
+            <a:r>
+              <a:rPr sz="1050">
+                <a:solidFill>
+                  <a:srgbClr val="A6E3A1"/>
+                </a:solidFill>
+                <a:latin typeface="Courier New"/>
+              </a:rPr>
+              <a:t>def _run_tool_loop(llm_with_tools, tool_map, messages, max_iter=5):</a:t>
+            </a:r>
+          </a:p>
+          <a:p>
+            <a:r>
+              <a:rPr sz="1050">
+                <a:solidFill>
+                  <a:srgbClr val="A6E3A1"/>
+                </a:solidFill>
+                <a:latin typeface="Courier New"/>
+              </a:rPr>
+              <a:t>    tools_used      = []</a:t>
+            </a:r>
+          </a:p>
+          <a:p>
+            <a:r>
+              <a:rPr sz="1050">
+                <a:solidFill>
+                  <a:srgbClr val="A6E3A1"/>
+                </a:solidFill>
+                <a:latin typeface="Courier New"/>
+              </a:rPr>
+              <a:t>    context_snippets = []</a:t>
+            </a:r>
+          </a:p>
+          <a:p>
+            <a:r>
+              <a:rPr sz="1050">
+                <a:solidFill>
+                  <a:srgbClr val="A6E3A1"/>
+                </a:solidFill>
+                <a:latin typeface="Courier New"/>
+              </a:rPr>
+              <a:t/>
+            </a:r>
+          </a:p>
+          <a:p>
+            <a:r>
+              <a:rPr sz="1050">
+                <a:solidFill>
+                  <a:srgbClr val="A6E3A1"/>
+                </a:solidFill>
+                <a:latin typeface="Courier New"/>
+              </a:rPr>
+              <a:t>    for _ in range(max_iter):          # max 5 iterations (8 for calculation_agent)</a:t>
+            </a:r>
+          </a:p>
+          <a:p>
+            <a:r>
+              <a:rPr sz="1050">
+                <a:solidFill>
+                  <a:srgbClr val="A6E3A1"/>
+                </a:solidFill>
+                <a:latin typeface="Courier New"/>
+              </a:rPr>
+              <a:t/>
+            </a:r>
+          </a:p>
+          <a:p>
+            <a:r>
+              <a:rPr sz="1050">
+                <a:solidFill>
+                  <a:srgbClr val="A6E3A1"/>
+                </a:solidFill>
+                <a:latin typeface="Courier New"/>
+              </a:rPr>
+              <a:t>        response = llm_with_tools.invoke(messages)</a:t>
+            </a:r>
+          </a:p>
+          <a:p>
+            <a:r>
+              <a:rPr sz="1050">
+                <a:solidFill>
+                  <a:srgbClr val="A6E3A1"/>
+                </a:solidFill>
+                <a:latin typeface="Courier New"/>
+              </a:rPr>
+              <a:t>        messages.append(response)</a:t>
+            </a:r>
+          </a:p>
+          <a:p>
+            <a:r>
+              <a:rPr sz="1050">
+                <a:solidFill>
+                  <a:srgbClr val="A6E3A1"/>
+                </a:solidFill>
+                <a:latin typeface="Courier New"/>
+              </a:rPr>
+              <a:t/>
+            </a:r>
+          </a:p>
+          <a:p>
+            <a:r>
+              <a:rPr sz="1050">
+                <a:solidFill>
+                  <a:srgbClr val="A6E3A1"/>
+                </a:solidFill>
+                <a:latin typeface="Courier New"/>
+              </a:rPr>
+              <a:t>        if not response.tool_calls:    # LLM finished — no more tool calls</a:t>
+            </a:r>
+          </a:p>
+          <a:p>
+            <a:r>
+              <a:rPr sz="1050">
+                <a:solidFill>
+                  <a:srgbClr val="A6E3A1"/>
+                </a:solidFill>
+                <a:latin typeface="Courier New"/>
+              </a:rPr>
+              <a:t>            break</a:t>
+            </a:r>
+          </a:p>
+          <a:p>
+            <a:r>
+              <a:rPr sz="1050">
+                <a:solidFill>
+                  <a:srgbClr val="A6E3A1"/>
+                </a:solidFill>
+                <a:latin typeface="Courier New"/>
+              </a:rPr>
+              <a:t/>
+            </a:r>
+          </a:p>
+          <a:p>
+            <a:r>
+              <a:rPr sz="1050">
+                <a:solidFill>
+                  <a:srgbClr val="A6E3A1"/>
+                </a:solidFill>
+                <a:latin typeface="Courier New"/>
+              </a:rPr>
+              <a:t>        for tc in response.tool_calls:</a:t>
+            </a:r>
+          </a:p>
+          <a:p>
+            <a:r>
+              <a:rPr sz="1050">
+                <a:solidFill>
+                  <a:srgbClr val="A6E3A1"/>
+                </a:solidFill>
+                <a:latin typeface="Courier New"/>
+              </a:rPr>
+              <a:t>            name   = tc["name"]        # e.g. "document_reader"</a:t>
+            </a:r>
+          </a:p>
+          <a:p>
+            <a:r>
+              <a:rPr sz="1050">
+                <a:solidFill>
+                  <a:srgbClr val="A6E3A1"/>
+                </a:solidFill>
+                <a:latin typeface="Courier New"/>
+              </a:rPr>
+              <a:t>            result = tool_map[name].invoke(tc["args"])   # runs the tool</a:t>
+            </a:r>
+          </a:p>
+          <a:p>
+            <a:r>
+              <a:rPr sz="1050">
+                <a:solidFill>
+                  <a:srgbClr val="A6E3A1"/>
+                </a:solidFill>
+                <a:latin typeface="Courier New"/>
+              </a:rPr>
+              <a:t>            tools_used.append(name)</a:t>
+            </a:r>
+          </a:p>
+          <a:p>
+            <a:r>
+              <a:rPr sz="1050">
+                <a:solidFill>
+                  <a:srgbClr val="A6E3A1"/>
+                </a:solidFill>
+                <a:latin typeface="Courier New"/>
+              </a:rPr>
+              <a:t>            context_snippets.append(str(result))</a:t>
+            </a:r>
+          </a:p>
+          <a:p>
+            <a:r>
+              <a:rPr sz="1050">
+                <a:solidFill>
+                  <a:srgbClr val="A6E3A1"/>
+                </a:solidFill>
+                <a:latin typeface="Courier New"/>
+              </a:rPr>
+              <a:t>            messages.append(ToolMessage(content=result, tool_call_id=tc["id"]))</a:t>
+            </a:r>
+          </a:p>
+          <a:p>
+            <a:r>
+              <a:rPr sz="1050">
+                <a:solidFill>
+                  <a:srgbClr val="A6E3A1"/>
+                </a:solidFill>
+                <a:latin typeface="Courier New"/>
+              </a:rPr>
+              <a:t/>
+            </a:r>
+          </a:p>
+          <a:p>
+            <a:r>
+              <a:rPr sz="1050">
+                <a:solidFill>
+                  <a:srgbClr val="A6E3A1"/>
+                </a:solidFill>
+                <a:latin typeface="Courier New"/>
+              </a:rPr>
+              <a:t>    return messages, tools_used, context_snippets</a:t>
+            </a:r>
+          </a:p>
+          <a:p>
+            <a:r>
+              <a:rPr sz="1050">
+                <a:solidFill>
+                  <a:srgbClr val="A6E3A1"/>
+                </a:solidFill>
+                <a:latin typeface="Courier New"/>
+              </a:rPr>
+              <a:t/>
+            </a:r>
+          </a:p>
+          <a:p>
+            <a:r>
+              <a:rPr sz="1050">
+                <a:solidFill>
+                  <a:srgbClr val="A6E3A1"/>
+                </a:solidFill>
+                <a:latin typeface="Courier New"/>
+              </a:rPr>
+              <a:t/>
+            </a:r>
+          </a:p>
+          <a:p>
+            <a:r>
+              <a:rPr sz="1050">
+                <a:solidFill>
+                  <a:srgbClr val="A6E3A1"/>
+                </a:solidFill>
+                <a:latin typeface="Courier New"/>
+              </a:rPr>
+              <a:t># If context_snippets is still empty after the loop:</a:t>
+            </a:r>
+          </a:p>
+          <a:p>
+            <a:r>
+              <a:rPr sz="1050">
+                <a:solidFill>
+                  <a:srgbClr val="A6E3A1"/>
+                </a:solidFill>
+                <a:latin typeface="Courier New"/>
+              </a:rPr>
+              <a:t>if not context_snippets:</a:t>
+            </a:r>
+          </a:p>
+          <a:p>
+            <a:r>
+              <a:rPr sz="1050">
+                <a:solidFill>
+                  <a:srgbClr val="A6E3A1"/>
+                </a:solidFill>
+                <a:latin typeface="Courier New"/>
+              </a:rPr>
+              <a:t>    context_snippets = _direct_retrieve(state["user_input"])</a:t>
+            </a:r>
+          </a:p>
+          <a:p>
+            <a:r>
+              <a:rPr sz="1050">
+                <a:solidFill>
+                  <a:srgbClr val="A6E3A1"/>
+                </a:solidFill>
+                <a:latin typeface="Courier New"/>
+              </a:rPr>
+              <a:t>    # → searches retriever directly and logs a FALLBACK entry</a:t>
+            </a:r>
+          </a:p>
+        </p:txBody>
+      </p:sp>
+      <p:sp>
+        <p:nvSpPr>
+          <p:cNvPr id="6" name="TextBox 5"/>
+          <p:cNvSpPr txBox="1"/>
+          <p:nvPr/>
+        </p:nvSpPr>
+        <p:spPr>
+          <a:xfrm>
+            <a:off x="320040" y="4937760"/>
+            <a:ext cx="8503920" cy="594360"/>
+          </a:xfrm>
+          <a:prstGeom prst="rect">
+            <a:avLst/>
+          </a:prstGeom>
+          <a:noFill/>
+        </p:spPr>
+        <p:txBody>
+          <a:bodyPr wrap="square">
+            <a:spAutoFit/>
+          </a:bodyPr>
+          <a:lstStyle/>
+          <a:p>
+            <a:pPr algn="l"/>
+            <a:r>
+              <a:rPr sz="1100" b="0">
+                <a:solidFill>
+                  <a:srgbClr val="CDD6F4"/>
+                </a:solidFill>
+              </a:rPr>
+              <a:t>Each tool result becomes a ToolMessage appended to the message chain so the LLM sees it in the next iteration.</a:t>
+            </a:r>
+          </a:p>
+          <a:p>
+            <a:pPr algn="l"/>
+            <a:r>
+              <a:rPr sz="1100" b="0">
+                <a:solidFill>
+                  <a:srgbClr val="CDD6F4"/>
+                </a:solidFill>
+              </a:rPr>
+              <a:t>After the loop, context_snippets feeds the Phase 2 structured-output call.</a:t>
+            </a:r>
+          </a:p>
+        </p:txBody>
+      </p:sp>
+    </p:spTree>
+  </p:cSld>
+  <p:clrMapOvr>
+    <a:masterClrMapping/>
+  </p:clrMapOvr>
+</p:sld>
+</file>
+
+<file path=ppt/slides/slide33.xml><?xml version="1.0" encoding="utf-8"?>
+<p:sld xmlns:a="http://schemas.openxmlformats.org/drawingml/2006/main" xmlns:p="http://schemas.openxmlformats.org/presentationml/2006/main" xmlns:r="http://schemas.openxmlformats.org/officeDocument/2006/relationships">
+  <p:cSld>
+    <p:bg>
+      <p:bgPr>
+        <a:solidFill>
+          <a:srgbClr val="1E1E2E"/>
+        </a:solidFill>
+        <a:effectLst/>
+      </p:bgPr>
+    </p:bg>
+    <p:spTree>
+      <p:nvGrpSpPr>
+        <p:cNvPr id="1" name=""/>
+        <p:cNvGrpSpPr/>
+        <p:nvPr/>
+      </p:nvGrpSpPr>
+      <p:grpSpPr/>
+      <p:sp>
+        <p:nvSpPr>
+          <p:cNvPr id="2" name="TextBox 1"/>
+          <p:cNvSpPr txBox="1"/>
+          <p:nvPr/>
+        </p:nvSpPr>
+        <p:spPr>
+          <a:xfrm>
+            <a:off x="365760" y="164592"/>
+            <a:ext cx="8412480" cy="594360"/>
+          </a:xfrm>
+          <a:prstGeom prst="rect">
+            <a:avLst/>
+          </a:prstGeom>
+          <a:noFill/>
+        </p:spPr>
+        <p:txBody>
+          <a:bodyPr wrap="none">
+            <a:spAutoFit/>
+          </a:bodyPr>
+          <a:lstStyle/>
+          <a:p>
+            <a:pPr algn="l"/>
+            <a:r>
+              <a:rPr b="1" sz="2200">
+                <a:solidFill>
+                  <a:srgbClr val="74C7EC"/>
+                </a:solidFill>
+              </a:rPr>
+              <a:t>All 5 Agent Nodes — Listing &amp; Role (agent.py)</a:t>
+            </a:r>
+          </a:p>
+        </p:txBody>
+      </p:sp>
+      <p:sp>
+        <p:nvSpPr>
+          <p:cNvPr id="3" name="Rectangle 2"/>
+          <p:cNvSpPr/>
+          <p:nvPr/>
+        </p:nvSpPr>
+        <p:spPr>
+          <a:xfrm>
+            <a:off x="365760" y="804672"/>
+            <a:ext cx="8412480" cy="27432"/>
+          </a:xfrm>
+          <a:prstGeom prst="rect">
+            <a:avLst/>
+          </a:prstGeom>
+          <a:solidFill>
+            <a:srgbClr val="74C7EC"/>
+          </a:solidFill>
+          <a:ln>
+            <a:noFill/>
+          </a:ln>
+        </p:spPr>
+        <p:style>
+          <a:lnRef idx="1">
+            <a:schemeClr val="accent1"/>
+          </a:lnRef>
+          <a:fillRef idx="3">
+            <a:schemeClr val="accent1"/>
+          </a:fillRef>
+          <a:effectRef idx="2">
+            <a:schemeClr val="accent1"/>
+          </a:effectRef>
+          <a:fontRef idx="minor">
+            <a:schemeClr val="lt1"/>
+          </a:fontRef>
+        </p:style>
+        <p:txBody>
+          <a:bodyPr rtlCol="0" anchor="ctr"/>
+          <a:lstStyle/>
+          <a:p>
+            <a:pPr algn="ctr"/>
+          </a:p>
+        </p:txBody>
+      </p:sp>
+      <p:sp>
+        <p:nvSpPr>
+          <p:cNvPr id="4" name="Rectangle 3"/>
+          <p:cNvSpPr/>
+          <p:nvPr/>
+        </p:nvSpPr>
+        <p:spPr>
+          <a:xfrm>
+            <a:off x="274320" y="914400"/>
+            <a:ext cx="8595360" cy="877824"/>
+          </a:xfrm>
+          <a:prstGeom prst="rect">
+            <a:avLst/>
+          </a:prstGeom>
+          <a:solidFill>
+            <a:srgbClr val="222238"/>
+          </a:solidFill>
+          <a:ln w="12700">
+            <a:solidFill>
+              <a:srgbClr val="74C7EC"/>
+            </a:solidFill>
+          </a:ln>
+        </p:spPr>
+        <p:style>
+          <a:lnRef idx="1">
+            <a:schemeClr val="accent1"/>
+          </a:lnRef>
+          <a:fillRef idx="3">
+            <a:schemeClr val="accent1"/>
+          </a:fillRef>
+          <a:effectRef idx="2">
+            <a:schemeClr val="accent1"/>
+          </a:effectRef>
+          <a:fontRef idx="minor">
+            <a:schemeClr val="lt1"/>
+          </a:fontRef>
+        </p:style>
+        <p:txBody>
+          <a:bodyPr rtlCol="0" anchor="ctr"/>
+          <a:lstStyle/>
+          <a:p>
+            <a:pPr algn="ctr"/>
+          </a:p>
+        </p:txBody>
+      </p:sp>
+      <p:sp>
+        <p:nvSpPr>
+          <p:cNvPr id="5" name="Rectangle 4"/>
+          <p:cNvSpPr/>
+          <p:nvPr/>
+        </p:nvSpPr>
+        <p:spPr>
+          <a:xfrm>
+            <a:off x="347472" y="1188720"/>
+            <a:ext cx="256032" cy="256032"/>
+          </a:xfrm>
+          <a:prstGeom prst="rect">
+            <a:avLst/>
+          </a:prstGeom>
+          <a:solidFill>
+            <a:srgbClr val="74C7EC"/>
+          </a:solidFill>
+          <a:ln>
+            <a:noFill/>
+          </a:ln>
+        </p:spPr>
+        <p:style>
+          <a:lnRef idx="1">
+            <a:schemeClr val="accent1"/>
+          </a:lnRef>
+          <a:fillRef idx="3">
+            <a:schemeClr val="accent1"/>
+          </a:fillRef>
+          <a:effectRef idx="2">
+            <a:schemeClr val="accent1"/>
+          </a:effectRef>
+          <a:fontRef idx="minor">
+            <a:schemeClr val="lt1"/>
+          </a:fontRef>
+        </p:style>
+        <p:txBody>
+          <a:bodyPr rtlCol="0" anchor="ctr"/>
+          <a:lstStyle/>
+          <a:p>
+            <a:pPr algn="ctr"/>
+          </a:p>
+        </p:txBody>
+      </p:sp>
+      <p:sp>
+        <p:nvSpPr>
+          <p:cNvPr id="6" name="TextBox 5"/>
+          <p:cNvSpPr txBox="1"/>
+          <p:nvPr/>
+        </p:nvSpPr>
+        <p:spPr>
+          <a:xfrm>
+            <a:off x="347472" y="1188720"/>
+            <a:ext cx="256032" cy="256032"/>
+          </a:xfrm>
+          <a:prstGeom prst="rect">
+            <a:avLst/>
+          </a:prstGeom>
+          <a:noFill/>
+        </p:spPr>
+        <p:txBody>
+          <a:bodyPr wrap="none">
+            <a:spAutoFit/>
+          </a:bodyPr>
+          <a:lstStyle/>
+          <a:p>
+            <a:pPr algn="ctr"/>
+            <a:r>
+              <a:rPr b="1" sz="1000">
+                <a:solidFill>
+                  <a:srgbClr val="1E1E2E"/>
+                </a:solidFill>
+              </a:rPr>
+              <a:t>1</a:t>
+            </a:r>
+          </a:p>
+        </p:txBody>
+      </p:sp>
+      <p:sp>
+        <p:nvSpPr>
+          <p:cNvPr id="7" name="TextBox 6"/>
+          <p:cNvSpPr txBox="1"/>
+          <p:nvPr/>
+        </p:nvSpPr>
+        <p:spPr>
+          <a:xfrm>
+            <a:off x="685800" y="1143000"/>
+            <a:ext cx="1828800" cy="411480"/>
+          </a:xfrm>
+          <a:prstGeom prst="rect">
+            <a:avLst/>
+          </a:prstGeom>
+          <a:noFill/>
+        </p:spPr>
+        <p:txBody>
+          <a:bodyPr wrap="square">
+            <a:spAutoFit/>
+          </a:bodyPr>
+          <a:lstStyle/>
+          <a:p>
+            <a:pPr algn="l"/>
+            <a:r>
+              <a:rPr sz="1300" b="1">
+                <a:solidFill>
+                  <a:srgbClr val="74C7EC"/>
+                </a:solidFill>
+                <a:latin typeface="Courier New"/>
+              </a:rPr>
+              <a:t>classify_intent</a:t>
+            </a:r>
+          </a:p>
+        </p:txBody>
+      </p:sp>
+      <p:sp>
+        <p:nvSpPr>
+          <p:cNvPr id="8" name="TextBox 7"/>
+          <p:cNvSpPr txBox="1"/>
+          <p:nvPr/>
+        </p:nvSpPr>
+        <p:spPr>
+          <a:xfrm>
+            <a:off x="2606040" y="987552"/>
+            <a:ext cx="6172200" cy="702346982400"/>
+          </a:xfrm>
+          <a:prstGeom prst="rect">
+            <a:avLst/>
+          </a:prstGeom>
+          <a:noFill/>
+        </p:spPr>
+        <p:txBody>
+          <a:bodyPr wrap="square">
+            <a:spAutoFit/>
+          </a:bodyPr>
+          <a:lstStyle/>
+          <a:p>
+            <a:pPr algn="l"/>
+            <a:r>
+              <a:rPr sz="1050" b="0">
+                <a:solidFill>
+                  <a:srgbClr val="FFFFFF"/>
+                </a:solidFill>
+              </a:rPr>
+              <a:t>WHEN: Entry point — every message</a:t>
+            </a:r>
+          </a:p>
+          <a:p>
+            <a:pPr algn="l"/>
+            <a:r>
+              <a:rPr sz="1050" b="0">
+                <a:solidFill>
+                  <a:srgbClr val="FFFFFF"/>
+                </a:solidFill>
+              </a:rPr>
+              <a:t>DOES: Calls llm.with_structured_output(UserIntent) with the enriched</a:t>
+            </a:r>
+          </a:p>
+          <a:p>
+            <a:pPr algn="l"/>
+            <a:r>
+              <a:rPr sz="1050" b="0">
+                <a:solidFill>
+                  <a:srgbClr val="FFFFFF"/>
+                </a:solidFill>
+              </a:rPr>
+              <a:t>      intent classification prompt + last 6 messages as history.</a:t>
+            </a:r>
+          </a:p>
+          <a:p>
+            <a:pPr algn="l"/>
+            <a:r>
+              <a:rPr sz="1050" b="0">
+                <a:solidFill>
+                  <a:srgbClr val="FFFFFF"/>
+                </a:solidFill>
+              </a:rPr>
+              <a:t>OUT:  intent_type, confidence, reasoning → sets next_step for routing</a:t>
+            </a:r>
+          </a:p>
+        </p:txBody>
+      </p:sp>
+      <p:sp>
+        <p:nvSpPr>
+          <p:cNvPr id="9" name="Rectangle 8"/>
+          <p:cNvSpPr/>
+          <p:nvPr/>
+        </p:nvSpPr>
+        <p:spPr>
+          <a:xfrm>
+            <a:off x="274320" y="1847088"/>
+            <a:ext cx="8595360" cy="877824"/>
+          </a:xfrm>
+          <a:prstGeom prst="rect">
+            <a:avLst/>
+          </a:prstGeom>
+          <a:solidFill>
+            <a:srgbClr val="222238"/>
+          </a:solidFill>
+          <a:ln w="12700">
+            <a:solidFill>
+              <a:srgbClr val="A6E3A1"/>
+            </a:solidFill>
+          </a:ln>
+        </p:spPr>
+        <p:style>
+          <a:lnRef idx="1">
+            <a:schemeClr val="accent1"/>
+          </a:lnRef>
+          <a:fillRef idx="3">
+            <a:schemeClr val="accent1"/>
+          </a:fillRef>
+          <a:effectRef idx="2">
+            <a:schemeClr val="accent1"/>
+          </a:effectRef>
+          <a:fontRef idx="minor">
+            <a:schemeClr val="lt1"/>
+          </a:fontRef>
+        </p:style>
+        <p:txBody>
+          <a:bodyPr rtlCol="0" anchor="ctr"/>
+          <a:lstStyle/>
+          <a:p>
+            <a:pPr algn="ctr"/>
+          </a:p>
+        </p:txBody>
+      </p:sp>
+      <p:sp>
+        <p:nvSpPr>
+          <p:cNvPr id="10" name="Rectangle 9"/>
+          <p:cNvSpPr/>
+          <p:nvPr/>
+        </p:nvSpPr>
+        <p:spPr>
+          <a:xfrm>
+            <a:off x="347472" y="2121408"/>
+            <a:ext cx="256032" cy="256032"/>
+          </a:xfrm>
+          <a:prstGeom prst="rect">
+            <a:avLst/>
+          </a:prstGeom>
+          <a:solidFill>
+            <a:srgbClr val="A6E3A1"/>
+          </a:solidFill>
+          <a:ln>
+            <a:noFill/>
+          </a:ln>
+        </p:spPr>
+        <p:style>
+          <a:lnRef idx="1">
+            <a:schemeClr val="accent1"/>
+          </a:lnRef>
+          <a:fillRef idx="3">
+            <a:schemeClr val="accent1"/>
+          </a:fillRef>
+          <a:effectRef idx="2">
+            <a:schemeClr val="accent1"/>
+          </a:effectRef>
+          <a:fontRef idx="minor">
+            <a:schemeClr val="lt1"/>
+          </a:fontRef>
+        </p:style>
+        <p:txBody>
+          <a:bodyPr rtlCol="0" anchor="ctr"/>
+          <a:lstStyle/>
+          <a:p>
+            <a:pPr algn="ctr"/>
+          </a:p>
+        </p:txBody>
+      </p:sp>
+      <p:sp>
+        <p:nvSpPr>
+          <p:cNvPr id="11" name="TextBox 10"/>
+          <p:cNvSpPr txBox="1"/>
+          <p:nvPr/>
+        </p:nvSpPr>
+        <p:spPr>
+          <a:xfrm>
+            <a:off x="347472" y="2121408"/>
+            <a:ext cx="256032" cy="256032"/>
+          </a:xfrm>
+          <a:prstGeom prst="rect">
+            <a:avLst/>
+          </a:prstGeom>
+          <a:noFill/>
+        </p:spPr>
+        <p:txBody>
+          <a:bodyPr wrap="none">
+            <a:spAutoFit/>
+          </a:bodyPr>
+          <a:lstStyle/>
+          <a:p>
+            <a:pPr algn="ctr"/>
+            <a:r>
+              <a:rPr b="1" sz="1000">
+                <a:solidFill>
+                  <a:srgbClr val="1E1E2E"/>
+                </a:solidFill>
+              </a:rPr>
+              <a:t>2</a:t>
+            </a:r>
+          </a:p>
+        </p:txBody>
+      </p:sp>
+      <p:sp>
+        <p:nvSpPr>
+          <p:cNvPr id="12" name="TextBox 11"/>
+          <p:cNvSpPr txBox="1"/>
+          <p:nvPr/>
+        </p:nvSpPr>
+        <p:spPr>
+          <a:xfrm>
+            <a:off x="685800" y="2075688"/>
+            <a:ext cx="1828800" cy="411480"/>
+          </a:xfrm>
+          <a:prstGeom prst="rect">
+            <a:avLst/>
+          </a:prstGeom>
+          <a:noFill/>
+        </p:spPr>
+        <p:txBody>
+          <a:bodyPr wrap="square">
+            <a:spAutoFit/>
+          </a:bodyPr>
+          <a:lstStyle/>
+          <a:p>
+            <a:pPr algn="l"/>
+            <a:r>
+              <a:rPr sz="1300" b="1">
+                <a:solidFill>
+                  <a:srgbClr val="A6E3A1"/>
+                </a:solidFill>
+                <a:latin typeface="Courier New"/>
+              </a:rPr>
+              <a:t>qa_agent</a:t>
+            </a:r>
+          </a:p>
+        </p:txBody>
+      </p:sp>
+      <p:sp>
+        <p:nvSpPr>
+          <p:cNvPr id="13" name="TextBox 12"/>
+          <p:cNvSpPr txBox="1"/>
+          <p:nvPr/>
+        </p:nvSpPr>
+        <p:spPr>
+          <a:xfrm>
+            <a:off x="2606040" y="1920240"/>
+            <a:ext cx="6172200" cy="702346982400"/>
+          </a:xfrm>
+          <a:prstGeom prst="rect">
+            <a:avLst/>
+          </a:prstGeom>
+          <a:noFill/>
+        </p:spPr>
+        <p:txBody>
+          <a:bodyPr wrap="square">
+            <a:spAutoFit/>
+          </a:bodyPr>
+          <a:lstStyle/>
+          <a:p>
+            <a:pPr algn="l"/>
+            <a:r>
+              <a:rPr sz="1050" b="0">
+                <a:solidFill>
+                  <a:srgbClr val="FFFFFF"/>
+                </a:solidFill>
+              </a:rPr>
+              <a:t>WHEN: intent_type == 'qa'</a:t>
+            </a:r>
+          </a:p>
+          <a:p>
+            <a:pPr algn="l"/>
+            <a:r>
+              <a:rPr sz="1050" b="0">
+                <a:solidFill>
+                  <a:srgbClr val="FFFFFF"/>
+                </a:solidFill>
+              </a:rPr>
+              <a:t>DOES: Tool loop with document_reader → Phase 2 with AnswerResponse.</a:t>
+            </a:r>
+          </a:p>
+          <a:p>
+            <a:pPr algn="l"/>
+            <a:r>
+              <a:rPr sz="1050" b="0">
+                <a:solidFill>
+                  <a:srgbClr val="FFFFFF"/>
+                </a:solidFill>
+              </a:rPr>
+              <a:t>      Injects _available_docs_hint() so LLM knows all doc IDs.</a:t>
+            </a:r>
+          </a:p>
+          <a:p>
+            <a:pPr algn="l"/>
+            <a:r>
+              <a:rPr sz="1050" b="0">
+                <a:solidFill>
+                  <a:srgbClr val="FFFFFF"/>
+                </a:solidFill>
+              </a:rPr>
+              <a:t>OUT:  AnswerResponse(question, answer, sources, confidence)</a:t>
+            </a:r>
+          </a:p>
+        </p:txBody>
+      </p:sp>
+      <p:sp>
+        <p:nvSpPr>
+          <p:cNvPr id="14" name="Rectangle 13"/>
+          <p:cNvSpPr/>
+          <p:nvPr/>
+        </p:nvSpPr>
+        <p:spPr>
+          <a:xfrm>
+            <a:off x="274320" y="2779776"/>
+            <a:ext cx="8595360" cy="877824"/>
+          </a:xfrm>
+          <a:prstGeom prst="rect">
+            <a:avLst/>
+          </a:prstGeom>
+          <a:solidFill>
+            <a:srgbClr val="222238"/>
+          </a:solidFill>
+          <a:ln w="12700">
+            <a:solidFill>
+              <a:srgbClr val="F9E2AF"/>
+            </a:solidFill>
+          </a:ln>
+        </p:spPr>
+        <p:style>
+          <a:lnRef idx="1">
+            <a:schemeClr val="accent1"/>
+          </a:lnRef>
+          <a:fillRef idx="3">
+            <a:schemeClr val="accent1"/>
+          </a:fillRef>
+          <a:effectRef idx="2">
+            <a:schemeClr val="accent1"/>
+          </a:effectRef>
+          <a:fontRef idx="minor">
+            <a:schemeClr val="lt1"/>
+          </a:fontRef>
+        </p:style>
+        <p:txBody>
+          <a:bodyPr rtlCol="0" anchor="ctr"/>
+          <a:lstStyle/>
+          <a:p>
+            <a:pPr algn="ctr"/>
+          </a:p>
+        </p:txBody>
+      </p:sp>
+      <p:sp>
+        <p:nvSpPr>
+          <p:cNvPr id="15" name="Rectangle 14"/>
+          <p:cNvSpPr/>
+          <p:nvPr/>
+        </p:nvSpPr>
+        <p:spPr>
+          <a:xfrm>
+            <a:off x="347472" y="3054096"/>
+            <a:ext cx="256032" cy="256032"/>
+          </a:xfrm>
+          <a:prstGeom prst="rect">
+            <a:avLst/>
+          </a:prstGeom>
+          <a:solidFill>
+            <a:srgbClr val="F9E2AF"/>
+          </a:solidFill>
+          <a:ln>
+            <a:noFill/>
+          </a:ln>
+        </p:spPr>
+        <p:style>
+          <a:lnRef idx="1">
+            <a:schemeClr val="accent1"/>
+          </a:lnRef>
+          <a:fillRef idx="3">
+            <a:schemeClr val="accent1"/>
+          </a:fillRef>
+          <a:effectRef idx="2">
+            <a:schemeClr val="accent1"/>
+          </a:effectRef>
+          <a:fontRef idx="minor">
+            <a:schemeClr val="lt1"/>
+          </a:fontRef>
+        </p:style>
+        <p:txBody>
+          <a:bodyPr rtlCol="0" anchor="ctr"/>
+          <a:lstStyle/>
+          <a:p>
+            <a:pPr algn="ctr"/>
+          </a:p>
+        </p:txBody>
+      </p:sp>
+      <p:sp>
+        <p:nvSpPr>
+          <p:cNvPr id="16" name="TextBox 15"/>
+          <p:cNvSpPr txBox="1"/>
+          <p:nvPr/>
+        </p:nvSpPr>
+        <p:spPr>
+          <a:xfrm>
+            <a:off x="347472" y="3054096"/>
+            <a:ext cx="256032" cy="256032"/>
+          </a:xfrm>
+          <a:prstGeom prst="rect">
+            <a:avLst/>
+          </a:prstGeom>
+          <a:noFill/>
+        </p:spPr>
+        <p:txBody>
+          <a:bodyPr wrap="none">
+            <a:spAutoFit/>
+          </a:bodyPr>
+          <a:lstStyle/>
+          <a:p>
+            <a:pPr algn="ctr"/>
+            <a:r>
+              <a:rPr b="1" sz="1000">
+                <a:solidFill>
+                  <a:srgbClr val="1E1E2E"/>
+                </a:solidFill>
+              </a:rPr>
+              <a:t>3</a:t>
+            </a:r>
+          </a:p>
+        </p:txBody>
+      </p:sp>
+      <p:sp>
+        <p:nvSpPr>
+          <p:cNvPr id="17" name="TextBox 16"/>
+          <p:cNvSpPr txBox="1"/>
+          <p:nvPr/>
+        </p:nvSpPr>
+        <p:spPr>
+          <a:xfrm>
+            <a:off x="685800" y="3008376"/>
+            <a:ext cx="1828800" cy="411480"/>
+          </a:xfrm>
+          <a:prstGeom prst="rect">
+            <a:avLst/>
+          </a:prstGeom>
+          <a:noFill/>
+        </p:spPr>
+        <p:txBody>
+          <a:bodyPr wrap="square">
+            <a:spAutoFit/>
+          </a:bodyPr>
+          <a:lstStyle/>
+          <a:p>
+            <a:pPr algn="l"/>
+            <a:r>
+              <a:rPr sz="1300" b="1">
+                <a:solidFill>
+                  <a:srgbClr val="F9E2AF"/>
+                </a:solidFill>
+                <a:latin typeface="Courier New"/>
+              </a:rPr>
+              <a:t>summarization_agent</a:t>
+            </a:r>
+          </a:p>
+        </p:txBody>
+      </p:sp>
+      <p:sp>
+        <p:nvSpPr>
+          <p:cNvPr id="18" name="TextBox 17"/>
+          <p:cNvSpPr txBox="1"/>
+          <p:nvPr/>
+        </p:nvSpPr>
+        <p:spPr>
+          <a:xfrm>
+            <a:off x="2606040" y="2852928"/>
+            <a:ext cx="6172200" cy="702346982400"/>
+          </a:xfrm>
+          <a:prstGeom prst="rect">
+            <a:avLst/>
+          </a:prstGeom>
+          <a:noFill/>
+        </p:spPr>
+        <p:txBody>
+          <a:bodyPr wrap="square">
+            <a:spAutoFit/>
+          </a:bodyPr>
+          <a:lstStyle/>
+          <a:p>
+            <a:pPr algn="l"/>
+            <a:r>
+              <a:rPr sz="1050" b="0">
+                <a:solidFill>
+                  <a:srgbClr val="FFFFFF"/>
+                </a:solidFill>
+              </a:rPr>
+              <a:t>WHEN: intent_type == 'summarization'</a:t>
+            </a:r>
+          </a:p>
+          <a:p>
+            <a:pPr algn="l"/>
+            <a:r>
+              <a:rPr sz="1050" b="0">
+                <a:solidFill>
+                  <a:srgbClr val="FFFFFF"/>
+                </a:solidFill>
+              </a:rPr>
+              <a:t>DOES: Tool loop retrieves document → Phase 2 with SummarizationResponse.</a:t>
+            </a:r>
+          </a:p>
+          <a:p>
+            <a:pPr algn="l"/>
+            <a:r>
+              <a:rPr sz="1050" b="0">
+                <a:solidFill>
+                  <a:srgbClr val="FFFFFF"/>
+                </a:solidFill>
+              </a:rPr>
+              <a:t>      Extracts 3–7 key points from document content.</a:t>
+            </a:r>
+          </a:p>
+          <a:p>
+            <a:pPr algn="l"/>
+            <a:r>
+              <a:rPr sz="1050" b="0">
+                <a:solidFill>
+                  <a:srgbClr val="FFFFFF"/>
+                </a:solidFill>
+              </a:rPr>
+              <a:t>OUT:  SummarizationResponse(summary, key_points, sources)</a:t>
+            </a:r>
+          </a:p>
+        </p:txBody>
+      </p:sp>
+      <p:sp>
+        <p:nvSpPr>
+          <p:cNvPr id="19" name="Rectangle 18"/>
+          <p:cNvSpPr/>
+          <p:nvPr/>
+        </p:nvSpPr>
+        <p:spPr>
+          <a:xfrm>
+            <a:off x="274320" y="3712464"/>
+            <a:ext cx="8595360" cy="877824"/>
+          </a:xfrm>
+          <a:prstGeom prst="rect">
+            <a:avLst/>
+          </a:prstGeom>
+          <a:solidFill>
+            <a:srgbClr val="222238"/>
+          </a:solidFill>
+          <a:ln w="12700">
+            <a:solidFill>
+              <a:srgbClr val="FAB387"/>
+            </a:solidFill>
+          </a:ln>
+        </p:spPr>
+        <p:style>
+          <a:lnRef idx="1">
+            <a:schemeClr val="accent1"/>
+          </a:lnRef>
+          <a:fillRef idx="3">
+            <a:schemeClr val="accent1"/>
+          </a:fillRef>
+          <a:effectRef idx="2">
+            <a:schemeClr val="accent1"/>
+          </a:effectRef>
+          <a:fontRef idx="minor">
+            <a:schemeClr val="lt1"/>
+          </a:fontRef>
+        </p:style>
+        <p:txBody>
+          <a:bodyPr rtlCol="0" anchor="ctr"/>
+          <a:lstStyle/>
+          <a:p>
+            <a:pPr algn="ctr"/>
+          </a:p>
+        </p:txBody>
+      </p:sp>
+      <p:sp>
+        <p:nvSpPr>
+          <p:cNvPr id="20" name="Rectangle 19"/>
+          <p:cNvSpPr/>
+          <p:nvPr/>
+        </p:nvSpPr>
+        <p:spPr>
+          <a:xfrm>
+            <a:off x="347472" y="3986784"/>
+            <a:ext cx="256032" cy="256032"/>
+          </a:xfrm>
+          <a:prstGeom prst="rect">
+            <a:avLst/>
+          </a:prstGeom>
+          <a:solidFill>
+            <a:srgbClr val="FAB387"/>
+          </a:solidFill>
+          <a:ln>
+            <a:noFill/>
+          </a:ln>
+        </p:spPr>
+        <p:style>
+          <a:lnRef idx="1">
+            <a:schemeClr val="accent1"/>
+          </a:lnRef>
+          <a:fillRef idx="3">
+            <a:schemeClr val="accent1"/>
+          </a:fillRef>
+          <a:effectRef idx="2">
+            <a:schemeClr val="accent1"/>
+          </a:effectRef>
+          <a:fontRef idx="minor">
+            <a:schemeClr val="lt1"/>
+          </a:fontRef>
+        </p:style>
+        <p:txBody>
+          <a:bodyPr rtlCol="0" anchor="ctr"/>
+          <a:lstStyle/>
+          <a:p>
+            <a:pPr algn="ctr"/>
+          </a:p>
+        </p:txBody>
+      </p:sp>
+      <p:sp>
+        <p:nvSpPr>
+          <p:cNvPr id="21" name="TextBox 20"/>
+          <p:cNvSpPr txBox="1"/>
+          <p:nvPr/>
+        </p:nvSpPr>
+        <p:spPr>
+          <a:xfrm>
+            <a:off x="347472" y="3986784"/>
+            <a:ext cx="256032" cy="256032"/>
+          </a:xfrm>
+          <a:prstGeom prst="rect">
+            <a:avLst/>
+          </a:prstGeom>
+          <a:noFill/>
+        </p:spPr>
+        <p:txBody>
+          <a:bodyPr wrap="none">
+            <a:spAutoFit/>
+          </a:bodyPr>
+          <a:lstStyle/>
+          <a:p>
+            <a:pPr algn="ctr"/>
+            <a:r>
+              <a:rPr b="1" sz="1000">
+                <a:solidFill>
+                  <a:srgbClr val="1E1E2E"/>
+                </a:solidFill>
+              </a:rPr>
+              <a:t>4</a:t>
+            </a:r>
+          </a:p>
+        </p:txBody>
+      </p:sp>
+      <p:sp>
+        <p:nvSpPr>
+          <p:cNvPr id="22" name="TextBox 21"/>
+          <p:cNvSpPr txBox="1"/>
+          <p:nvPr/>
+        </p:nvSpPr>
+        <p:spPr>
+          <a:xfrm>
+            <a:off x="685800" y="3941064"/>
+            <a:ext cx="1828800" cy="411480"/>
+          </a:xfrm>
+          <a:prstGeom prst="rect">
+            <a:avLst/>
+          </a:prstGeom>
+          <a:noFill/>
+        </p:spPr>
+        <p:txBody>
+          <a:bodyPr wrap="square">
+            <a:spAutoFit/>
+          </a:bodyPr>
+          <a:lstStyle/>
+          <a:p>
+            <a:pPr algn="l"/>
+            <a:r>
+              <a:rPr sz="1300" b="1">
+                <a:solidFill>
+                  <a:srgbClr val="FAB387"/>
+                </a:solidFill>
+                <a:latin typeface="Courier New"/>
+              </a:rPr>
+              <a:t>calculation_agent</a:t>
+            </a:r>
+          </a:p>
+        </p:txBody>
+      </p:sp>
+      <p:sp>
+        <p:nvSpPr>
+          <p:cNvPr id="23" name="TextBox 22"/>
+          <p:cNvSpPr txBox="1"/>
+          <p:nvPr/>
+        </p:nvSpPr>
+        <p:spPr>
+          <a:xfrm>
+            <a:off x="2606040" y="3785616"/>
+            <a:ext cx="6172200" cy="702346982400"/>
+          </a:xfrm>
+          <a:prstGeom prst="rect">
+            <a:avLst/>
+          </a:prstGeom>
+          <a:noFill/>
+        </p:spPr>
+        <p:txBody>
+          <a:bodyPr wrap="square">
+            <a:spAutoFit/>
+          </a:bodyPr>
+          <a:lstStyle/>
+          <a:p>
+            <a:pPr algn="l"/>
+            <a:r>
+              <a:rPr sz="1050" b="0">
+                <a:solidFill>
+                  <a:srgbClr val="FFFFFF"/>
+                </a:solidFill>
+              </a:rPr>
+              <a:t>WHEN: intent_type == 'calculation'</a:t>
+            </a:r>
+          </a:p>
+          <a:p>
+            <a:pPr algn="l"/>
+            <a:r>
+              <a:rPr sz="1050" b="0">
+                <a:solidFill>
+                  <a:srgbClr val="FFFFFF"/>
+                </a:solidFill>
+              </a:rPr>
+              <a:t>DOES: Tool loop (max 8 iter) — calls document_reader then calculator.</a:t>
+            </a:r>
+          </a:p>
+          <a:p>
+            <a:pPr algn="l"/>
+            <a:r>
+              <a:rPr sz="1050" b="0">
+                <a:solidFill>
+                  <a:srgbClr val="FFFFFF"/>
+                </a:solidFill>
+              </a:rPr>
+              <a:t>      Phase 2 with CalculationResponse including the expression used.</a:t>
+            </a:r>
+          </a:p>
+          <a:p>
+            <a:pPr algn="l"/>
+            <a:r>
+              <a:rPr sz="1050" b="0">
+                <a:solidFill>
+                  <a:srgbClr val="FFFFFF"/>
+                </a:solidFill>
+              </a:rPr>
+              <a:t>OUT:  CalculationResponse(question, result, expression, sources)</a:t>
+            </a:r>
+          </a:p>
+        </p:txBody>
+      </p:sp>
+      <p:sp>
+        <p:nvSpPr>
+          <p:cNvPr id="24" name="Rectangle 23"/>
+          <p:cNvSpPr/>
+          <p:nvPr/>
+        </p:nvSpPr>
+        <p:spPr>
+          <a:xfrm>
+            <a:off x="274320" y="4645152"/>
+            <a:ext cx="8595360" cy="877824"/>
+          </a:xfrm>
+          <a:prstGeom prst="rect">
+            <a:avLst/>
+          </a:prstGeom>
+          <a:solidFill>
+            <a:srgbClr val="222238"/>
+          </a:solidFill>
+          <a:ln w="12700">
+            <a:solidFill>
+              <a:srgbClr val="CBA6F7"/>
+            </a:solidFill>
+          </a:ln>
+        </p:spPr>
+        <p:style>
+          <a:lnRef idx="1">
+            <a:schemeClr val="accent1"/>
+          </a:lnRef>
+          <a:fillRef idx="3">
+            <a:schemeClr val="accent1"/>
+          </a:fillRef>
+          <a:effectRef idx="2">
+            <a:schemeClr val="accent1"/>
+          </a:effectRef>
+          <a:fontRef idx="minor">
+            <a:schemeClr val="lt1"/>
+          </a:fontRef>
+        </p:style>
+        <p:txBody>
+          <a:bodyPr rtlCol="0" anchor="ctr"/>
+          <a:lstStyle/>
+          <a:p>
+            <a:pPr algn="ctr"/>
+          </a:p>
+        </p:txBody>
+      </p:sp>
+      <p:sp>
+        <p:nvSpPr>
+          <p:cNvPr id="25" name="Rectangle 24"/>
+          <p:cNvSpPr/>
+          <p:nvPr/>
+        </p:nvSpPr>
+        <p:spPr>
+          <a:xfrm>
+            <a:off x="347472" y="4919472"/>
+            <a:ext cx="256032" cy="256032"/>
+          </a:xfrm>
+          <a:prstGeom prst="rect">
+            <a:avLst/>
+          </a:prstGeom>
+          <a:solidFill>
+            <a:srgbClr val="CBA6F7"/>
+          </a:solidFill>
+          <a:ln>
+            <a:noFill/>
+          </a:ln>
+        </p:spPr>
+        <p:style>
+          <a:lnRef idx="1">
+            <a:schemeClr val="accent1"/>
+          </a:lnRef>
+          <a:fillRef idx="3">
+            <a:schemeClr val="accent1"/>
+          </a:fillRef>
+          <a:effectRef idx="2">
+            <a:schemeClr val="accent1"/>
+          </a:effectRef>
+          <a:fontRef idx="minor">
+            <a:schemeClr val="lt1"/>
+          </a:fontRef>
+        </p:style>
+        <p:txBody>
+          <a:bodyPr rtlCol="0" anchor="ctr"/>
+          <a:lstStyle/>
+          <a:p>
+            <a:pPr algn="ctr"/>
+          </a:p>
+        </p:txBody>
+      </p:sp>
+      <p:sp>
+        <p:nvSpPr>
+          <p:cNvPr id="26" name="TextBox 25"/>
+          <p:cNvSpPr txBox="1"/>
+          <p:nvPr/>
+        </p:nvSpPr>
+        <p:spPr>
+          <a:xfrm>
+            <a:off x="347472" y="4919472"/>
+            <a:ext cx="256032" cy="256032"/>
+          </a:xfrm>
+          <a:prstGeom prst="rect">
+            <a:avLst/>
+          </a:prstGeom>
+          <a:noFill/>
+        </p:spPr>
+        <p:txBody>
+          <a:bodyPr wrap="none">
+            <a:spAutoFit/>
+          </a:bodyPr>
+          <a:lstStyle/>
+          <a:p>
+            <a:pPr algn="ctr"/>
+            <a:r>
+              <a:rPr b="1" sz="1000">
+                <a:solidFill>
+                  <a:srgbClr val="1E1E2E"/>
+                </a:solidFill>
+              </a:rPr>
+              <a:t>5</a:t>
+            </a:r>
+          </a:p>
+        </p:txBody>
+      </p:sp>
+      <p:sp>
+        <p:nvSpPr>
+          <p:cNvPr id="27" name="TextBox 26"/>
+          <p:cNvSpPr txBox="1"/>
+          <p:nvPr/>
+        </p:nvSpPr>
+        <p:spPr>
+          <a:xfrm>
+            <a:off x="685800" y="4873752"/>
+            <a:ext cx="1828800" cy="411480"/>
+          </a:xfrm>
+          <a:prstGeom prst="rect">
+            <a:avLst/>
+          </a:prstGeom>
+          <a:noFill/>
+        </p:spPr>
+        <p:txBody>
+          <a:bodyPr wrap="square">
+            <a:spAutoFit/>
+          </a:bodyPr>
+          <a:lstStyle/>
+          <a:p>
+            <a:pPr algn="l"/>
+            <a:r>
+              <a:rPr sz="1300" b="1">
+                <a:solidFill>
+                  <a:srgbClr val="CBA6F7"/>
+                </a:solidFill>
+                <a:latin typeface="Courier New"/>
+              </a:rPr>
+              <a:t>update_memory</a:t>
+            </a:r>
+          </a:p>
+        </p:txBody>
+      </p:sp>
+      <p:sp>
+        <p:nvSpPr>
+          <p:cNvPr id="28" name="TextBox 27"/>
+          <p:cNvSpPr txBox="1"/>
+          <p:nvPr/>
+        </p:nvSpPr>
+        <p:spPr>
+          <a:xfrm>
+            <a:off x="2606040" y="4718304"/>
+            <a:ext cx="6172200" cy="702346982400"/>
+          </a:xfrm>
+          <a:prstGeom prst="rect">
+            <a:avLst/>
+          </a:prstGeom>
+          <a:noFill/>
+        </p:spPr>
+        <p:txBody>
+          <a:bodyPr wrap="square">
+            <a:spAutoFit/>
+          </a:bodyPr>
+          <a:lstStyle/>
+          <a:p>
+            <a:pPr algn="l"/>
+            <a:r>
+              <a:rPr sz="1050" b="0">
+                <a:solidFill>
+                  <a:srgbClr val="FFFFFF"/>
+                </a:solidFill>
+              </a:rPr>
+              <a:t>WHEN: After any specialist agent — always the last node before END</a:t>
+            </a:r>
+          </a:p>
+          <a:p>
+            <a:pPr algn="l"/>
+            <a:r>
+              <a:rPr sz="1050" b="0">
+                <a:solidFill>
+                  <a:srgbClr val="FFFFFF"/>
+                </a:solidFill>
+              </a:rPr>
+              <a:t>DOES: LLM writes 1–2 sentence conversation summary. Tracks active_documents</a:t>
+            </a:r>
+          </a:p>
+          <a:p>
+            <a:pPr algn="l"/>
+            <a:r>
+              <a:rPr sz="1050" b="0">
+                <a:solidFill>
+                  <a:srgbClr val="FFFFFF"/>
+                </a:solidFill>
+              </a:rPr>
+              <a:t>      by reading sources from current_response. Sets next_step = END.</a:t>
+            </a:r>
+          </a:p>
+          <a:p>
+            <a:pPr algn="l"/>
+            <a:r>
+              <a:rPr sz="1050" b="0">
+                <a:solidFill>
+                  <a:srgbClr val="FFFFFF"/>
+                </a:solidFill>
+              </a:rPr>
+              <a:t>OUT:  conversation_summary, active_documents updated in state</a:t>
+            </a:r>
+          </a:p>
+        </p:txBody>
+      </p:sp>
+    </p:spTree>
+  </p:cSld>
+  <p:clrMapOvr>
+    <a:masterClrMapping/>
+  </p:clrMapOvr>
+</p:sld>
+</file>
+
+<file path=ppt/slides/slide34.xml><?xml version="1.0" encoding="utf-8"?>
+<p:sld xmlns:a="http://schemas.openxmlformats.org/drawingml/2006/main" xmlns:p="http://schemas.openxmlformats.org/presentationml/2006/main" xmlns:r="http://schemas.openxmlformats.org/officeDocument/2006/relationships">
+  <p:cSld>
+    <p:bg>
+      <p:bgPr>
+        <a:solidFill>
+          <a:srgbClr val="1E1E2E"/>
+        </a:solidFill>
+        <a:effectLst/>
+      </p:bgPr>
+    </p:bg>
+    <p:spTree>
+      <p:nvGrpSpPr>
+        <p:cNvPr id="1" name=""/>
+        <p:cNvGrpSpPr/>
+        <p:nvPr/>
+      </p:nvGrpSpPr>
+      <p:grpSpPr/>
+      <p:sp>
+        <p:nvSpPr>
+          <p:cNvPr id="2" name="TextBox 1"/>
+          <p:cNvSpPr txBox="1"/>
+          <p:nvPr/>
+        </p:nvSpPr>
+        <p:spPr>
+          <a:xfrm>
+            <a:off x="365760" y="164592"/>
+            <a:ext cx="8412480" cy="594360"/>
+          </a:xfrm>
+          <a:prstGeom prst="rect">
+            <a:avLst/>
+          </a:prstGeom>
+          <a:noFill/>
+        </p:spPr>
+        <p:txBody>
+          <a:bodyPr wrap="none">
+            <a:spAutoFit/>
+          </a:bodyPr>
+          <a:lstStyle/>
+          <a:p>
+            <a:pPr algn="l"/>
+            <a:r>
+              <a:rPr b="1" sz="2200">
+                <a:solidFill>
+                  <a:srgbClr val="74C7EC"/>
+                </a:solidFill>
+              </a:rPr>
+              <a:t>LangGraph Routing — Edges &amp; Conditional Flow</a:t>
+            </a:r>
+          </a:p>
+        </p:txBody>
+      </p:sp>
+      <p:sp>
+        <p:nvSpPr>
+          <p:cNvPr id="3" name="Rectangle 2"/>
+          <p:cNvSpPr/>
+          <p:nvPr/>
+        </p:nvSpPr>
+        <p:spPr>
+          <a:xfrm>
+            <a:off x="365760" y="804672"/>
+            <a:ext cx="8412480" cy="27432"/>
+          </a:xfrm>
+          <a:prstGeom prst="rect">
+            <a:avLst/>
+          </a:prstGeom>
+          <a:solidFill>
+            <a:srgbClr val="74C7EC"/>
+          </a:solidFill>
+          <a:ln>
+            <a:noFill/>
+          </a:ln>
+        </p:spPr>
+        <p:style>
+          <a:lnRef idx="1">
+            <a:schemeClr val="accent1"/>
+          </a:lnRef>
+          <a:fillRef idx="3">
+            <a:schemeClr val="accent1"/>
+          </a:fillRef>
+          <a:effectRef idx="2">
+            <a:schemeClr val="accent1"/>
+          </a:effectRef>
+          <a:fontRef idx="minor">
+            <a:schemeClr val="lt1"/>
+          </a:fontRef>
+        </p:style>
+        <p:txBody>
+          <a:bodyPr rtlCol="0" anchor="ctr"/>
+          <a:lstStyle/>
+          <a:p>
+            <a:pPr algn="ctr"/>
+          </a:p>
+        </p:txBody>
+      </p:sp>
+      <p:sp>
+        <p:nvSpPr>
+          <p:cNvPr id="4" name="Rectangle 3"/>
+          <p:cNvSpPr/>
+          <p:nvPr/>
+        </p:nvSpPr>
+        <p:spPr>
+          <a:xfrm>
+            <a:off x="320040" y="914400"/>
+            <a:ext cx="8503920" cy="5212080"/>
+          </a:xfrm>
+          <a:prstGeom prst="rect">
+            <a:avLst/>
+          </a:prstGeom>
+          <a:solidFill>
+            <a:srgbClr val="111122"/>
+          </a:solidFill>
+          <a:ln>
+            <a:noFill/>
+          </a:ln>
+        </p:spPr>
+        <p:style>
+          <a:lnRef idx="1">
+            <a:schemeClr val="accent1"/>
+          </a:lnRef>
+          <a:fillRef idx="3">
+            <a:schemeClr val="accent1"/>
+          </a:fillRef>
+          <a:effectRef idx="2">
+            <a:schemeClr val="accent1"/>
+          </a:effectRef>
+          <a:fontRef idx="minor">
+            <a:schemeClr val="lt1"/>
+          </a:fontRef>
+        </p:style>
+        <p:txBody>
+          <a:bodyPr rtlCol="0" anchor="ctr"/>
+          <a:lstStyle/>
+          <a:p>
+            <a:pPr algn="ctr"/>
+          </a:p>
+        </p:txBody>
+      </p:sp>
+      <p:sp>
+        <p:nvSpPr>
+          <p:cNvPr id="5" name="TextBox 4"/>
+          <p:cNvSpPr txBox="1"/>
+          <p:nvPr/>
+        </p:nvSpPr>
+        <p:spPr>
+          <a:xfrm>
+            <a:off x="429768" y="1005840"/>
+            <a:ext cx="8284464" cy="5074920"/>
+          </a:xfrm>
+          <a:prstGeom prst="rect">
+            <a:avLst/>
+          </a:prstGeom>
+          <a:noFill/>
+        </p:spPr>
+        <p:txBody>
+          <a:bodyPr wrap="square">
+            <a:spAutoFit/>
+          </a:bodyPr>
+          <a:lstStyle/>
+          <a:p>
+            <a:r>
+              <a:rPr sz="1000">
+                <a:solidFill>
+                  <a:srgbClr val="A6E3A1"/>
+                </a:solidFill>
+                <a:latin typeface="Courier New"/>
+              </a:rPr>
+              <a:t>                        ┌─────────────────────────┐</a:t>
+            </a:r>
+          </a:p>
+          <a:p>
+            <a:r>
+              <a:rPr sz="1000">
+                <a:solidFill>
+                  <a:srgbClr val="A6E3A1"/>
+                </a:solidFill>
+                <a:latin typeface="Courier New"/>
+              </a:rPr>
+              <a:t>                        │   User sends a message   │</a:t>
+            </a:r>
+          </a:p>
+          <a:p>
+            <a:r>
+              <a:rPr sz="1000">
+                <a:solidFill>
+                  <a:srgbClr val="A6E3A1"/>
+                </a:solidFill>
+                <a:latin typeface="Courier New"/>
+              </a:rPr>
+              <a:t>                        └────────────┬────────────┘</a:t>
+            </a:r>
+          </a:p>
+          <a:p>
+            <a:r>
+              <a:rPr sz="1000">
+                <a:solidFill>
+                  <a:srgbClr val="A6E3A1"/>
+                </a:solidFill>
+                <a:latin typeface="Courier New"/>
+              </a:rPr>
+              <a:t>                                     │</a:t>
+            </a:r>
+          </a:p>
+          <a:p>
+            <a:r>
+              <a:rPr sz="1000">
+                <a:solidFill>
+                  <a:srgbClr val="A6E3A1"/>
+                </a:solidFill>
+                <a:latin typeface="Courier New"/>
+              </a:rPr>
+              <a:t>                                     ▼</a:t>
+            </a:r>
+          </a:p>
+          <a:p>
+            <a:r>
+              <a:rPr sz="1000">
+                <a:solidFill>
+                  <a:srgbClr val="A6E3A1"/>
+                </a:solidFill>
+                <a:latin typeface="Courier New"/>
+              </a:rPr>
+              <a:t>                          ┌──────────────────────┐</a:t>
+            </a:r>
+          </a:p>
+          <a:p>
+            <a:r>
+              <a:rPr sz="1000">
+                <a:solidFill>
+                  <a:srgbClr val="A6E3A1"/>
+                </a:solidFill>
+                <a:latin typeface="Courier New"/>
+              </a:rPr>
+              <a:t>                          │   classify_intent     │  ← Entry Point</a:t>
+            </a:r>
+          </a:p>
+          <a:p>
+            <a:r>
+              <a:rPr sz="1000">
+                <a:solidFill>
+                  <a:srgbClr val="A6E3A1"/>
+                </a:solidFill>
+                <a:latin typeface="Courier New"/>
+              </a:rPr>
+              <a:t>                          │   (UserIntent schema) │</a:t>
+            </a:r>
+          </a:p>
+          <a:p>
+            <a:r>
+              <a:rPr sz="1000">
+                <a:solidFill>
+                  <a:srgbClr val="A6E3A1"/>
+                </a:solidFill>
+                <a:latin typeface="Courier New"/>
+              </a:rPr>
+              <a:t>                          └──────────┬───────────┘</a:t>
+            </a:r>
+          </a:p>
+          <a:p>
+            <a:r>
+              <a:rPr sz="1000">
+                <a:solidFill>
+                  <a:srgbClr val="A6E3A1"/>
+                </a:solidFill>
+                <a:latin typeface="Courier New"/>
+              </a:rPr>
+              <a:t>                                     │</a:t>
+            </a:r>
+          </a:p>
+          <a:p>
+            <a:r>
+              <a:rPr sz="1000">
+                <a:solidFill>
+                  <a:srgbClr val="A6E3A1"/>
+                </a:solidFill>
+                <a:latin typeface="Courier New"/>
+              </a:rPr>
+              <a:t>               ┌─────────────────────┼──────────────────────┐</a:t>
+            </a:r>
+          </a:p>
+          <a:p>
+            <a:r>
+              <a:rPr sz="1000">
+                <a:solidFill>
+                  <a:srgbClr val="A6E3A1"/>
+                </a:solidFill>
+                <a:latin typeface="Courier New"/>
+              </a:rPr>
+              <a:t>               │ intent="qa"         │ intent="summarization" │ intent="calculation"</a:t>
+            </a:r>
+          </a:p>
+          <a:p>
+            <a:r>
+              <a:rPr sz="1000">
+                <a:solidFill>
+                  <a:srgbClr val="A6E3A1"/>
+                </a:solidFill>
+                <a:latin typeface="Courier New"/>
+              </a:rPr>
+              <a:t>               ▼                     ▼                        ▼</a:t>
+            </a:r>
+          </a:p>
+          <a:p>
+            <a:r>
+              <a:rPr sz="1000">
+                <a:solidFill>
+                  <a:srgbClr val="A6E3A1"/>
+                </a:solidFill>
+                <a:latin typeface="Courier New"/>
+              </a:rPr>
+              <a:t>       ┌──────────────┐   ┌─────────────────────┐   ┌──────────────────────┐</a:t>
+            </a:r>
+          </a:p>
+          <a:p>
+            <a:r>
+              <a:rPr sz="1000">
+                <a:solidFill>
+                  <a:srgbClr val="A6E3A1"/>
+                </a:solidFill>
+                <a:latin typeface="Courier New"/>
+              </a:rPr>
+              <a:t>       │   qa_agent   │   │ summarization_agent  │   │  calculation_agent   │</a:t>
+            </a:r>
+          </a:p>
+          <a:p>
+            <a:r>
+              <a:rPr sz="1000">
+                <a:solidFill>
+                  <a:srgbClr val="A6E3A1"/>
+                </a:solidFill>
+                <a:latin typeface="Courier New"/>
+              </a:rPr>
+              <a:t>       │  AnswerResp  │   │ SummarizationResp    │   │  CalculationResp     │</a:t>
+            </a:r>
+          </a:p>
+          <a:p>
+            <a:r>
+              <a:rPr sz="1000">
+                <a:solidFill>
+                  <a:srgbClr val="A6E3A1"/>
+                </a:solidFill>
+                <a:latin typeface="Courier New"/>
+              </a:rPr>
+              <a:t>       └──────┬───────┘   └──────────┬──────────┘   └──────────┬───────────┘</a:t>
+            </a:r>
+          </a:p>
+          <a:p>
+            <a:r>
+              <a:rPr sz="1000">
+                <a:solidFill>
+                  <a:srgbClr val="A6E3A1"/>
+                </a:solidFill>
+                <a:latin typeface="Courier New"/>
+              </a:rPr>
+              <a:t>              │                      │                           │</a:t>
+            </a:r>
+          </a:p>
+          <a:p>
+            <a:r>
+              <a:rPr sz="1000">
+                <a:solidFill>
+                  <a:srgbClr val="A6E3A1"/>
+                </a:solidFill>
+                <a:latin typeface="Courier New"/>
+              </a:rPr>
+              <a:t>              └──────────────────────┼───────────────────────────┘</a:t>
+            </a:r>
+          </a:p>
+          <a:p>
+            <a:r>
+              <a:rPr sz="1000">
+                <a:solidFill>
+                  <a:srgbClr val="A6E3A1"/>
+                </a:solidFill>
+                <a:latin typeface="Courier New"/>
+              </a:rPr>
+              <a:t>                                     │</a:t>
+            </a:r>
+          </a:p>
+          <a:p>
+            <a:r>
+              <a:rPr sz="1000">
+                <a:solidFill>
+                  <a:srgbClr val="A6E3A1"/>
+                </a:solidFill>
+                <a:latin typeface="Courier New"/>
+              </a:rPr>
+              <a:t>                                     ▼</a:t>
+            </a:r>
+          </a:p>
+          <a:p>
+            <a:r>
+              <a:rPr sz="1000">
+                <a:solidFill>
+                  <a:srgbClr val="A6E3A1"/>
+                </a:solidFill>
+                <a:latin typeface="Courier New"/>
+              </a:rPr>
+              <a:t>                           ┌──────────────────┐</a:t>
+            </a:r>
+          </a:p>
+          <a:p>
+            <a:r>
+              <a:rPr sz="1000">
+                <a:solidFill>
+                  <a:srgbClr val="A6E3A1"/>
+                </a:solidFill>
+                <a:latin typeface="Courier New"/>
+              </a:rPr>
+              <a:t>                           │  update_memory   │  ← Always runs last</a:t>
+            </a:r>
+          </a:p>
+          <a:p>
+            <a:r>
+              <a:rPr sz="1000">
+                <a:solidFill>
+                  <a:srgbClr val="A6E3A1"/>
+                </a:solidFill>
+                <a:latin typeface="Courier New"/>
+              </a:rPr>
+              <a:t>                           │  (summary + docs)│</a:t>
+            </a:r>
+          </a:p>
+          <a:p>
+            <a:r>
+              <a:rPr sz="1000">
+                <a:solidFill>
+                  <a:srgbClr val="A6E3A1"/>
+                </a:solidFill>
+                <a:latin typeface="Courier New"/>
+              </a:rPr>
+              <a:t>                           └────────┬─────────┘</a:t>
+            </a:r>
+          </a:p>
+          <a:p>
+            <a:r>
+              <a:rPr sz="1000">
+                <a:solidFill>
+                  <a:srgbClr val="A6E3A1"/>
+                </a:solidFill>
+                <a:latin typeface="Courier New"/>
+              </a:rPr>
+              <a:t>                                    │</a:t>
+            </a:r>
+          </a:p>
+          <a:p>
+            <a:r>
+              <a:rPr sz="1000">
+                <a:solidFill>
+                  <a:srgbClr val="A6E3A1"/>
+                </a:solidFill>
+                <a:latin typeface="Courier New"/>
+              </a:rPr>
+              <a:t>                                    ▼</a:t>
+            </a:r>
+          </a:p>
+          <a:p>
+            <a:r>
+              <a:rPr sz="1000">
+                <a:solidFill>
+                  <a:srgbClr val="A6E3A1"/>
+                </a:solidFill>
+                <a:latin typeface="Courier New"/>
+              </a:rPr>
+              <a:t>                                   END</a:t>
+            </a:r>
+          </a:p>
+          <a:p>
+            <a:r>
+              <a:rPr sz="1000">
+                <a:solidFill>
+                  <a:srgbClr val="A6E3A1"/>
+                </a:solidFill>
+                <a:latin typeface="Courier New"/>
+              </a:rPr>
+              <a:t/>
+            </a:r>
+          </a:p>
+          <a:p>
+            <a:r>
+              <a:rPr sz="1000">
+                <a:solidFill>
+                  <a:srgbClr val="A6E3A1"/>
+                </a:solidFill>
+                <a:latin typeface="Courier New"/>
+              </a:rPr>
+              <a:t/>
+            </a:r>
+          </a:p>
+          <a:p>
+            <a:r>
+              <a:rPr sz="1000">
+                <a:solidFill>
+                  <a:srgbClr val="A6E3A1"/>
+                </a:solidFill>
+                <a:latin typeface="Courier New"/>
+              </a:rPr>
+              <a:t>Graph compiled with: workflow.compile(checkpointer=InMemorySaver())</a:t>
+            </a:r>
+          </a:p>
+          <a:p>
+            <a:r>
+              <a:rPr sz="1000">
+                <a:solidFill>
+                  <a:srgbClr val="A6E3A1"/>
+                </a:solidFill>
+                <a:latin typeface="Courier New"/>
+              </a:rPr>
+              <a:t>Routing function:    _route_to_agent(state) → returns state["next_step"]</a:t>
+            </a:r>
           </a:p>
         </p:txBody>
       </p:sp>

--- a/Document_Assistant.pptx
+++ b/Document_Assistant.pptx
@@ -21460,48 +21460,82 @@
         </p:nvSpPr>
         <p:spPr>
           <a:xfrm>
-            <a:off x="365760" y="164592"/>
-            <a:ext cx="8412480" cy="594360"/>
-          </a:xfrm>
-          <a:prstGeom prst="rect">
-            <a:avLst/>
-          </a:prstGeom>
-          <a:noFill/>
-        </p:spPr>
-        <p:txBody>
-          <a:bodyPr wrap="none">
+            <a:off x="320040" y="137160"/>
+            <a:ext cx="8046720" cy="475488"/>
+          </a:xfrm>
+          <a:prstGeom prst="rect">
+            <a:avLst/>
+          </a:prstGeom>
+          <a:noFill/>
+        </p:spPr>
+        <p:txBody>
+          <a:bodyPr wrap="square">
             <a:spAutoFit/>
           </a:bodyPr>
           <a:lstStyle/>
           <a:p>
             <a:pPr algn="l"/>
             <a:r>
-              <a:rPr b="1" sz="2200">
-                <a:solidFill>
-                  <a:srgbClr val="74C7EC"/>
-                </a:solidFill>
-              </a:rPr>
-              <a:t>AgentState — Full Field Listing (agent.py)</a:t>
-            </a:r>
-          </a:p>
-        </p:txBody>
-      </p:sp>
-      <p:sp>
-        <p:nvSpPr>
-          <p:cNvPr id="3" name="Rectangle 2"/>
+              <a:rPr sz="1800" b="1">
+                <a:solidFill>
+                  <a:srgbClr val="FFFFFF"/>
+                </a:solidFill>
+              </a:rPr>
+              <a:t>AgentState — All 11 Fields  (agent.py)</a:t>
+            </a:r>
+          </a:p>
+        </p:txBody>
+      </p:sp>
+      <p:sp>
+        <p:nvSpPr>
+          <p:cNvPr id="3" name="TextBox 2"/>
+          <p:cNvSpPr txBox="1"/>
+          <p:nvPr/>
+        </p:nvSpPr>
+        <p:spPr>
+          <a:xfrm>
+            <a:off x="8321040" y="164592"/>
+            <a:ext cx="548640" cy="320040"/>
+          </a:xfrm>
+          <a:prstGeom prst="rect">
+            <a:avLst/>
+          </a:prstGeom>
+          <a:noFill/>
+        </p:spPr>
+        <p:txBody>
+          <a:bodyPr wrap="square">
+            <a:spAutoFit/>
+          </a:bodyPr>
+          <a:lstStyle/>
+          <a:p>
+            <a:pPr algn="r"/>
+            <a:r>
+              <a:rPr sz="900" b="0">
+                <a:solidFill>
+                  <a:srgbClr val="A7F3D0"/>
+                </a:solidFill>
+              </a:rPr>
+              <a:t>29/34</a:t>
+            </a:r>
+          </a:p>
+        </p:txBody>
+      </p:sp>
+      <p:sp>
+        <p:nvSpPr>
+          <p:cNvPr id="4" name="Rectangle 3"/>
           <p:cNvSpPr/>
           <p:nvPr/>
         </p:nvSpPr>
         <p:spPr>
           <a:xfrm>
-            <a:off x="365760" y="804672"/>
-            <a:ext cx="8412480" cy="27432"/>
+            <a:off x="320040" y="658368"/>
+            <a:ext cx="8503920" cy="22860"/>
           </a:xfrm>
           <a:prstGeom prst="rect">
             <a:avLst/>
           </a:prstGeom>
           <a:solidFill>
-            <a:srgbClr val="74C7EC"/>
+            <a:srgbClr val="10B981"/>
           </a:solidFill>
           <a:ln>
             <a:noFill/>
@@ -21531,30 +21565,31 @@
       </p:sp>
       <p:sp>
         <p:nvSpPr>
-          <p:cNvPr id="4" name="TextBox 3"/>
-          <p:cNvSpPr txBox="1"/>
-          <p:nvPr/>
-        </p:nvSpPr>
-        <p:spPr>
-          <a:xfrm>
-            <a:off x="320040" y="868680"/>
-            <a:ext cx="1554480" cy="292608"/>
-          </a:xfrm>
-          <a:prstGeom prst="rect">
-            <a:avLst/>
-          </a:prstGeom>
-          <a:noFill/>
-        </p:spPr>
-        <p:txBody>
-          <a:bodyPr wrap="none">
+          <p:cNvPr id="5" name="TextBox 4"/>
+          <p:cNvSpPr txBox="1"/>
+          <p:nvPr/>
+        </p:nvSpPr>
+        <p:spPr>
+          <a:xfrm>
+            <a:off x="292608" y="731520"/>
+            <a:ext cx="1691640" cy="256032"/>
+          </a:xfrm>
+          <a:prstGeom prst="rect">
+            <a:avLst/>
+          </a:prstGeom>
+          <a:noFill/>
+        </p:spPr>
+        <p:txBody>
+          <a:bodyPr wrap="square">
             <a:spAutoFit/>
           </a:bodyPr>
           <a:lstStyle/>
           <a:p>
-            <a:r>
-              <a:rPr b="1" sz="1100">
-                <a:solidFill>
-                  <a:srgbClr val="74C7EC"/>
+            <a:pPr algn="l"/>
+            <a:r>
+              <a:rPr sz="1000" b="1">
+                <a:solidFill>
+                  <a:srgbClr val="10B981"/>
                 </a:solidFill>
               </a:rPr>
               <a:t>Field</a:t>
@@ -21564,30 +21599,31 @@
       </p:sp>
       <p:sp>
         <p:nvSpPr>
-          <p:cNvPr id="5" name="TextBox 4"/>
-          <p:cNvSpPr txBox="1"/>
-          <p:nvPr/>
-        </p:nvSpPr>
-        <p:spPr>
-          <a:xfrm>
-            <a:off x="1920240" y="868680"/>
-            <a:ext cx="1188720" cy="292608"/>
-          </a:xfrm>
-          <a:prstGeom prst="rect">
-            <a:avLst/>
-          </a:prstGeom>
-          <a:noFill/>
-        </p:spPr>
-        <p:txBody>
-          <a:bodyPr wrap="none">
+          <p:cNvPr id="6" name="TextBox 5"/>
+          <p:cNvSpPr txBox="1"/>
+          <p:nvPr/>
+        </p:nvSpPr>
+        <p:spPr>
+          <a:xfrm>
+            <a:off x="2029968" y="731520"/>
+            <a:ext cx="1234440" cy="256032"/>
+          </a:xfrm>
+          <a:prstGeom prst="rect">
+            <a:avLst/>
+          </a:prstGeom>
+          <a:noFill/>
+        </p:spPr>
+        <p:txBody>
+          <a:bodyPr wrap="square">
             <a:spAutoFit/>
           </a:bodyPr>
           <a:lstStyle/>
           <a:p>
-            <a:r>
-              <a:rPr b="1" sz="1100">
-                <a:solidFill>
-                  <a:srgbClr val="74C7EC"/>
+            <a:pPr algn="l"/>
+            <a:r>
+              <a:rPr sz="1000" b="1">
+                <a:solidFill>
+                  <a:srgbClr val="10B981"/>
                 </a:solidFill>
               </a:rPr>
               <a:t>Type</a:t>
@@ -21597,30 +21633,31 @@
       </p:sp>
       <p:sp>
         <p:nvSpPr>
-          <p:cNvPr id="6" name="TextBox 5"/>
-          <p:cNvSpPr txBox="1"/>
-          <p:nvPr/>
-        </p:nvSpPr>
-        <p:spPr>
-          <a:xfrm>
-            <a:off x="3154680" y="868680"/>
-            <a:ext cx="2560320" cy="292608"/>
-          </a:xfrm>
-          <a:prstGeom prst="rect">
-            <a:avLst/>
-          </a:prstGeom>
-          <a:noFill/>
-        </p:spPr>
-        <p:txBody>
-          <a:bodyPr wrap="none">
+          <p:cNvPr id="7" name="TextBox 6"/>
+          <p:cNvSpPr txBox="1"/>
+          <p:nvPr/>
+        </p:nvSpPr>
+        <p:spPr>
+          <a:xfrm>
+            <a:off x="3310128" y="731520"/>
+            <a:ext cx="1417320" cy="256032"/>
+          </a:xfrm>
+          <a:prstGeom prst="rect">
+            <a:avLst/>
+          </a:prstGeom>
+          <a:noFill/>
+        </p:spPr>
+        <p:txBody>
+          <a:bodyPr wrap="square">
             <a:spAutoFit/>
           </a:bodyPr>
           <a:lstStyle/>
           <a:p>
-            <a:r>
-              <a:rPr b="1" sz="1100">
-                <a:solidFill>
-                  <a:srgbClr val="74C7EC"/>
+            <a:pPr algn="l"/>
+            <a:r>
+              <a:rPr sz="1000" b="1">
+                <a:solidFill>
+                  <a:srgbClr val="10B981"/>
                 </a:solidFill>
               </a:rPr>
               <a:t>Reducer</a:t>
@@ -21630,30 +21667,31 @@
       </p:sp>
       <p:sp>
         <p:nvSpPr>
-          <p:cNvPr id="7" name="TextBox 6"/>
-          <p:cNvSpPr txBox="1"/>
-          <p:nvPr/>
-        </p:nvSpPr>
-        <p:spPr>
-          <a:xfrm>
-            <a:off x="5760720" y="868680"/>
-            <a:ext cx="2926080" cy="292608"/>
-          </a:xfrm>
-          <a:prstGeom prst="rect">
-            <a:avLst/>
-          </a:prstGeom>
-          <a:noFill/>
-        </p:spPr>
-        <p:txBody>
-          <a:bodyPr wrap="none">
+          <p:cNvPr id="8" name="TextBox 7"/>
+          <p:cNvSpPr txBox="1"/>
+          <p:nvPr/>
+        </p:nvSpPr>
+        <p:spPr>
+          <a:xfrm>
+            <a:off x="4773168" y="731520"/>
+            <a:ext cx="4041648" cy="256032"/>
+          </a:xfrm>
+          <a:prstGeom prst="rect">
+            <a:avLst/>
+          </a:prstGeom>
+          <a:noFill/>
+        </p:spPr>
+        <p:txBody>
+          <a:bodyPr wrap="square">
             <a:spAutoFit/>
           </a:bodyPr>
           <a:lstStyle/>
           <a:p>
-            <a:r>
-              <a:rPr b="1" sz="1100">
-                <a:solidFill>
-                  <a:srgbClr val="74C7EC"/>
+            <a:pPr algn="l"/>
+            <a:r>
+              <a:rPr sz="1000" b="1">
+                <a:solidFill>
+                  <a:srgbClr val="10B981"/>
                 </a:solidFill>
               </a:rPr>
               <a:t>Purpose</a:t>
@@ -21663,20 +21701,20 @@
       </p:sp>
       <p:sp>
         <p:nvSpPr>
-          <p:cNvPr id="8" name="Rectangle 7"/>
+          <p:cNvPr id="9" name="Rectangle 8"/>
           <p:cNvSpPr/>
           <p:nvPr/>
         </p:nvSpPr>
         <p:spPr>
           <a:xfrm>
-            <a:off x="274320" y="1207008"/>
-            <a:ext cx="8595360" cy="365760"/>
+            <a:off x="274320" y="1005840"/>
+            <a:ext cx="8641080" cy="457200"/>
           </a:xfrm>
           <a:prstGeom prst="rect">
             <a:avLst/>
           </a:prstGeom>
           <a:solidFill>
-            <a:srgbClr val="282840"/>
+            <a:srgbClr val="16243E"/>
           </a:solidFill>
           <a:ln>
             <a:noFill/>
@@ -21706,14 +21744,14 @@
       </p:sp>
       <p:sp>
         <p:nvSpPr>
-          <p:cNvPr id="9" name="TextBox 8"/>
-          <p:cNvSpPr txBox="1"/>
-          <p:nvPr/>
-        </p:nvSpPr>
-        <p:spPr>
-          <a:xfrm>
-            <a:off x="320040" y="1252728"/>
-            <a:ext cx="1554480" cy="320040"/>
+          <p:cNvPr id="10" name="TextBox 9"/>
+          <p:cNvSpPr txBox="1"/>
+          <p:nvPr/>
+        </p:nvSpPr>
+        <p:spPr>
+          <a:xfrm>
+            <a:off x="292608" y="1078992"/>
+            <a:ext cx="1691640" cy="365760"/>
           </a:xfrm>
           <a:prstGeom prst="rect">
             <a:avLst/>
@@ -21726,10 +21764,11 @@
           </a:bodyPr>
           <a:lstStyle/>
           <a:p>
-            <a:r>
-              <a:rPr sz="1100" b="1">
-                <a:solidFill>
-                  <a:srgbClr val="F9E2AF"/>
+            <a:pPr algn="l"/>
+            <a:r>
+              <a:rPr sz="950" b="1">
+                <a:solidFill>
+                  <a:srgbClr val="A7F3D0"/>
                 </a:solidFill>
               </a:rPr>
               <a:t>user_input</a:t>
@@ -21739,14 +21778,14 @@
       </p:sp>
       <p:sp>
         <p:nvSpPr>
-          <p:cNvPr id="10" name="TextBox 9"/>
-          <p:cNvSpPr txBox="1"/>
-          <p:nvPr/>
-        </p:nvSpPr>
-        <p:spPr>
-          <a:xfrm>
-            <a:off x="1920240" y="1252728"/>
-            <a:ext cx="1188720" cy="320040"/>
+          <p:cNvPr id="11" name="TextBox 10"/>
+          <p:cNvSpPr txBox="1"/>
+          <p:nvPr/>
+        </p:nvSpPr>
+        <p:spPr>
+          <a:xfrm>
+            <a:off x="2029968" y="1078992"/>
+            <a:ext cx="1234440" cy="365760"/>
           </a:xfrm>
           <a:prstGeom prst="rect">
             <a:avLst/>
@@ -21759,10 +21798,11 @@
           </a:bodyPr>
           <a:lstStyle/>
           <a:p>
-            <a:r>
-              <a:rPr sz="1100" b="0">
-                <a:solidFill>
-                  <a:srgbClr val="FAB387"/>
+            <a:pPr algn="l"/>
+            <a:r>
+              <a:rPr sz="950" b="1">
+                <a:solidFill>
+                  <a:srgbClr val="D97706"/>
                 </a:solidFill>
               </a:rPr>
               <a:t>str</a:t>
@@ -21772,14 +21812,14 @@
       </p:sp>
       <p:sp>
         <p:nvSpPr>
-          <p:cNvPr id="11" name="TextBox 10"/>
-          <p:cNvSpPr txBox="1"/>
-          <p:nvPr/>
-        </p:nvSpPr>
-        <p:spPr>
-          <a:xfrm>
-            <a:off x="3154680" y="1252728"/>
-            <a:ext cx="2560320" cy="320040"/>
+          <p:cNvPr id="12" name="TextBox 11"/>
+          <p:cNvSpPr txBox="1"/>
+          <p:nvPr/>
+        </p:nvSpPr>
+        <p:spPr>
+          <a:xfrm>
+            <a:off x="3310128" y="1078992"/>
+            <a:ext cx="1417320" cy="365760"/>
           </a:xfrm>
           <a:prstGeom prst="rect">
             <a:avLst/>
@@ -21792,10 +21832,11 @@
           </a:bodyPr>
           <a:lstStyle/>
           <a:p>
-            <a:r>
-              <a:rPr sz="1100" b="0">
-                <a:solidFill>
-                  <a:srgbClr val="A6E3A1"/>
+            <a:pPr algn="l"/>
+            <a:r>
+              <a:rPr sz="950" b="0">
+                <a:solidFill>
+                  <a:srgbClr val="10B981"/>
                 </a:solidFill>
               </a:rPr>
               <a:t>—</a:t>
@@ -21805,14 +21846,14 @@
       </p:sp>
       <p:sp>
         <p:nvSpPr>
-          <p:cNvPr id="12" name="TextBox 11"/>
-          <p:cNvSpPr txBox="1"/>
-          <p:nvPr/>
-        </p:nvSpPr>
-        <p:spPr>
-          <a:xfrm>
-            <a:off x="5760720" y="1252728"/>
-            <a:ext cx="2926080" cy="320040"/>
+          <p:cNvPr id="13" name="TextBox 12"/>
+          <p:cNvSpPr txBox="1"/>
+          <p:nvPr/>
+        </p:nvSpPr>
+        <p:spPr>
+          <a:xfrm>
+            <a:off x="4773168" y="1078992"/>
+            <a:ext cx="4041648" cy="365760"/>
           </a:xfrm>
           <a:prstGeom prst="rect">
             <a:avLst/>
@@ -21825,8 +21866,9 @@
           </a:bodyPr>
           <a:lstStyle/>
           <a:p>
-            <a:r>
-              <a:rPr sz="1100" b="0">
+            <a:pPr algn="l"/>
+            <a:r>
+              <a:rPr sz="950" b="0">
                 <a:solidFill>
                   <a:srgbClr val="FFFFFF"/>
                 </a:solidFill>
@@ -21838,14 +21880,14 @@
       </p:sp>
       <p:sp>
         <p:nvSpPr>
-          <p:cNvPr id="13" name="TextBox 12"/>
-          <p:cNvSpPr txBox="1"/>
-          <p:nvPr/>
-        </p:nvSpPr>
-        <p:spPr>
-          <a:xfrm>
-            <a:off x="320040" y="1645920"/>
-            <a:ext cx="1554480" cy="320040"/>
+          <p:cNvPr id="14" name="TextBox 13"/>
+          <p:cNvSpPr txBox="1"/>
+          <p:nvPr/>
+        </p:nvSpPr>
+        <p:spPr>
+          <a:xfrm>
+            <a:off x="292608" y="1554480"/>
+            <a:ext cx="1691640" cy="365760"/>
           </a:xfrm>
           <a:prstGeom prst="rect">
             <a:avLst/>
@@ -21858,10 +21900,11 @@
           </a:bodyPr>
           <a:lstStyle/>
           <a:p>
-            <a:r>
-              <a:rPr sz="1100" b="1">
-                <a:solidFill>
-                  <a:srgbClr val="F9E2AF"/>
+            <a:pPr algn="l"/>
+            <a:r>
+              <a:rPr sz="950" b="1">
+                <a:solidFill>
+                  <a:srgbClr val="A7F3D0"/>
                 </a:solidFill>
               </a:rPr>
               <a:t>messages</a:t>
@@ -21871,14 +21914,14 @@
       </p:sp>
       <p:sp>
         <p:nvSpPr>
-          <p:cNvPr id="14" name="TextBox 13"/>
-          <p:cNvSpPr txBox="1"/>
-          <p:nvPr/>
-        </p:nvSpPr>
-        <p:spPr>
-          <a:xfrm>
-            <a:off x="1920240" y="1645920"/>
-            <a:ext cx="1188720" cy="320040"/>
+          <p:cNvPr id="15" name="TextBox 14"/>
+          <p:cNvSpPr txBox="1"/>
+          <p:nvPr/>
+        </p:nvSpPr>
+        <p:spPr>
+          <a:xfrm>
+            <a:off x="2029968" y="1554480"/>
+            <a:ext cx="1234440" cy="365760"/>
           </a:xfrm>
           <a:prstGeom prst="rect">
             <a:avLst/>
@@ -21891,10 +21934,11 @@
           </a:bodyPr>
           <a:lstStyle/>
           <a:p>
-            <a:r>
-              <a:rPr sz="1100" b="0">
-                <a:solidFill>
-                  <a:srgbClr val="FAB387"/>
+            <a:pPr algn="l"/>
+            <a:r>
+              <a:rPr sz="950" b="1">
+                <a:solidFill>
+                  <a:srgbClr val="D97706"/>
                 </a:solidFill>
               </a:rPr>
               <a:t>List[BaseMessage]</a:t>
@@ -21904,14 +21948,14 @@
       </p:sp>
       <p:sp>
         <p:nvSpPr>
-          <p:cNvPr id="15" name="TextBox 14"/>
-          <p:cNvSpPr txBox="1"/>
-          <p:nvPr/>
-        </p:nvSpPr>
-        <p:spPr>
-          <a:xfrm>
-            <a:off x="3154680" y="1645920"/>
-            <a:ext cx="2560320" cy="320040"/>
+          <p:cNvPr id="16" name="TextBox 15"/>
+          <p:cNvSpPr txBox="1"/>
+          <p:nvPr/>
+        </p:nvSpPr>
+        <p:spPr>
+          <a:xfrm>
+            <a:off x="3310128" y="1554480"/>
+            <a:ext cx="1417320" cy="365760"/>
           </a:xfrm>
           <a:prstGeom prst="rect">
             <a:avLst/>
@@ -21924,10 +21968,11 @@
           </a:bodyPr>
           <a:lstStyle/>
           <a:p>
-            <a:r>
-              <a:rPr sz="1100" b="0">
-                <a:solidFill>
-                  <a:srgbClr val="A6E3A1"/>
+            <a:pPr algn="l"/>
+            <a:r>
+              <a:rPr sz="950" b="0">
+                <a:solidFill>
+                  <a:srgbClr val="10B981"/>
                 </a:solidFill>
               </a:rPr>
               <a:t>add_messages</a:t>
@@ -21937,14 +21982,14 @@
       </p:sp>
       <p:sp>
         <p:nvSpPr>
-          <p:cNvPr id="16" name="TextBox 15"/>
-          <p:cNvSpPr txBox="1"/>
-          <p:nvPr/>
-        </p:nvSpPr>
-        <p:spPr>
-          <a:xfrm>
-            <a:off x="5760720" y="1645920"/>
-            <a:ext cx="2926080" cy="320040"/>
+          <p:cNvPr id="17" name="TextBox 16"/>
+          <p:cNvSpPr txBox="1"/>
+          <p:nvPr/>
+        </p:nvSpPr>
+        <p:spPr>
+          <a:xfrm>
+            <a:off x="4773168" y="1554480"/>
+            <a:ext cx="4041648" cy="365760"/>
           </a:xfrm>
           <a:prstGeom prst="rect">
             <a:avLst/>
@@ -21957,8 +22002,9 @@
           </a:bodyPr>
           <a:lstStyle/>
           <a:p>
-            <a:r>
-              <a:rPr sz="1100" b="0">
+            <a:pPr algn="l"/>
+            <a:r>
+              <a:rPr sz="950" b="0">
                 <a:solidFill>
                   <a:srgbClr val="FFFFFF"/>
                 </a:solidFill>
@@ -21970,20 +22016,20 @@
       </p:sp>
       <p:sp>
         <p:nvSpPr>
-          <p:cNvPr id="17" name="Rectangle 16"/>
+          <p:cNvPr id="18" name="Rectangle 17"/>
           <p:cNvSpPr/>
           <p:nvPr/>
         </p:nvSpPr>
         <p:spPr>
           <a:xfrm>
-            <a:off x="274320" y="1993392"/>
-            <a:ext cx="8595360" cy="365760"/>
+            <a:off x="274320" y="1956816"/>
+            <a:ext cx="8641080" cy="457200"/>
           </a:xfrm>
           <a:prstGeom prst="rect">
             <a:avLst/>
           </a:prstGeom>
           <a:solidFill>
-            <a:srgbClr val="282840"/>
+            <a:srgbClr val="16243E"/>
           </a:solidFill>
           <a:ln>
             <a:noFill/>
@@ -22013,14 +22059,14 @@
       </p:sp>
       <p:sp>
         <p:nvSpPr>
-          <p:cNvPr id="18" name="TextBox 17"/>
-          <p:cNvSpPr txBox="1"/>
-          <p:nvPr/>
-        </p:nvSpPr>
-        <p:spPr>
-          <a:xfrm>
-            <a:off x="320040" y="2039112"/>
-            <a:ext cx="1554480" cy="320040"/>
+          <p:cNvPr id="19" name="TextBox 18"/>
+          <p:cNvSpPr txBox="1"/>
+          <p:nvPr/>
+        </p:nvSpPr>
+        <p:spPr>
+          <a:xfrm>
+            <a:off x="292608" y="2029968"/>
+            <a:ext cx="1691640" cy="365760"/>
           </a:xfrm>
           <a:prstGeom prst="rect">
             <a:avLst/>
@@ -22033,10 +22079,11 @@
           </a:bodyPr>
           <a:lstStyle/>
           <a:p>
-            <a:r>
-              <a:rPr sz="1100" b="1">
-                <a:solidFill>
-                  <a:srgbClr val="F9E2AF"/>
+            <a:pPr algn="l"/>
+            <a:r>
+              <a:rPr sz="950" b="1">
+                <a:solidFill>
+                  <a:srgbClr val="A7F3D0"/>
                 </a:solidFill>
               </a:rPr>
               <a:t>intent</a:t>
@@ -22046,14 +22093,14 @@
       </p:sp>
       <p:sp>
         <p:nvSpPr>
-          <p:cNvPr id="19" name="TextBox 18"/>
-          <p:cNvSpPr txBox="1"/>
-          <p:nvPr/>
-        </p:nvSpPr>
-        <p:spPr>
-          <a:xfrm>
-            <a:off x="1920240" y="2039112"/>
-            <a:ext cx="1188720" cy="320040"/>
+          <p:cNvPr id="20" name="TextBox 19"/>
+          <p:cNvSpPr txBox="1"/>
+          <p:nvPr/>
+        </p:nvSpPr>
+        <p:spPr>
+          <a:xfrm>
+            <a:off x="2029968" y="2029968"/>
+            <a:ext cx="1234440" cy="365760"/>
           </a:xfrm>
           <a:prstGeom prst="rect">
             <a:avLst/>
@@ -22066,27 +22113,28 @@
           </a:bodyPr>
           <a:lstStyle/>
           <a:p>
-            <a:r>
-              <a:rPr sz="1100" b="0">
-                <a:solidFill>
-                  <a:srgbClr val="FAB387"/>
-                </a:solidFill>
-              </a:rPr>
-              <a:t>UserIntent | None</a:t>
-            </a:r>
-          </a:p>
-        </p:txBody>
-      </p:sp>
-      <p:sp>
-        <p:nvSpPr>
-          <p:cNvPr id="20" name="TextBox 19"/>
-          <p:cNvSpPr txBox="1"/>
-          <p:nvPr/>
-        </p:nvSpPr>
-        <p:spPr>
-          <a:xfrm>
-            <a:off x="3154680" y="2039112"/>
-            <a:ext cx="2560320" cy="320040"/>
+            <a:pPr algn="l"/>
+            <a:r>
+              <a:rPr sz="950" b="1">
+                <a:solidFill>
+                  <a:srgbClr val="D97706"/>
+                </a:solidFill>
+              </a:rPr>
+              <a:t>UserIntent|None</a:t>
+            </a:r>
+          </a:p>
+        </p:txBody>
+      </p:sp>
+      <p:sp>
+        <p:nvSpPr>
+          <p:cNvPr id="21" name="TextBox 20"/>
+          <p:cNvSpPr txBox="1"/>
+          <p:nvPr/>
+        </p:nvSpPr>
+        <p:spPr>
+          <a:xfrm>
+            <a:off x="3310128" y="2029968"/>
+            <a:ext cx="1417320" cy="365760"/>
           </a:xfrm>
           <a:prstGeom prst="rect">
             <a:avLst/>
@@ -22099,10 +22147,11 @@
           </a:bodyPr>
           <a:lstStyle/>
           <a:p>
-            <a:r>
-              <a:rPr sz="1100" b="0">
-                <a:solidFill>
-                  <a:srgbClr val="A6E3A1"/>
+            <a:pPr algn="l"/>
+            <a:r>
+              <a:rPr sz="950" b="0">
+                <a:solidFill>
+                  <a:srgbClr val="10B981"/>
                 </a:solidFill>
               </a:rPr>
               <a:t>—</a:t>
@@ -22112,14 +22161,14 @@
       </p:sp>
       <p:sp>
         <p:nvSpPr>
-          <p:cNvPr id="21" name="TextBox 20"/>
-          <p:cNvSpPr txBox="1"/>
-          <p:nvPr/>
-        </p:nvSpPr>
-        <p:spPr>
-          <a:xfrm>
-            <a:off x="5760720" y="2039112"/>
-            <a:ext cx="2926080" cy="320040"/>
+          <p:cNvPr id="22" name="TextBox 21"/>
+          <p:cNvSpPr txBox="1"/>
+          <p:nvPr/>
+        </p:nvSpPr>
+        <p:spPr>
+          <a:xfrm>
+            <a:off x="4773168" y="2029968"/>
+            <a:ext cx="4041648" cy="365760"/>
           </a:xfrm>
           <a:prstGeom prst="rect">
             <a:avLst/>
@@ -22132,27 +22181,28 @@
           </a:bodyPr>
           <a:lstStyle/>
           <a:p>
-            <a:r>
-              <a:rPr sz="1100" b="0">
+            <a:pPr algn="l"/>
+            <a:r>
+              <a:rPr sz="950" b="0">
                 <a:solidFill>
                   <a:srgbClr val="FFFFFF"/>
                 </a:solidFill>
               </a:rPr>
-              <a:t>Classified intent from classify_intent node</a:t>
-            </a:r>
-          </a:p>
-        </p:txBody>
-      </p:sp>
-      <p:sp>
-        <p:nvSpPr>
-          <p:cNvPr id="22" name="TextBox 21"/>
-          <p:cNvSpPr txBox="1"/>
-          <p:nvPr/>
-        </p:nvSpPr>
-        <p:spPr>
-          <a:xfrm>
-            <a:off x="320040" y="2432304"/>
-            <a:ext cx="1554480" cy="320040"/>
+              <a:t>Classified intent from classify_intent</a:t>
+            </a:r>
+          </a:p>
+        </p:txBody>
+      </p:sp>
+      <p:sp>
+        <p:nvSpPr>
+          <p:cNvPr id="23" name="TextBox 22"/>
+          <p:cNvSpPr txBox="1"/>
+          <p:nvPr/>
+        </p:nvSpPr>
+        <p:spPr>
+          <a:xfrm>
+            <a:off x="292608" y="2505456"/>
+            <a:ext cx="1691640" cy="365760"/>
           </a:xfrm>
           <a:prstGeom prst="rect">
             <a:avLst/>
@@ -22165,10 +22215,11 @@
           </a:bodyPr>
           <a:lstStyle/>
           <a:p>
-            <a:r>
-              <a:rPr sz="1100" b="1">
-                <a:solidFill>
-                  <a:srgbClr val="F9E2AF"/>
+            <a:pPr algn="l"/>
+            <a:r>
+              <a:rPr sz="950" b="1">
+                <a:solidFill>
+                  <a:srgbClr val="A7F3D0"/>
                 </a:solidFill>
               </a:rPr>
               <a:t>next_step</a:t>
@@ -22178,14 +22229,14 @@
       </p:sp>
       <p:sp>
         <p:nvSpPr>
-          <p:cNvPr id="23" name="TextBox 22"/>
-          <p:cNvSpPr txBox="1"/>
-          <p:nvPr/>
-        </p:nvSpPr>
-        <p:spPr>
-          <a:xfrm>
-            <a:off x="1920240" y="2432304"/>
-            <a:ext cx="1188720" cy="320040"/>
+          <p:cNvPr id="24" name="TextBox 23"/>
+          <p:cNvSpPr txBox="1"/>
+          <p:nvPr/>
+        </p:nvSpPr>
+        <p:spPr>
+          <a:xfrm>
+            <a:off x="2029968" y="2505456"/>
+            <a:ext cx="1234440" cy="365760"/>
           </a:xfrm>
           <a:prstGeom prst="rect">
             <a:avLst/>
@@ -22198,10 +22249,11 @@
           </a:bodyPr>
           <a:lstStyle/>
           <a:p>
-            <a:r>
-              <a:rPr sz="1100" b="0">
-                <a:solidFill>
-                  <a:srgbClr val="FAB387"/>
+            <a:pPr algn="l"/>
+            <a:r>
+              <a:rPr sz="950" b="1">
+                <a:solidFill>
+                  <a:srgbClr val="D97706"/>
                 </a:solidFill>
               </a:rPr>
               <a:t>str</a:t>
@@ -22211,14 +22263,14 @@
       </p:sp>
       <p:sp>
         <p:nvSpPr>
-          <p:cNvPr id="24" name="TextBox 23"/>
-          <p:cNvSpPr txBox="1"/>
-          <p:nvPr/>
-        </p:nvSpPr>
-        <p:spPr>
-          <a:xfrm>
-            <a:off x="3154680" y="2432304"/>
-            <a:ext cx="2560320" cy="320040"/>
+          <p:cNvPr id="25" name="TextBox 24"/>
+          <p:cNvSpPr txBox="1"/>
+          <p:nvPr/>
+        </p:nvSpPr>
+        <p:spPr>
+          <a:xfrm>
+            <a:off x="3310128" y="2505456"/>
+            <a:ext cx="1417320" cy="365760"/>
           </a:xfrm>
           <a:prstGeom prst="rect">
             <a:avLst/>
@@ -22231,10 +22283,11 @@
           </a:bodyPr>
           <a:lstStyle/>
           <a:p>
-            <a:r>
-              <a:rPr sz="1100" b="0">
-                <a:solidFill>
-                  <a:srgbClr val="A6E3A1"/>
+            <a:pPr algn="l"/>
+            <a:r>
+              <a:rPr sz="950" b="0">
+                <a:solidFill>
+                  <a:srgbClr val="10B981"/>
                 </a:solidFill>
               </a:rPr>
               <a:t>—</a:t>
@@ -22244,14 +22297,14 @@
       </p:sp>
       <p:sp>
         <p:nvSpPr>
-          <p:cNvPr id="25" name="TextBox 24"/>
-          <p:cNvSpPr txBox="1"/>
-          <p:nvPr/>
-        </p:nvSpPr>
-        <p:spPr>
-          <a:xfrm>
-            <a:off x="5760720" y="2432304"/>
-            <a:ext cx="2926080" cy="320040"/>
+          <p:cNvPr id="26" name="TextBox 25"/>
+          <p:cNvSpPr txBox="1"/>
+          <p:nvPr/>
+        </p:nvSpPr>
+        <p:spPr>
+          <a:xfrm>
+            <a:off x="4773168" y="2505456"/>
+            <a:ext cx="4041648" cy="365760"/>
           </a:xfrm>
           <a:prstGeom prst="rect">
             <a:avLst/>
@@ -22264,8 +22317,9 @@
           </a:bodyPr>
           <a:lstStyle/>
           <a:p>
-            <a:r>
-              <a:rPr sz="1100" b="0">
+            <a:pPr algn="l"/>
+            <a:r>
+              <a:rPr sz="950" b="0">
                 <a:solidFill>
                   <a:srgbClr val="FFFFFF"/>
                 </a:solidFill>
@@ -22277,20 +22331,20 @@
       </p:sp>
       <p:sp>
         <p:nvSpPr>
-          <p:cNvPr id="26" name="Rectangle 25"/>
+          <p:cNvPr id="27" name="Rectangle 26"/>
           <p:cNvSpPr/>
           <p:nvPr/>
         </p:nvSpPr>
         <p:spPr>
           <a:xfrm>
-            <a:off x="274320" y="2779776"/>
-            <a:ext cx="8595360" cy="365760"/>
+            <a:off x="274320" y="2907792"/>
+            <a:ext cx="8641080" cy="457200"/>
           </a:xfrm>
           <a:prstGeom prst="rect">
             <a:avLst/>
           </a:prstGeom>
           <a:solidFill>
-            <a:srgbClr val="282840"/>
+            <a:srgbClr val="16243E"/>
           </a:solidFill>
           <a:ln>
             <a:noFill/>
@@ -22320,14 +22374,14 @@
       </p:sp>
       <p:sp>
         <p:nvSpPr>
-          <p:cNvPr id="27" name="TextBox 26"/>
-          <p:cNvSpPr txBox="1"/>
-          <p:nvPr/>
-        </p:nvSpPr>
-        <p:spPr>
-          <a:xfrm>
-            <a:off x="320040" y="2825496"/>
-            <a:ext cx="1554480" cy="320040"/>
+          <p:cNvPr id="28" name="TextBox 27"/>
+          <p:cNvSpPr txBox="1"/>
+          <p:nvPr/>
+        </p:nvSpPr>
+        <p:spPr>
+          <a:xfrm>
+            <a:off x="292608" y="2980944"/>
+            <a:ext cx="1691640" cy="365760"/>
           </a:xfrm>
           <a:prstGeom prst="rect">
             <a:avLst/>
@@ -22340,10 +22394,11 @@
           </a:bodyPr>
           <a:lstStyle/>
           <a:p>
-            <a:r>
-              <a:rPr sz="1100" b="1">
-                <a:solidFill>
-                  <a:srgbClr val="F9E2AF"/>
+            <a:pPr algn="l"/>
+            <a:r>
+              <a:rPr sz="950" b="1">
+                <a:solidFill>
+                  <a:srgbClr val="A7F3D0"/>
                 </a:solidFill>
               </a:rPr>
               <a:t>conversation_summary</a:t>
@@ -22353,14 +22408,14 @@
       </p:sp>
       <p:sp>
         <p:nvSpPr>
-          <p:cNvPr id="28" name="TextBox 27"/>
-          <p:cNvSpPr txBox="1"/>
-          <p:nvPr/>
-        </p:nvSpPr>
-        <p:spPr>
-          <a:xfrm>
-            <a:off x="1920240" y="2825496"/>
-            <a:ext cx="1188720" cy="320040"/>
+          <p:cNvPr id="29" name="TextBox 28"/>
+          <p:cNvSpPr txBox="1"/>
+          <p:nvPr/>
+        </p:nvSpPr>
+        <p:spPr>
+          <a:xfrm>
+            <a:off x="2029968" y="2980944"/>
+            <a:ext cx="1234440" cy="365760"/>
           </a:xfrm>
           <a:prstGeom prst="rect">
             <a:avLst/>
@@ -22373,10 +22428,11 @@
           </a:bodyPr>
           <a:lstStyle/>
           <a:p>
-            <a:r>
-              <a:rPr sz="1100" b="0">
-                <a:solidFill>
-                  <a:srgbClr val="FAB387"/>
+            <a:pPr algn="l"/>
+            <a:r>
+              <a:rPr sz="950" b="1">
+                <a:solidFill>
+                  <a:srgbClr val="D97706"/>
                 </a:solidFill>
               </a:rPr>
               <a:t>str</a:t>
@@ -22386,14 +22442,14 @@
       </p:sp>
       <p:sp>
         <p:nvSpPr>
-          <p:cNvPr id="29" name="TextBox 28"/>
-          <p:cNvSpPr txBox="1"/>
-          <p:nvPr/>
-        </p:nvSpPr>
-        <p:spPr>
-          <a:xfrm>
-            <a:off x="3154680" y="2825496"/>
-            <a:ext cx="2560320" cy="320040"/>
+          <p:cNvPr id="30" name="TextBox 29"/>
+          <p:cNvSpPr txBox="1"/>
+          <p:nvPr/>
+        </p:nvSpPr>
+        <p:spPr>
+          <a:xfrm>
+            <a:off x="3310128" y="2980944"/>
+            <a:ext cx="1417320" cy="365760"/>
           </a:xfrm>
           <a:prstGeom prst="rect">
             <a:avLst/>
@@ -22406,10 +22462,11 @@
           </a:bodyPr>
           <a:lstStyle/>
           <a:p>
-            <a:r>
-              <a:rPr sz="1100" b="0">
-                <a:solidFill>
-                  <a:srgbClr val="A6E3A1"/>
+            <a:pPr algn="l"/>
+            <a:r>
+              <a:rPr sz="950" b="0">
+                <a:solidFill>
+                  <a:srgbClr val="10B981"/>
                 </a:solidFill>
               </a:rPr>
               <a:t>—</a:t>
@@ -22419,14 +22476,14 @@
       </p:sp>
       <p:sp>
         <p:nvSpPr>
-          <p:cNvPr id="30" name="TextBox 29"/>
-          <p:cNvSpPr txBox="1"/>
-          <p:nvPr/>
-        </p:nvSpPr>
-        <p:spPr>
-          <a:xfrm>
-            <a:off x="5760720" y="2825496"/>
-            <a:ext cx="2926080" cy="320040"/>
+          <p:cNvPr id="31" name="TextBox 30"/>
+          <p:cNvSpPr txBox="1"/>
+          <p:nvPr/>
+        </p:nvSpPr>
+        <p:spPr>
+          <a:xfrm>
+            <a:off x="4773168" y="2980944"/>
+            <a:ext cx="4041648" cy="365760"/>
           </a:xfrm>
           <a:prstGeom prst="rect">
             <a:avLst/>
@@ -22439,8 +22496,9 @@
           </a:bodyPr>
           <a:lstStyle/>
           <a:p>
-            <a:r>
-              <a:rPr sz="1100" b="0">
+            <a:pPr algn="l"/>
+            <a:r>
+              <a:rPr sz="950" b="0">
                 <a:solidFill>
                   <a:srgbClr val="FFFFFF"/>
                 </a:solidFill>
@@ -22452,14 +22510,14 @@
       </p:sp>
       <p:sp>
         <p:nvSpPr>
-          <p:cNvPr id="31" name="TextBox 30"/>
-          <p:cNvSpPr txBox="1"/>
-          <p:nvPr/>
-        </p:nvSpPr>
-        <p:spPr>
-          <a:xfrm>
-            <a:off x="320040" y="3218688"/>
-            <a:ext cx="1554480" cy="320040"/>
+          <p:cNvPr id="32" name="TextBox 31"/>
+          <p:cNvSpPr txBox="1"/>
+          <p:nvPr/>
+        </p:nvSpPr>
+        <p:spPr>
+          <a:xfrm>
+            <a:off x="292608" y="3456432"/>
+            <a:ext cx="1691640" cy="365760"/>
           </a:xfrm>
           <a:prstGeom prst="rect">
             <a:avLst/>
@@ -22472,10 +22530,11 @@
           </a:bodyPr>
           <a:lstStyle/>
           <a:p>
-            <a:r>
-              <a:rPr sz="1100" b="1">
-                <a:solidFill>
-                  <a:srgbClr val="F9E2AF"/>
+            <a:pPr algn="l"/>
+            <a:r>
+              <a:rPr sz="950" b="1">
+                <a:solidFill>
+                  <a:srgbClr val="A7F3D0"/>
                 </a:solidFill>
               </a:rPr>
               <a:t>active_documents</a:t>
@@ -22485,14 +22544,14 @@
       </p:sp>
       <p:sp>
         <p:nvSpPr>
-          <p:cNvPr id="32" name="TextBox 31"/>
-          <p:cNvSpPr txBox="1"/>
-          <p:nvPr/>
-        </p:nvSpPr>
-        <p:spPr>
-          <a:xfrm>
-            <a:off x="1920240" y="3218688"/>
-            <a:ext cx="1188720" cy="320040"/>
+          <p:cNvPr id="33" name="TextBox 32"/>
+          <p:cNvSpPr txBox="1"/>
+          <p:nvPr/>
+        </p:nvSpPr>
+        <p:spPr>
+          <a:xfrm>
+            <a:off x="2029968" y="3456432"/>
+            <a:ext cx="1234440" cy="365760"/>
           </a:xfrm>
           <a:prstGeom prst="rect">
             <a:avLst/>
@@ -22505,10 +22564,11 @@
           </a:bodyPr>
           <a:lstStyle/>
           <a:p>
-            <a:r>
-              <a:rPr sz="1100" b="0">
-                <a:solidFill>
-                  <a:srgbClr val="FAB387"/>
+            <a:pPr algn="l"/>
+            <a:r>
+              <a:rPr sz="950" b="1">
+                <a:solidFill>
+                  <a:srgbClr val="D97706"/>
                 </a:solidFill>
               </a:rPr>
               <a:t>List[str]</a:t>
@@ -22518,14 +22578,14 @@
       </p:sp>
       <p:sp>
         <p:nvSpPr>
-          <p:cNvPr id="33" name="TextBox 32"/>
-          <p:cNvSpPr txBox="1"/>
-          <p:nvPr/>
-        </p:nvSpPr>
-        <p:spPr>
-          <a:xfrm>
-            <a:off x="3154680" y="3218688"/>
-            <a:ext cx="2560320" cy="320040"/>
+          <p:cNvPr id="34" name="TextBox 33"/>
+          <p:cNvSpPr txBox="1"/>
+          <p:nvPr/>
+        </p:nvSpPr>
+        <p:spPr>
+          <a:xfrm>
+            <a:off x="3310128" y="3456432"/>
+            <a:ext cx="1417320" cy="365760"/>
           </a:xfrm>
           <a:prstGeom prst="rect">
             <a:avLst/>
@@ -22538,10 +22598,11 @@
           </a:bodyPr>
           <a:lstStyle/>
           <a:p>
-            <a:r>
-              <a:rPr sz="1100" b="0">
-                <a:solidFill>
-                  <a:srgbClr val="A6E3A1"/>
+            <a:pPr algn="l"/>
+            <a:r>
+              <a:rPr sz="950" b="0">
+                <a:solidFill>
+                  <a:srgbClr val="10B981"/>
                 </a:solidFill>
               </a:rPr>
               <a:t>—</a:t>
@@ -22551,14 +22612,14 @@
       </p:sp>
       <p:sp>
         <p:nvSpPr>
-          <p:cNvPr id="34" name="TextBox 33"/>
-          <p:cNvSpPr txBox="1"/>
-          <p:nvPr/>
-        </p:nvSpPr>
-        <p:spPr>
-          <a:xfrm>
-            <a:off x="5760720" y="3218688"/>
-            <a:ext cx="2926080" cy="320040"/>
+          <p:cNvPr id="35" name="TextBox 34"/>
+          <p:cNvSpPr txBox="1"/>
+          <p:nvPr/>
+        </p:nvSpPr>
+        <p:spPr>
+          <a:xfrm>
+            <a:off x="4773168" y="3456432"/>
+            <a:ext cx="4041648" cy="365760"/>
           </a:xfrm>
           <a:prstGeom prst="rect">
             <a:avLst/>
@@ -22571,8 +22632,9 @@
           </a:bodyPr>
           <a:lstStyle/>
           <a:p>
-            <a:r>
-              <a:rPr sz="1100" b="0">
+            <a:pPr algn="l"/>
+            <a:r>
+              <a:rPr sz="950" b="0">
                 <a:solidFill>
                   <a:srgbClr val="FFFFFF"/>
                 </a:solidFill>
@@ -22584,20 +22646,20 @@
       </p:sp>
       <p:sp>
         <p:nvSpPr>
-          <p:cNvPr id="35" name="Rectangle 34"/>
+          <p:cNvPr id="36" name="Rectangle 35"/>
           <p:cNvSpPr/>
           <p:nvPr/>
         </p:nvSpPr>
         <p:spPr>
           <a:xfrm>
-            <a:off x="274320" y="3566160"/>
-            <a:ext cx="8595360" cy="365760"/>
+            <a:off x="274320" y="3858768"/>
+            <a:ext cx="8641080" cy="457200"/>
           </a:xfrm>
           <a:prstGeom prst="rect">
             <a:avLst/>
           </a:prstGeom>
           <a:solidFill>
-            <a:srgbClr val="282840"/>
+            <a:srgbClr val="16243E"/>
           </a:solidFill>
           <a:ln>
             <a:noFill/>
@@ -22627,14 +22689,14 @@
       </p:sp>
       <p:sp>
         <p:nvSpPr>
-          <p:cNvPr id="36" name="TextBox 35"/>
-          <p:cNvSpPr txBox="1"/>
-          <p:nvPr/>
-        </p:nvSpPr>
-        <p:spPr>
-          <a:xfrm>
-            <a:off x="320040" y="3611880"/>
-            <a:ext cx="1554480" cy="320040"/>
+          <p:cNvPr id="37" name="TextBox 36"/>
+          <p:cNvSpPr txBox="1"/>
+          <p:nvPr/>
+        </p:nvSpPr>
+        <p:spPr>
+          <a:xfrm>
+            <a:off x="292608" y="3931920"/>
+            <a:ext cx="1691640" cy="365760"/>
           </a:xfrm>
           <a:prstGeom prst="rect">
             <a:avLst/>
@@ -22647,10 +22709,11 @@
           </a:bodyPr>
           <a:lstStyle/>
           <a:p>
-            <a:r>
-              <a:rPr sz="1100" b="1">
-                <a:solidFill>
-                  <a:srgbClr val="F9E2AF"/>
+            <a:pPr algn="l"/>
+            <a:r>
+              <a:rPr sz="950" b="1">
+                <a:solidFill>
+                  <a:srgbClr val="A7F3D0"/>
                 </a:solidFill>
               </a:rPr>
               <a:t>current_response</a:t>
@@ -22660,14 +22723,14 @@
       </p:sp>
       <p:sp>
         <p:nvSpPr>
-          <p:cNvPr id="37" name="TextBox 36"/>
-          <p:cNvSpPr txBox="1"/>
-          <p:nvPr/>
-        </p:nvSpPr>
-        <p:spPr>
-          <a:xfrm>
-            <a:off x="1920240" y="3611880"/>
-            <a:ext cx="1188720" cy="320040"/>
+          <p:cNvPr id="38" name="TextBox 37"/>
+          <p:cNvSpPr txBox="1"/>
+          <p:nvPr/>
+        </p:nvSpPr>
+        <p:spPr>
+          <a:xfrm>
+            <a:off x="2029968" y="3931920"/>
+            <a:ext cx="1234440" cy="365760"/>
           </a:xfrm>
           <a:prstGeom prst="rect">
             <a:avLst/>
@@ -22680,27 +22743,28 @@
           </a:bodyPr>
           <a:lstStyle/>
           <a:p>
-            <a:r>
-              <a:rPr sz="1100" b="0">
-                <a:solidFill>
-                  <a:srgbClr val="FAB387"/>
-                </a:solidFill>
-              </a:rPr>
-              <a:t>Pydantic | None</a:t>
-            </a:r>
-          </a:p>
-        </p:txBody>
-      </p:sp>
-      <p:sp>
-        <p:nvSpPr>
-          <p:cNvPr id="38" name="TextBox 37"/>
-          <p:cNvSpPr txBox="1"/>
-          <p:nvPr/>
-        </p:nvSpPr>
-        <p:spPr>
-          <a:xfrm>
-            <a:off x="3154680" y="3611880"/>
-            <a:ext cx="2560320" cy="320040"/>
+            <a:pPr algn="l"/>
+            <a:r>
+              <a:rPr sz="950" b="1">
+                <a:solidFill>
+                  <a:srgbClr val="D97706"/>
+                </a:solidFill>
+              </a:rPr>
+              <a:t>Pydantic|None</a:t>
+            </a:r>
+          </a:p>
+        </p:txBody>
+      </p:sp>
+      <p:sp>
+        <p:nvSpPr>
+          <p:cNvPr id="39" name="TextBox 38"/>
+          <p:cNvSpPr txBox="1"/>
+          <p:nvPr/>
+        </p:nvSpPr>
+        <p:spPr>
+          <a:xfrm>
+            <a:off x="3310128" y="3931920"/>
+            <a:ext cx="1417320" cy="365760"/>
           </a:xfrm>
           <a:prstGeom prst="rect">
             <a:avLst/>
@@ -22713,10 +22777,11 @@
           </a:bodyPr>
           <a:lstStyle/>
           <a:p>
-            <a:r>
-              <a:rPr sz="1100" b="0">
-                <a:solidFill>
-                  <a:srgbClr val="A6E3A1"/>
+            <a:pPr algn="l"/>
+            <a:r>
+              <a:rPr sz="950" b="0">
+                <a:solidFill>
+                  <a:srgbClr val="10B981"/>
                 </a:solidFill>
               </a:rPr>
               <a:t>—</a:t>
@@ -22726,14 +22791,14 @@
       </p:sp>
       <p:sp>
         <p:nvSpPr>
-          <p:cNvPr id="39" name="TextBox 38"/>
-          <p:cNvSpPr txBox="1"/>
-          <p:nvPr/>
-        </p:nvSpPr>
-        <p:spPr>
-          <a:xfrm>
-            <a:off x="5760720" y="3611880"/>
-            <a:ext cx="2926080" cy="320040"/>
+          <p:cNvPr id="40" name="TextBox 39"/>
+          <p:cNvSpPr txBox="1"/>
+          <p:nvPr/>
+        </p:nvSpPr>
+        <p:spPr>
+          <a:xfrm>
+            <a:off x="4773168" y="3931920"/>
+            <a:ext cx="4041648" cy="365760"/>
           </a:xfrm>
           <a:prstGeom prst="rect">
             <a:avLst/>
@@ -22746,8 +22811,9 @@
           </a:bodyPr>
           <a:lstStyle/>
           <a:p>
-            <a:r>
-              <a:rPr sz="1100" b="0">
+            <a:pPr algn="l"/>
+            <a:r>
+              <a:rPr sz="950" b="0">
                 <a:solidFill>
                   <a:srgbClr val="FFFFFF"/>
                 </a:solidFill>
@@ -22759,14 +22825,14 @@
       </p:sp>
       <p:sp>
         <p:nvSpPr>
-          <p:cNvPr id="40" name="TextBox 39"/>
-          <p:cNvSpPr txBox="1"/>
-          <p:nvPr/>
-        </p:nvSpPr>
-        <p:spPr>
-          <a:xfrm>
-            <a:off x="320040" y="4005072"/>
-            <a:ext cx="1554480" cy="320040"/>
+          <p:cNvPr id="41" name="TextBox 40"/>
+          <p:cNvSpPr txBox="1"/>
+          <p:nvPr/>
+        </p:nvSpPr>
+        <p:spPr>
+          <a:xfrm>
+            <a:off x="292608" y="4407408"/>
+            <a:ext cx="1691640" cy="365760"/>
           </a:xfrm>
           <a:prstGeom prst="rect">
             <a:avLst/>
@@ -22779,10 +22845,11 @@
           </a:bodyPr>
           <a:lstStyle/>
           <a:p>
-            <a:r>
-              <a:rPr sz="1100" b="1">
-                <a:solidFill>
-                  <a:srgbClr val="F9E2AF"/>
+            <a:pPr algn="l"/>
+            <a:r>
+              <a:rPr sz="950" b="1">
+                <a:solidFill>
+                  <a:srgbClr val="A7F3D0"/>
                 </a:solidFill>
               </a:rPr>
               <a:t>tools_used</a:t>
@@ -22792,14 +22859,14 @@
       </p:sp>
       <p:sp>
         <p:nvSpPr>
-          <p:cNvPr id="41" name="TextBox 40"/>
-          <p:cNvSpPr txBox="1"/>
-          <p:nvPr/>
-        </p:nvSpPr>
-        <p:spPr>
-          <a:xfrm>
-            <a:off x="1920240" y="4005072"/>
-            <a:ext cx="1188720" cy="320040"/>
+          <p:cNvPr id="42" name="TextBox 41"/>
+          <p:cNvSpPr txBox="1"/>
+          <p:nvPr/>
+        </p:nvSpPr>
+        <p:spPr>
+          <a:xfrm>
+            <a:off x="2029968" y="4407408"/>
+            <a:ext cx="1234440" cy="365760"/>
           </a:xfrm>
           <a:prstGeom prst="rect">
             <a:avLst/>
@@ -22812,10 +22879,11 @@
           </a:bodyPr>
           <a:lstStyle/>
           <a:p>
-            <a:r>
-              <a:rPr sz="1100" b="0">
-                <a:solidFill>
-                  <a:srgbClr val="FAB387"/>
+            <a:pPr algn="l"/>
+            <a:r>
+              <a:rPr sz="950" b="1">
+                <a:solidFill>
+                  <a:srgbClr val="D97706"/>
                 </a:solidFill>
               </a:rPr>
               <a:t>List[str]</a:t>
@@ -22825,14 +22893,14 @@
       </p:sp>
       <p:sp>
         <p:nvSpPr>
-          <p:cNvPr id="42" name="TextBox 41"/>
-          <p:cNvSpPr txBox="1"/>
-          <p:nvPr/>
-        </p:nvSpPr>
-        <p:spPr>
-          <a:xfrm>
-            <a:off x="3154680" y="4005072"/>
-            <a:ext cx="2560320" cy="320040"/>
+          <p:cNvPr id="43" name="TextBox 42"/>
+          <p:cNvSpPr txBox="1"/>
+          <p:nvPr/>
+        </p:nvSpPr>
+        <p:spPr>
+          <a:xfrm>
+            <a:off x="3310128" y="4407408"/>
+            <a:ext cx="1417320" cy="365760"/>
           </a:xfrm>
           <a:prstGeom prst="rect">
             <a:avLst/>
@@ -22845,10 +22913,11 @@
           </a:bodyPr>
           <a:lstStyle/>
           <a:p>
-            <a:r>
-              <a:rPr sz="1100" b="0">
-                <a:solidFill>
-                  <a:srgbClr val="A6E3A1"/>
+            <a:pPr algn="l"/>
+            <a:r>
+              <a:rPr sz="950" b="0">
+                <a:solidFill>
+                  <a:srgbClr val="10B981"/>
                 </a:solidFill>
               </a:rPr>
               <a:t>—</a:t>
@@ -22858,14 +22927,14 @@
       </p:sp>
       <p:sp>
         <p:nvSpPr>
-          <p:cNvPr id="43" name="TextBox 42"/>
-          <p:cNvSpPr txBox="1"/>
-          <p:nvPr/>
-        </p:nvSpPr>
-        <p:spPr>
-          <a:xfrm>
-            <a:off x="5760720" y="4005072"/>
-            <a:ext cx="2926080" cy="320040"/>
+          <p:cNvPr id="44" name="TextBox 43"/>
+          <p:cNvSpPr txBox="1"/>
+          <p:nvPr/>
+        </p:nvSpPr>
+        <p:spPr>
+          <a:xfrm>
+            <a:off x="4773168" y="4407408"/>
+            <a:ext cx="4041648" cy="365760"/>
           </a:xfrm>
           <a:prstGeom prst="rect">
             <a:avLst/>
@@ -22878,8 +22947,9 @@
           </a:bodyPr>
           <a:lstStyle/>
           <a:p>
-            <a:r>
-              <a:rPr sz="1100" b="0">
+            <a:pPr algn="l"/>
+            <a:r>
+              <a:rPr sz="950" b="0">
                 <a:solidFill>
                   <a:srgbClr val="FFFFFF"/>
                 </a:solidFill>
@@ -22891,20 +22961,20 @@
       </p:sp>
       <p:sp>
         <p:nvSpPr>
-          <p:cNvPr id="44" name="Rectangle 43"/>
+          <p:cNvPr id="45" name="Rectangle 44"/>
           <p:cNvSpPr/>
           <p:nvPr/>
         </p:nvSpPr>
         <p:spPr>
           <a:xfrm>
-            <a:off x="274320" y="4352544"/>
-            <a:ext cx="8595360" cy="365760"/>
+            <a:off x="274320" y="4809744"/>
+            <a:ext cx="8641080" cy="457200"/>
           </a:xfrm>
           <a:prstGeom prst="rect">
             <a:avLst/>
           </a:prstGeom>
           <a:solidFill>
-            <a:srgbClr val="282840"/>
+            <a:srgbClr val="16243E"/>
           </a:solidFill>
           <a:ln>
             <a:noFill/>
@@ -22934,14 +23004,14 @@
       </p:sp>
       <p:sp>
         <p:nvSpPr>
-          <p:cNvPr id="45" name="TextBox 44"/>
-          <p:cNvSpPr txBox="1"/>
-          <p:nvPr/>
-        </p:nvSpPr>
-        <p:spPr>
-          <a:xfrm>
-            <a:off x="320040" y="4398264"/>
-            <a:ext cx="1554480" cy="320040"/>
+          <p:cNvPr id="46" name="TextBox 45"/>
+          <p:cNvSpPr txBox="1"/>
+          <p:nvPr/>
+        </p:nvSpPr>
+        <p:spPr>
+          <a:xfrm>
+            <a:off x="292608" y="4882896"/>
+            <a:ext cx="1691640" cy="365760"/>
           </a:xfrm>
           <a:prstGeom prst="rect">
             <a:avLst/>
@@ -22954,10 +23024,11 @@
           </a:bodyPr>
           <a:lstStyle/>
           <a:p>
-            <a:r>
-              <a:rPr sz="1100" b="1">
-                <a:solidFill>
-                  <a:srgbClr val="F9E2AF"/>
+            <a:pPr algn="l"/>
+            <a:r>
+              <a:rPr sz="950" b="1">
+                <a:solidFill>
+                  <a:srgbClr val="A7F3D0"/>
                 </a:solidFill>
               </a:rPr>
               <a:t>session_id</a:t>
@@ -22967,14 +23038,14 @@
       </p:sp>
       <p:sp>
         <p:nvSpPr>
-          <p:cNvPr id="46" name="TextBox 45"/>
-          <p:cNvSpPr txBox="1"/>
-          <p:nvPr/>
-        </p:nvSpPr>
-        <p:spPr>
-          <a:xfrm>
-            <a:off x="1920240" y="4398264"/>
-            <a:ext cx="1188720" cy="320040"/>
+          <p:cNvPr id="47" name="TextBox 46"/>
+          <p:cNvSpPr txBox="1"/>
+          <p:nvPr/>
+        </p:nvSpPr>
+        <p:spPr>
+          <a:xfrm>
+            <a:off x="2029968" y="4882896"/>
+            <a:ext cx="1234440" cy="365760"/>
           </a:xfrm>
           <a:prstGeom prst="rect">
             <a:avLst/>
@@ -22987,10 +23058,11 @@
           </a:bodyPr>
           <a:lstStyle/>
           <a:p>
-            <a:r>
-              <a:rPr sz="1100" b="0">
-                <a:solidFill>
-                  <a:srgbClr val="FAB387"/>
+            <a:pPr algn="l"/>
+            <a:r>
+              <a:rPr sz="950" b="1">
+                <a:solidFill>
+                  <a:srgbClr val="D97706"/>
                 </a:solidFill>
               </a:rPr>
               <a:t>str</a:t>
@@ -23000,14 +23072,14 @@
       </p:sp>
       <p:sp>
         <p:nvSpPr>
-          <p:cNvPr id="47" name="TextBox 46"/>
-          <p:cNvSpPr txBox="1"/>
-          <p:nvPr/>
-        </p:nvSpPr>
-        <p:spPr>
-          <a:xfrm>
-            <a:off x="3154680" y="4398264"/>
-            <a:ext cx="2560320" cy="320040"/>
+          <p:cNvPr id="48" name="TextBox 47"/>
+          <p:cNvSpPr txBox="1"/>
+          <p:nvPr/>
+        </p:nvSpPr>
+        <p:spPr>
+          <a:xfrm>
+            <a:off x="3310128" y="4882896"/>
+            <a:ext cx="1417320" cy="365760"/>
           </a:xfrm>
           <a:prstGeom prst="rect">
             <a:avLst/>
@@ -23020,10 +23092,11 @@
           </a:bodyPr>
           <a:lstStyle/>
           <a:p>
-            <a:r>
-              <a:rPr sz="1100" b="0">
-                <a:solidFill>
-                  <a:srgbClr val="A6E3A1"/>
+            <a:pPr algn="l"/>
+            <a:r>
+              <a:rPr sz="950" b="0">
+                <a:solidFill>
+                  <a:srgbClr val="10B981"/>
                 </a:solidFill>
               </a:rPr>
               <a:t>—</a:t>
@@ -23033,14 +23106,14 @@
       </p:sp>
       <p:sp>
         <p:nvSpPr>
-          <p:cNvPr id="48" name="TextBox 47"/>
-          <p:cNvSpPr txBox="1"/>
-          <p:nvPr/>
-        </p:nvSpPr>
-        <p:spPr>
-          <a:xfrm>
-            <a:off x="5760720" y="4398264"/>
-            <a:ext cx="2926080" cy="320040"/>
+          <p:cNvPr id="49" name="TextBox 48"/>
+          <p:cNvSpPr txBox="1"/>
+          <p:nvPr/>
+        </p:nvSpPr>
+        <p:spPr>
+          <a:xfrm>
+            <a:off x="4773168" y="4882896"/>
+            <a:ext cx="4041648" cy="365760"/>
           </a:xfrm>
           <a:prstGeom prst="rect">
             <a:avLst/>
@@ -23053,8 +23126,9 @@
           </a:bodyPr>
           <a:lstStyle/>
           <a:p>
-            <a:r>
-              <a:rPr sz="1100" b="0">
+            <a:pPr algn="l"/>
+            <a:r>
+              <a:rPr sz="950" b="0">
                 <a:solidFill>
                   <a:srgbClr val="FFFFFF"/>
                 </a:solidFill>
@@ -23066,14 +23140,14 @@
       </p:sp>
       <p:sp>
         <p:nvSpPr>
-          <p:cNvPr id="49" name="TextBox 48"/>
-          <p:cNvSpPr txBox="1"/>
-          <p:nvPr/>
-        </p:nvSpPr>
-        <p:spPr>
-          <a:xfrm>
-            <a:off x="320040" y="4791456"/>
-            <a:ext cx="1554480" cy="320040"/>
+          <p:cNvPr id="50" name="TextBox 49"/>
+          <p:cNvSpPr txBox="1"/>
+          <p:nvPr/>
+        </p:nvSpPr>
+        <p:spPr>
+          <a:xfrm>
+            <a:off x="292608" y="5358384"/>
+            <a:ext cx="1691640" cy="365760"/>
           </a:xfrm>
           <a:prstGeom prst="rect">
             <a:avLst/>
@@ -23086,10 +23160,11 @@
           </a:bodyPr>
           <a:lstStyle/>
           <a:p>
-            <a:r>
-              <a:rPr sz="1100" b="1">
-                <a:solidFill>
-                  <a:srgbClr val="F9E2AF"/>
+            <a:pPr algn="l"/>
+            <a:r>
+              <a:rPr sz="950" b="1">
+                <a:solidFill>
+                  <a:srgbClr val="A7F3D0"/>
                 </a:solidFill>
               </a:rPr>
               <a:t>user_id</a:t>
@@ -23099,14 +23174,14 @@
       </p:sp>
       <p:sp>
         <p:nvSpPr>
-          <p:cNvPr id="50" name="TextBox 49"/>
-          <p:cNvSpPr txBox="1"/>
-          <p:nvPr/>
-        </p:nvSpPr>
-        <p:spPr>
-          <a:xfrm>
-            <a:off x="1920240" y="4791456"/>
-            <a:ext cx="1188720" cy="320040"/>
+          <p:cNvPr id="51" name="TextBox 50"/>
+          <p:cNvSpPr txBox="1"/>
+          <p:nvPr/>
+        </p:nvSpPr>
+        <p:spPr>
+          <a:xfrm>
+            <a:off x="2029968" y="5358384"/>
+            <a:ext cx="1234440" cy="365760"/>
           </a:xfrm>
           <a:prstGeom prst="rect">
             <a:avLst/>
@@ -23119,10 +23194,11 @@
           </a:bodyPr>
           <a:lstStyle/>
           <a:p>
-            <a:r>
-              <a:rPr sz="1100" b="0">
-                <a:solidFill>
-                  <a:srgbClr val="FAB387"/>
+            <a:pPr algn="l"/>
+            <a:r>
+              <a:rPr sz="950" b="1">
+                <a:solidFill>
+                  <a:srgbClr val="D97706"/>
                 </a:solidFill>
               </a:rPr>
               <a:t>str</a:t>
@@ -23132,14 +23208,14 @@
       </p:sp>
       <p:sp>
         <p:nvSpPr>
-          <p:cNvPr id="51" name="TextBox 50"/>
-          <p:cNvSpPr txBox="1"/>
-          <p:nvPr/>
-        </p:nvSpPr>
-        <p:spPr>
-          <a:xfrm>
-            <a:off x="3154680" y="4791456"/>
-            <a:ext cx="2560320" cy="320040"/>
+          <p:cNvPr id="52" name="TextBox 51"/>
+          <p:cNvSpPr txBox="1"/>
+          <p:nvPr/>
+        </p:nvSpPr>
+        <p:spPr>
+          <a:xfrm>
+            <a:off x="3310128" y="5358384"/>
+            <a:ext cx="1417320" cy="365760"/>
           </a:xfrm>
           <a:prstGeom prst="rect">
             <a:avLst/>
@@ -23152,10 +23228,11 @@
           </a:bodyPr>
           <a:lstStyle/>
           <a:p>
-            <a:r>
-              <a:rPr sz="1100" b="0">
-                <a:solidFill>
-                  <a:srgbClr val="A6E3A1"/>
+            <a:pPr algn="l"/>
+            <a:r>
+              <a:rPr sz="950" b="0">
+                <a:solidFill>
+                  <a:srgbClr val="10B981"/>
                 </a:solidFill>
               </a:rPr>
               <a:t>—</a:t>
@@ -23165,14 +23242,14 @@
       </p:sp>
       <p:sp>
         <p:nvSpPr>
-          <p:cNvPr id="52" name="TextBox 51"/>
-          <p:cNvSpPr txBox="1"/>
-          <p:nvPr/>
-        </p:nvSpPr>
-        <p:spPr>
-          <a:xfrm>
-            <a:off x="5760720" y="4791456"/>
-            <a:ext cx="2926080" cy="320040"/>
+          <p:cNvPr id="53" name="TextBox 52"/>
+          <p:cNvSpPr txBox="1"/>
+          <p:nvPr/>
+        </p:nvSpPr>
+        <p:spPr>
+          <a:xfrm>
+            <a:off x="4773168" y="5358384"/>
+            <a:ext cx="4041648" cy="365760"/>
           </a:xfrm>
           <a:prstGeom prst="rect">
             <a:avLst/>
@@ -23185,8 +23262,9 @@
           </a:bodyPr>
           <a:lstStyle/>
           <a:p>
-            <a:r>
-              <a:rPr sz="1100" b="0">
+            <a:pPr algn="l"/>
+            <a:r>
+              <a:rPr sz="950" b="0">
                 <a:solidFill>
                   <a:srgbClr val="FFFFFF"/>
                 </a:solidFill>
@@ -23198,20 +23276,20 @@
       </p:sp>
       <p:sp>
         <p:nvSpPr>
-          <p:cNvPr id="53" name="Rectangle 52"/>
+          <p:cNvPr id="54" name="Rectangle 53"/>
           <p:cNvSpPr/>
           <p:nvPr/>
         </p:nvSpPr>
         <p:spPr>
           <a:xfrm>
-            <a:off x="274320" y="5138928"/>
-            <a:ext cx="8595360" cy="365760"/>
+            <a:off x="274320" y="5760720"/>
+            <a:ext cx="8641080" cy="457200"/>
           </a:xfrm>
           <a:prstGeom prst="rect">
             <a:avLst/>
           </a:prstGeom>
           <a:solidFill>
-            <a:srgbClr val="282840"/>
+            <a:srgbClr val="16243E"/>
           </a:solidFill>
           <a:ln>
             <a:noFill/>
@@ -23241,14 +23319,14 @@
       </p:sp>
       <p:sp>
         <p:nvSpPr>
-          <p:cNvPr id="54" name="TextBox 53"/>
-          <p:cNvSpPr txBox="1"/>
-          <p:nvPr/>
-        </p:nvSpPr>
-        <p:spPr>
-          <a:xfrm>
-            <a:off x="320040" y="5184648"/>
-            <a:ext cx="1554480" cy="320040"/>
+          <p:cNvPr id="55" name="TextBox 54"/>
+          <p:cNvSpPr txBox="1"/>
+          <p:nvPr/>
+        </p:nvSpPr>
+        <p:spPr>
+          <a:xfrm>
+            <a:off x="292608" y="5833872"/>
+            <a:ext cx="1691640" cy="365760"/>
           </a:xfrm>
           <a:prstGeom prst="rect">
             <a:avLst/>
@@ -23261,10 +23339,11 @@
           </a:bodyPr>
           <a:lstStyle/>
           <a:p>
-            <a:r>
-              <a:rPr sz="1100" b="1">
-                <a:solidFill>
-                  <a:srgbClr val="F9E2AF"/>
+            <a:pPr algn="l"/>
+            <a:r>
+              <a:rPr sz="950" b="1">
+                <a:solidFill>
+                  <a:srgbClr val="A7F3D0"/>
                 </a:solidFill>
               </a:rPr>
               <a:t>actions_taken</a:t>
@@ -23274,14 +23353,14 @@
       </p:sp>
       <p:sp>
         <p:nvSpPr>
-          <p:cNvPr id="55" name="TextBox 54"/>
-          <p:cNvSpPr txBox="1"/>
-          <p:nvPr/>
-        </p:nvSpPr>
-        <p:spPr>
-          <a:xfrm>
-            <a:off x="1920240" y="5184648"/>
-            <a:ext cx="1188720" cy="320040"/>
+          <p:cNvPr id="56" name="TextBox 55"/>
+          <p:cNvSpPr txBox="1"/>
+          <p:nvPr/>
+        </p:nvSpPr>
+        <p:spPr>
+          <a:xfrm>
+            <a:off x="2029968" y="5833872"/>
+            <a:ext cx="1234440" cy="365760"/>
           </a:xfrm>
           <a:prstGeom prst="rect">
             <a:avLst/>
@@ -23294,10 +23373,11 @@
           </a:bodyPr>
           <a:lstStyle/>
           <a:p>
-            <a:r>
-              <a:rPr sz="1100" b="0">
-                <a:solidFill>
-                  <a:srgbClr val="FAB387"/>
+            <a:pPr algn="l"/>
+            <a:r>
+              <a:rPr sz="950" b="1">
+                <a:solidFill>
+                  <a:srgbClr val="D97706"/>
                 </a:solidFill>
               </a:rPr>
               <a:t>List[str]</a:t>
@@ -23307,14 +23387,14 @@
       </p:sp>
       <p:sp>
         <p:nvSpPr>
-          <p:cNvPr id="56" name="TextBox 55"/>
-          <p:cNvSpPr txBox="1"/>
-          <p:nvPr/>
-        </p:nvSpPr>
-        <p:spPr>
-          <a:xfrm>
-            <a:off x="3154680" y="5184648"/>
-            <a:ext cx="2560320" cy="320040"/>
+          <p:cNvPr id="57" name="TextBox 56"/>
+          <p:cNvSpPr txBox="1"/>
+          <p:nvPr/>
+        </p:nvSpPr>
+        <p:spPr>
+          <a:xfrm>
+            <a:off x="3310128" y="5833872"/>
+            <a:ext cx="1417320" cy="365760"/>
           </a:xfrm>
           <a:prstGeom prst="rect">
             <a:avLst/>
@@ -23327,10 +23407,11 @@
           </a:bodyPr>
           <a:lstStyle/>
           <a:p>
-            <a:r>
-              <a:rPr sz="1100" b="0">
-                <a:solidFill>
-                  <a:srgbClr val="A6E3A1"/>
+            <a:pPr algn="l"/>
+            <a:r>
+              <a:rPr sz="950" b="0">
+                <a:solidFill>
+                  <a:srgbClr val="10B981"/>
                 </a:solidFill>
               </a:rPr>
               <a:t>operator.add</a:t>
@@ -23340,14 +23421,14 @@
       </p:sp>
       <p:sp>
         <p:nvSpPr>
-          <p:cNvPr id="57" name="TextBox 56"/>
-          <p:cNvSpPr txBox="1"/>
-          <p:nvPr/>
-        </p:nvSpPr>
-        <p:spPr>
-          <a:xfrm>
-            <a:off x="5760720" y="5184648"/>
-            <a:ext cx="2926080" cy="320040"/>
+          <p:cNvPr id="58" name="TextBox 57"/>
+          <p:cNvSpPr txBox="1"/>
+          <p:nvPr/>
+        </p:nvSpPr>
+        <p:spPr>
+          <a:xfrm>
+            <a:off x="4773168" y="5833872"/>
+            <a:ext cx="4041648" cy="365760"/>
           </a:xfrm>
           <a:prstGeom prst="rect">
             <a:avLst/>
@@ -23360,13 +23441,14 @@
           </a:bodyPr>
           <a:lstStyle/>
           <a:p>
-            <a:r>
-              <a:rPr sz="1100" b="0">
+            <a:pPr algn="l"/>
+            <a:r>
+              <a:rPr sz="950" b="0">
                 <a:solidFill>
                   <a:srgbClr val="FFFFFF"/>
                 </a:solidFill>
               </a:rPr>
-              <a:t>Node names run this turn (accumulated)</a:t>
+              <a:t>Node names accumulated across turn</a:t>
             </a:r>
           </a:p>
         </p:txBody>
@@ -24793,48 +24875,82 @@
         </p:nvSpPr>
         <p:spPr>
           <a:xfrm>
-            <a:off x="365760" y="164592"/>
-            <a:ext cx="8412480" cy="594360"/>
-          </a:xfrm>
-          <a:prstGeom prst="rect">
-            <a:avLst/>
-          </a:prstGeom>
-          <a:noFill/>
-        </p:spPr>
-        <p:txBody>
-          <a:bodyPr wrap="none">
+            <a:off x="320040" y="137160"/>
+            <a:ext cx="8046720" cy="475488"/>
+          </a:xfrm>
+          <a:prstGeom prst="rect">
+            <a:avLst/>
+          </a:prstGeom>
+          <a:noFill/>
+        </p:spPr>
+        <p:txBody>
+          <a:bodyPr wrap="square">
             <a:spAutoFit/>
           </a:bodyPr>
           <a:lstStyle/>
           <a:p>
             <a:pPr algn="l"/>
             <a:r>
-              <a:rPr b="1" sz="2200">
-                <a:solidFill>
-                  <a:srgbClr val="74C7EC"/>
-                </a:solidFill>
-              </a:rPr>
-              <a:t>AgentState — Reducers Explained</a:t>
-            </a:r>
-          </a:p>
-        </p:txBody>
-      </p:sp>
-      <p:sp>
-        <p:nvSpPr>
-          <p:cNvPr id="3" name="Rectangle 2"/>
+              <a:rPr sz="1800" b="1">
+                <a:solidFill>
+                  <a:srgbClr val="FFFFFF"/>
+                </a:solidFill>
+              </a:rPr>
+              <a:t>AgentState — Reducers &amp; InMemorySaver</a:t>
+            </a:r>
+          </a:p>
+        </p:txBody>
+      </p:sp>
+      <p:sp>
+        <p:nvSpPr>
+          <p:cNvPr id="3" name="TextBox 2"/>
+          <p:cNvSpPr txBox="1"/>
+          <p:nvPr/>
+        </p:nvSpPr>
+        <p:spPr>
+          <a:xfrm>
+            <a:off x="8321040" y="164592"/>
+            <a:ext cx="548640" cy="320040"/>
+          </a:xfrm>
+          <a:prstGeom prst="rect">
+            <a:avLst/>
+          </a:prstGeom>
+          <a:noFill/>
+        </p:spPr>
+        <p:txBody>
+          <a:bodyPr wrap="square">
+            <a:spAutoFit/>
+          </a:bodyPr>
+          <a:lstStyle/>
+          <a:p>
+            <a:pPr algn="r"/>
+            <a:r>
+              <a:rPr sz="900" b="0">
+                <a:solidFill>
+                  <a:srgbClr val="A7F3D0"/>
+                </a:solidFill>
+              </a:rPr>
+              <a:t>30/34</a:t>
+            </a:r>
+          </a:p>
+        </p:txBody>
+      </p:sp>
+      <p:sp>
+        <p:nvSpPr>
+          <p:cNvPr id="4" name="Rectangle 3"/>
           <p:cNvSpPr/>
           <p:nvPr/>
         </p:nvSpPr>
         <p:spPr>
           <a:xfrm>
-            <a:off x="365760" y="804672"/>
-            <a:ext cx="8412480" cy="27432"/>
+            <a:off x="320040" y="658368"/>
+            <a:ext cx="8503920" cy="22860"/>
           </a:xfrm>
           <a:prstGeom prst="rect">
             <a:avLst/>
           </a:prstGeom>
           <a:solidFill>
-            <a:srgbClr val="74C7EC"/>
+            <a:srgbClr val="10B981"/>
           </a:solidFill>
           <a:ln>
             <a:noFill/>
@@ -24864,20 +24980,20 @@
       </p:sp>
       <p:sp>
         <p:nvSpPr>
-          <p:cNvPr id="4" name="Rectangle 3"/>
+          <p:cNvPr id="5" name="Rectangle 4"/>
           <p:cNvSpPr/>
           <p:nvPr/>
         </p:nvSpPr>
         <p:spPr>
           <a:xfrm>
-            <a:off x="320040" y="914400"/>
-            <a:ext cx="8503920" cy="5212080"/>
+            <a:off x="320040" y="749808"/>
+            <a:ext cx="8503920" cy="5394960"/>
           </a:xfrm>
           <a:prstGeom prst="rect">
             <a:avLst/>
           </a:prstGeom>
           <a:solidFill>
-            <a:srgbClr val="111122"/>
+            <a:srgbClr val="0F172A"/>
           </a:solidFill>
           <a:ln>
             <a:noFill/>
@@ -24907,14 +25023,14 @@
       </p:sp>
       <p:sp>
         <p:nvSpPr>
-          <p:cNvPr id="5" name="TextBox 4"/>
-          <p:cNvSpPr txBox="1"/>
-          <p:nvPr/>
-        </p:nvSpPr>
-        <p:spPr>
-          <a:xfrm>
-            <a:off x="429768" y="1005840"/>
-            <a:ext cx="8284464" cy="5074920"/>
+          <p:cNvPr id="6" name="TextBox 5"/>
+          <p:cNvSpPr txBox="1"/>
+          <p:nvPr/>
+        </p:nvSpPr>
+        <p:spPr>
+          <a:xfrm>
+            <a:off x="429768" y="841248"/>
+            <a:ext cx="8284464" cy="5230368"/>
           </a:xfrm>
           <a:prstGeom prst="rect">
             <a:avLst/>
@@ -24928,42 +25044,42 @@
           <a:lstStyle/>
           <a:p>
             <a:r>
-              <a:rPr sz="1050">
-                <a:solidFill>
-                  <a:srgbClr val="A6E3A1"/>
+              <a:rPr sz="900">
+                <a:solidFill>
+                  <a:srgbClr val="A7F3D0"/>
                 </a:solidFill>
                 <a:latin typeface="Courier New"/>
               </a:rPr>
-              <a:t># Without a reducer — last write wins (default)</a:t>
-            </a:r>
-          </a:p>
-          <a:p>
-            <a:r>
-              <a:rPr sz="1050">
-                <a:solidFill>
-                  <a:srgbClr val="A6E3A1"/>
+              <a:t># Default (no reducer) — last write wins — values get overwritten</a:t>
+            </a:r>
+          </a:p>
+          <a:p>
+            <a:r>
+              <a:rPr sz="900">
+                <a:solidFill>
+                  <a:srgbClr val="A7F3D0"/>
                 </a:solidFill>
                 <a:latin typeface="Courier New"/>
               </a:rPr>
-              <a:t>state["next_step"] = "qa_agent"          # classify_intent sets this</a:t>
-            </a:r>
-          </a:p>
-          <a:p>
-            <a:r>
-              <a:rPr sz="1050">
-                <a:solidFill>
-                  <a:srgbClr val="A6E3A1"/>
+              <a:t>state["next_step"] = "qa_agent"      # classify_intent sets this</a:t>
+            </a:r>
+          </a:p>
+          <a:p>
+            <a:r>
+              <a:rPr sz="900">
+                <a:solidFill>
+                  <a:srgbClr val="A7F3D0"/>
                 </a:solidFill>
                 <a:latin typeface="Courier New"/>
               </a:rPr>
-              <a:t>state["next_step"] = "summarization"     # update_memory overwrites it  ← lost!</a:t>
-            </a:r>
-          </a:p>
-          <a:p>
-            <a:r>
-              <a:rPr sz="1050">
-                <a:solidFill>
-                  <a:srgbClr val="A6E3A1"/>
+              <a:t>state["next_step"] = "update_memory" # next node overwrites ← data lost!</a:t>
+            </a:r>
+          </a:p>
+          <a:p>
+            <a:r>
+              <a:rPr sz="900">
+                <a:solidFill>
+                  <a:srgbClr val="A7F3D0"/>
                 </a:solidFill>
                 <a:latin typeface="Courier New"/>
               </a:rPr>
@@ -24972,9 +25088,9 @@
           </a:p>
           <a:p>
             <a:r>
-              <a:rPr sz="1050">
-                <a:solidFill>
-                  <a:srgbClr val="A6E3A1"/>
+              <a:rPr sz="900">
+                <a:solidFill>
+                  <a:srgbClr val="A7F3D0"/>
                 </a:solidFill>
                 <a:latin typeface="Courier New"/>
               </a:rPr>
@@ -24983,20 +25099,20 @@
           </a:p>
           <a:p>
             <a:r>
-              <a:rPr sz="1050">
-                <a:solidFill>
-                  <a:srgbClr val="A6E3A1"/>
+              <a:rPr sz="900">
+                <a:solidFill>
+                  <a:srgbClr val="A7F3D0"/>
                 </a:solidFill>
                 <a:latin typeface="Courier New"/>
               </a:rPr>
-              <a:t># add_messages reducer — appends, never overwrites</a:t>
-            </a:r>
-          </a:p>
-          <a:p>
-            <a:r>
-              <a:rPr sz="1050">
-                <a:solidFill>
-                  <a:srgbClr val="A6E3A1"/>
+              <a:t># add_messages — appends, never overwrites (conversation history)</a:t>
+            </a:r>
+          </a:p>
+          <a:p>
+            <a:r>
+              <a:rPr sz="900">
+                <a:solidFill>
+                  <a:srgbClr val="A7F3D0"/>
                 </a:solidFill>
                 <a:latin typeface="Courier New"/>
               </a:rPr>
@@ -25005,64 +25121,141 @@
           </a:p>
           <a:p>
             <a:r>
-              <a:rPr sz="1050">
-                <a:solidFill>
-                  <a:srgbClr val="A6E3A1"/>
+              <a:rPr sz="900">
+                <a:solidFill>
+                  <a:srgbClr val="A7F3D0"/>
                 </a:solidFill>
                 <a:latin typeface="Courier New"/>
               </a:rPr>
+              <a:t># Turn 1: [HumanMsg("Q1 revenue?"), AIMsg("$4.2M")]</a:t>
+            </a:r>
+          </a:p>
+          <a:p>
+            <a:r>
+              <a:rPr sz="900">
+                <a:solidFill>
+                  <a:srgbClr val="A7F3D0"/>
+                </a:solidFill>
+                <a:latin typeface="Courier New"/>
+              </a:rPr>
+              <a:t># Turn 2: [HumanMsg("Q2 revenue?"), AIMsg("$5.1M")]</a:t>
+            </a:r>
+          </a:p>
+          <a:p>
+            <a:r>
+              <a:rPr sz="900">
+                <a:solidFill>
+                  <a:srgbClr val="A7F3D0"/>
+                </a:solidFill>
+                <a:latin typeface="Courier New"/>
+              </a:rPr>
+              <a:t># State : all 4 messages preserved across both turns  ✓</a:t>
+            </a:r>
+          </a:p>
+          <a:p>
+            <a:r>
+              <a:rPr sz="900">
+                <a:solidFill>
+                  <a:srgbClr val="A7F3D0"/>
+                </a:solidFill>
+                <a:latin typeface="Courier New"/>
+              </a:rPr>
               <a:t/>
             </a:r>
           </a:p>
           <a:p>
             <a:r>
-              <a:rPr sz="1050">
-                <a:solidFill>
-                  <a:srgbClr val="A6E3A1"/>
+              <a:rPr sz="900">
+                <a:solidFill>
+                  <a:srgbClr val="A7F3D0"/>
                 </a:solidFill>
                 <a:latin typeface="Courier New"/>
               </a:rPr>
-              <a:t># Turn 1 result : [HumanMessage("Q1 revenue?"), AIMessage("$4.2M")]</a:t>
-            </a:r>
-          </a:p>
-          <a:p>
-            <a:r>
-              <a:rPr sz="1050">
-                <a:solidFill>
-                  <a:srgbClr val="A6E3A1"/>
+              <a:t/>
+            </a:r>
+          </a:p>
+          <a:p>
+            <a:r>
+              <a:rPr sz="900">
+                <a:solidFill>
+                  <a:srgbClr val="A7F3D0"/>
                 </a:solidFill>
                 <a:latin typeface="Courier New"/>
               </a:rPr>
-              <a:t># Turn 2 result : [HumanMessage("Q2 revenue?"), AIMessage("$5.1M")]</a:t>
-            </a:r>
-          </a:p>
-          <a:p>
-            <a:r>
-              <a:rPr sz="1050">
-                <a:solidFill>
-                  <a:srgbClr val="A6E3A1"/>
+              <a:t># operator.add — list concatenation across all nodes in one turn</a:t>
+            </a:r>
+          </a:p>
+          <a:p>
+            <a:r>
+              <a:rPr sz="900">
+                <a:solidFill>
+                  <a:srgbClr val="A7F3D0"/>
                 </a:solidFill>
                 <a:latin typeface="Courier New"/>
               </a:rPr>
-              <a:t># State after 2 turns: ALL 4 messages preserved  ✓</a:t>
-            </a:r>
-          </a:p>
-          <a:p>
-            <a:r>
-              <a:rPr sz="1050">
-                <a:solidFill>
-                  <a:srgbClr val="A6E3A1"/>
+              <a:t>actions_taken: Annotated[List[str], operator.add]</a:t>
+            </a:r>
+          </a:p>
+          <a:p>
+            <a:r>
+              <a:rPr sz="900">
+                <a:solidFill>
+                  <a:srgbClr val="A7F3D0"/>
                 </a:solidFill>
                 <a:latin typeface="Courier New"/>
               </a:rPr>
+              <a:t># classify_intent  returns → ["classify_intent"]</a:t>
+            </a:r>
+          </a:p>
+          <a:p>
+            <a:r>
+              <a:rPr sz="900">
+                <a:solidFill>
+                  <a:srgbClr val="A7F3D0"/>
+                </a:solidFill>
+                <a:latin typeface="Courier New"/>
+              </a:rPr>
+              <a:t># qa_agent         returns → ["qa_agent"]</a:t>
+            </a:r>
+          </a:p>
+          <a:p>
+            <a:r>
+              <a:rPr sz="900">
+                <a:solidFill>
+                  <a:srgbClr val="A7F3D0"/>
+                </a:solidFill>
+                <a:latin typeface="Courier New"/>
+              </a:rPr>
+              <a:t># update_memory    returns → ["update_memory"]</a:t>
+            </a:r>
+          </a:p>
+          <a:p>
+            <a:r>
+              <a:rPr sz="900">
+                <a:solidFill>
+                  <a:srgbClr val="A7F3D0"/>
+                </a:solidFill>
+                <a:latin typeface="Courier New"/>
+              </a:rPr>
+              <a:t># Final state              → ["classify_intent", "qa_agent", "update_memory"]  ✓</a:t>
+            </a:r>
+          </a:p>
+          <a:p>
+            <a:r>
+              <a:rPr sz="900">
+                <a:solidFill>
+                  <a:srgbClr val="A7F3D0"/>
+                </a:solidFill>
+                <a:latin typeface="Courier New"/>
+              </a:rPr>
               <a:t/>
             </a:r>
           </a:p>
           <a:p>
             <a:r>
-              <a:rPr sz="1050">
-                <a:solidFill>
-                  <a:srgbClr val="A6E3A1"/>
+              <a:rPr sz="900">
+                <a:solidFill>
+                  <a:srgbClr val="A7F3D0"/>
                 </a:solidFill>
                 <a:latin typeface="Courier New"/>
               </a:rPr>
@@ -25071,134 +25264,46 @@
           </a:p>
           <a:p>
             <a:r>
-              <a:rPr sz="1050">
-                <a:solidFill>
-                  <a:srgbClr val="A6E3A1"/>
+              <a:rPr sz="900">
+                <a:solidFill>
+                  <a:srgbClr val="A7F3D0"/>
                 </a:solidFill>
                 <a:latin typeface="Courier New"/>
               </a:rPr>
-              <a:t># operator.add reducer — list concatenation across nodes</a:t>
-            </a:r>
-          </a:p>
-          <a:p>
-            <a:r>
-              <a:rPr sz="1050">
-                <a:solidFill>
-                  <a:srgbClr val="A6E3A1"/>
+              <a:t># InMemorySaver — checkpoints full AgentState after every node</a:t>
+            </a:r>
+          </a:p>
+          <a:p>
+            <a:r>
+              <a:rPr sz="900">
+                <a:solidFill>
+                  <a:srgbClr val="A7F3D0"/>
                 </a:solidFill>
                 <a:latin typeface="Courier New"/>
               </a:rPr>
-              <a:t>actions_taken: Annotated[List[str], operator.add]</a:t>
-            </a:r>
-          </a:p>
-          <a:p>
-            <a:r>
-              <a:rPr sz="1050">
-                <a:solidFill>
-                  <a:srgbClr val="A6E3A1"/>
+              <a:t>workflow.compile(checkpointer=InMemorySaver())</a:t>
+            </a:r>
+          </a:p>
+          <a:p>
+            <a:r>
+              <a:rPr sz="900">
+                <a:solidFill>
+                  <a:srgbClr val="A7F3D0"/>
                 </a:solidFill>
                 <a:latin typeface="Courier New"/>
               </a:rPr>
-              <a:t/>
-            </a:r>
-          </a:p>
-          <a:p>
-            <a:r>
-              <a:rPr sz="1050">
-                <a:solidFill>
-                  <a:srgbClr val="A6E3A1"/>
+              <a:t># Next .invoke() with same thread_id → full state restored</a:t>
+            </a:r>
+          </a:p>
+          <a:p>
+            <a:r>
+              <a:rPr sz="900">
+                <a:solidFill>
+                  <a:srgbClr val="A7F3D0"/>
                 </a:solidFill>
                 <a:latin typeface="Courier New"/>
               </a:rPr>
-              <a:t># classify_intent returns : ["classify_intent"]</a:t>
-            </a:r>
-          </a:p>
-          <a:p>
-            <a:r>
-              <a:rPr sz="1050">
-                <a:solidFill>
-                  <a:srgbClr val="A6E3A1"/>
-                </a:solidFill>
-                <a:latin typeface="Courier New"/>
-              </a:rPr>
-              <a:t># qa_agent returns        : ["qa_agent"]</a:t>
-            </a:r>
-          </a:p>
-          <a:p>
-            <a:r>
-              <a:rPr sz="1050">
-                <a:solidFill>
-                  <a:srgbClr val="A6E3A1"/>
-                </a:solidFill>
-                <a:latin typeface="Courier New"/>
-              </a:rPr>
-              <a:t># update_memory returns   : ["update_memory"]</a:t>
-            </a:r>
-          </a:p>
-          <a:p>
-            <a:r>
-              <a:rPr sz="1050">
-                <a:solidFill>
-                  <a:srgbClr val="A6E3A1"/>
-                </a:solidFill>
-                <a:latin typeface="Courier New"/>
-              </a:rPr>
-              <a:t># Final state             : ["classify_intent", "qa_agent", "update_memory"]  ✓</a:t>
-            </a:r>
-          </a:p>
-          <a:p>
-            <a:r>
-              <a:rPr sz="1050">
-                <a:solidFill>
-                  <a:srgbClr val="A6E3A1"/>
-                </a:solidFill>
-                <a:latin typeface="Courier New"/>
-              </a:rPr>
-              <a:t/>
-            </a:r>
-          </a:p>
-          <a:p>
-            <a:r>
-              <a:rPr sz="1050">
-                <a:solidFill>
-                  <a:srgbClr val="A6E3A1"/>
-                </a:solidFill>
-                <a:latin typeface="Courier New"/>
-              </a:rPr>
-              <a:t/>
-            </a:r>
-          </a:p>
-          <a:p>
-            <a:r>
-              <a:rPr sz="1050">
-                <a:solidFill>
-                  <a:srgbClr val="A6E3A1"/>
-                </a:solidFill>
-                <a:latin typeface="Courier New"/>
-              </a:rPr>
-              <a:t># InMemorySaver — checkpoints full state after every node</a:t>
-            </a:r>
-          </a:p>
-          <a:p>
-            <a:r>
-              <a:rPr sz="1050">
-                <a:solidFill>
-                  <a:srgbClr val="A6E3A1"/>
-                </a:solidFill>
-                <a:latin typeface="Courier New"/>
-              </a:rPr>
-              <a:t>workflow.compile(checkpointer=InMemorySaver())</a:t>
-            </a:r>
-          </a:p>
-          <a:p>
-            <a:r>
-              <a:rPr sz="1050">
-                <a:solidFill>
-                  <a:srgbClr val="A6E3A1"/>
-                </a:solidFill>
-                <a:latin typeface="Courier New"/>
-              </a:rPr>
-              <a:t># Same thread_id → state restored on next .invoke()  →  true multi-turn memory</a:t>
+              <a:t># → true multi-turn memory without a database  ✓</a:t>
             </a:r>
           </a:p>
         </p:txBody>
@@ -25237,48 +25342,82 @@
         </p:nvSpPr>
         <p:spPr>
           <a:xfrm>
-            <a:off x="365760" y="164592"/>
-            <a:ext cx="8412480" cy="594360"/>
-          </a:xfrm>
-          <a:prstGeom prst="rect">
-            <a:avLst/>
-          </a:prstGeom>
-          <a:noFill/>
-        </p:spPr>
-        <p:txBody>
-          <a:bodyPr wrap="none">
+            <a:off x="320040" y="137160"/>
+            <a:ext cx="8046720" cy="475488"/>
+          </a:xfrm>
+          <a:prstGeom prst="rect">
+            <a:avLst/>
+          </a:prstGeom>
+          <a:noFill/>
+        </p:spPr>
+        <p:txBody>
+          <a:bodyPr wrap="square">
             <a:spAutoFit/>
           </a:bodyPr>
           <a:lstStyle/>
           <a:p>
             <a:pPr algn="l"/>
             <a:r>
-              <a:rPr b="1" sz="2200">
-                <a:solidFill>
-                  <a:srgbClr val="74C7EC"/>
-                </a:solidFill>
-              </a:rPr>
-              <a:t>Tools — calculator &amp; document_reader (tools.py)</a:t>
-            </a:r>
-          </a:p>
-        </p:txBody>
-      </p:sp>
-      <p:sp>
-        <p:nvSpPr>
-          <p:cNvPr id="3" name="Rectangle 2"/>
+              <a:rPr sz="1800" b="1">
+                <a:solidFill>
+                  <a:srgbClr val="FFFFFF"/>
+                </a:solidFill>
+              </a:rPr>
+              <a:t>Tools — calculator &amp; document_reader  (tools.py)</a:t>
+            </a:r>
+          </a:p>
+        </p:txBody>
+      </p:sp>
+      <p:sp>
+        <p:nvSpPr>
+          <p:cNvPr id="3" name="TextBox 2"/>
+          <p:cNvSpPr txBox="1"/>
+          <p:nvPr/>
+        </p:nvSpPr>
+        <p:spPr>
+          <a:xfrm>
+            <a:off x="8321040" y="164592"/>
+            <a:ext cx="548640" cy="320040"/>
+          </a:xfrm>
+          <a:prstGeom prst="rect">
+            <a:avLst/>
+          </a:prstGeom>
+          <a:noFill/>
+        </p:spPr>
+        <p:txBody>
+          <a:bodyPr wrap="square">
+            <a:spAutoFit/>
+          </a:bodyPr>
+          <a:lstStyle/>
+          <a:p>
+            <a:pPr algn="r"/>
+            <a:r>
+              <a:rPr sz="900" b="0">
+                <a:solidFill>
+                  <a:srgbClr val="A7F3D0"/>
+                </a:solidFill>
+              </a:rPr>
+              <a:t>31/34</a:t>
+            </a:r>
+          </a:p>
+        </p:txBody>
+      </p:sp>
+      <p:sp>
+        <p:nvSpPr>
+          <p:cNvPr id="4" name="Rectangle 3"/>
           <p:cNvSpPr/>
           <p:nvPr/>
         </p:nvSpPr>
         <p:spPr>
           <a:xfrm>
-            <a:off x="365760" y="804672"/>
-            <a:ext cx="8412480" cy="27432"/>
+            <a:off x="320040" y="658368"/>
+            <a:ext cx="8503920" cy="22860"/>
           </a:xfrm>
           <a:prstGeom prst="rect">
             <a:avLst/>
           </a:prstGeom>
           <a:solidFill>
-            <a:srgbClr val="74C7EC"/>
+            <a:srgbClr val="10B981"/>
           </a:solidFill>
           <a:ln>
             <a:noFill/>
@@ -25308,14 +25447,14 @@
       </p:sp>
       <p:sp>
         <p:nvSpPr>
-          <p:cNvPr id="4" name="TextBox 3"/>
-          <p:cNvSpPr txBox="1"/>
-          <p:nvPr/>
-        </p:nvSpPr>
-        <p:spPr>
-          <a:xfrm>
-            <a:off x="320040" y="914400"/>
-            <a:ext cx="8412480" cy="320040"/>
+          <p:cNvPr id="5" name="TextBox 4"/>
+          <p:cNvSpPr txBox="1"/>
+          <p:nvPr/>
+        </p:nvSpPr>
+        <p:spPr>
+          <a:xfrm>
+            <a:off x="320040" y="749808"/>
+            <a:ext cx="8412480" cy="292608"/>
           </a:xfrm>
           <a:prstGeom prst="rect">
             <a:avLst/>
@@ -25330,9 +25469,9 @@
           <a:p>
             <a:pPr algn="l"/>
             <a:r>
-              <a:rPr sz="1400" b="1">
-                <a:solidFill>
-                  <a:srgbClr val="F9E2AF"/>
+              <a:rPr sz="1200" b="1">
+                <a:solidFill>
+                  <a:srgbClr val="D97706"/>
                 </a:solidFill>
               </a:rPr>
               <a:t>🧮  calculator</a:t>
@@ -25342,20 +25481,20 @@
       </p:sp>
       <p:sp>
         <p:nvSpPr>
-          <p:cNvPr id="5" name="Rectangle 4"/>
+          <p:cNvPr id="6" name="Rectangle 5"/>
           <p:cNvSpPr/>
           <p:nvPr/>
         </p:nvSpPr>
         <p:spPr>
           <a:xfrm>
-            <a:off x="320040" y="1280160"/>
-            <a:ext cx="8503920" cy="1828800"/>
+            <a:off x="320040" y="1078992"/>
+            <a:ext cx="8503920" cy="1554480"/>
           </a:xfrm>
           <a:prstGeom prst="rect">
             <a:avLst/>
           </a:prstGeom>
           <a:solidFill>
-            <a:srgbClr val="111122"/>
+            <a:srgbClr val="0F172A"/>
           </a:solidFill>
           <a:ln>
             <a:noFill/>
@@ -25385,14 +25524,14 @@
       </p:sp>
       <p:sp>
         <p:nvSpPr>
-          <p:cNvPr id="6" name="TextBox 5"/>
-          <p:cNvSpPr txBox="1"/>
-          <p:nvPr/>
-        </p:nvSpPr>
-        <p:spPr>
-          <a:xfrm>
-            <a:off x="429768" y="1371600"/>
-            <a:ext cx="8284464" cy="1691640"/>
+          <p:cNvPr id="7" name="TextBox 6"/>
+          <p:cNvSpPr txBox="1"/>
+          <p:nvPr/>
+        </p:nvSpPr>
+        <p:spPr>
+          <a:xfrm>
+            <a:off x="429768" y="1170432"/>
+            <a:ext cx="8284464" cy="1389888"/>
           </a:xfrm>
           <a:prstGeom prst="rect">
             <a:avLst/>
@@ -25406,104 +25545,93 @@
           <a:lstStyle/>
           <a:p>
             <a:r>
-              <a:rPr sz="1050">
-                <a:solidFill>
-                  <a:srgbClr val="A6E3A1"/>
+              <a:rPr sz="900">
+                <a:solidFill>
+                  <a:srgbClr val="A7F3D0"/>
                 </a:solidFill>
                 <a:latin typeface="Courier New"/>
               </a:rPr>
-              <a:t>@tool</a:t>
-            </a:r>
-          </a:p>
-          <a:p>
-            <a:r>
-              <a:rPr sz="1050">
-                <a:solidFill>
-                  <a:srgbClr val="A6E3A1"/>
+              <a:t>@tool  def calculator(expression: str) -&gt; str:</a:t>
+            </a:r>
+          </a:p>
+          <a:p>
+            <a:r>
+              <a:rPr sz="900">
+                <a:solidFill>
+                  <a:srgbClr val="A7F3D0"/>
                 </a:solidFill>
                 <a:latin typeface="Courier New"/>
               </a:rPr>
-              <a:t>def calculator(expression: str) -&gt; str:</a:t>
-            </a:r>
-          </a:p>
-          <a:p>
-            <a:r>
-              <a:rPr sz="1050">
-                <a:solidFill>
-                  <a:srgbClr val="A6E3A1"/>
+              <a:t>  1. Strip commas:     "4,200,000 + 5,100,000"  →  "4200000 + 5100000"</a:t>
+            </a:r>
+          </a:p>
+          <a:p>
+            <a:r>
+              <a:rPr sz="900">
+                <a:solidFill>
+                  <a:srgbClr val="A7F3D0"/>
                 </a:solidFill>
                 <a:latin typeface="Courier New"/>
               </a:rPr>
-              <a:t>    # 1. Strip commas:        "4,200,000 + 5,100,000"  →  "4200000 + 5100000"</a:t>
-            </a:r>
-          </a:p>
-          <a:p>
-            <a:r>
-              <a:rPr sz="1050">
-                <a:solidFill>
-                  <a:srgbClr val="A6E3A1"/>
+              <a:t>  2. Regex whitelist:  only  digits  + - * / ( ) . %  allowed</a:t>
+            </a:r>
+          </a:p>
+          <a:p>
+            <a:r>
+              <a:rPr sz="900">
+                <a:solidFill>
+                  <a:srgbClr val="A7F3D0"/>
                 </a:solidFill>
                 <a:latin typeface="Courier New"/>
               </a:rPr>
-              <a:t>    # 2. Regex whitelist:     only  digits  + - * / ( ) . %  allowed</a:t>
-            </a:r>
-          </a:p>
-          <a:p>
-            <a:r>
-              <a:rPr sz="1050">
-                <a:solidFill>
-                  <a:srgbClr val="A6E3A1"/>
+              <a:t>  3. Sandboxed eval(): eval(expr, {"__builtins__": {}}, {})</a:t>
+            </a:r>
+          </a:p>
+          <a:p>
+            <a:r>
+              <a:rPr sz="900">
+                <a:solidFill>
+                  <a:srgbClr val="A7F3D0"/>
                 </a:solidFill>
                 <a:latin typeface="Courier New"/>
               </a:rPr>
-              <a:t>    # 3. Sandboxed eval():    eval(expr, {"__builtins__": {}}, {})</a:t>
-            </a:r>
-          </a:p>
-          <a:p>
-            <a:r>
-              <a:rPr sz="1050">
-                <a:solidFill>
-                  <a:srgbClr val="A6E3A1"/>
+              <a:t>  4. Format result:    int-valued float → "9,300,000"</a:t>
+            </a:r>
+          </a:p>
+          <a:p>
+            <a:r>
+              <a:rPr sz="900">
+                <a:solidFill>
+                  <a:srgbClr val="A7F3D0"/>
                 </a:solidFill>
                 <a:latin typeface="Courier New"/>
               </a:rPr>
-              <a:t>    # 4. Format result:       int-valued floats → "9,300,000"</a:t>
-            </a:r>
-          </a:p>
-          <a:p>
-            <a:r>
-              <a:rPr sz="1050">
-                <a:solidFill>
-                  <a:srgbClr val="A6E3A1"/>
+              <a:t>  5. Log to session:   logs/&lt;session_id&gt;.log  status = OK | INVALID_INPUT | ZERO_DIV | ERROR</a:t>
+            </a:r>
+          </a:p>
+          <a:p>
+            <a:r>
+              <a:rPr sz="900">
+                <a:solidFill>
+                  <a:srgbClr val="A7F3D0"/>
                 </a:solidFill>
                 <a:latin typeface="Courier New"/>
               </a:rPr>
-              <a:t>    # 5. Log to session file: status = OK | INVALID_INPUT | ZERO_DIVISION | ERROR</a:t>
-            </a:r>
-          </a:p>
-          <a:p>
-            <a:r>
-              <a:rPr sz="1050">
-                <a:solidFill>
-                  <a:srgbClr val="A6E3A1"/>
-                </a:solidFill>
-                <a:latin typeface="Courier New"/>
-              </a:rPr>
-              <a:t>    return "Result: 9,300,000  (expression: 4200000 + 5100000)" </a:t>
-            </a:r>
-          </a:p>
-        </p:txBody>
-      </p:sp>
-      <p:sp>
-        <p:nvSpPr>
-          <p:cNvPr id="7" name="TextBox 6"/>
-          <p:cNvSpPr txBox="1"/>
-          <p:nvPr/>
-        </p:nvSpPr>
-        <p:spPr>
-          <a:xfrm>
-            <a:off x="320040" y="3200400"/>
-            <a:ext cx="8412480" cy="320040"/>
+              <a:t>  Returns: "Result: 9,300,000  (expression: 4200000 + 5100000)" </a:t>
+            </a:r>
+          </a:p>
+        </p:txBody>
+      </p:sp>
+      <p:sp>
+        <p:nvSpPr>
+          <p:cNvPr id="8" name="TextBox 7"/>
+          <p:cNvSpPr txBox="1"/>
+          <p:nvPr/>
+        </p:nvSpPr>
+        <p:spPr>
+          <a:xfrm>
+            <a:off x="320040" y="2697480"/>
+            <a:ext cx="8412480" cy="292608"/>
           </a:xfrm>
           <a:prstGeom prst="rect">
             <a:avLst/>
@@ -25518,9 +25646,9 @@
           <a:p>
             <a:pPr algn="l"/>
             <a:r>
-              <a:rPr sz="1400" b="1">
-                <a:solidFill>
-                  <a:srgbClr val="F9E2AF"/>
+              <a:rPr sz="1200" b="1">
+                <a:solidFill>
+                  <a:srgbClr val="0891B2"/>
                 </a:solidFill>
               </a:rPr>
               <a:t>📄  document_reader</a:t>
@@ -25530,20 +25658,20 @@
       </p:sp>
       <p:sp>
         <p:nvSpPr>
-          <p:cNvPr id="8" name="Rectangle 7"/>
+          <p:cNvPr id="9" name="Rectangle 8"/>
           <p:cNvSpPr/>
           <p:nvPr/>
         </p:nvSpPr>
         <p:spPr>
           <a:xfrm>
-            <a:off x="320040" y="3566160"/>
-            <a:ext cx="8503920" cy="1691640"/>
+            <a:off x="320040" y="3017520"/>
+            <a:ext cx="8503920" cy="1600200"/>
           </a:xfrm>
           <a:prstGeom prst="rect">
             <a:avLst/>
           </a:prstGeom>
           <a:solidFill>
-            <a:srgbClr val="111122"/>
+            <a:srgbClr val="0F172A"/>
           </a:solidFill>
           <a:ln>
             <a:noFill/>
@@ -25573,14 +25701,14 @@
       </p:sp>
       <p:sp>
         <p:nvSpPr>
-          <p:cNvPr id="9" name="TextBox 8"/>
-          <p:cNvSpPr txBox="1"/>
-          <p:nvPr/>
-        </p:nvSpPr>
-        <p:spPr>
-          <a:xfrm>
-            <a:off x="429768" y="3657600"/>
-            <a:ext cx="8284464" cy="1554480"/>
+          <p:cNvPr id="10" name="TextBox 9"/>
+          <p:cNvSpPr txBox="1"/>
+          <p:nvPr/>
+        </p:nvSpPr>
+        <p:spPr>
+          <a:xfrm>
+            <a:off x="429768" y="3108960"/>
+            <a:ext cx="8284464" cy="1435608"/>
           </a:xfrm>
           <a:prstGeom prst="rect">
             <a:avLst/>
@@ -25594,103 +25722,92 @@
           <a:lstStyle/>
           <a:p>
             <a:r>
-              <a:rPr sz="1050">
-                <a:solidFill>
-                  <a:srgbClr val="A6E3A1"/>
+              <a:rPr sz="900">
+                <a:solidFill>
+                  <a:srgbClr val="A7F3D0"/>
                 </a:solidFill>
                 <a:latin typeface="Courier New"/>
               </a:rPr>
-              <a:t>@tool</a:t>
-            </a:r>
-          </a:p>
-          <a:p>
-            <a:r>
-              <a:rPr sz="1050">
-                <a:solidFill>
-                  <a:srgbClr val="A6E3A1"/>
+              <a:t>@tool  def document_reader(query: str) -&gt; str:</a:t>
+            </a:r>
+          </a:p>
+          <a:p>
+            <a:r>
+              <a:rPr sz="900">
+                <a:solidFill>
+                  <a:srgbClr val="A7F3D0"/>
                 </a:solidFill>
                 <a:latin typeface="Courier New"/>
               </a:rPr>
-              <a:t>def document_reader(query: str) -&gt; str:</a:t>
-            </a:r>
-          </a:p>
-          <a:p>
-            <a:r>
-              <a:rPr sz="1050">
-                <a:solidFill>
-                  <a:srgbClr val="A6E3A1"/>
+              <a:t>  Path 1  LIST         query="list"              → all doc IDs + titles       status=LIST</a:t>
+            </a:r>
+          </a:p>
+          <a:p>
+            <a:r>
+              <a:rPr sz="900">
+                <a:solidFill>
+                  <a:srgbClr val="A7F3D0"/>
                 </a:solidFill>
                 <a:latin typeface="Courier New"/>
               </a:rPr>
-              <a:t>    # Path 1  LIST        query = "list"         → returns all doc IDs + titles</a:t>
-            </a:r>
-          </a:p>
-          <a:p>
-            <a:r>
-              <a:rPr sz="1050">
-                <a:solidFill>
-                  <a:srgbClr val="A6E3A1"/>
+              <a:t>  Path 2  EXACT_MATCH  query="doc_financial_q2"  → full document content      status=EXACT_MATCH</a:t>
+            </a:r>
+          </a:p>
+          <a:p>
+            <a:r>
+              <a:rPr sz="900">
+                <a:solidFill>
+                  <a:srgbClr val="A7F3D0"/>
                 </a:solidFill>
                 <a:latin typeface="Courier New"/>
               </a:rPr>
-              <a:t>    # Path 2  EXACT_MATCH query = "doc_financial_q2"  → returns full content</a:t>
-            </a:r>
-          </a:p>
-          <a:p>
-            <a:r>
-              <a:rPr sz="1050">
-                <a:solidFill>
-                  <a:srgbClr val="A6E3A1"/>
+              <a:t>  Path 3  KEYWORD      query="revenue growth"    → keyword scored (top 3)     status=KEYWORD_MATCH</a:t>
+            </a:r>
+          </a:p>
+          <a:p>
+            <a:r>
+              <a:rPr sz="900">
+                <a:solidFill>
+                  <a:srgbClr val="A7F3D0"/>
                 </a:solidFill>
                 <a:latin typeface="Courier New"/>
               </a:rPr>
-              <a:t>    # Path 3  KEYWORD     query = "revenue growth"    → keyword scored search (top 3)</a:t>
-            </a:r>
-          </a:p>
-          <a:p>
-            <a:r>
-              <a:rPr sz="1050">
-                <a:solidFill>
-                  <a:srgbClr val="A6E3A1"/>
+              <a:t>  Path 4  FALLBACK     no match found            → first 2 docs in store      status=FALLBACK_ALL</a:t>
+            </a:r>
+          </a:p>
+          <a:p>
+            <a:r>
+              <a:rPr sz="900">
+                <a:solidFill>
+                  <a:srgbClr val="A7F3D0"/>
                 </a:solidFill>
                 <a:latin typeface="Courier New"/>
               </a:rPr>
-              <a:t>    # Path 4  FALLBACK    no match found         → returns first 2 docs in store</a:t>
-            </a:r>
-          </a:p>
-          <a:p>
-            <a:r>
-              <a:rPr sz="1050">
-                <a:solidFill>
-                  <a:srgbClr val="A6E3A1"/>
+              <a:t>  Path 5  NO_MATCH     store is empty            → "No documents found"        status=NO_MATCH</a:t>
+            </a:r>
+          </a:p>
+          <a:p>
+            <a:r>
+              <a:rPr sz="900">
+                <a:solidFill>
+                  <a:srgbClr val="A7F3D0"/>
                 </a:solidFill>
                 <a:latin typeface="Courier New"/>
               </a:rPr>
-              <a:t>    # Path 5  NO_MATCH    store is empty         → "No documents found"</a:t>
-            </a:r>
-          </a:p>
-          <a:p>
-            <a:r>
-              <a:rPr sz="1050">
-                <a:solidFill>
-                  <a:srgbClr val="A6E3A1"/>
-                </a:solidFill>
-                <a:latin typeface="Courier New"/>
-              </a:rPr>
-              <a:t>    # All paths log to logs/&lt;session_id&gt;.log with status label + full output</a:t>
-            </a:r>
-          </a:p>
-        </p:txBody>
-      </p:sp>
-      <p:sp>
-        <p:nvSpPr>
-          <p:cNvPr id="10" name="TextBox 9"/>
-          <p:cNvSpPr txBox="1"/>
-          <p:nvPr/>
-        </p:nvSpPr>
-        <p:spPr>
-          <a:xfrm>
-            <a:off x="320040" y="5321808"/>
+              <a:t>  All paths append to logs/&lt;session_id&gt;.log with full input + output (no truncation)</a:t>
+            </a:r>
+          </a:p>
+        </p:txBody>
+      </p:sp>
+      <p:sp>
+        <p:nvSpPr>
+          <p:cNvPr id="11" name="TextBox 10"/>
+          <p:cNvSpPr txBox="1"/>
+          <p:nvPr/>
+        </p:nvSpPr>
+        <p:spPr>
+          <a:xfrm>
+            <a:off x="320040" y="4681728"/>
             <a:ext cx="8503920" cy="502920"/>
           </a:xfrm>
           <a:prstGeom prst="rect">
@@ -25706,23 +25823,23 @@
           <a:p>
             <a:pPr algn="l"/>
             <a:r>
-              <a:rPr sz="1100" b="0">
-                <a:solidFill>
-                  <a:srgbClr val="CDD6F4"/>
-                </a:solidFill>
-              </a:rPr>
-              <a:t>Both tools are bound to the LLM via llm.bind_tools([calculator, document_reader])</a:t>
+              <a:rPr sz="950" b="0">
+                <a:solidFill>
+                  <a:srgbClr val="A7F3D0"/>
+                </a:solidFill>
+              </a:rPr>
+              <a:t>set_session_context(session_id) wires ToolLogger to the correct log file.</a:t>
             </a:r>
           </a:p>
           <a:p>
             <a:pPr algn="l"/>
             <a:r>
-              <a:rPr sz="1100" b="0">
-                <a:solidFill>
-                  <a:srgbClr val="CDD6F4"/>
-                </a:solidFill>
-              </a:rPr>
-              <a:t>and invoked inside _run_tool_loop() when the LLM returns a tool_calls response.</a:t>
+              <a:rPr sz="950" b="0">
+                <a:solidFill>
+                  <a:srgbClr val="A7F3D0"/>
+                </a:solidFill>
+              </a:rPr>
+              <a:t>Both tools are bound to the LLM via llm.bind_tools() and called inside _run_tool_loop().</a:t>
             </a:r>
           </a:p>
         </p:txBody>
@@ -25761,48 +25878,82 @@
         </p:nvSpPr>
         <p:spPr>
           <a:xfrm>
-            <a:off x="365760" y="164592"/>
-            <a:ext cx="8412480" cy="594360"/>
-          </a:xfrm>
-          <a:prstGeom prst="rect">
-            <a:avLst/>
-          </a:prstGeom>
-          <a:noFill/>
-        </p:spPr>
-        <p:txBody>
-          <a:bodyPr wrap="none">
+            <a:off x="320040" y="137160"/>
+            <a:ext cx="8046720" cy="475488"/>
+          </a:xfrm>
+          <a:prstGeom prst="rect">
+            <a:avLst/>
+          </a:prstGeom>
+          <a:noFill/>
+        </p:spPr>
+        <p:txBody>
+          <a:bodyPr wrap="square">
             <a:spAutoFit/>
           </a:bodyPr>
           <a:lstStyle/>
           <a:p>
             <a:pPr algn="l"/>
             <a:r>
-              <a:rPr b="1" sz="2200">
-                <a:solidFill>
-                  <a:srgbClr val="74C7EC"/>
-                </a:solidFill>
-              </a:rPr>
-              <a:t>Tool Calling Loop — _run_tool_loop()</a:t>
-            </a:r>
-          </a:p>
-        </p:txBody>
-      </p:sp>
-      <p:sp>
-        <p:nvSpPr>
-          <p:cNvPr id="3" name="Rectangle 2"/>
+              <a:rPr sz="1800" b="1">
+                <a:solidFill>
+                  <a:srgbClr val="FFFFFF"/>
+                </a:solidFill>
+              </a:rPr>
+              <a:t>Tool Calling Loop — _run_tool_loop()  (agent.py)</a:t>
+            </a:r>
+          </a:p>
+        </p:txBody>
+      </p:sp>
+      <p:sp>
+        <p:nvSpPr>
+          <p:cNvPr id="3" name="TextBox 2"/>
+          <p:cNvSpPr txBox="1"/>
+          <p:nvPr/>
+        </p:nvSpPr>
+        <p:spPr>
+          <a:xfrm>
+            <a:off x="8321040" y="164592"/>
+            <a:ext cx="548640" cy="320040"/>
+          </a:xfrm>
+          <a:prstGeom prst="rect">
+            <a:avLst/>
+          </a:prstGeom>
+          <a:noFill/>
+        </p:spPr>
+        <p:txBody>
+          <a:bodyPr wrap="square">
+            <a:spAutoFit/>
+          </a:bodyPr>
+          <a:lstStyle/>
+          <a:p>
+            <a:pPr algn="r"/>
+            <a:r>
+              <a:rPr sz="900" b="0">
+                <a:solidFill>
+                  <a:srgbClr val="A7F3D0"/>
+                </a:solidFill>
+              </a:rPr>
+              <a:t>32/34</a:t>
+            </a:r>
+          </a:p>
+        </p:txBody>
+      </p:sp>
+      <p:sp>
+        <p:nvSpPr>
+          <p:cNvPr id="4" name="Rectangle 3"/>
           <p:cNvSpPr/>
           <p:nvPr/>
         </p:nvSpPr>
         <p:spPr>
           <a:xfrm>
-            <a:off x="365760" y="804672"/>
-            <a:ext cx="8412480" cy="27432"/>
+            <a:off x="320040" y="658368"/>
+            <a:ext cx="8503920" cy="22860"/>
           </a:xfrm>
           <a:prstGeom prst="rect">
             <a:avLst/>
           </a:prstGeom>
           <a:solidFill>
-            <a:srgbClr val="74C7EC"/>
+            <a:srgbClr val="10B981"/>
           </a:solidFill>
           <a:ln>
             <a:noFill/>
@@ -25832,20 +25983,20 @@
       </p:sp>
       <p:sp>
         <p:nvSpPr>
-          <p:cNvPr id="4" name="Rectangle 3"/>
+          <p:cNvPr id="5" name="Rectangle 4"/>
           <p:cNvSpPr/>
           <p:nvPr/>
         </p:nvSpPr>
         <p:spPr>
           <a:xfrm>
-            <a:off x="320040" y="914400"/>
-            <a:ext cx="8503920" cy="3931920"/>
+            <a:off x="320040" y="749808"/>
+            <a:ext cx="8503920" cy="5394960"/>
           </a:xfrm>
           <a:prstGeom prst="rect">
             <a:avLst/>
           </a:prstGeom>
           <a:solidFill>
-            <a:srgbClr val="111122"/>
+            <a:srgbClr val="0F172A"/>
           </a:solidFill>
           <a:ln>
             <a:noFill/>
@@ -25875,14 +26026,14 @@
       </p:sp>
       <p:sp>
         <p:nvSpPr>
-          <p:cNvPr id="5" name="TextBox 4"/>
-          <p:cNvSpPr txBox="1"/>
-          <p:nvPr/>
-        </p:nvSpPr>
-        <p:spPr>
-          <a:xfrm>
-            <a:off x="429768" y="1005840"/>
-            <a:ext cx="8284464" cy="3794760"/>
+          <p:cNvPr id="6" name="TextBox 5"/>
+          <p:cNvSpPr txBox="1"/>
+          <p:nvPr/>
+        </p:nvSpPr>
+        <p:spPr>
+          <a:xfrm>
+            <a:off x="429768" y="841248"/>
+            <a:ext cx="8284464" cy="5230368"/>
           </a:xfrm>
           <a:prstGeom prst="rect">
             <a:avLst/>
@@ -25896,9 +26047,9 @@
           <a:lstStyle/>
           <a:p>
             <a:r>
-              <a:rPr sz="1050">
-                <a:solidFill>
-                  <a:srgbClr val="A6E3A1"/>
+              <a:rPr sz="900">
+                <a:solidFill>
+                  <a:srgbClr val="A7F3D0"/>
                 </a:solidFill>
                 <a:latin typeface="Courier New"/>
               </a:rPr>
@@ -25907,31 +26058,31 @@
           </a:p>
           <a:p>
             <a:r>
-              <a:rPr sz="1050">
-                <a:solidFill>
-                  <a:srgbClr val="A6E3A1"/>
+              <a:rPr sz="900">
+                <a:solidFill>
+                  <a:srgbClr val="A7F3D0"/>
                 </a:solidFill>
                 <a:latin typeface="Courier New"/>
               </a:rPr>
-              <a:t>    tools_used      = []</a:t>
-            </a:r>
-          </a:p>
-          <a:p>
-            <a:r>
-              <a:rPr sz="1050">
-                <a:solidFill>
-                  <a:srgbClr val="A6E3A1"/>
+              <a:t>    # max_iter=8 for calculation_agent (needs doc_reader + calculator in sequence)</a:t>
+            </a:r>
+          </a:p>
+          <a:p>
+            <a:r>
+              <a:rPr sz="900">
+                <a:solidFill>
+                  <a:srgbClr val="A7F3D0"/>
                 </a:solidFill>
                 <a:latin typeface="Courier New"/>
               </a:rPr>
-              <a:t>    context_snippets = []</a:t>
-            </a:r>
-          </a:p>
-          <a:p>
-            <a:r>
-              <a:rPr sz="1050">
-                <a:solidFill>
-                  <a:srgbClr val="A6E3A1"/>
+              <a:t>    tools_used, context_snippets = [], []</a:t>
+            </a:r>
+          </a:p>
+          <a:p>
+            <a:r>
+              <a:rPr sz="900">
+                <a:solidFill>
+                  <a:srgbClr val="A7F3D0"/>
                 </a:solidFill>
                 <a:latin typeface="Courier New"/>
               </a:rPr>
@@ -25940,53 +26091,75 @@
           </a:p>
           <a:p>
             <a:r>
-              <a:rPr sz="1050">
-                <a:solidFill>
-                  <a:srgbClr val="A6E3A1"/>
+              <a:rPr sz="900">
+                <a:solidFill>
+                  <a:srgbClr val="A7F3D0"/>
                 </a:solidFill>
                 <a:latin typeface="Courier New"/>
               </a:rPr>
-              <a:t>    for _ in range(max_iter):          # max 5 iterations (8 for calculation_agent)</a:t>
-            </a:r>
-          </a:p>
-          <a:p>
-            <a:r>
-              <a:rPr sz="1050">
-                <a:solidFill>
-                  <a:srgbClr val="A6E3A1"/>
+              <a:t>    for _ in range(max_iter):</a:t>
+            </a:r>
+          </a:p>
+          <a:p>
+            <a:r>
+              <a:rPr sz="900">
+                <a:solidFill>
+                  <a:srgbClr val="A7F3D0"/>
                 </a:solidFill>
                 <a:latin typeface="Courier New"/>
               </a:rPr>
+              <a:t>        response = llm_with_tools.invoke(messages)   # LLM call</a:t>
+            </a:r>
+          </a:p>
+          <a:p>
+            <a:r>
+              <a:rPr sz="900">
+                <a:solidFill>
+                  <a:srgbClr val="A7F3D0"/>
+                </a:solidFill>
+                <a:latin typeface="Courier New"/>
+              </a:rPr>
+              <a:t>        messages.append(response)</a:t>
+            </a:r>
+          </a:p>
+          <a:p>
+            <a:r>
+              <a:rPr sz="900">
+                <a:solidFill>
+                  <a:srgbClr val="A7F3D0"/>
+                </a:solidFill>
+                <a:latin typeface="Courier New"/>
+              </a:rPr>
               <a:t/>
             </a:r>
           </a:p>
           <a:p>
             <a:r>
-              <a:rPr sz="1050">
-                <a:solidFill>
-                  <a:srgbClr val="A6E3A1"/>
+              <a:rPr sz="900">
+                <a:solidFill>
+                  <a:srgbClr val="A7F3D0"/>
                 </a:solidFill>
                 <a:latin typeface="Courier New"/>
               </a:rPr>
-              <a:t>        response = llm_with_tools.invoke(messages)</a:t>
-            </a:r>
-          </a:p>
-          <a:p>
-            <a:r>
-              <a:rPr sz="1050">
-                <a:solidFill>
-                  <a:srgbClr val="A6E3A1"/>
+              <a:t>        if not response.tool_calls:                   # LLM done — no more tools</a:t>
+            </a:r>
+          </a:p>
+          <a:p>
+            <a:r>
+              <a:rPr sz="900">
+                <a:solidFill>
+                  <a:srgbClr val="A7F3D0"/>
                 </a:solidFill>
                 <a:latin typeface="Courier New"/>
               </a:rPr>
-              <a:t>        messages.append(response)</a:t>
-            </a:r>
-          </a:p>
-          <a:p>
-            <a:r>
-              <a:rPr sz="1050">
-                <a:solidFill>
-                  <a:srgbClr val="A6E3A1"/>
+              <a:t>            break</a:t>
+            </a:r>
+          </a:p>
+          <a:p>
+            <a:r>
+              <a:rPr sz="900">
+                <a:solidFill>
+                  <a:srgbClr val="A7F3D0"/>
                 </a:solidFill>
                 <a:latin typeface="Courier New"/>
               </a:rPr>
@@ -25995,234 +26168,211 @@
           </a:p>
           <a:p>
             <a:r>
-              <a:rPr sz="1050">
-                <a:solidFill>
-                  <a:srgbClr val="A6E3A1"/>
+              <a:rPr sz="900">
+                <a:solidFill>
+                  <a:srgbClr val="A7F3D0"/>
                 </a:solidFill>
                 <a:latin typeface="Courier New"/>
               </a:rPr>
-              <a:t>        if not response.tool_calls:    # LLM finished — no more tool calls</a:t>
-            </a:r>
-          </a:p>
-          <a:p>
-            <a:r>
-              <a:rPr sz="1050">
-                <a:solidFill>
-                  <a:srgbClr val="A6E3A1"/>
+              <a:t>        for tc in response.tool_calls:</a:t>
+            </a:r>
+          </a:p>
+          <a:p>
+            <a:r>
+              <a:rPr sz="900">
+                <a:solidFill>
+                  <a:srgbClr val="A7F3D0"/>
                 </a:solidFill>
                 <a:latin typeface="Courier New"/>
               </a:rPr>
-              <a:t>            break</a:t>
-            </a:r>
-          </a:p>
-          <a:p>
-            <a:r>
-              <a:rPr sz="1050">
-                <a:solidFill>
-                  <a:srgbClr val="A6E3A1"/>
+              <a:t>            name   = tc["name"]                       # e.g. "document_reader"</a:t>
+            </a:r>
+          </a:p>
+          <a:p>
+            <a:r>
+              <a:rPr sz="900">
+                <a:solidFill>
+                  <a:srgbClr val="A7F3D0"/>
                 </a:solidFill>
                 <a:latin typeface="Courier New"/>
               </a:rPr>
+              <a:t>            result = tool_map[name].invoke(tc["args"])# runs the tool → logs to file</a:t>
+            </a:r>
+          </a:p>
+          <a:p>
+            <a:r>
+              <a:rPr sz="900">
+                <a:solidFill>
+                  <a:srgbClr val="A7F3D0"/>
+                </a:solidFill>
+                <a:latin typeface="Courier New"/>
+              </a:rPr>
+              <a:t>            tools_used.append(name)</a:t>
+            </a:r>
+          </a:p>
+          <a:p>
+            <a:r>
+              <a:rPr sz="900">
+                <a:solidFill>
+                  <a:srgbClr val="A7F3D0"/>
+                </a:solidFill>
+                <a:latin typeface="Courier New"/>
+              </a:rPr>
+              <a:t>            context_snippets.append(str(result))</a:t>
+            </a:r>
+          </a:p>
+          <a:p>
+            <a:r>
+              <a:rPr sz="900">
+                <a:solidFill>
+                  <a:srgbClr val="A7F3D0"/>
+                </a:solidFill>
+                <a:latin typeface="Courier New"/>
+              </a:rPr>
+              <a:t>            messages.append(ToolMessage(content=result, tool_call_id=tc["id"]))</a:t>
+            </a:r>
+          </a:p>
+          <a:p>
+            <a:r>
+              <a:rPr sz="900">
+                <a:solidFill>
+                  <a:srgbClr val="A7F3D0"/>
+                </a:solidFill>
+                <a:latin typeface="Courier New"/>
+              </a:rPr>
               <a:t/>
             </a:r>
           </a:p>
           <a:p>
             <a:r>
-              <a:rPr sz="1050">
-                <a:solidFill>
-                  <a:srgbClr val="A6E3A1"/>
+              <a:rPr sz="900">
+                <a:solidFill>
+                  <a:srgbClr val="A7F3D0"/>
                 </a:solidFill>
                 <a:latin typeface="Courier New"/>
               </a:rPr>
-              <a:t>        for tc in response.tool_calls:</a:t>
-            </a:r>
-          </a:p>
-          <a:p>
-            <a:r>
-              <a:rPr sz="1050">
-                <a:solidFill>
-                  <a:srgbClr val="A6E3A1"/>
+              <a:t>    return messages, tools_used, context_snippets</a:t>
+            </a:r>
+          </a:p>
+          <a:p>
+            <a:r>
+              <a:rPr sz="900">
+                <a:solidFill>
+                  <a:srgbClr val="A7F3D0"/>
                 </a:solidFill>
                 <a:latin typeface="Courier New"/>
               </a:rPr>
-              <a:t>            name   = tc["name"]        # e.g. "document_reader"</a:t>
-            </a:r>
-          </a:p>
-          <a:p>
-            <a:r>
-              <a:rPr sz="1050">
-                <a:solidFill>
-                  <a:srgbClr val="A6E3A1"/>
+              <a:t/>
+            </a:r>
+          </a:p>
+          <a:p>
+            <a:r>
+              <a:rPr sz="900">
+                <a:solidFill>
+                  <a:srgbClr val="A7F3D0"/>
                 </a:solidFill>
                 <a:latin typeface="Courier New"/>
               </a:rPr>
-              <a:t>            result = tool_map[name].invoke(tc["args"])   # runs the tool</a:t>
-            </a:r>
-          </a:p>
-          <a:p>
-            <a:r>
-              <a:rPr sz="1050">
-                <a:solidFill>
-                  <a:srgbClr val="A6E3A1"/>
+              <a:t/>
+            </a:r>
+          </a:p>
+          <a:p>
+            <a:r>
+              <a:rPr sz="900">
+                <a:solidFill>
+                  <a:srgbClr val="A7F3D0"/>
                 </a:solidFill>
                 <a:latin typeface="Courier New"/>
               </a:rPr>
-              <a:t>            tools_used.append(name)</a:t>
-            </a:r>
-          </a:p>
-          <a:p>
-            <a:r>
-              <a:rPr sz="1050">
-                <a:solidFill>
-                  <a:srgbClr val="A6E3A1"/>
+              <a:t># After the loop — fallback if LLM never called any tool</a:t>
+            </a:r>
+          </a:p>
+          <a:p>
+            <a:r>
+              <a:rPr sz="900">
+                <a:solidFill>
+                  <a:srgbClr val="A7F3D0"/>
                 </a:solidFill>
                 <a:latin typeface="Courier New"/>
               </a:rPr>
-              <a:t>            context_snippets.append(str(result))</a:t>
-            </a:r>
-          </a:p>
-          <a:p>
-            <a:r>
-              <a:rPr sz="1050">
-                <a:solidFill>
-                  <a:srgbClr val="A6E3A1"/>
+              <a:t>if not context_snippets:</a:t>
+            </a:r>
+          </a:p>
+          <a:p>
+            <a:r>
+              <a:rPr sz="900">
+                <a:solidFill>
+                  <a:srgbClr val="A7F3D0"/>
                 </a:solidFill>
                 <a:latin typeface="Courier New"/>
               </a:rPr>
-              <a:t>            messages.append(ToolMessage(content=result, tool_call_id=tc["id"]))</a:t>
-            </a:r>
-          </a:p>
-          <a:p>
-            <a:r>
-              <a:rPr sz="1050">
-                <a:solidFill>
-                  <a:srgbClr val="A6E3A1"/>
+              <a:t>    context_snippets = _direct_retrieve(state["user_input"])</a:t>
+            </a:r>
+          </a:p>
+          <a:p>
+            <a:r>
+              <a:rPr sz="900">
+                <a:solidFill>
+                  <a:srgbClr val="A7F3D0"/>
                 </a:solidFill>
                 <a:latin typeface="Courier New"/>
               </a:rPr>
+              <a:t>    # Searches retriever directly + logs FALLBACK entry to session log</a:t>
+            </a:r>
+          </a:p>
+          <a:p>
+            <a:r>
+              <a:rPr sz="900">
+                <a:solidFill>
+                  <a:srgbClr val="A7F3D0"/>
+                </a:solidFill>
+                <a:latin typeface="Courier New"/>
+              </a:rPr>
               <a:t/>
             </a:r>
           </a:p>
           <a:p>
             <a:r>
-              <a:rPr sz="1050">
-                <a:solidFill>
-                  <a:srgbClr val="A6E3A1"/>
+              <a:rPr sz="900">
+                <a:solidFill>
+                  <a:srgbClr val="A7F3D0"/>
                 </a:solidFill>
                 <a:latin typeface="Courier New"/>
               </a:rPr>
-              <a:t>    return messages, tools_used, context_snippets</a:t>
-            </a:r>
-          </a:p>
-          <a:p>
-            <a:r>
-              <a:rPr sz="1050">
-                <a:solidFill>
-                  <a:srgbClr val="A6E3A1"/>
+              <a:t/>
+            </a:r>
+          </a:p>
+          <a:p>
+            <a:r>
+              <a:rPr sz="900">
+                <a:solidFill>
+                  <a:srgbClr val="A7F3D0"/>
                 </a:solidFill>
                 <a:latin typeface="Courier New"/>
               </a:rPr>
-              <a:t/>
-            </a:r>
-          </a:p>
-          <a:p>
-            <a:r>
-              <a:rPr sz="1050">
-                <a:solidFill>
-                  <a:srgbClr val="A6E3A1"/>
+              <a:t># Phase 2 — structured output call (always after the tool loop)</a:t>
+            </a:r>
+          </a:p>
+          <a:p>
+            <a:r>
+              <a:rPr sz="900">
+                <a:solidFill>
+                  <a:srgbClr val="A7F3D0"/>
                 </a:solidFill>
                 <a:latin typeface="Courier New"/>
               </a:rPr>
-              <a:t/>
-            </a:r>
-          </a:p>
-          <a:p>
-            <a:r>
-              <a:rPr sz="1050">
-                <a:solidFill>
-                  <a:srgbClr val="A6E3A1"/>
+              <a:t>final_response = llm.with_structured_output(AnswerResponse).invoke(final_prompt)</a:t>
+            </a:r>
+          </a:p>
+          <a:p>
+            <a:r>
+              <a:rPr sz="900">
+                <a:solidFill>
+                  <a:srgbClr val="A7F3D0"/>
                 </a:solidFill>
                 <a:latin typeface="Courier New"/>
               </a:rPr>
-              <a:t># If context_snippets is still empty after the loop:</a:t>
-            </a:r>
-          </a:p>
-          <a:p>
-            <a:r>
-              <a:rPr sz="1050">
-                <a:solidFill>
-                  <a:srgbClr val="A6E3A1"/>
-                </a:solidFill>
-                <a:latin typeface="Courier New"/>
-              </a:rPr>
-              <a:t>if not context_snippets:</a:t>
-            </a:r>
-          </a:p>
-          <a:p>
-            <a:r>
-              <a:rPr sz="1050">
-                <a:solidFill>
-                  <a:srgbClr val="A6E3A1"/>
-                </a:solidFill>
-                <a:latin typeface="Courier New"/>
-              </a:rPr>
-              <a:t>    context_snippets = _direct_retrieve(state["user_input"])</a:t>
-            </a:r>
-          </a:p>
-          <a:p>
-            <a:r>
-              <a:rPr sz="1050">
-                <a:solidFill>
-                  <a:srgbClr val="A6E3A1"/>
-                </a:solidFill>
-                <a:latin typeface="Courier New"/>
-              </a:rPr>
-              <a:t>    # → searches retriever directly and logs a FALLBACK entry</a:t>
-            </a:r>
-          </a:p>
-        </p:txBody>
-      </p:sp>
-      <p:sp>
-        <p:nvSpPr>
-          <p:cNvPr id="6" name="TextBox 5"/>
-          <p:cNvSpPr txBox="1"/>
-          <p:nvPr/>
-        </p:nvSpPr>
-        <p:spPr>
-          <a:xfrm>
-            <a:off x="320040" y="4937760"/>
-            <a:ext cx="8503920" cy="594360"/>
-          </a:xfrm>
-          <a:prstGeom prst="rect">
-            <a:avLst/>
-          </a:prstGeom>
-          <a:noFill/>
-        </p:spPr>
-        <p:txBody>
-          <a:bodyPr wrap="square">
-            <a:spAutoFit/>
-          </a:bodyPr>
-          <a:lstStyle/>
-          <a:p>
-            <a:pPr algn="l"/>
-            <a:r>
-              <a:rPr sz="1100" b="0">
-                <a:solidFill>
-                  <a:srgbClr val="CDD6F4"/>
-                </a:solidFill>
-              </a:rPr>
-              <a:t>Each tool result becomes a ToolMessage appended to the message chain so the LLM sees it in the next iteration.</a:t>
-            </a:r>
-          </a:p>
-          <a:p>
-            <a:pPr algn="l"/>
-            <a:r>
-              <a:rPr sz="1100" b="0">
-                <a:solidFill>
-                  <a:srgbClr val="CDD6F4"/>
-                </a:solidFill>
-              </a:rPr>
-              <a:t>After the loop, context_snippets feeds the Phase 2 structured-output call.</a:t>
+              <a:t># final_prompt contains the retrieved content + original question</a:t>
             </a:r>
           </a:p>
         </p:txBody>
@@ -26261,48 +26411,82 @@
         </p:nvSpPr>
         <p:spPr>
           <a:xfrm>
-            <a:off x="365760" y="164592"/>
-            <a:ext cx="8412480" cy="594360"/>
-          </a:xfrm>
-          <a:prstGeom prst="rect">
-            <a:avLst/>
-          </a:prstGeom>
-          <a:noFill/>
-        </p:spPr>
-        <p:txBody>
-          <a:bodyPr wrap="none">
+            <a:off x="320040" y="137160"/>
+            <a:ext cx="8046720" cy="475488"/>
+          </a:xfrm>
+          <a:prstGeom prst="rect">
+            <a:avLst/>
+          </a:prstGeom>
+          <a:noFill/>
+        </p:spPr>
+        <p:txBody>
+          <a:bodyPr wrap="square">
             <a:spAutoFit/>
           </a:bodyPr>
           <a:lstStyle/>
           <a:p>
             <a:pPr algn="l"/>
             <a:r>
-              <a:rPr b="1" sz="2200">
-                <a:solidFill>
-                  <a:srgbClr val="74C7EC"/>
-                </a:solidFill>
-              </a:rPr>
-              <a:t>All 5 Agent Nodes — Listing &amp; Role (agent.py)</a:t>
-            </a:r>
-          </a:p>
-        </p:txBody>
-      </p:sp>
-      <p:sp>
-        <p:nvSpPr>
-          <p:cNvPr id="3" name="Rectangle 2"/>
+              <a:rPr sz="1800" b="1">
+                <a:solidFill>
+                  <a:srgbClr val="FFFFFF"/>
+                </a:solidFill>
+              </a:rPr>
+              <a:t>All 5 Agent Nodes — Role &amp; Output  (agent.py)</a:t>
+            </a:r>
+          </a:p>
+        </p:txBody>
+      </p:sp>
+      <p:sp>
+        <p:nvSpPr>
+          <p:cNvPr id="3" name="TextBox 2"/>
+          <p:cNvSpPr txBox="1"/>
+          <p:nvPr/>
+        </p:nvSpPr>
+        <p:spPr>
+          <a:xfrm>
+            <a:off x="8321040" y="164592"/>
+            <a:ext cx="548640" cy="320040"/>
+          </a:xfrm>
+          <a:prstGeom prst="rect">
+            <a:avLst/>
+          </a:prstGeom>
+          <a:noFill/>
+        </p:spPr>
+        <p:txBody>
+          <a:bodyPr wrap="square">
+            <a:spAutoFit/>
+          </a:bodyPr>
+          <a:lstStyle/>
+          <a:p>
+            <a:pPr algn="r"/>
+            <a:r>
+              <a:rPr sz="900" b="0">
+                <a:solidFill>
+                  <a:srgbClr val="A7F3D0"/>
+                </a:solidFill>
+              </a:rPr>
+              <a:t>33/34</a:t>
+            </a:r>
+          </a:p>
+        </p:txBody>
+      </p:sp>
+      <p:sp>
+        <p:nvSpPr>
+          <p:cNvPr id="4" name="Rectangle 3"/>
           <p:cNvSpPr/>
           <p:nvPr/>
         </p:nvSpPr>
         <p:spPr>
           <a:xfrm>
-            <a:off x="365760" y="804672"/>
-            <a:ext cx="8412480" cy="27432"/>
+            <a:off x="320040" y="658368"/>
+            <a:ext cx="8503920" cy="22860"/>
           </a:xfrm>
           <a:prstGeom prst="rect">
             <a:avLst/>
           </a:prstGeom>
           <a:solidFill>
-            <a:srgbClr val="74C7EC"/>
+            <a:srgbClr val="10B981"/>
           </a:solidFill>
           <a:ln>
             <a:noFill/>
@@ -26332,24 +26516,24 @@
       </p:sp>
       <p:sp>
         <p:nvSpPr>
-          <p:cNvPr id="4" name="Rectangle 3"/>
+          <p:cNvPr id="5" name="Rectangle 4"/>
           <p:cNvSpPr/>
           <p:nvPr/>
         </p:nvSpPr>
         <p:spPr>
           <a:xfrm>
-            <a:off x="274320" y="914400"/>
-            <a:ext cx="8595360" cy="877824"/>
+            <a:off x="274320" y="749808"/>
+            <a:ext cx="8641080" cy="914400"/>
           </a:xfrm>
           <a:prstGeom prst="rect">
             <a:avLst/>
           </a:prstGeom>
           <a:solidFill>
-            <a:srgbClr val="222238"/>
+            <a:srgbClr val="0F172A"/>
           </a:solidFill>
-          <a:ln w="12700">
+          <a:ln w="9525">
             <a:solidFill>
-              <a:srgbClr val="74C7EC"/>
+              <a:srgbClr val="10B981"/>
             </a:solidFill>
           </a:ln>
         </p:spPr>
@@ -26377,20 +26561,20 @@
       </p:sp>
       <p:sp>
         <p:nvSpPr>
-          <p:cNvPr id="5" name="Rectangle 4"/>
+          <p:cNvPr id="6" name="Rectangle 5"/>
           <p:cNvSpPr/>
           <p:nvPr/>
         </p:nvSpPr>
         <p:spPr>
           <a:xfrm>
-            <a:off x="347472" y="1188720"/>
-            <a:ext cx="256032" cy="256032"/>
+            <a:off x="347472" y="1024128"/>
+            <a:ext cx="237744" cy="237744"/>
           </a:xfrm>
           <a:prstGeom prst="rect">
             <a:avLst/>
           </a:prstGeom>
           <a:solidFill>
-            <a:srgbClr val="74C7EC"/>
+            <a:srgbClr val="10B981"/>
           </a:solidFill>
           <a:ln>
             <a:noFill/>
@@ -26420,48 +26604,14 @@
       </p:sp>
       <p:sp>
         <p:nvSpPr>
-          <p:cNvPr id="6" name="TextBox 5"/>
-          <p:cNvSpPr txBox="1"/>
-          <p:nvPr/>
-        </p:nvSpPr>
-        <p:spPr>
-          <a:xfrm>
-            <a:off x="347472" y="1188720"/>
-            <a:ext cx="256032" cy="256032"/>
-          </a:xfrm>
-          <a:prstGeom prst="rect">
-            <a:avLst/>
-          </a:prstGeom>
-          <a:noFill/>
-        </p:spPr>
-        <p:txBody>
-          <a:bodyPr wrap="none">
-            <a:spAutoFit/>
-          </a:bodyPr>
-          <a:lstStyle/>
-          <a:p>
-            <a:pPr algn="ctr"/>
-            <a:r>
-              <a:rPr b="1" sz="1000">
-                <a:solidFill>
-                  <a:srgbClr val="1E1E2E"/>
-                </a:solidFill>
-              </a:rPr>
-              <a:t>1</a:t>
-            </a:r>
-          </a:p>
-        </p:txBody>
-      </p:sp>
-      <p:sp>
-        <p:nvSpPr>
           <p:cNvPr id="7" name="TextBox 6"/>
           <p:cNvSpPr txBox="1"/>
           <p:nvPr/>
         </p:nvSpPr>
         <p:spPr>
           <a:xfrm>
-            <a:off x="685800" y="1143000"/>
-            <a:ext cx="1828800" cy="411480"/>
+            <a:off x="347472" y="1005840"/>
+            <a:ext cx="237744" cy="256032"/>
           </a:xfrm>
           <a:prstGeom prst="rect">
             <a:avLst/>
@@ -26474,15 +26624,14 @@
           </a:bodyPr>
           <a:lstStyle/>
           <a:p>
-            <a:pPr algn="l"/>
-            <a:r>
-              <a:rPr sz="1300" b="1">
-                <a:solidFill>
-                  <a:srgbClr val="74C7EC"/>
-                </a:solidFill>
-                <a:latin typeface="Courier New"/>
-              </a:rPr>
-              <a:t>classify_intent</a:t>
+            <a:pPr algn="ctr"/>
+            <a:r>
+              <a:rPr sz="900" b="1">
+                <a:solidFill>
+                  <a:srgbClr val="1E1E2E"/>
+                </a:solidFill>
+              </a:rPr>
+              <a:t>1</a:t>
             </a:r>
           </a:p>
         </p:txBody>
@@ -26495,8 +26644,8 @@
         </p:nvSpPr>
         <p:spPr>
           <a:xfrm>
-            <a:off x="2606040" y="987552"/>
-            <a:ext cx="6172200" cy="702346982400"/>
+            <a:off x="667512" y="978408"/>
+            <a:ext cx="1920240" cy="320040"/>
           </a:xfrm>
           <a:prstGeom prst="rect">
             <a:avLst/>
@@ -26511,69 +26660,93 @@
           <a:p>
             <a:pPr algn="l"/>
             <a:r>
-              <a:rPr sz="1050" b="0">
+              <a:rPr sz="1100" b="1">
+                <a:solidFill>
+                  <a:srgbClr val="10B981"/>
+                </a:solidFill>
+                <a:latin typeface="Courier New"/>
+              </a:rPr>
+              <a:t>classify_intent</a:t>
+            </a:r>
+          </a:p>
+        </p:txBody>
+      </p:sp>
+      <p:sp>
+        <p:nvSpPr>
+          <p:cNvPr id="9" name="TextBox 8"/>
+          <p:cNvSpPr txBox="1"/>
+          <p:nvPr/>
+        </p:nvSpPr>
+        <p:spPr>
+          <a:xfrm>
+            <a:off x="2651760" y="841248"/>
+            <a:ext cx="6172200" cy="822960"/>
+          </a:xfrm>
+          <a:prstGeom prst="rect">
+            <a:avLst/>
+          </a:prstGeom>
+          <a:noFill/>
+        </p:spPr>
+        <p:txBody>
+          <a:bodyPr wrap="square">
+            <a:spAutoFit/>
+          </a:bodyPr>
+          <a:lstStyle/>
+          <a:p>
+            <a:pPr algn="l"/>
+            <a:r>
+              <a:rPr sz="950" b="0">
                 <a:solidFill>
                   <a:srgbClr val="FFFFFF"/>
                 </a:solidFill>
               </a:rPr>
-              <a:t>WHEN: Entry point — every message</a:t>
+              <a:t>When: Entry point — every message</a:t>
             </a:r>
           </a:p>
           <a:p>
             <a:pPr algn="l"/>
             <a:r>
-              <a:rPr sz="1050" b="0">
+              <a:rPr sz="950" b="0">
                 <a:solidFill>
                   <a:srgbClr val="FFFFFF"/>
                 </a:solidFill>
               </a:rPr>
-              <a:t>DOES: Calls llm.with_structured_output(UserIntent) with the enriched</a:t>
+              <a:t>Does: llm.with_structured_output(UserIntent) with enriched intent prompt + last 6 messages</a:t>
             </a:r>
           </a:p>
           <a:p>
             <a:pPr algn="l"/>
             <a:r>
-              <a:rPr sz="1050" b="0">
+              <a:rPr sz="950" b="0">
                 <a:solidFill>
                   <a:srgbClr val="FFFFFF"/>
                 </a:solidFill>
               </a:rPr>
-              <a:t>      intent classification prompt + last 6 messages as history.</a:t>
-            </a:r>
-          </a:p>
-          <a:p>
-            <a:pPr algn="l"/>
-            <a:r>
-              <a:rPr sz="1050" b="0">
-                <a:solidFill>
-                  <a:srgbClr val="FFFFFF"/>
-                </a:solidFill>
-              </a:rPr>
-              <a:t>OUT:  intent_type, confidence, reasoning → sets next_step for routing</a:t>
-            </a:r>
-          </a:p>
-        </p:txBody>
-      </p:sp>
-      <p:sp>
-        <p:nvSpPr>
-          <p:cNvPr id="9" name="Rectangle 8"/>
+              <a:t>Out:  intent_type, confidence, reasoning → sets next_step for routing</a:t>
+            </a:r>
+          </a:p>
+        </p:txBody>
+      </p:sp>
+      <p:sp>
+        <p:nvSpPr>
+          <p:cNvPr id="10" name="Rectangle 9"/>
           <p:cNvSpPr/>
           <p:nvPr/>
         </p:nvSpPr>
         <p:spPr>
           <a:xfrm>
-            <a:off x="274320" y="1847088"/>
-            <a:ext cx="8595360" cy="877824"/>
+            <a:off x="274320" y="1709928"/>
+            <a:ext cx="8641080" cy="914400"/>
           </a:xfrm>
           <a:prstGeom prst="rect">
             <a:avLst/>
           </a:prstGeom>
           <a:solidFill>
-            <a:srgbClr val="222238"/>
+            <a:srgbClr val="0F172A"/>
           </a:solidFill>
-          <a:ln w="12700">
+          <a:ln w="9525">
             <a:solidFill>
-              <a:srgbClr val="A6E3A1"/>
+              <a:srgbClr val="1D4ED8"/>
             </a:solidFill>
           </a:ln>
         </p:spPr>
@@ -26601,20 +26774,20 @@
       </p:sp>
       <p:sp>
         <p:nvSpPr>
-          <p:cNvPr id="10" name="Rectangle 9"/>
+          <p:cNvPr id="11" name="Rectangle 10"/>
           <p:cNvSpPr/>
           <p:nvPr/>
         </p:nvSpPr>
         <p:spPr>
           <a:xfrm>
-            <a:off x="347472" y="2121408"/>
-            <a:ext cx="256032" cy="256032"/>
+            <a:off x="347472" y="1984248"/>
+            <a:ext cx="237744" cy="237744"/>
           </a:xfrm>
           <a:prstGeom prst="rect">
             <a:avLst/>
           </a:prstGeom>
           <a:solidFill>
-            <a:srgbClr val="A6E3A1"/>
+            <a:srgbClr val="1D4ED8"/>
           </a:solidFill>
           <a:ln>
             <a:noFill/>
@@ -26644,48 +26817,14 @@
       </p:sp>
       <p:sp>
         <p:nvSpPr>
-          <p:cNvPr id="11" name="TextBox 10"/>
-          <p:cNvSpPr txBox="1"/>
-          <p:nvPr/>
-        </p:nvSpPr>
-        <p:spPr>
-          <a:xfrm>
-            <a:off x="347472" y="2121408"/>
-            <a:ext cx="256032" cy="256032"/>
-          </a:xfrm>
-          <a:prstGeom prst="rect">
-            <a:avLst/>
-          </a:prstGeom>
-          <a:noFill/>
-        </p:spPr>
-        <p:txBody>
-          <a:bodyPr wrap="none">
-            <a:spAutoFit/>
-          </a:bodyPr>
-          <a:lstStyle/>
-          <a:p>
-            <a:pPr algn="ctr"/>
-            <a:r>
-              <a:rPr b="1" sz="1000">
-                <a:solidFill>
-                  <a:srgbClr val="1E1E2E"/>
-                </a:solidFill>
-              </a:rPr>
-              <a:t>2</a:t>
-            </a:r>
-          </a:p>
-        </p:txBody>
-      </p:sp>
-      <p:sp>
-        <p:nvSpPr>
           <p:cNvPr id="12" name="TextBox 11"/>
           <p:cNvSpPr txBox="1"/>
           <p:nvPr/>
         </p:nvSpPr>
         <p:spPr>
           <a:xfrm>
-            <a:off x="685800" y="2075688"/>
-            <a:ext cx="1828800" cy="411480"/>
+            <a:off x="347472" y="1965960"/>
+            <a:ext cx="237744" cy="256032"/>
           </a:xfrm>
           <a:prstGeom prst="rect">
             <a:avLst/>
@@ -26698,15 +26837,14 @@
           </a:bodyPr>
           <a:lstStyle/>
           <a:p>
-            <a:pPr algn="l"/>
-            <a:r>
-              <a:rPr sz="1300" b="1">
-                <a:solidFill>
-                  <a:srgbClr val="A6E3A1"/>
-                </a:solidFill>
-                <a:latin typeface="Courier New"/>
-              </a:rPr>
-              <a:t>qa_agent</a:t>
+            <a:pPr algn="ctr"/>
+            <a:r>
+              <a:rPr sz="900" b="1">
+                <a:solidFill>
+                  <a:srgbClr val="1E1E2E"/>
+                </a:solidFill>
+              </a:rPr>
+              <a:t>2</a:t>
             </a:r>
           </a:p>
         </p:txBody>
@@ -26719,8 +26857,8 @@
         </p:nvSpPr>
         <p:spPr>
           <a:xfrm>
-            <a:off x="2606040" y="1920240"/>
-            <a:ext cx="6172200" cy="702346982400"/>
+            <a:off x="667512" y="1938528"/>
+            <a:ext cx="1920240" cy="320040"/>
           </a:xfrm>
           <a:prstGeom prst="rect">
             <a:avLst/>
@@ -26735,69 +26873,93 @@
           <a:p>
             <a:pPr algn="l"/>
             <a:r>
-              <a:rPr sz="1050" b="0">
+              <a:rPr sz="1100" b="1">
+                <a:solidFill>
+                  <a:srgbClr val="1D4ED8"/>
+                </a:solidFill>
+                <a:latin typeface="Courier New"/>
+              </a:rPr>
+              <a:t>qa_agent</a:t>
+            </a:r>
+          </a:p>
+        </p:txBody>
+      </p:sp>
+      <p:sp>
+        <p:nvSpPr>
+          <p:cNvPr id="14" name="TextBox 13"/>
+          <p:cNvSpPr txBox="1"/>
+          <p:nvPr/>
+        </p:nvSpPr>
+        <p:spPr>
+          <a:xfrm>
+            <a:off x="2651760" y="1801368"/>
+            <a:ext cx="6172200" cy="822960"/>
+          </a:xfrm>
+          <a:prstGeom prst="rect">
+            <a:avLst/>
+          </a:prstGeom>
+          <a:noFill/>
+        </p:spPr>
+        <p:txBody>
+          <a:bodyPr wrap="square">
+            <a:spAutoFit/>
+          </a:bodyPr>
+          <a:lstStyle/>
+          <a:p>
+            <a:pPr algn="l"/>
+            <a:r>
+              <a:rPr sz="950" b="0">
                 <a:solidFill>
                   <a:srgbClr val="FFFFFF"/>
                 </a:solidFill>
               </a:rPr>
-              <a:t>WHEN: intent_type == 'qa'</a:t>
+              <a:t>When: intent_type == 'qa'</a:t>
             </a:r>
           </a:p>
           <a:p>
             <a:pPr algn="l"/>
             <a:r>
-              <a:rPr sz="1050" b="0">
+              <a:rPr sz="950" b="0">
                 <a:solidFill>
                   <a:srgbClr val="FFFFFF"/>
                 </a:solidFill>
               </a:rPr>
-              <a:t>DOES: Tool loop with document_reader → Phase 2 with AnswerResponse.</a:t>
+              <a:t>Does: Tool loop → document_reader → Phase 2 with AnswerResponse schema</a:t>
             </a:r>
           </a:p>
           <a:p>
             <a:pPr algn="l"/>
             <a:r>
-              <a:rPr sz="1050" b="0">
+              <a:rPr sz="950" b="0">
                 <a:solidFill>
                   <a:srgbClr val="FFFFFF"/>
                 </a:solidFill>
               </a:rPr>
-              <a:t>      Injects _available_docs_hint() so LLM knows all doc IDs.</a:t>
-            </a:r>
-          </a:p>
-          <a:p>
-            <a:pPr algn="l"/>
-            <a:r>
-              <a:rPr sz="1050" b="0">
-                <a:solidFill>
-                  <a:srgbClr val="FFFFFF"/>
-                </a:solidFill>
-              </a:rPr>
-              <a:t>OUT:  AnswerResponse(question, answer, sources, confidence)</a:t>
-            </a:r>
-          </a:p>
-        </p:txBody>
-      </p:sp>
-      <p:sp>
-        <p:nvSpPr>
-          <p:cNvPr id="14" name="Rectangle 13"/>
+              <a:t>Out:  AnswerResponse(question, answer, sources, confidence, timestamp)</a:t>
+            </a:r>
+          </a:p>
+        </p:txBody>
+      </p:sp>
+      <p:sp>
+        <p:nvSpPr>
+          <p:cNvPr id="15" name="Rectangle 14"/>
           <p:cNvSpPr/>
           <p:nvPr/>
         </p:nvSpPr>
         <p:spPr>
           <a:xfrm>
-            <a:off x="274320" y="2779776"/>
-            <a:ext cx="8595360" cy="877824"/>
+            <a:off x="274320" y="2670048"/>
+            <a:ext cx="8641080" cy="914400"/>
           </a:xfrm>
           <a:prstGeom prst="rect">
             <a:avLst/>
           </a:prstGeom>
           <a:solidFill>
-            <a:srgbClr val="222238"/>
+            <a:srgbClr val="0F172A"/>
           </a:solidFill>
-          <a:ln w="12700">
+          <a:ln w="9525">
             <a:solidFill>
-              <a:srgbClr val="F9E2AF"/>
+              <a:srgbClr val="7C3AED"/>
             </a:solidFill>
           </a:ln>
         </p:spPr>
@@ -26825,20 +26987,20 @@
       </p:sp>
       <p:sp>
         <p:nvSpPr>
-          <p:cNvPr id="15" name="Rectangle 14"/>
+          <p:cNvPr id="16" name="Rectangle 15"/>
           <p:cNvSpPr/>
           <p:nvPr/>
         </p:nvSpPr>
         <p:spPr>
           <a:xfrm>
-            <a:off x="347472" y="3054096"/>
-            <a:ext cx="256032" cy="256032"/>
+            <a:off x="347472" y="2944368"/>
+            <a:ext cx="237744" cy="237744"/>
           </a:xfrm>
           <a:prstGeom prst="rect">
             <a:avLst/>
           </a:prstGeom>
           <a:solidFill>
-            <a:srgbClr val="F9E2AF"/>
+            <a:srgbClr val="7C3AED"/>
           </a:solidFill>
           <a:ln>
             <a:noFill/>
@@ -26868,48 +27030,14 @@
       </p:sp>
       <p:sp>
         <p:nvSpPr>
-          <p:cNvPr id="16" name="TextBox 15"/>
-          <p:cNvSpPr txBox="1"/>
-          <p:nvPr/>
-        </p:nvSpPr>
-        <p:spPr>
-          <a:xfrm>
-            <a:off x="347472" y="3054096"/>
-            <a:ext cx="256032" cy="256032"/>
-          </a:xfrm>
-          <a:prstGeom prst="rect">
-            <a:avLst/>
-          </a:prstGeom>
-          <a:noFill/>
-        </p:spPr>
-        <p:txBody>
-          <a:bodyPr wrap="none">
-            <a:spAutoFit/>
-          </a:bodyPr>
-          <a:lstStyle/>
-          <a:p>
-            <a:pPr algn="ctr"/>
-            <a:r>
-              <a:rPr b="1" sz="1000">
-                <a:solidFill>
-                  <a:srgbClr val="1E1E2E"/>
-                </a:solidFill>
-              </a:rPr>
-              <a:t>3</a:t>
-            </a:r>
-          </a:p>
-        </p:txBody>
-      </p:sp>
-      <p:sp>
-        <p:nvSpPr>
           <p:cNvPr id="17" name="TextBox 16"/>
           <p:cNvSpPr txBox="1"/>
           <p:nvPr/>
         </p:nvSpPr>
         <p:spPr>
           <a:xfrm>
-            <a:off x="685800" y="3008376"/>
-            <a:ext cx="1828800" cy="411480"/>
+            <a:off x="347472" y="2926080"/>
+            <a:ext cx="237744" cy="256032"/>
           </a:xfrm>
           <a:prstGeom prst="rect">
             <a:avLst/>
@@ -26922,15 +27050,14 @@
           </a:bodyPr>
           <a:lstStyle/>
           <a:p>
-            <a:pPr algn="l"/>
-            <a:r>
-              <a:rPr sz="1300" b="1">
-                <a:solidFill>
-                  <a:srgbClr val="F9E2AF"/>
-                </a:solidFill>
-                <a:latin typeface="Courier New"/>
-              </a:rPr>
-              <a:t>summarization_agent</a:t>
+            <a:pPr algn="ctr"/>
+            <a:r>
+              <a:rPr sz="900" b="1">
+                <a:solidFill>
+                  <a:srgbClr val="1E1E2E"/>
+                </a:solidFill>
+              </a:rPr>
+              <a:t>3</a:t>
             </a:r>
           </a:p>
         </p:txBody>
@@ -26943,8 +27070,8 @@
         </p:nvSpPr>
         <p:spPr>
           <a:xfrm>
-            <a:off x="2606040" y="2852928"/>
-            <a:ext cx="6172200" cy="702346982400"/>
+            <a:off x="667512" y="2898648"/>
+            <a:ext cx="1920240" cy="320040"/>
           </a:xfrm>
           <a:prstGeom prst="rect">
             <a:avLst/>
@@ -26959,69 +27086,93 @@
           <a:p>
             <a:pPr algn="l"/>
             <a:r>
-              <a:rPr sz="1050" b="0">
+              <a:rPr sz="1100" b="1">
+                <a:solidFill>
+                  <a:srgbClr val="7C3AED"/>
+                </a:solidFill>
+                <a:latin typeface="Courier New"/>
+              </a:rPr>
+              <a:t>summarization_agent</a:t>
+            </a:r>
+          </a:p>
+        </p:txBody>
+      </p:sp>
+      <p:sp>
+        <p:nvSpPr>
+          <p:cNvPr id="19" name="TextBox 18"/>
+          <p:cNvSpPr txBox="1"/>
+          <p:nvPr/>
+        </p:nvSpPr>
+        <p:spPr>
+          <a:xfrm>
+            <a:off x="2651760" y="2761488"/>
+            <a:ext cx="6172200" cy="822960"/>
+          </a:xfrm>
+          <a:prstGeom prst="rect">
+            <a:avLst/>
+          </a:prstGeom>
+          <a:noFill/>
+        </p:spPr>
+        <p:txBody>
+          <a:bodyPr wrap="square">
+            <a:spAutoFit/>
+          </a:bodyPr>
+          <a:lstStyle/>
+          <a:p>
+            <a:pPr algn="l"/>
+            <a:r>
+              <a:rPr sz="950" b="0">
                 <a:solidFill>
                   <a:srgbClr val="FFFFFF"/>
                 </a:solidFill>
               </a:rPr>
-              <a:t>WHEN: intent_type == 'summarization'</a:t>
+              <a:t>When: intent_type == 'summarization'</a:t>
             </a:r>
           </a:p>
           <a:p>
             <a:pPr algn="l"/>
             <a:r>
-              <a:rPr sz="1050" b="0">
+              <a:rPr sz="950" b="0">
                 <a:solidFill>
                   <a:srgbClr val="FFFFFF"/>
                 </a:solidFill>
               </a:rPr>
-              <a:t>DOES: Tool loop retrieves document → Phase 2 with SummarizationResponse.</a:t>
+              <a:t>Does: Tool loop → document_reader → Phase 2 with SummarizationResponse</a:t>
             </a:r>
           </a:p>
           <a:p>
             <a:pPr algn="l"/>
             <a:r>
-              <a:rPr sz="1050" b="0">
+              <a:rPr sz="950" b="0">
                 <a:solidFill>
                   <a:srgbClr val="FFFFFF"/>
                 </a:solidFill>
               </a:rPr>
-              <a:t>      Extracts 3–7 key points from document content.</a:t>
-            </a:r>
-          </a:p>
-          <a:p>
-            <a:pPr algn="l"/>
-            <a:r>
-              <a:rPr sz="1050" b="0">
-                <a:solidFill>
-                  <a:srgbClr val="FFFFFF"/>
-                </a:solidFill>
-              </a:rPr>
-              <a:t>OUT:  SummarizationResponse(summary, key_points, sources)</a:t>
-            </a:r>
-          </a:p>
-        </p:txBody>
-      </p:sp>
-      <p:sp>
-        <p:nvSpPr>
-          <p:cNvPr id="19" name="Rectangle 18"/>
+              <a:t>Out:  SummarizationResponse(summary, key_points[3-7], sources, timestamp)</a:t>
+            </a:r>
+          </a:p>
+        </p:txBody>
+      </p:sp>
+      <p:sp>
+        <p:nvSpPr>
+          <p:cNvPr id="20" name="Rectangle 19"/>
           <p:cNvSpPr/>
           <p:nvPr/>
         </p:nvSpPr>
         <p:spPr>
           <a:xfrm>
-            <a:off x="274320" y="3712464"/>
-            <a:ext cx="8595360" cy="877824"/>
+            <a:off x="274320" y="3630168"/>
+            <a:ext cx="8641080" cy="914400"/>
           </a:xfrm>
           <a:prstGeom prst="rect">
             <a:avLst/>
           </a:prstGeom>
           <a:solidFill>
-            <a:srgbClr val="222238"/>
+            <a:srgbClr val="0F172A"/>
           </a:solidFill>
-          <a:ln w="12700">
+          <a:ln w="9525">
             <a:solidFill>
-              <a:srgbClr val="FAB387"/>
+              <a:srgbClr val="D97706"/>
             </a:solidFill>
           </a:ln>
         </p:spPr>
@@ -27049,20 +27200,20 @@
       </p:sp>
       <p:sp>
         <p:nvSpPr>
-          <p:cNvPr id="20" name="Rectangle 19"/>
+          <p:cNvPr id="21" name="Rectangle 20"/>
           <p:cNvSpPr/>
           <p:nvPr/>
         </p:nvSpPr>
         <p:spPr>
           <a:xfrm>
-            <a:off x="347472" y="3986784"/>
-            <a:ext cx="256032" cy="256032"/>
+            <a:off x="347472" y="3904488"/>
+            <a:ext cx="237744" cy="237744"/>
           </a:xfrm>
           <a:prstGeom prst="rect">
             <a:avLst/>
           </a:prstGeom>
           <a:solidFill>
-            <a:srgbClr val="FAB387"/>
+            <a:srgbClr val="D97706"/>
           </a:solidFill>
           <a:ln>
             <a:noFill/>
@@ -27092,48 +27243,14 @@
       </p:sp>
       <p:sp>
         <p:nvSpPr>
-          <p:cNvPr id="21" name="TextBox 20"/>
-          <p:cNvSpPr txBox="1"/>
-          <p:nvPr/>
-        </p:nvSpPr>
-        <p:spPr>
-          <a:xfrm>
-            <a:off x="347472" y="3986784"/>
-            <a:ext cx="256032" cy="256032"/>
-          </a:xfrm>
-          <a:prstGeom prst="rect">
-            <a:avLst/>
-          </a:prstGeom>
-          <a:noFill/>
-        </p:spPr>
-        <p:txBody>
-          <a:bodyPr wrap="none">
-            <a:spAutoFit/>
-          </a:bodyPr>
-          <a:lstStyle/>
-          <a:p>
-            <a:pPr algn="ctr"/>
-            <a:r>
-              <a:rPr b="1" sz="1000">
-                <a:solidFill>
-                  <a:srgbClr val="1E1E2E"/>
-                </a:solidFill>
-              </a:rPr>
-              <a:t>4</a:t>
-            </a:r>
-          </a:p>
-        </p:txBody>
-      </p:sp>
-      <p:sp>
-        <p:nvSpPr>
           <p:cNvPr id="22" name="TextBox 21"/>
           <p:cNvSpPr txBox="1"/>
           <p:nvPr/>
         </p:nvSpPr>
         <p:spPr>
           <a:xfrm>
-            <a:off x="685800" y="3941064"/>
-            <a:ext cx="1828800" cy="411480"/>
+            <a:off x="347472" y="3886200"/>
+            <a:ext cx="237744" cy="256032"/>
           </a:xfrm>
           <a:prstGeom prst="rect">
             <a:avLst/>
@@ -27146,15 +27263,14 @@
           </a:bodyPr>
           <a:lstStyle/>
           <a:p>
-            <a:pPr algn="l"/>
-            <a:r>
-              <a:rPr sz="1300" b="1">
-                <a:solidFill>
-                  <a:srgbClr val="FAB387"/>
-                </a:solidFill>
-                <a:latin typeface="Courier New"/>
-              </a:rPr>
-              <a:t>calculation_agent</a:t>
+            <a:pPr algn="ctr"/>
+            <a:r>
+              <a:rPr sz="900" b="1">
+                <a:solidFill>
+                  <a:srgbClr val="1E1E2E"/>
+                </a:solidFill>
+              </a:rPr>
+              <a:t>4</a:t>
             </a:r>
           </a:p>
         </p:txBody>
@@ -27167,8 +27283,8 @@
         </p:nvSpPr>
         <p:spPr>
           <a:xfrm>
-            <a:off x="2606040" y="3785616"/>
-            <a:ext cx="6172200" cy="702346982400"/>
+            <a:off x="667512" y="3858768"/>
+            <a:ext cx="1920240" cy="320040"/>
           </a:xfrm>
           <a:prstGeom prst="rect">
             <a:avLst/>
@@ -27183,69 +27299,93 @@
           <a:p>
             <a:pPr algn="l"/>
             <a:r>
-              <a:rPr sz="1050" b="0">
+              <a:rPr sz="1100" b="1">
+                <a:solidFill>
+                  <a:srgbClr val="D97706"/>
+                </a:solidFill>
+                <a:latin typeface="Courier New"/>
+              </a:rPr>
+              <a:t>calculation_agent</a:t>
+            </a:r>
+          </a:p>
+        </p:txBody>
+      </p:sp>
+      <p:sp>
+        <p:nvSpPr>
+          <p:cNvPr id="24" name="TextBox 23"/>
+          <p:cNvSpPr txBox="1"/>
+          <p:nvPr/>
+        </p:nvSpPr>
+        <p:spPr>
+          <a:xfrm>
+            <a:off x="2651760" y="3721608"/>
+            <a:ext cx="6172200" cy="822960"/>
+          </a:xfrm>
+          <a:prstGeom prst="rect">
+            <a:avLst/>
+          </a:prstGeom>
+          <a:noFill/>
+        </p:spPr>
+        <p:txBody>
+          <a:bodyPr wrap="square">
+            <a:spAutoFit/>
+          </a:bodyPr>
+          <a:lstStyle/>
+          <a:p>
+            <a:pPr algn="l"/>
+            <a:r>
+              <a:rPr sz="950" b="0">
                 <a:solidFill>
                   <a:srgbClr val="FFFFFF"/>
                 </a:solidFill>
               </a:rPr>
-              <a:t>WHEN: intent_type == 'calculation'</a:t>
+              <a:t>When: intent_type == 'calculation'</a:t>
             </a:r>
           </a:p>
           <a:p>
             <a:pPr algn="l"/>
             <a:r>
-              <a:rPr sz="1050" b="0">
+              <a:rPr sz="950" b="0">
                 <a:solidFill>
                   <a:srgbClr val="FFFFFF"/>
                 </a:solidFill>
               </a:rPr>
-              <a:t>DOES: Tool loop (max 8 iter) — calls document_reader then calculator.</a:t>
+              <a:t>Does: Tool loop (max 8) — document_reader then calculator → CalculationResponse</a:t>
             </a:r>
           </a:p>
           <a:p>
             <a:pPr algn="l"/>
             <a:r>
-              <a:rPr sz="1050" b="0">
+              <a:rPr sz="950" b="0">
                 <a:solidFill>
                   <a:srgbClr val="FFFFFF"/>
                 </a:solidFill>
               </a:rPr>
-              <a:t>      Phase 2 with CalculationResponse including the expression used.</a:t>
-            </a:r>
-          </a:p>
-          <a:p>
-            <a:pPr algn="l"/>
-            <a:r>
-              <a:rPr sz="1050" b="0">
-                <a:solidFill>
-                  <a:srgbClr val="FFFFFF"/>
-                </a:solidFill>
-              </a:rPr>
-              <a:t>OUT:  CalculationResponse(question, result, expression, sources)</a:t>
-            </a:r>
-          </a:p>
-        </p:txBody>
-      </p:sp>
-      <p:sp>
-        <p:nvSpPr>
-          <p:cNvPr id="24" name="Rectangle 23"/>
+              <a:t>Out:  CalculationResponse(question, result, expression, sources, timestamp)</a:t>
+            </a:r>
+          </a:p>
+        </p:txBody>
+      </p:sp>
+      <p:sp>
+        <p:nvSpPr>
+          <p:cNvPr id="25" name="Rectangle 24"/>
           <p:cNvSpPr/>
           <p:nvPr/>
         </p:nvSpPr>
         <p:spPr>
           <a:xfrm>
-            <a:off x="274320" y="4645152"/>
-            <a:ext cx="8595360" cy="877824"/>
+            <a:off x="274320" y="4590288"/>
+            <a:ext cx="8641080" cy="914400"/>
           </a:xfrm>
           <a:prstGeom prst="rect">
             <a:avLst/>
           </a:prstGeom>
           <a:solidFill>
-            <a:srgbClr val="222238"/>
+            <a:srgbClr val="0F172A"/>
           </a:solidFill>
-          <a:ln w="12700">
+          <a:ln w="9525">
             <a:solidFill>
-              <a:srgbClr val="CBA6F7"/>
+              <a:srgbClr val="DC2626"/>
             </a:solidFill>
           </a:ln>
         </p:spPr>
@@ -27273,20 +27413,20 @@
       </p:sp>
       <p:sp>
         <p:nvSpPr>
-          <p:cNvPr id="25" name="Rectangle 24"/>
+          <p:cNvPr id="26" name="Rectangle 25"/>
           <p:cNvSpPr/>
           <p:nvPr/>
         </p:nvSpPr>
         <p:spPr>
           <a:xfrm>
-            <a:off x="347472" y="4919472"/>
-            <a:ext cx="256032" cy="256032"/>
+            <a:off x="347472" y="4864608"/>
+            <a:ext cx="237744" cy="237744"/>
           </a:xfrm>
           <a:prstGeom prst="rect">
             <a:avLst/>
           </a:prstGeom>
           <a:solidFill>
-            <a:srgbClr val="CBA6F7"/>
+            <a:srgbClr val="DC2626"/>
           </a:solidFill>
           <a:ln>
             <a:noFill/>
@@ -27316,48 +27456,14 @@
       </p:sp>
       <p:sp>
         <p:nvSpPr>
-          <p:cNvPr id="26" name="TextBox 25"/>
-          <p:cNvSpPr txBox="1"/>
-          <p:nvPr/>
-        </p:nvSpPr>
-        <p:spPr>
-          <a:xfrm>
-            <a:off x="347472" y="4919472"/>
-            <a:ext cx="256032" cy="256032"/>
-          </a:xfrm>
-          <a:prstGeom prst="rect">
-            <a:avLst/>
-          </a:prstGeom>
-          <a:noFill/>
-        </p:spPr>
-        <p:txBody>
-          <a:bodyPr wrap="none">
-            <a:spAutoFit/>
-          </a:bodyPr>
-          <a:lstStyle/>
-          <a:p>
-            <a:pPr algn="ctr"/>
-            <a:r>
-              <a:rPr b="1" sz="1000">
-                <a:solidFill>
-                  <a:srgbClr val="1E1E2E"/>
-                </a:solidFill>
-              </a:rPr>
-              <a:t>5</a:t>
-            </a:r>
-          </a:p>
-        </p:txBody>
-      </p:sp>
-      <p:sp>
-        <p:nvSpPr>
           <p:cNvPr id="27" name="TextBox 26"/>
           <p:cNvSpPr txBox="1"/>
           <p:nvPr/>
         </p:nvSpPr>
         <p:spPr>
           <a:xfrm>
-            <a:off x="685800" y="4873752"/>
-            <a:ext cx="1828800" cy="411480"/>
+            <a:off x="347472" y="4846320"/>
+            <a:ext cx="237744" cy="256032"/>
           </a:xfrm>
           <a:prstGeom prst="rect">
             <a:avLst/>
@@ -27370,15 +27476,14 @@
           </a:bodyPr>
           <a:lstStyle/>
           <a:p>
-            <a:pPr algn="l"/>
-            <a:r>
-              <a:rPr sz="1300" b="1">
-                <a:solidFill>
-                  <a:srgbClr val="CBA6F7"/>
-                </a:solidFill>
-                <a:latin typeface="Courier New"/>
-              </a:rPr>
-              <a:t>update_memory</a:t>
+            <a:pPr algn="ctr"/>
+            <a:r>
+              <a:rPr sz="900" b="1">
+                <a:solidFill>
+                  <a:srgbClr val="1E1E2E"/>
+                </a:solidFill>
+              </a:rPr>
+              <a:t>5</a:t>
             </a:r>
           </a:p>
         </p:txBody>
@@ -27391,8 +27496,8 @@
         </p:nvSpPr>
         <p:spPr>
           <a:xfrm>
-            <a:off x="2606040" y="4718304"/>
-            <a:ext cx="6172200" cy="702346982400"/>
+            <a:off x="667512" y="4818888"/>
+            <a:ext cx="1920240" cy="320040"/>
           </a:xfrm>
           <a:prstGeom prst="rect">
             <a:avLst/>
@@ -27407,45 +27512,69 @@
           <a:p>
             <a:pPr algn="l"/>
             <a:r>
-              <a:rPr sz="1050" b="0">
+              <a:rPr sz="1100" b="1">
+                <a:solidFill>
+                  <a:srgbClr val="DC2626"/>
+                </a:solidFill>
+                <a:latin typeface="Courier New"/>
+              </a:rPr>
+              <a:t>update_memory</a:t>
+            </a:r>
+          </a:p>
+        </p:txBody>
+      </p:sp>
+      <p:sp>
+        <p:nvSpPr>
+          <p:cNvPr id="29" name="TextBox 28"/>
+          <p:cNvSpPr txBox="1"/>
+          <p:nvPr/>
+        </p:nvSpPr>
+        <p:spPr>
+          <a:xfrm>
+            <a:off x="2651760" y="4681728"/>
+            <a:ext cx="6172200" cy="822960"/>
+          </a:xfrm>
+          <a:prstGeom prst="rect">
+            <a:avLst/>
+          </a:prstGeom>
+          <a:noFill/>
+        </p:spPr>
+        <p:txBody>
+          <a:bodyPr wrap="square">
+            <a:spAutoFit/>
+          </a:bodyPr>
+          <a:lstStyle/>
+          <a:p>
+            <a:pPr algn="l"/>
+            <a:r>
+              <a:rPr sz="950" b="0">
                 <a:solidFill>
                   <a:srgbClr val="FFFFFF"/>
                 </a:solidFill>
               </a:rPr>
-              <a:t>WHEN: After any specialist agent — always the last node before END</a:t>
+              <a:t>When: After any specialist agent — always the last node before END</a:t>
             </a:r>
           </a:p>
           <a:p>
             <a:pPr algn="l"/>
             <a:r>
-              <a:rPr sz="1050" b="0">
+              <a:rPr sz="950" b="0">
                 <a:solidFill>
                   <a:srgbClr val="FFFFFF"/>
                 </a:solidFill>
               </a:rPr>
-              <a:t>DOES: LLM writes 1–2 sentence conversation summary. Tracks active_documents</a:t>
+              <a:t>Does: LLM writes 1-2 sentence summary; tracks active_documents from sources</a:t>
             </a:r>
           </a:p>
           <a:p>
             <a:pPr algn="l"/>
             <a:r>
-              <a:rPr sz="1050" b="0">
+              <a:rPr sz="950" b="0">
                 <a:solidFill>
                   <a:srgbClr val="FFFFFF"/>
                 </a:solidFill>
               </a:rPr>
-              <a:t>      by reading sources from current_response. Sets next_step = END.</a:t>
-            </a:r>
-          </a:p>
-          <a:p>
-            <a:pPr algn="l"/>
-            <a:r>
-              <a:rPr sz="1050" b="0">
-                <a:solidFill>
-                  <a:srgbClr val="FFFFFF"/>
-                </a:solidFill>
-              </a:rPr>
-              <a:t>OUT:  conversation_summary, active_documents updated in state</a:t>
+              <a:t>Out:  conversation_summary and active_documents updated in state</a:t>
             </a:r>
           </a:p>
         </p:txBody>
@@ -27484,48 +27613,82 @@
         </p:nvSpPr>
         <p:spPr>
           <a:xfrm>
-            <a:off x="365760" y="164592"/>
-            <a:ext cx="8412480" cy="594360"/>
-          </a:xfrm>
-          <a:prstGeom prst="rect">
-            <a:avLst/>
-          </a:prstGeom>
-          <a:noFill/>
-        </p:spPr>
-        <p:txBody>
-          <a:bodyPr wrap="none">
+            <a:off x="320040" y="137160"/>
+            <a:ext cx="8046720" cy="475488"/>
+          </a:xfrm>
+          <a:prstGeom prst="rect">
+            <a:avLst/>
+          </a:prstGeom>
+          <a:noFill/>
+        </p:spPr>
+        <p:txBody>
+          <a:bodyPr wrap="square">
             <a:spAutoFit/>
           </a:bodyPr>
           <a:lstStyle/>
           <a:p>
             <a:pPr algn="l"/>
             <a:r>
-              <a:rPr b="1" sz="2200">
-                <a:solidFill>
-                  <a:srgbClr val="74C7EC"/>
-                </a:solidFill>
-              </a:rPr>
-              <a:t>LangGraph Routing — Edges &amp; Conditional Flow</a:t>
-            </a:r>
-          </a:p>
-        </p:txBody>
-      </p:sp>
-      <p:sp>
-        <p:nvSpPr>
-          <p:cNvPr id="3" name="Rectangle 2"/>
+              <a:rPr sz="1800" b="1">
+                <a:solidFill>
+                  <a:srgbClr val="FFFFFF"/>
+                </a:solidFill>
+              </a:rPr>
+              <a:t>LangGraph Routing — Nodes, Edges &amp; Conditional Flow</a:t>
+            </a:r>
+          </a:p>
+        </p:txBody>
+      </p:sp>
+      <p:sp>
+        <p:nvSpPr>
+          <p:cNvPr id="3" name="TextBox 2"/>
+          <p:cNvSpPr txBox="1"/>
+          <p:nvPr/>
+        </p:nvSpPr>
+        <p:spPr>
+          <a:xfrm>
+            <a:off x="8321040" y="164592"/>
+            <a:ext cx="548640" cy="320040"/>
+          </a:xfrm>
+          <a:prstGeom prst="rect">
+            <a:avLst/>
+          </a:prstGeom>
+          <a:noFill/>
+        </p:spPr>
+        <p:txBody>
+          <a:bodyPr wrap="square">
+            <a:spAutoFit/>
+          </a:bodyPr>
+          <a:lstStyle/>
+          <a:p>
+            <a:pPr algn="r"/>
+            <a:r>
+              <a:rPr sz="900" b="0">
+                <a:solidFill>
+                  <a:srgbClr val="A7F3D0"/>
+                </a:solidFill>
+              </a:rPr>
+              <a:t>34/34</a:t>
+            </a:r>
+          </a:p>
+        </p:txBody>
+      </p:sp>
+      <p:sp>
+        <p:nvSpPr>
+          <p:cNvPr id="4" name="Rectangle 3"/>
           <p:cNvSpPr/>
           <p:nvPr/>
         </p:nvSpPr>
         <p:spPr>
           <a:xfrm>
-            <a:off x="365760" y="804672"/>
-            <a:ext cx="8412480" cy="27432"/>
+            <a:off x="320040" y="658368"/>
+            <a:ext cx="8503920" cy="22860"/>
           </a:xfrm>
           <a:prstGeom prst="rect">
             <a:avLst/>
           </a:prstGeom>
           <a:solidFill>
-            <a:srgbClr val="74C7EC"/>
+            <a:srgbClr val="10B981"/>
           </a:solidFill>
           <a:ln>
             <a:noFill/>
@@ -27555,20 +27718,20 @@
       </p:sp>
       <p:sp>
         <p:nvSpPr>
-          <p:cNvPr id="4" name="Rectangle 3"/>
+          <p:cNvPr id="5" name="Rectangle 4"/>
           <p:cNvSpPr/>
           <p:nvPr/>
         </p:nvSpPr>
         <p:spPr>
           <a:xfrm>
-            <a:off x="320040" y="914400"/>
-            <a:ext cx="8503920" cy="5212080"/>
+            <a:off x="320040" y="749808"/>
+            <a:ext cx="8503920" cy="5413248"/>
           </a:xfrm>
           <a:prstGeom prst="rect">
             <a:avLst/>
           </a:prstGeom>
           <a:solidFill>
-            <a:srgbClr val="111122"/>
+            <a:srgbClr val="0F172A"/>
           </a:solidFill>
           <a:ln>
             <a:noFill/>
@@ -27598,14 +27761,14 @@
       </p:sp>
       <p:sp>
         <p:nvSpPr>
-          <p:cNvPr id="5" name="TextBox 4"/>
-          <p:cNvSpPr txBox="1"/>
-          <p:nvPr/>
-        </p:nvSpPr>
-        <p:spPr>
-          <a:xfrm>
-            <a:off x="429768" y="1005840"/>
-            <a:ext cx="8284464" cy="5074920"/>
+          <p:cNvPr id="6" name="TextBox 5"/>
+          <p:cNvSpPr txBox="1"/>
+          <p:nvPr/>
+        </p:nvSpPr>
+        <p:spPr>
+          <a:xfrm>
+            <a:off x="429768" y="841248"/>
+            <a:ext cx="8284464" cy="5248656"/>
           </a:xfrm>
           <a:prstGeom prst="rect">
             <a:avLst/>
@@ -27619,354 +27782,387 @@
           <a:lstStyle/>
           <a:p>
             <a:r>
-              <a:rPr sz="1000">
-                <a:solidFill>
-                  <a:srgbClr val="A6E3A1"/>
+              <a:rPr sz="850">
+                <a:solidFill>
+                  <a:srgbClr val="A7F3D0"/>
                 </a:solidFill>
                 <a:latin typeface="Courier New"/>
               </a:rPr>
-              <a:t>                        ┌─────────────────────────┐</a:t>
-            </a:r>
-          </a:p>
-          <a:p>
-            <a:r>
-              <a:rPr sz="1000">
-                <a:solidFill>
-                  <a:srgbClr val="A6E3A1"/>
+              <a:t>                   ┌─────────────────────────────────┐</a:t>
+            </a:r>
+          </a:p>
+          <a:p>
+            <a:r>
+              <a:rPr sz="850">
+                <a:solidFill>
+                  <a:srgbClr val="A7F3D0"/>
                 </a:solidFill>
                 <a:latin typeface="Courier New"/>
               </a:rPr>
-              <a:t>                        │   User sends a message   │</a:t>
-            </a:r>
-          </a:p>
-          <a:p>
-            <a:r>
-              <a:rPr sz="1000">
-                <a:solidFill>
-                  <a:srgbClr val="A6E3A1"/>
+              <a:t>                   │        User sends a message      │</a:t>
+            </a:r>
+          </a:p>
+          <a:p>
+            <a:r>
+              <a:rPr sz="850">
+                <a:solidFill>
+                  <a:srgbClr val="A7F3D0"/>
                 </a:solidFill>
                 <a:latin typeface="Courier New"/>
               </a:rPr>
-              <a:t>                        └────────────┬────────────┘</a:t>
-            </a:r>
-          </a:p>
-          <a:p>
-            <a:r>
-              <a:rPr sz="1000">
-                <a:solidFill>
-                  <a:srgbClr val="A6E3A1"/>
+              <a:t>                   └────────────────┬────────────────┘</a:t>
+            </a:r>
+          </a:p>
+          <a:p>
+            <a:r>
+              <a:rPr sz="850">
+                <a:solidFill>
+                  <a:srgbClr val="A7F3D0"/>
                 </a:solidFill>
                 <a:latin typeface="Courier New"/>
               </a:rPr>
-              <a:t>                                     │</a:t>
-            </a:r>
-          </a:p>
-          <a:p>
-            <a:r>
-              <a:rPr sz="1000">
-                <a:solidFill>
-                  <a:srgbClr val="A6E3A1"/>
+              <a:t>                                    ▼</a:t>
+            </a:r>
+          </a:p>
+          <a:p>
+            <a:r>
+              <a:rPr sz="850">
+                <a:solidFill>
+                  <a:srgbClr val="A7F3D0"/>
                 </a:solidFill>
                 <a:latin typeface="Courier New"/>
               </a:rPr>
-              <a:t>                                     ▼</a:t>
-            </a:r>
-          </a:p>
-          <a:p>
-            <a:r>
-              <a:rPr sz="1000">
-                <a:solidFill>
-                  <a:srgbClr val="A6E3A1"/>
+              <a:t>                       ┌────────────────────────┐</a:t>
+            </a:r>
+          </a:p>
+          <a:p>
+            <a:r>
+              <a:rPr sz="850">
+                <a:solidFill>
+                  <a:srgbClr val="A7F3D0"/>
                 </a:solidFill>
                 <a:latin typeface="Courier New"/>
               </a:rPr>
-              <a:t>                          ┌──────────────────────┐</a:t>
-            </a:r>
-          </a:p>
-          <a:p>
-            <a:r>
-              <a:rPr sz="1000">
-                <a:solidFill>
-                  <a:srgbClr val="A6E3A1"/>
+              <a:t>                       │     classify_intent     │   ← Entry Point</a:t>
+            </a:r>
+          </a:p>
+          <a:p>
+            <a:r>
+              <a:rPr sz="850">
+                <a:solidFill>
+                  <a:srgbClr val="A7F3D0"/>
                 </a:solidFill>
                 <a:latin typeface="Courier New"/>
               </a:rPr>
-              <a:t>                          │   classify_intent     │  ← Entry Point</a:t>
-            </a:r>
-          </a:p>
-          <a:p>
-            <a:r>
-              <a:rPr sz="1000">
-                <a:solidFill>
-                  <a:srgbClr val="A6E3A1"/>
+              <a:t>                       │  UserIntent(Pydantic)   │   with_structured_output()</a:t>
+            </a:r>
+          </a:p>
+          <a:p>
+            <a:r>
+              <a:rPr sz="850">
+                <a:solidFill>
+                  <a:srgbClr val="A7F3D0"/>
                 </a:solidFill>
                 <a:latin typeface="Courier New"/>
               </a:rPr>
-              <a:t>                          │   (UserIntent schema) │</a:t>
-            </a:r>
-          </a:p>
-          <a:p>
-            <a:r>
-              <a:rPr sz="1000">
-                <a:solidFill>
-                  <a:srgbClr val="A6E3A1"/>
+              <a:t>                       └────────────┬───────────┘</a:t>
+            </a:r>
+          </a:p>
+          <a:p>
+            <a:r>
+              <a:rPr sz="850">
+                <a:solidFill>
+                  <a:srgbClr val="A7F3D0"/>
                 </a:solidFill>
                 <a:latin typeface="Courier New"/>
               </a:rPr>
-              <a:t>                          └──────────┬───────────┘</a:t>
-            </a:r>
-          </a:p>
-          <a:p>
-            <a:r>
-              <a:rPr sz="1000">
-                <a:solidFill>
-                  <a:srgbClr val="A6E3A1"/>
+              <a:t>                                    │  _route_to_agent(state["next_step"])</a:t>
+            </a:r>
+          </a:p>
+          <a:p>
+            <a:r>
+              <a:rPr sz="850">
+                <a:solidFill>
+                  <a:srgbClr val="A7F3D0"/>
                 </a:solidFill>
                 <a:latin typeface="Courier New"/>
               </a:rPr>
-              <a:t>                                     │</a:t>
-            </a:r>
-          </a:p>
-          <a:p>
-            <a:r>
-              <a:rPr sz="1000">
-                <a:solidFill>
-                  <a:srgbClr val="A6E3A1"/>
+              <a:t>          ┌─────────────────────────┼──────────────────────────┐</a:t>
+            </a:r>
+          </a:p>
+          <a:p>
+            <a:r>
+              <a:rPr sz="850">
+                <a:solidFill>
+                  <a:srgbClr val="A7F3D0"/>
                 </a:solidFill>
                 <a:latin typeface="Courier New"/>
               </a:rPr>
-              <a:t>               ┌─────────────────────┼──────────────────────┐</a:t>
-            </a:r>
-          </a:p>
-          <a:p>
-            <a:r>
-              <a:rPr sz="1000">
-                <a:solidFill>
-                  <a:srgbClr val="A6E3A1"/>
+              <a:t>          │ intent="qa"             │ intent="summarization"    │ intent="calculation"</a:t>
+            </a:r>
+          </a:p>
+          <a:p>
+            <a:r>
+              <a:rPr sz="850">
+                <a:solidFill>
+                  <a:srgbClr val="A7F3D0"/>
                 </a:solidFill>
                 <a:latin typeface="Courier New"/>
               </a:rPr>
-              <a:t>               │ intent="qa"         │ intent="summarization" │ intent="calculation"</a:t>
-            </a:r>
-          </a:p>
-          <a:p>
-            <a:r>
-              <a:rPr sz="1000">
-                <a:solidFill>
-                  <a:srgbClr val="A6E3A1"/>
+              <a:t>          ▼                         ▼                           ▼</a:t>
+            </a:r>
+          </a:p>
+          <a:p>
+            <a:r>
+              <a:rPr sz="850">
+                <a:solidFill>
+                  <a:srgbClr val="A7F3D0"/>
                 </a:solidFill>
                 <a:latin typeface="Courier New"/>
               </a:rPr>
-              <a:t>               ▼                     ▼                        ▼</a:t>
-            </a:r>
-          </a:p>
-          <a:p>
-            <a:r>
-              <a:rPr sz="1000">
-                <a:solidFill>
-                  <a:srgbClr val="A6E3A1"/>
+              <a:t>  ┌───────────────┐    ┌──────────────────────┐    ┌───────────────────────┐</a:t>
+            </a:r>
+          </a:p>
+          <a:p>
+            <a:r>
+              <a:rPr sz="850">
+                <a:solidFill>
+                  <a:srgbClr val="A7F3D0"/>
                 </a:solidFill>
                 <a:latin typeface="Courier New"/>
               </a:rPr>
-              <a:t>       ┌──────────────┐   ┌─────────────────────┐   ┌──────────────────────┐</a:t>
-            </a:r>
-          </a:p>
-          <a:p>
-            <a:r>
-              <a:rPr sz="1000">
-                <a:solidFill>
-                  <a:srgbClr val="A6E3A1"/>
+              <a:t>  │   qa_agent    │    │ summarization_agent  │    │  calculation_agent    │</a:t>
+            </a:r>
+          </a:p>
+          <a:p>
+            <a:r>
+              <a:rPr sz="850">
+                <a:solidFill>
+                  <a:srgbClr val="A7F3D0"/>
                 </a:solidFill>
                 <a:latin typeface="Courier New"/>
               </a:rPr>
-              <a:t>       │   qa_agent   │   │ summarization_agent  │   │  calculation_agent   │</a:t>
-            </a:r>
-          </a:p>
-          <a:p>
-            <a:r>
-              <a:rPr sz="1000">
-                <a:solidFill>
-                  <a:srgbClr val="A6E3A1"/>
+              <a:t>  │ AnswerResponse│    │SummarizationResponse │    │ CalculationResponse   │</a:t>
+            </a:r>
+          </a:p>
+          <a:p>
+            <a:r>
+              <a:rPr sz="850">
+                <a:solidFill>
+                  <a:srgbClr val="A7F3D0"/>
                 </a:solidFill>
                 <a:latin typeface="Courier New"/>
               </a:rPr>
-              <a:t>       │  AnswerResp  │   │ SummarizationResp    │   │  CalculationResp     │</a:t>
-            </a:r>
-          </a:p>
-          <a:p>
-            <a:r>
-              <a:rPr sz="1000">
-                <a:solidFill>
-                  <a:srgbClr val="A6E3A1"/>
+              <a:t>  │  tool_loop(5) │    │    tool_loop(5)      │    │    tool_loop(8)       │</a:t>
+            </a:r>
+          </a:p>
+          <a:p>
+            <a:r>
+              <a:rPr sz="850">
+                <a:solidFill>
+                  <a:srgbClr val="A7F3D0"/>
                 </a:solidFill>
                 <a:latin typeface="Courier New"/>
               </a:rPr>
-              <a:t>       └──────┬───────┘   └──────────┬──────────┘   └──────────┬───────────┘</a:t>
-            </a:r>
-          </a:p>
-          <a:p>
-            <a:r>
-              <a:rPr sz="1000">
-                <a:solidFill>
-                  <a:srgbClr val="A6E3A1"/>
+              <a:t>  └───────┬───────┘    └──────────┬───────────┘    └───────────┬───────────┘</a:t>
+            </a:r>
+          </a:p>
+          <a:p>
+            <a:r>
+              <a:rPr sz="850">
+                <a:solidFill>
+                  <a:srgbClr val="A7F3D0"/>
                 </a:solidFill>
                 <a:latin typeface="Courier New"/>
               </a:rPr>
-              <a:t>              │                      │                           │</a:t>
-            </a:r>
-          </a:p>
-          <a:p>
-            <a:r>
-              <a:rPr sz="1000">
-                <a:solidFill>
-                  <a:srgbClr val="A6E3A1"/>
+              <a:t>          │                       │                             │</a:t>
+            </a:r>
+          </a:p>
+          <a:p>
+            <a:r>
+              <a:rPr sz="850">
+                <a:solidFill>
+                  <a:srgbClr val="A7F3D0"/>
                 </a:solidFill>
                 <a:latin typeface="Courier New"/>
               </a:rPr>
-              <a:t>              └──────────────────────┼───────────────────────────┘</a:t>
-            </a:r>
-          </a:p>
-          <a:p>
-            <a:r>
-              <a:rPr sz="1000">
-                <a:solidFill>
-                  <a:srgbClr val="A6E3A1"/>
+              <a:t>          └───────────────────────┼─────────────────────────────┘</a:t>
+            </a:r>
+          </a:p>
+          <a:p>
+            <a:r>
+              <a:rPr sz="850">
+                <a:solidFill>
+                  <a:srgbClr val="A7F3D0"/>
                 </a:solidFill>
                 <a:latin typeface="Courier New"/>
               </a:rPr>
-              <a:t>                                     │</a:t>
-            </a:r>
-          </a:p>
-          <a:p>
-            <a:r>
-              <a:rPr sz="1000">
-                <a:solidFill>
-                  <a:srgbClr val="A6E3A1"/>
+              <a:t>                                  ▼</a:t>
+            </a:r>
+          </a:p>
+          <a:p>
+            <a:r>
+              <a:rPr sz="850">
+                <a:solidFill>
+                  <a:srgbClr val="A7F3D0"/>
                 </a:solidFill>
                 <a:latin typeface="Courier New"/>
               </a:rPr>
-              <a:t>                                     ▼</a:t>
-            </a:r>
-          </a:p>
-          <a:p>
-            <a:r>
-              <a:rPr sz="1000">
-                <a:solidFill>
-                  <a:srgbClr val="A6E3A1"/>
+              <a:t>                      ┌───────────────────────┐</a:t>
+            </a:r>
+          </a:p>
+          <a:p>
+            <a:r>
+              <a:rPr sz="850">
+                <a:solidFill>
+                  <a:srgbClr val="A7F3D0"/>
                 </a:solidFill>
                 <a:latin typeface="Courier New"/>
               </a:rPr>
-              <a:t>                           ┌──────────────────┐</a:t>
-            </a:r>
-          </a:p>
-          <a:p>
-            <a:r>
-              <a:rPr sz="1000">
-                <a:solidFill>
-                  <a:srgbClr val="A6E3A1"/>
+              <a:t>                      │     update_memory     │   ← Always last node</a:t>
+            </a:r>
+          </a:p>
+          <a:p>
+            <a:r>
+              <a:rPr sz="850">
+                <a:solidFill>
+                  <a:srgbClr val="A7F3D0"/>
                 </a:solidFill>
                 <a:latin typeface="Courier New"/>
               </a:rPr>
-              <a:t>                           │  update_memory   │  ← Always runs last</a:t>
-            </a:r>
-          </a:p>
-          <a:p>
-            <a:r>
-              <a:rPr sz="1000">
-                <a:solidFill>
-                  <a:srgbClr val="A6E3A1"/>
+              <a:t>                      │  summary + doc track  │</a:t>
+            </a:r>
+          </a:p>
+          <a:p>
+            <a:r>
+              <a:rPr sz="850">
+                <a:solidFill>
+                  <a:srgbClr val="A7F3D0"/>
                 </a:solidFill>
                 <a:latin typeface="Courier New"/>
               </a:rPr>
-              <a:t>                           │  (summary + docs)│</a:t>
-            </a:r>
-          </a:p>
-          <a:p>
-            <a:r>
-              <a:rPr sz="1000">
-                <a:solidFill>
-                  <a:srgbClr val="A6E3A1"/>
+              <a:t>                      └──────────┬────────────┘</a:t>
+            </a:r>
+          </a:p>
+          <a:p>
+            <a:r>
+              <a:rPr sz="850">
+                <a:solidFill>
+                  <a:srgbClr val="A7F3D0"/>
                 </a:solidFill>
                 <a:latin typeface="Courier New"/>
               </a:rPr>
-              <a:t>                           └────────┬─────────┘</a:t>
-            </a:r>
-          </a:p>
-          <a:p>
-            <a:r>
-              <a:rPr sz="1000">
-                <a:solidFill>
-                  <a:srgbClr val="A6E3A1"/>
+              <a:t>                                 ▼</a:t>
+            </a:r>
+          </a:p>
+          <a:p>
+            <a:r>
+              <a:rPr sz="850">
+                <a:solidFill>
+                  <a:srgbClr val="A7F3D0"/>
                 </a:solidFill>
                 <a:latin typeface="Courier New"/>
               </a:rPr>
-              <a:t>                                    │</a:t>
-            </a:r>
-          </a:p>
-          <a:p>
-            <a:r>
-              <a:rPr sz="1000">
-                <a:solidFill>
-                  <a:srgbClr val="A6E3A1"/>
+              <a:t>                                END</a:t>
+            </a:r>
+          </a:p>
+          <a:p>
+            <a:r>
+              <a:rPr sz="850">
+                <a:solidFill>
+                  <a:srgbClr val="A7F3D0"/>
                 </a:solidFill>
                 <a:latin typeface="Courier New"/>
               </a:rPr>
-              <a:t>                                    ▼</a:t>
-            </a:r>
-          </a:p>
-          <a:p>
-            <a:r>
-              <a:rPr sz="1000">
-                <a:solidFill>
-                  <a:srgbClr val="A6E3A1"/>
+              <a:t>                                         ← InMemorySaver checkpoints state here</a:t>
+            </a:r>
+          </a:p>
+          <a:p>
+            <a:r>
+              <a:rPr sz="850">
+                <a:solidFill>
+                  <a:srgbClr val="A7F3D0"/>
                 </a:solidFill>
                 <a:latin typeface="Courier New"/>
               </a:rPr>
-              <a:t>                                   END</a:t>
-            </a:r>
-          </a:p>
-          <a:p>
-            <a:r>
-              <a:rPr sz="1000">
-                <a:solidFill>
-                  <a:srgbClr val="A6E3A1"/>
+              <a:t/>
+            </a:r>
+          </a:p>
+          <a:p>
+            <a:r>
+              <a:rPr sz="850">
+                <a:solidFill>
+                  <a:srgbClr val="A7F3D0"/>
                 </a:solidFill>
                 <a:latin typeface="Courier New"/>
               </a:rPr>
-              <a:t/>
-            </a:r>
-          </a:p>
-          <a:p>
-            <a:r>
-              <a:rPr sz="1000">
-                <a:solidFill>
-                  <a:srgbClr val="A6E3A1"/>
+              <a:t>Edges added in create_workflow():</a:t>
+            </a:r>
+          </a:p>
+          <a:p>
+            <a:r>
+              <a:rPr sz="850">
+                <a:solidFill>
+                  <a:srgbClr val="A7F3D0"/>
                 </a:solidFill>
                 <a:latin typeface="Courier New"/>
               </a:rPr>
-              <a:t/>
-            </a:r>
-          </a:p>
-          <a:p>
-            <a:r>
-              <a:rPr sz="1000">
-                <a:solidFill>
-                  <a:srgbClr val="A6E3A1"/>
+              <a:t>  set_entry_point("classify_intent")</a:t>
+            </a:r>
+          </a:p>
+          <a:p>
+            <a:r>
+              <a:rPr sz="850">
+                <a:solidFill>
+                  <a:srgbClr val="A7F3D0"/>
                 </a:solidFill>
                 <a:latin typeface="Courier New"/>
               </a:rPr>
-              <a:t>Graph compiled with: workflow.compile(checkpointer=InMemorySaver())</a:t>
-            </a:r>
-          </a:p>
-          <a:p>
-            <a:r>
-              <a:rPr sz="1000">
-                <a:solidFill>
-                  <a:srgbClr val="A6E3A1"/>
+              <a:t>  add_conditional_edges("classify_intent", _route_to_agent, {qa/summ/calc})</a:t>
+            </a:r>
+          </a:p>
+          <a:p>
+            <a:r>
+              <a:rPr sz="850">
+                <a:solidFill>
+                  <a:srgbClr val="A7F3D0"/>
                 </a:solidFill>
                 <a:latin typeface="Courier New"/>
               </a:rPr>
-              <a:t>Routing function:    _route_to_agent(state) → returns state["next_step"]</a:t>
+              <a:t>  add_edge("qa_agent",             "update_memory")</a:t>
+            </a:r>
+          </a:p>
+          <a:p>
+            <a:r>
+              <a:rPr sz="850">
+                <a:solidFill>
+                  <a:srgbClr val="A7F3D0"/>
+                </a:solidFill>
+                <a:latin typeface="Courier New"/>
+              </a:rPr>
+              <a:t>  add_edge("summarization_agent",  "update_memory")</a:t>
+            </a:r>
+          </a:p>
+          <a:p>
+            <a:r>
+              <a:rPr sz="850">
+                <a:solidFill>
+                  <a:srgbClr val="A7F3D0"/>
+                </a:solidFill>
+                <a:latin typeface="Courier New"/>
+              </a:rPr>
+              <a:t>  add_edge("calculation_agent",    "update_memory")</a:t>
+            </a:r>
+          </a:p>
+          <a:p>
+            <a:r>
+              <a:rPr sz="850">
+                <a:solidFill>
+                  <a:srgbClr val="A7F3D0"/>
+                </a:solidFill>
+                <a:latin typeface="Courier New"/>
+              </a:rPr>
+              <a:t>  add_edge("update_memory",        END)</a:t>
             </a:r>
           </a:p>
         </p:txBody>
